--- a/downloads/presentations/modules/lesson-37-ai-sustainability-and-lifecycle-funding.pptx
+++ b/downloads/presentations/modules/lesson-37-ai-sustainability-and-lifecycle-funding.pptx
@@ -24,9 +24,11 @@
     <p:sldId id="272" r:id="rId18"/>
     <p:sldId id="273" r:id="rId19"/>
     <p:sldId id="274" r:id="rId20"/>
+    <p:sldId id="275" r:id="rId21"/>
+    <p:sldId id="276" r:id="rId22"/>
   </p:sldIdLst>
   <p:notesMasterIdLst>
-    <p:notesMasterId r:id="rId21"/>
+    <p:notesMasterId r:id="rId23"/>
   </p:notesMasterIdLst>
   <p:sldSz cx="12192000" cy="6858000"/>
   <p:notesSz cx="6858000" cy="12192000"/>
@@ -609,8 +611,10 @@
           <a:p>
             <a:r>
               <a:rPr lang="en-US" dirty="0"/>
-              <a:t>Application to AI-Supported Workflows
-Generative AI sustainability requires prompt and source updates, user training, output review, and policy alignment. Predictive analytics sustainability requires drift monitoring, recalibration, subgroup review, and documentation. Agentic AI sustainability requires continued security review, permission management, incident drills, and rollback testing. Lifecycle funding should match the safeguards required by the AI type.</a:t>
+              <a:t>Technical and Governance Deep Dive
+AI lifecycle planning should begin during intake and business case review. Leaders should ask whether the use case is a short-term experiment, a time-limited emergency support tool, or a long-term operational capability. Each category has different funding and governance needs. A time-limited tool may need clear end dates and data deletion rules. An operational tool needs sustained staffing, budget, contracts, monitoring, and training.
+Lifecycle costs include more than licenses. Agencies must consider integration maintenance, data pipeline monitoring, model evaluation, cybersecurity review, privacy review, accessibility updates, user support, vendor management, documentation, incident response, retraining or reconfiguration, and future procurement. These costs should be tied to ownership. If no role or budget owns a lifecycle function, the function may not happen.
+Sunset and retirement criteria are essential. A tool may be retired if it no longer aligns with agency priorities, if benefits are not realized, if risks outweigh value, if vendor terms change, if performance deteriorates, if data sources are no longer reliable, or if a better shared service becomes available. Retirement should be planned so staff know how to transition without disrupting public health operations.</a:t>
             </a:r>
             <a:endParaRPr lang="en-US" dirty="0"/>
           </a:p>
@@ -698,10 +702,9 @@
           <a:p>
             <a:r>
               <a:rPr lang="en-US" dirty="0"/>
-              <a:t>Reflection Questions
-Which current or proposed AI use case in your agency raises this leadership or governance issue most clearly?
-Who currently has authority to make decisions about this issue, and is that authority documented?
-What evidence would governance or leadership need before approving the use case?</a:t>
+              <a:t>Risks, Failure Modes, and Guardrails
+One risk is pilot dependency. Staff may begin relying on a tool that was never funded or governed for long-term use. A guardrail is to define pilot duration, scale limits, success criteria, and continuation requirements before launch.
+Another risk is silent degradation. A tool may continue operating after data, policies, user behavior, or vendor models change. A guardrail is to require periodic lifecycle review and clear pause or sunset criteria.</a:t>
             </a:r>
             <a:endParaRPr lang="en-US" dirty="0"/>
           </a:p>
@@ -789,9 +792,8 @@
           <a:p>
             <a:r>
               <a:rPr lang="en-US" dirty="0"/>
-              <a:t>Reflection Questions
-Which staff, partners, or communities would be affected if this issue were handled poorly?
-What policy, process, or artifact should be created or updated after this module?</a:t>
+              <a:t>Application to AI-Supported Workflows
+Generative AI sustainability requires prompt and source updates, user training, output review, and policy alignment. Predictive analytics sustainability requires drift monitoring, recalibration, subgroup review, and documentation. Agentic AI sustainability requires continued security review, permission management, incident drills, and rollback testing. Lifecycle funding should match the safeguards required by the AI type.</a:t>
             </a:r>
             <a:endParaRPr lang="en-US" dirty="0"/>
           </a:p>
@@ -879,8 +881,10 @@
           <a:p>
             <a:r>
               <a:rPr lang="en-US" dirty="0"/>
-              <a:t>Practical Exercise
-Create a lifecycle funding and sustainability plan for one AI use case. Include costs, owners, funding sources, monitoring, update cadence, vendor management, training, fallback process, and sunset criteria.</a:t>
+              <a:t>Reflection Questions
+Which current or proposed AI use case in your agency raises this leadership or governance issue most clearly?
+Who currently has authority to make decisions about this issue, and is that authority documented?
+What evidence would governance or leadership need before approving the use case?</a:t>
             </a:r>
             <a:endParaRPr lang="en-US" dirty="0"/>
           </a:p>
@@ -968,8 +972,9 @@
           <a:p>
             <a:r>
               <a:rPr lang="en-US" dirty="0"/>
-              <a:t>Before You Begin
-Choose a real or realistic public health AI use case. Document assumptions, unresolved questions, and which agency roles would need to review the artifact before it is adopted. The exercise should produce a work product that could support governance review, leadership discussion, implementation planning, or policy development.</a:t>
+              <a:t>Reflection Questions
+Which staff, partners, or communities would be affected if this issue were handled poorly?
+What policy, process, or artifact should be created or updated after this module?</a:t>
             </a:r>
             <a:endParaRPr lang="en-US" dirty="0"/>
           </a:p>
@@ -1057,8 +1062,8 @@
           <a:p>
             <a:r>
               <a:rPr lang="en-US" dirty="0"/>
-              <a:t>Expected Artifact or Evidence
-Sustainability plan; lifecycle cost list; ownership map; continuation and sunset criteria; rollback or fallback plan.</a:t>
+              <a:t>Practical Exercise
+Create a lifecycle funding and sustainability plan for one AI use case. Include costs, owners, funding sources, monitoring, update cadence, vendor management, training, fallback process, and sunset criteria.</a:t>
             </a:r>
             <a:endParaRPr lang="en-US" dirty="0"/>
           </a:p>
@@ -1146,8 +1151,8 @@
           <a:p>
             <a:r>
               <a:rPr lang="en-US" dirty="0"/>
-              <a:t>Expected Assignment
-Sustainability plan; lifecycle cost list; ownership map; continuation and sunset criteria; rollback or fallback plan.</a:t>
+              <a:t>Before You Begin
+Choose a real or realistic public health AI use case. Document assumptions, unresolved questions, and which agency roles would need to review the artifact before it is adopted. The exercise should produce a work product that could support governance review, leadership discussion, implementation planning, or policy development.</a:t>
             </a:r>
             <a:endParaRPr lang="en-US" dirty="0"/>
           </a:p>
@@ -1235,12 +1240,8 @@
           <a:p>
             <a:r>
               <a:rPr lang="en-US" dirty="0"/>
-              <a:t>Knowledge Check
-1. What is the strongest reason this module topic belongs in AI leadership and governance training?
-2. Which practice best supports accountable public health AI governance?
-3. When should an AI use case be escalated for leadership or governance review?
-4. What is weak evidence of completion for a leadership and governance module?
-5. What should leaders do when an AI use case has meaningful benefits but unresolved risks?</a:t>
+              <a:t>Expected Artifact or Evidence
+Sustainability plan; lifecycle cost list; ownership map; continuation and sunset criteria; rollback or fallback plan.</a:t>
             </a:r>
             <a:endParaRPr lang="en-US" dirty="0"/>
           </a:p>
@@ -1328,12 +1329,8 @@
           <a:p>
             <a:r>
               <a:rPr lang="en-US" dirty="0"/>
-              <a:t>References and Resources
-NIST Artificial Intelligence Risk Management Framework (AI RMF 1.0): https://www.nist.gov/itl/ai-risk-management-framework
-NIST Generative AI Profile: https://www.nist.gov/publications/artificial-intelligence-risk-management-framework-generative-artificial-intelligence
-NIST Privacy Framework
-CDC Public Health Data Strategy and Data Modernization resources: https://www.cdc.gov/public-health-data-strategy/php/about/index.html
-WHO Ethics and Governance of Artificial Intelligence for Health: https://www.who.int/publications/i/item/9789240029200</a:t>
+              <a:t>Expected Assignment
+Sustainability plan; lifecycle cost list; ownership map; continuation and sunset criteria; rollback or fallback plan.</a:t>
             </a:r>
             <a:endParaRPr lang="en-US" dirty="0"/>
           </a:p>
@@ -1421,9 +1418,12 @@
           <a:p>
             <a:r>
               <a:rPr lang="en-US" dirty="0"/>
-              <a:t>References and Resources
-OMB Memorandum M-24-10 on federal AI governance, risk management, and innovation, where relevant to public-sector governance models
-Agency strategic plans, procurement policies, privacy policies, cybersecurity policies, records policies, and equity plans</a:t>
+              <a:t>Knowledge Check
+1. What is the strongest reason this module topic belongs in AI leadership and governance training?
+2. Which practice best supports accountable public health AI governance?
+3. When should an AI use case be escalated for leadership or governance review?
+4. What is weak evidence of completion for a leadership and governance module?
+5. What should leaders do when an AI use case has meaningful benefits but unresolved risks?</a:t>
             </a:r>
             <a:endParaRPr lang="en-US" dirty="0"/>
           </a:p>
@@ -1557,6 +1557,189 @@
 </p:notes>
 </file>
 
+<file path=ppt/notesSlides/notesSlide20.xml><?xml version="1.0" encoding="utf-8"?>
+<p:notes xmlns:a="http://schemas.openxmlformats.org/drawingml/2006/main" xmlns:r="http://schemas.openxmlformats.org/officeDocument/2006/relationships" xmlns:p="http://schemas.openxmlformats.org/presentationml/2006/main">
+  <p:cSld>
+    <p:spTree>
+      <p:nvGrpSpPr>
+        <p:cNvPr id="1" name=""/>
+        <p:cNvGrpSpPr/>
+        <p:nvPr/>
+      </p:nvGrpSpPr>
+      <p:grpSpPr>
+        <a:xfrm>
+          <a:off x="0" y="0"/>
+          <a:ext cx="0" cy="0"/>
+          <a:chOff x="0" y="0"/>
+          <a:chExt cx="0" cy="0"/>
+        </a:xfrm>
+      </p:grpSpPr>
+      <p:sp>
+        <p:nvSpPr>
+          <p:cNvPr id="2" name="Slide Image Placeholder 1"/>
+          <p:cNvSpPr>
+            <a:spLocks noGrp="1" noRot="1" noChangeAspect="1"/>
+          </p:cNvSpPr>
+          <p:nvPr>
+            <p:ph type="sldImg"/>
+          </p:nvPr>
+        </p:nvSpPr>
+        <p:spPr/>
+      </p:sp>
+      <p:sp>
+        <p:nvSpPr>
+          <p:cNvPr id="3" name="Notes Placeholder 2"/>
+          <p:cNvSpPr>
+            <a:spLocks noGrp="1"/>
+          </p:cNvSpPr>
+          <p:nvPr>
+            <p:ph type="body" idx="1"/>
+          </p:nvPr>
+        </p:nvSpPr>
+        <p:spPr/>
+        <p:txBody>
+          <a:bodyPr/>
+          <a:lstStyle/>
+          <a:p>
+            <a:r>
+              <a:rPr lang="en-US" dirty="0"/>
+              <a:t>References and Resources
+NIST Artificial Intelligence Risk Management Framework (AI RMF 1.0): https://www.nist.gov/itl/ai-risk-management-framework
+NIST Generative AI Profile: https://www.nist.gov/publications/artificial-intelligence-risk-management-framework-generative-artificial-intelligence
+NIST Privacy Framework
+CDC Public Health Data Strategy and Data Modernization resources: https://www.cdc.gov/public-health-data-strategy/php/about/index.html
+WHO Ethics and Governance of Artificial Intelligence for Health: https://www.who.int/publications/i/item/9789240029200</a:t>
+            </a:r>
+            <a:endParaRPr lang="en-US" dirty="0"/>
+          </a:p>
+        </p:txBody>
+      </p:sp>
+      <p:sp>
+        <p:nvSpPr>
+          <p:cNvPr id="4" name="Slide Number Placeholder 3"/>
+          <p:cNvSpPr>
+            <a:spLocks noGrp="1"/>
+          </p:cNvSpPr>
+          <p:nvPr>
+            <p:ph type="sldNum" sz="quarter" idx="10"/>
+          </p:nvPr>
+        </p:nvSpPr>
+        <p:spPr/>
+        <p:txBody>
+          <a:bodyPr/>
+          <a:lstStyle/>
+          <a:p>
+            <a:fld id="{F7021451-1387-4CA6-816F-3879F97B5CBC}" type="slidenum">
+              <a:rPr lang="en-US"/>
+              <a:t>20</a:t>
+            </a:fld>
+            <a:endParaRPr lang="en-US"/>
+          </a:p>
+        </p:txBody>
+      </p:sp>
+    </p:spTree>
+    <p:extLst>
+      <p:ext uri="{BB962C8B-B14F-4D97-AF65-F5344CB8AC3E}">
+        <p14:creationId xmlns:p14="http://schemas.microsoft.com/office/powerpoint/2010/main" val="1024086991"/>
+      </p:ext>
+    </p:extLst>
+  </p:cSld>
+  <p:clrMapOvr>
+    <a:masterClrMapping/>
+  </p:clrMapOvr>
+</p:notes>
+</file>
+
+<file path=ppt/notesSlides/notesSlide21.xml><?xml version="1.0" encoding="utf-8"?>
+<p:notes xmlns:a="http://schemas.openxmlformats.org/drawingml/2006/main" xmlns:r="http://schemas.openxmlformats.org/officeDocument/2006/relationships" xmlns:p="http://schemas.openxmlformats.org/presentationml/2006/main">
+  <p:cSld>
+    <p:spTree>
+      <p:nvGrpSpPr>
+        <p:cNvPr id="1" name=""/>
+        <p:cNvGrpSpPr/>
+        <p:nvPr/>
+      </p:nvGrpSpPr>
+      <p:grpSpPr>
+        <a:xfrm>
+          <a:off x="0" y="0"/>
+          <a:ext cx="0" cy="0"/>
+          <a:chOff x="0" y="0"/>
+          <a:chExt cx="0" cy="0"/>
+        </a:xfrm>
+      </p:grpSpPr>
+      <p:sp>
+        <p:nvSpPr>
+          <p:cNvPr id="2" name="Slide Image Placeholder 1"/>
+          <p:cNvSpPr>
+            <a:spLocks noGrp="1" noRot="1" noChangeAspect="1"/>
+          </p:cNvSpPr>
+          <p:nvPr>
+            <p:ph type="sldImg"/>
+          </p:nvPr>
+        </p:nvSpPr>
+        <p:spPr/>
+      </p:sp>
+      <p:sp>
+        <p:nvSpPr>
+          <p:cNvPr id="3" name="Notes Placeholder 2"/>
+          <p:cNvSpPr>
+            <a:spLocks noGrp="1"/>
+          </p:cNvSpPr>
+          <p:nvPr>
+            <p:ph type="body" idx="1"/>
+          </p:nvPr>
+        </p:nvSpPr>
+        <p:spPr/>
+        <p:txBody>
+          <a:bodyPr/>
+          <a:lstStyle/>
+          <a:p>
+            <a:r>
+              <a:rPr lang="en-US" dirty="0"/>
+              <a:t>References and Resources
+OMB Memorandum M-24-10 on federal AI governance, risk management, and innovation, where relevant to public-sector governance models
+Agency strategic plans, procurement policies, privacy policies, cybersecurity policies, records policies, and equity plans</a:t>
+            </a:r>
+            <a:endParaRPr lang="en-US" dirty="0"/>
+          </a:p>
+        </p:txBody>
+      </p:sp>
+      <p:sp>
+        <p:nvSpPr>
+          <p:cNvPr id="4" name="Slide Number Placeholder 3"/>
+          <p:cNvSpPr>
+            <a:spLocks noGrp="1"/>
+          </p:cNvSpPr>
+          <p:nvPr>
+            <p:ph type="sldNum" sz="quarter" idx="10"/>
+          </p:nvPr>
+        </p:nvSpPr>
+        <p:spPr/>
+        <p:txBody>
+          <a:bodyPr/>
+          <a:lstStyle/>
+          <a:p>
+            <a:fld id="{F7021451-1387-4CA6-816F-3879F97B5CBC}" type="slidenum">
+              <a:rPr lang="en-US"/>
+              <a:t>21</a:t>
+            </a:fld>
+            <a:endParaRPr lang="en-US"/>
+          </a:p>
+        </p:txBody>
+      </p:sp>
+    </p:spTree>
+    <p:extLst>
+      <p:ext uri="{BB962C8B-B14F-4D97-AF65-F5344CB8AC3E}">
+        <p14:creationId xmlns:p14="http://schemas.microsoft.com/office/powerpoint/2010/main" val="1024086991"/>
+      </p:ext>
+    </p:extLst>
+  </p:cSld>
+  <p:clrMapOvr>
+    <a:masterClrMapping/>
+  </p:clrMapOvr>
+</p:notes>
+</file>
+
 <file path=ppt/notesSlides/notesSlide3.xml><?xml version="1.0" encoding="utf-8"?>
 <p:notes xmlns:a="http://schemas.openxmlformats.org/drawingml/2006/main" xmlns:r="http://schemas.openxmlformats.org/officeDocument/2006/relationships" xmlns:p="http://schemas.openxmlformats.org/presentationml/2006/main">
   <p:cSld>
@@ -1603,12 +1786,11 @@
           <a:p>
             <a:r>
               <a:rPr lang="en-US" dirty="0"/>
-              <a:t>Learning Objectives
-Explain why AI sustainability must be planned before launch.
-Identify lifecycle costs and responsibilities for AI tools and workflows.
-Develop sustainability criteria for moving from pilot to operational use.
-Define sunset, pause, and retirement criteria for AI use cases.
-Produce an AI lifecycle funding and sustainability plan.</a:t>
+              <a:t>Related Playbook Plays
+Play 11: Build and Deploy AI Solutions - This lesson informs Play 11 by helping learners connect the lesson topic to build and deploy ai solutions work in the AI Playbook.
+Play 8: Develop a Funding Strategy - This lesson informs Play 8 by helping learners connect the lesson topic to develop a funding strategy work in the AI Playbook sequence.
+Play 3: Establish AI Governance - This lesson informs Play 3 by helping learners connect the lesson topic to establish ai governance work in the AI Playbook sequence.
+Play 1: Vision &amp; Guardrails - This lesson informs Play 1 by helping learners connect the lesson topic to vision &amp; guardrails work in the AI Playbook sequence.</a:t>
             </a:r>
             <a:endParaRPr lang="en-US" dirty="0"/>
           </a:p>
@@ -1696,9 +1878,13 @@
           <a:p>
             <a:r>
               <a:rPr lang="en-US" dirty="0"/>
-              <a:t>Module Overview
-Responsible AI does not end at launch. AI tools require ongoing funding, staff time, monitoring, updates, vendor management, training, incident response, documentation, and eventual retirement. Sustainability planning ensures that AI-supported workflows do not become unfunded, unmonitored, or outdated after the initial pilot or grant period ends.
-This module helps leaders plan for the full AI lifecycle. It focuses on funding models, ownership, maintenance, monitoring, contract renewal, retraining, policy updates, user support, accessibility updates, cybersecurity review, and sunset criteria. The module emphasizes that a tool should not be approved if the agency cannot reasonably sustain the safeguards needed for responsible use.</a:t>
+              <a:t>Related Toolkit Resources
+Tool 33: Funding Strategy Checklists (Checklist) - Use this tool to complete or strengthen the practical exercise for the module using fictional, de-identified, or generalized.
+Tool 35: AI Total Cost of Ownership and Sustainability Worksheet (Worksheet) - Use this tool to complete or strengthen the practical exercise for the module using fictional, de-identified, or generalized.
+Tool 32: Vendor Evaluation Checklist (Checklist) - Use this tool to complete or strengthen the practical exercise for the module using fictional, de-identified, or generalized.
+Tool 34: STLT AI Procurement and Vendor Addendum (Checklist) - Use this tool to complete or strengthen the practical exercise for the module using fictional, de-identified, or generalized.
+Tool 3: Equity Impact Assessment Checklist (Checklist) - Use this tool to complete or strengthen the practical exercise for the module using fictional, de-identified, or generalized.
+Tool 4: AI Policy Landscape Scan (Worksheet) - Use AI Policy Landscape Scan to translate this lesson into a documented public health AI planning, governance, implementation,.</a:t>
             </a:r>
             <a:endParaRPr lang="en-US" dirty="0"/>
           </a:p>
@@ -1786,8 +1972,12 @@
           <a:p>
             <a:r>
               <a:rPr lang="en-US" dirty="0"/>
-              <a:t>Jurisdiction and Agency Policy Note
-This national-level module is intended for training and planning purposes. It does not replace legal, privacy, procurement, civil rights, records, or agency policy review. Learners should confirm applicable requirements in their own jurisdiction and organization before implementing AI-supported workflows.</a:t>
+              <a:t>Learning Objectives
+Explain why AI sustainability must be planned before launch.
+Identify lifecycle costs and responsibilities for AI tools and workflows.
+Develop sustainability criteria for moving from pilot to operational use.
+Define sunset, pause, and retirement criteria for AI use cases.
+Produce an AI lifecycle funding and sustainability plan.</a:t>
             </a:r>
             <a:endParaRPr lang="en-US" dirty="0"/>
           </a:p>
@@ -1875,9 +2065,9 @@
           <a:p>
             <a:r>
               <a:rPr lang="en-US" dirty="0"/>
-              <a:t>Why This Topic Matters for Public Health AI
-Many AI efforts begin as pilots, innovation projects, or grant-funded experiments. These projects may succeed technically but fail operationally if there is no plan for ongoing support. Public health agencies may be left with a tool that staff rely on but no budget for validation updates, vendor support, data integration maintenance, monitoring, or training new users.
-Sustainability is also a risk-control issue. AI tools can become unsafe when they are not maintained. Data sources change, regulations change, staff roles change, vendor models change, and public expectations change. A sustainability plan helps the agency decide whether the tool should continue, be modified, be replaced, or be retired.</a:t>
+              <a:t>Module Overview
+Responsible AI does not end at launch. AI tools require ongoing funding, staff time, monitoring, updates, vendor management, training, incident response, documentation, and eventual retirement. Sustainability planning ensures that AI-supported workflows do not become unfunded, unmonitored, or outdated after the initial pilot or grant period ends.
+This module helps leaders plan for the full AI lifecycle. It focuses on funding models, ownership, maintenance, monitoring, contract renewal, retraining, policy updates, user support, accessibility updates, cybersecurity review, and sunset criteria. The module emphasizes that a tool should not be approved if the agency cannot reasonably sustain the safeguards needed for responsible use.</a:t>
             </a:r>
             <a:endParaRPr lang="en-US" dirty="0"/>
           </a:p>
@@ -1965,9 +2155,8 @@
           <a:p>
             <a:r>
               <a:rPr lang="en-US" dirty="0"/>
-              <a:t>Public Health Example
-A grant funds a two-year AI pilot to help identify likely duplicate records in a public health system. The pilot improves efficiency, but the grant does not cover long-term hosting, monitoring, system upgrades, training, or validation after data sources change. When funding ends, staff continue relying on the tool even though no one is assigned to review performance.
-A sustainability plan would have addressed this before launch. It would define operational ownership, long-term funding, monitoring indicators, update cadence, user support, vendor responsibilities, and criteria for continuing or retiring the tool. It would also define a manual fallback process if the tool is paused.</a:t>
+              <a:t>Jurisdiction and Agency Policy Note
+This national-level module is intended for training and planning purposes. It does not replace legal, privacy, procurement, civil rights, records, or agency policy review. Learners should confirm applicable requirements in their own jurisdiction and organization before implementing AI-supported workflows.</a:t>
             </a:r>
             <a:endParaRPr lang="en-US" dirty="0"/>
           </a:p>
@@ -2055,10 +2244,9 @@
           <a:p>
             <a:r>
               <a:rPr lang="en-US" dirty="0"/>
-              <a:t>Technical and Governance Deep Dive
-AI lifecycle planning should begin during intake and business case review. Leaders should ask whether the use case is a short-term experiment, a time-limited emergency support tool, or a long-term operational capability. Each category has different funding and governance needs. A time-limited tool may need clear end dates and data deletion rules. An operational tool needs sustained staffing, budget, contracts, monitoring, and training.
-Lifecycle costs include more than licenses. Agencies must consider integration maintenance, data pipeline monitoring, model evaluation, cybersecurity review, privacy review, accessibility updates, user support, vendor management, documentation, incident response, retraining or reconfiguration, and future procurement. These costs should be tied to ownership. If no role or budget owns a lifecycle function, the function may not happen.
-Sunset and retirement criteria are essential. A tool may be retired if it no longer aligns with agency priorities, if benefits are not realized, if risks outweigh value, if vendor terms change, if performance deteriorates, if data sources are no longer reliable, or if a better shared service becomes available. Retirement should be planned so staff know how to transition without disrupting public health operations.</a:t>
+              <a:t>Why This Topic Matters for Public Health AI
+Many AI efforts begin as pilots, innovation projects, or grant-funded experiments. These projects may succeed technically but fail operationally if there is no plan for ongoing support. Public health agencies may be left with a tool that staff rely on but no budget for validation updates, vendor support, data integration maintenance, monitoring, or training new users.
+Sustainability is also a risk-control issue. AI tools can become unsafe when they are not maintained. Data sources change, regulations change, staff roles change, vendor models change, and public expectations change. A sustainability plan helps the agency decide whether the tool should continue, be modified, be replaced, or be retired.</a:t>
             </a:r>
             <a:endParaRPr lang="en-US" dirty="0"/>
           </a:p>
@@ -2146,9 +2334,9 @@
           <a:p>
             <a:r>
               <a:rPr lang="en-US" dirty="0"/>
-              <a:t>Risks, Failure Modes, and Guardrails
-One risk is pilot dependency. Staff may begin relying on a tool that was never funded or governed for long-term use. A guardrail is to define pilot duration, scale limits, success criteria, and continuation requirements before launch.
-Another risk is silent degradation. A tool may continue operating after data, policies, user behavior, or vendor models change. A guardrail is to require periodic lifecycle review and clear pause or sunset criteria.</a:t>
+              <a:t>Public Health Example
+A grant funds a two-year AI pilot to help identify likely duplicate records in a public health system. The pilot improves efficiency, but the grant does not cover long-term hosting, monitoring, system upgrades, training, or validation after data sources change. When funding ends, staff continue relying on the tool even though no one is assigned to review performance.
+A sustainability plan would have addressed this before launch. It would define operational ownership, long-term funding, monitoring indicators, update cadence, user support, vendor responsibilities, and criteria for continuing or retiring the tool. It would also define a manual fallback process if the tool is paused.</a:t>
             </a:r>
             <a:endParaRPr lang="en-US" dirty="0"/>
           </a:p>
@@ -2771,7 +2959,32 @@
       </p:sp>
       <p:sp>
         <p:nvSpPr>
-          <p:cNvPr id="3" name="Text 1"/>
+          <p:cNvPr id="3" name="Shape 1"/>
+          <p:cNvSpPr/>
+          <p:nvPr/>
+        </p:nvSpPr>
+        <p:spPr>
+          <a:xfrm>
+            <a:off x="0" y="164592"/>
+            <a:ext cx="146304" cy="6693408"/>
+          </a:xfrm>
+          <a:prstGeom prst="rect">
+            <a:avLst/>
+          </a:prstGeom>
+          <a:solidFill>
+            <a:srgbClr val="2F8A28"/>
+          </a:solidFill>
+          <a:ln w="12700">
+            <a:solidFill>
+              <a:srgbClr val="2F8A28"/>
+            </a:solidFill>
+            <a:prstDash val="solid"/>
+          </a:ln>
+        </p:spPr>
+      </p:sp>
+      <p:sp>
+        <p:nvSpPr>
+          <p:cNvPr id="4" name="Text 2"/>
           <p:cNvSpPr/>
           <p:nvPr/>
         </p:nvSpPr>
@@ -2810,7 +3023,7 @@
       </p:sp>
       <p:sp>
         <p:nvSpPr>
-          <p:cNvPr id="4" name="Text 2"/>
+          <p:cNvPr id="5" name="Text 3"/>
           <p:cNvSpPr/>
           <p:nvPr/>
         </p:nvSpPr>
@@ -2849,7 +3062,7 @@
       </p:sp>
       <p:sp>
         <p:nvSpPr>
-          <p:cNvPr id="5" name="Text 3"/>
+          <p:cNvPr id="6" name="Text 4"/>
           <p:cNvSpPr/>
           <p:nvPr/>
         </p:nvSpPr>
@@ -2888,13 +3101,77 @@
       </p:sp>
       <p:sp>
         <p:nvSpPr>
-          <p:cNvPr id="6" name="Text 4"/>
+          <p:cNvPr id="7" name="Shape 5"/>
           <p:cNvSpPr/>
           <p:nvPr/>
         </p:nvSpPr>
         <p:spPr>
           <a:xfrm>
             <a:off x="640080" y="658368"/>
+            <a:ext cx="420624" cy="420624"/>
+          </a:xfrm>
+          <a:prstGeom prst="ellipse">
+            <a:avLst/>
+          </a:prstGeom>
+          <a:solidFill>
+            <a:srgbClr val="0068B7"/>
+          </a:solidFill>
+          <a:ln w="12700">
+            <a:solidFill>
+              <a:srgbClr val="0068B7"/>
+            </a:solidFill>
+            <a:prstDash val="solid"/>
+          </a:ln>
+        </p:spPr>
+      </p:sp>
+      <p:sp>
+        <p:nvSpPr>
+          <p:cNvPr id="8" name="Text 6"/>
+          <p:cNvSpPr/>
+          <p:nvPr/>
+        </p:nvSpPr>
+        <p:spPr>
+          <a:xfrm>
+            <a:off x="640080" y="731520"/>
+            <a:ext cx="420624" cy="164592"/>
+          </a:xfrm>
+          <a:prstGeom prst="rect">
+            <a:avLst/>
+          </a:prstGeom>
+          <a:noFill/>
+          <a:ln/>
+        </p:spPr>
+        <p:txBody>
+          <a:bodyPr wrap="square" lIns="0" tIns="0" rIns="0" bIns="0" rtlCol="0" anchor="ctr"/>
+          <a:lstStyle/>
+          <a:p>
+            <a:pPr algn="ctr" indent="0" marL="0">
+              <a:buNone/>
+            </a:pPr>
+            <a:r>
+              <a:rPr lang="en-US" sz="1100" b="1" dirty="0">
+                <a:solidFill>
+                  <a:srgbClr val="FFFFFF"/>
+                </a:solidFill>
+                <a:latin typeface="Aptos" pitchFamily="34" charset="0"/>
+                <a:ea typeface="Aptos" pitchFamily="34" charset="-122"/>
+                <a:cs typeface="Aptos" pitchFamily="34" charset="-120"/>
+              </a:rPr>
+              <a:t>6</a:t>
+            </a:r>
+            <a:endParaRPr lang="en-US" sz="1100" dirty="0"/>
+          </a:p>
+        </p:txBody>
+      </p:sp>
+      <p:sp>
+        <p:nvSpPr>
+          <p:cNvPr id="9" name="Text 7"/>
+          <p:cNvSpPr/>
+          <p:nvPr/>
+        </p:nvSpPr>
+        <p:spPr>
+          <a:xfrm>
+            <a:off x="640080" y="621792"/>
             <a:ext cx="10881360" cy="566928"/>
           </a:xfrm>
           <a:prstGeom prst="rect">
@@ -2921,7 +3198,7 @@
                 <a:ea typeface="Aptos Display" pitchFamily="34" charset="-122"/>
                 <a:cs typeface="Aptos Display" pitchFamily="34" charset="-120"/>
               </a:rPr>
-              <a:t>Application to AI-Supported Workflows</a:t>
+              <a:t>Technical and Governance Deep Dive</a:t>
             </a:r>
             <a:endParaRPr lang="en-US" sz="2700" dirty="0"/>
           </a:p>
@@ -2929,32 +3206,178 @@
       </p:sp>
       <p:sp>
         <p:nvSpPr>
-          <p:cNvPr id="7" name="Text 5"/>
-          <p:cNvSpPr/>
-          <p:nvPr/>
-        </p:nvSpPr>
-        <p:spPr>
-          <a:xfrm>
-            <a:off x="822960" y="1325880"/>
-            <a:ext cx="10378440" cy="4800600"/>
-          </a:xfrm>
-          <a:prstGeom prst="rect">
-            <a:avLst/>
-          </a:prstGeom>
-          <a:noFill/>
-          <a:ln/>
-        </p:spPr>
-        <p:txBody>
-          <a:bodyPr wrap="square" lIns="1016" tIns="1016" rIns="1016" bIns="1016" rtlCol="0" anchor="t">
+          <p:cNvPr id="10" name="Text 8"/>
+          <p:cNvSpPr/>
+          <p:nvPr/>
+        </p:nvSpPr>
+        <p:spPr>
+          <a:xfrm>
+            <a:off x="868680" y="1417320"/>
+            <a:ext cx="6675120" cy="4434840"/>
+          </a:xfrm>
+          <a:prstGeom prst="rect">
+            <a:avLst/>
+          </a:prstGeom>
+          <a:noFill/>
+          <a:ln/>
+        </p:spPr>
+        <p:txBody>
+          <a:bodyPr wrap="square" lIns="635" tIns="635" rIns="635" bIns="635" rtlCol="0" anchor="t">
             <a:normAutofit/>
           </a:bodyPr>
           <a:lstStyle/>
           <a:p>
+            <a:r>
+              <a:rPr lang="en-US" sz="1700" dirty="0">
+                <a:solidFill>
+                  <a:srgbClr val="17364A"/>
+                </a:solidFill>
+                <a:latin typeface="Aptos" pitchFamily="34" charset="0"/>
+                <a:ea typeface="Aptos" pitchFamily="34" charset="-122"/>
+                <a:cs typeface="Aptos" pitchFamily="34" charset="-120"/>
+              </a:rPr>
+              <a:t>AI lifecycle planning should begin during intake and business case review.</a:t>
+            </a:r>
+            <a:endParaRPr lang="en-US" sz="1700" dirty="0"/>
+          </a:p>
+          <a:p>
+            <a:r>
+              <a:rPr lang="en-US" sz="1700" dirty="0">
+                <a:solidFill>
+                  <a:srgbClr val="17364A"/>
+                </a:solidFill>
+                <a:latin typeface="Aptos" pitchFamily="34" charset="0"/>
+                <a:ea typeface="Aptos" pitchFamily="34" charset="-122"/>
+                <a:cs typeface="Aptos" pitchFamily="34" charset="-120"/>
+              </a:rPr>
+              <a:t>Leaders should ask whether the use case is a short-term experiment, a time-limited emergency support tool, or a long-term.</a:t>
+            </a:r>
+            <a:endParaRPr lang="en-US" sz="1700" dirty="0"/>
+          </a:p>
+          <a:p>
+            <a:r>
+              <a:rPr lang="en-US" sz="1700" dirty="0">
+                <a:solidFill>
+                  <a:srgbClr val="17364A"/>
+                </a:solidFill>
+                <a:latin typeface="Aptos" pitchFamily="34" charset="0"/>
+                <a:ea typeface="Aptos" pitchFamily="34" charset="-122"/>
+                <a:cs typeface="Aptos" pitchFamily="34" charset="-120"/>
+              </a:rPr>
+              <a:t>Each category has different funding and governance needs.</a:t>
+            </a:r>
+            <a:endParaRPr lang="en-US" sz="1700" dirty="0"/>
+          </a:p>
+          <a:p>
+            <a:r>
+              <a:rPr lang="en-US" sz="1700" dirty="0">
+                <a:solidFill>
+                  <a:srgbClr val="17364A"/>
+                </a:solidFill>
+                <a:latin typeface="Aptos" pitchFamily="34" charset="0"/>
+                <a:ea typeface="Aptos" pitchFamily="34" charset="-122"/>
+                <a:cs typeface="Aptos" pitchFamily="34" charset="-120"/>
+              </a:rPr>
+              <a:t>A time-limited tool may need clear end dates and data deletion rules.</a:t>
+            </a:r>
+            <a:endParaRPr lang="en-US" sz="1700" dirty="0"/>
+          </a:p>
+        </p:txBody>
+      </p:sp>
+      <p:sp>
+        <p:nvSpPr>
+          <p:cNvPr id="11" name="Shape 9"/>
+          <p:cNvSpPr/>
+          <p:nvPr/>
+        </p:nvSpPr>
+        <p:spPr>
+          <a:xfrm>
+            <a:off x="7909560" y="1417320"/>
+            <a:ext cx="3154680" cy="1828800"/>
+          </a:xfrm>
+          <a:prstGeom prst="roundRect">
+            <a:avLst>
+              <a:gd name="adj" fmla="val 6000"/>
+            </a:avLst>
+          </a:prstGeom>
+          <a:solidFill>
+            <a:srgbClr val="EEF8ED"/>
+          </a:solidFill>
+          <a:ln w="12700">
+            <a:solidFill>
+              <a:srgbClr val="B9D7E6"/>
+            </a:solidFill>
+            <a:prstDash val="solid"/>
+          </a:ln>
+        </p:spPr>
+      </p:sp>
+      <p:sp>
+        <p:nvSpPr>
+          <p:cNvPr id="12" name="Text 10"/>
+          <p:cNvSpPr/>
+          <p:nvPr/>
+        </p:nvSpPr>
+        <p:spPr>
+          <a:xfrm>
+            <a:off x="8074152" y="1563624"/>
+            <a:ext cx="2825496" cy="201168"/>
+          </a:xfrm>
+          <a:prstGeom prst="rect">
+            <a:avLst/>
+          </a:prstGeom>
+          <a:noFill/>
+          <a:ln/>
+        </p:spPr>
+        <p:txBody>
+          <a:bodyPr wrap="square" lIns="0" tIns="0" rIns="0" bIns="0" rtlCol="0" anchor="ctr"/>
+          <a:lstStyle/>
+          <a:p>
             <a:pPr indent="0" marL="0">
               <a:buNone/>
             </a:pPr>
             <a:r>
-              <a:rPr lang="en-US" sz="1420" dirty="0">
+              <a:rPr lang="en-US" sz="950" b="1" dirty="0">
+                <a:solidFill>
+                  <a:srgbClr val="0068B7"/>
+                </a:solidFill>
+                <a:latin typeface="Aptos" pitchFamily="34" charset="0"/>
+                <a:ea typeface="Aptos" pitchFamily="34" charset="-122"/>
+                <a:cs typeface="Aptos" pitchFamily="34" charset="-120"/>
+              </a:rPr>
+              <a:t>Key idea</a:t>
+            </a:r>
+            <a:endParaRPr lang="en-US" sz="950" dirty="0"/>
+          </a:p>
+        </p:txBody>
+      </p:sp>
+      <p:sp>
+        <p:nvSpPr>
+          <p:cNvPr id="13" name="Text 11"/>
+          <p:cNvSpPr/>
+          <p:nvPr/>
+        </p:nvSpPr>
+        <p:spPr>
+          <a:xfrm>
+            <a:off x="8074152" y="1856232"/>
+            <a:ext cx="2825496" cy="1261872"/>
+          </a:xfrm>
+          <a:prstGeom prst="rect">
+            <a:avLst/>
+          </a:prstGeom>
+          <a:noFill/>
+          <a:ln/>
+        </p:spPr>
+        <p:txBody>
+          <a:bodyPr wrap="square" lIns="0" tIns="0" rIns="0" bIns="0" rtlCol="0" anchor="t">
+            <a:normAutofit/>
+          </a:bodyPr>
+          <a:lstStyle/>
+          <a:p>
+            <a:pPr indent="0" marL="0">
+              <a:buNone/>
+            </a:pPr>
+            <a:r>
+              <a:rPr lang="en-US" sz="1250" dirty="0">
                 <a:solidFill>
                   <a:srgbClr val="17364A"/>
                 </a:solidFill>
@@ -2962,9 +3385,116 @@
                 <a:ea typeface="Aptos" pitchFamily="34" charset="-122"/>
                 <a:cs typeface="Aptos" pitchFamily="34" charset="-120"/>
               </a:rPr>
-              <a:t>Generative AI sustainability requires prompt and source updates, user training, output review, and policy alignment. Predictive analytics sustainability requires drift monitoring, recalibration, subgroup review, and documentation. Agentic AI sustainability requires continued security review, permission management, incident drills, and rollback testing. Lifecycle funding should match the safeguards required by the AI type.</a:t>
-            </a:r>
-            <a:endParaRPr lang="en-US" sz="1420" dirty="0"/>
+              <a:t>AI lifecycle planning should begin during intake and business case review.</a:t>
+            </a:r>
+            <a:endParaRPr lang="en-US" sz="1250" dirty="0"/>
+          </a:p>
+        </p:txBody>
+      </p:sp>
+      <p:sp>
+        <p:nvSpPr>
+          <p:cNvPr id="14" name="Shape 12"/>
+          <p:cNvSpPr/>
+          <p:nvPr/>
+        </p:nvSpPr>
+        <p:spPr>
+          <a:xfrm>
+            <a:off x="7909560" y="3520440"/>
+            <a:ext cx="3154680" cy="1737360"/>
+          </a:xfrm>
+          <a:prstGeom prst="roundRect">
+            <a:avLst>
+              <a:gd name="adj" fmla="val 6316"/>
+            </a:avLst>
+          </a:prstGeom>
+          <a:solidFill>
+            <a:srgbClr val="EAF6F8"/>
+          </a:solidFill>
+          <a:ln w="12700">
+            <a:solidFill>
+              <a:srgbClr val="B9D7E6"/>
+            </a:solidFill>
+            <a:prstDash val="solid"/>
+          </a:ln>
+        </p:spPr>
+      </p:sp>
+      <p:sp>
+        <p:nvSpPr>
+          <p:cNvPr id="15" name="Text 13"/>
+          <p:cNvSpPr/>
+          <p:nvPr/>
+        </p:nvSpPr>
+        <p:spPr>
+          <a:xfrm>
+            <a:off x="8074152" y="3666744"/>
+            <a:ext cx="2825496" cy="201168"/>
+          </a:xfrm>
+          <a:prstGeom prst="rect">
+            <a:avLst/>
+          </a:prstGeom>
+          <a:noFill/>
+          <a:ln/>
+        </p:spPr>
+        <p:txBody>
+          <a:bodyPr wrap="square" lIns="0" tIns="0" rIns="0" bIns="0" rtlCol="0" anchor="ctr"/>
+          <a:lstStyle/>
+          <a:p>
+            <a:pPr indent="0" marL="0">
+              <a:buNone/>
+            </a:pPr>
+            <a:r>
+              <a:rPr lang="en-US" sz="950" b="1" dirty="0">
+                <a:solidFill>
+                  <a:srgbClr val="0068B7"/>
+                </a:solidFill>
+                <a:latin typeface="Aptos" pitchFamily="34" charset="0"/>
+                <a:ea typeface="Aptos" pitchFamily="34" charset="-122"/>
+                <a:cs typeface="Aptos" pitchFamily="34" charset="-120"/>
+              </a:rPr>
+              <a:t>Use this for</a:t>
+            </a:r>
+            <a:endParaRPr lang="en-US" sz="950" dirty="0"/>
+          </a:p>
+        </p:txBody>
+      </p:sp>
+      <p:sp>
+        <p:nvSpPr>
+          <p:cNvPr id="16" name="Text 14"/>
+          <p:cNvSpPr/>
+          <p:nvPr/>
+        </p:nvSpPr>
+        <p:spPr>
+          <a:xfrm>
+            <a:off x="8074152" y="3959352"/>
+            <a:ext cx="2825496" cy="1170432"/>
+          </a:xfrm>
+          <a:prstGeom prst="rect">
+            <a:avLst/>
+          </a:prstGeom>
+          <a:noFill/>
+          <a:ln/>
+        </p:spPr>
+        <p:txBody>
+          <a:bodyPr wrap="square" lIns="0" tIns="0" rIns="0" bIns="0" rtlCol="0" anchor="t">
+            <a:normAutofit/>
+          </a:bodyPr>
+          <a:lstStyle/>
+          <a:p>
+            <a:pPr indent="0" marL="0">
+              <a:buNone/>
+            </a:pPr>
+            <a:r>
+              <a:rPr lang="en-US" sz="1250" dirty="0">
+                <a:solidFill>
+                  <a:srgbClr val="17364A"/>
+                </a:solidFill>
+                <a:latin typeface="Aptos" pitchFamily="34" charset="0"/>
+                <a:ea typeface="Aptos" pitchFamily="34" charset="-122"/>
+                <a:cs typeface="Aptos" pitchFamily="34" charset="-120"/>
+              </a:rPr>
+              <a:t>Connect the concept to public health decisions, safeguards, documentation, or implementation work.</a:t>
+            </a:r>
+            <a:endParaRPr lang="en-US" sz="1250" dirty="0"/>
           </a:p>
         </p:txBody>
       </p:sp>
@@ -3027,7 +3557,32 @@
       </p:sp>
       <p:sp>
         <p:nvSpPr>
-          <p:cNvPr id="3" name="Text 1"/>
+          <p:cNvPr id="3" name="Shape 1"/>
+          <p:cNvSpPr/>
+          <p:nvPr/>
+        </p:nvSpPr>
+        <p:spPr>
+          <a:xfrm>
+            <a:off x="0" y="164592"/>
+            <a:ext cx="146304" cy="6693408"/>
+          </a:xfrm>
+          <a:prstGeom prst="rect">
+            <a:avLst/>
+          </a:prstGeom>
+          <a:solidFill>
+            <a:srgbClr val="2F8A28"/>
+          </a:solidFill>
+          <a:ln w="12700">
+            <a:solidFill>
+              <a:srgbClr val="2F8A28"/>
+            </a:solidFill>
+            <a:prstDash val="solid"/>
+          </a:ln>
+        </p:spPr>
+      </p:sp>
+      <p:sp>
+        <p:nvSpPr>
+          <p:cNvPr id="4" name="Text 2"/>
           <p:cNvSpPr/>
           <p:nvPr/>
         </p:nvSpPr>
@@ -3066,7 +3621,7 @@
       </p:sp>
       <p:sp>
         <p:nvSpPr>
-          <p:cNvPr id="4" name="Text 2"/>
+          <p:cNvPr id="5" name="Text 3"/>
           <p:cNvSpPr/>
           <p:nvPr/>
         </p:nvSpPr>
@@ -3105,7 +3660,7 @@
       </p:sp>
       <p:sp>
         <p:nvSpPr>
-          <p:cNvPr id="5" name="Text 3"/>
+          <p:cNvPr id="6" name="Text 4"/>
           <p:cNvSpPr/>
           <p:nvPr/>
         </p:nvSpPr>
@@ -3144,13 +3699,77 @@
       </p:sp>
       <p:sp>
         <p:nvSpPr>
-          <p:cNvPr id="6" name="Text 4"/>
+          <p:cNvPr id="7" name="Shape 5"/>
           <p:cNvSpPr/>
           <p:nvPr/>
         </p:nvSpPr>
         <p:spPr>
           <a:xfrm>
             <a:off x="640080" y="658368"/>
+            <a:ext cx="420624" cy="420624"/>
+          </a:xfrm>
+          <a:prstGeom prst="ellipse">
+            <a:avLst/>
+          </a:prstGeom>
+          <a:solidFill>
+            <a:srgbClr val="0068B7"/>
+          </a:solidFill>
+          <a:ln w="12700">
+            <a:solidFill>
+              <a:srgbClr val="0068B7"/>
+            </a:solidFill>
+            <a:prstDash val="solid"/>
+          </a:ln>
+        </p:spPr>
+      </p:sp>
+      <p:sp>
+        <p:nvSpPr>
+          <p:cNvPr id="8" name="Text 6"/>
+          <p:cNvSpPr/>
+          <p:nvPr/>
+        </p:nvSpPr>
+        <p:spPr>
+          <a:xfrm>
+            <a:off x="640080" y="731520"/>
+            <a:ext cx="420624" cy="164592"/>
+          </a:xfrm>
+          <a:prstGeom prst="rect">
+            <a:avLst/>
+          </a:prstGeom>
+          <a:noFill/>
+          <a:ln/>
+        </p:spPr>
+        <p:txBody>
+          <a:bodyPr wrap="square" lIns="0" tIns="0" rIns="0" bIns="0" rtlCol="0" anchor="ctr"/>
+          <a:lstStyle/>
+          <a:p>
+            <a:pPr algn="ctr" indent="0" marL="0">
+              <a:buNone/>
+            </a:pPr>
+            <a:r>
+              <a:rPr lang="en-US" sz="1100" b="1" dirty="0">
+                <a:solidFill>
+                  <a:srgbClr val="FFFFFF"/>
+                </a:solidFill>
+                <a:latin typeface="Aptos" pitchFamily="34" charset="0"/>
+                <a:ea typeface="Aptos" pitchFamily="34" charset="-122"/>
+                <a:cs typeface="Aptos" pitchFamily="34" charset="-120"/>
+              </a:rPr>
+              <a:t>7</a:t>
+            </a:r>
+            <a:endParaRPr lang="en-US" sz="1100" dirty="0"/>
+          </a:p>
+        </p:txBody>
+      </p:sp>
+      <p:sp>
+        <p:nvSpPr>
+          <p:cNvPr id="9" name="Text 7"/>
+          <p:cNvSpPr/>
+          <p:nvPr/>
+        </p:nvSpPr>
+        <p:spPr>
+          <a:xfrm>
+            <a:off x="640080" y="621792"/>
             <a:ext cx="10881360" cy="566928"/>
           </a:xfrm>
           <a:prstGeom prst="rect">
@@ -3177,7 +3796,7 @@
                 <a:ea typeface="Aptos Display" pitchFamily="34" charset="-122"/>
                 <a:cs typeface="Aptos Display" pitchFamily="34" charset="-120"/>
               </a:rPr>
-              <a:t>Reflection Questions</a:t>
+              <a:t>Risks, Failure Modes, and Guardrails</a:t>
             </a:r>
             <a:endParaRPr lang="en-US" sz="2700" dirty="0"/>
           </a:p>
@@ -3185,32 +3804,178 @@
       </p:sp>
       <p:sp>
         <p:nvSpPr>
-          <p:cNvPr id="7" name="Text 5"/>
-          <p:cNvSpPr/>
-          <p:nvPr/>
-        </p:nvSpPr>
-        <p:spPr>
-          <a:xfrm>
-            <a:off x="822960" y="1325880"/>
-            <a:ext cx="10378440" cy="4800600"/>
-          </a:xfrm>
-          <a:prstGeom prst="rect">
-            <a:avLst/>
-          </a:prstGeom>
-          <a:noFill/>
-          <a:ln/>
-        </p:spPr>
-        <p:txBody>
-          <a:bodyPr wrap="square" lIns="1016" tIns="1016" rIns="1016" bIns="1016" rtlCol="0" anchor="t">
+          <p:cNvPr id="10" name="Text 8"/>
+          <p:cNvSpPr/>
+          <p:nvPr/>
+        </p:nvSpPr>
+        <p:spPr>
+          <a:xfrm>
+            <a:off x="868680" y="1417320"/>
+            <a:ext cx="6675120" cy="4434840"/>
+          </a:xfrm>
+          <a:prstGeom prst="rect">
+            <a:avLst/>
+          </a:prstGeom>
+          <a:noFill/>
+          <a:ln/>
+        </p:spPr>
+        <p:txBody>
+          <a:bodyPr wrap="square" lIns="635" tIns="635" rIns="635" bIns="635" rtlCol="0" anchor="t">
             <a:normAutofit/>
           </a:bodyPr>
           <a:lstStyle/>
           <a:p>
+            <a:r>
+              <a:rPr lang="en-US" sz="1700" dirty="0">
+                <a:solidFill>
+                  <a:srgbClr val="17364A"/>
+                </a:solidFill>
+                <a:latin typeface="Aptos" pitchFamily="34" charset="0"/>
+                <a:ea typeface="Aptos" pitchFamily="34" charset="-122"/>
+                <a:cs typeface="Aptos" pitchFamily="34" charset="-120"/>
+              </a:rPr>
+              <a:t>One risk is pilot dependency.</a:t>
+            </a:r>
+            <a:endParaRPr lang="en-US" sz="1700" dirty="0"/>
+          </a:p>
+          <a:p>
+            <a:r>
+              <a:rPr lang="en-US" sz="1700" dirty="0">
+                <a:solidFill>
+                  <a:srgbClr val="17364A"/>
+                </a:solidFill>
+                <a:latin typeface="Aptos" pitchFamily="34" charset="0"/>
+                <a:ea typeface="Aptos" pitchFamily="34" charset="-122"/>
+                <a:cs typeface="Aptos" pitchFamily="34" charset="-120"/>
+              </a:rPr>
+              <a:t>Staff may begin relying on a tool that was never funded or governed for long-term use.</a:t>
+            </a:r>
+            <a:endParaRPr lang="en-US" sz="1700" dirty="0"/>
+          </a:p>
+          <a:p>
+            <a:r>
+              <a:rPr lang="en-US" sz="1700" dirty="0">
+                <a:solidFill>
+                  <a:srgbClr val="17364A"/>
+                </a:solidFill>
+                <a:latin typeface="Aptos" pitchFamily="34" charset="0"/>
+                <a:ea typeface="Aptos" pitchFamily="34" charset="-122"/>
+                <a:cs typeface="Aptos" pitchFamily="34" charset="-120"/>
+              </a:rPr>
+              <a:t>A guardrail is to define pilot duration, scale limits, success criteria, and continuation requirements before launch.</a:t>
+            </a:r>
+            <a:endParaRPr lang="en-US" sz="1700" dirty="0"/>
+          </a:p>
+          <a:p>
+            <a:r>
+              <a:rPr lang="en-US" sz="1700" dirty="0">
+                <a:solidFill>
+                  <a:srgbClr val="17364A"/>
+                </a:solidFill>
+                <a:latin typeface="Aptos" pitchFamily="34" charset="0"/>
+                <a:ea typeface="Aptos" pitchFamily="34" charset="-122"/>
+                <a:cs typeface="Aptos" pitchFamily="34" charset="-120"/>
+              </a:rPr>
+              <a:t>Another risk is silent degradation.</a:t>
+            </a:r>
+            <a:endParaRPr lang="en-US" sz="1700" dirty="0"/>
+          </a:p>
+        </p:txBody>
+      </p:sp>
+      <p:sp>
+        <p:nvSpPr>
+          <p:cNvPr id="11" name="Shape 9"/>
+          <p:cNvSpPr/>
+          <p:nvPr/>
+        </p:nvSpPr>
+        <p:spPr>
+          <a:xfrm>
+            <a:off x="7909560" y="1417320"/>
+            <a:ext cx="3154680" cy="1828800"/>
+          </a:xfrm>
+          <a:prstGeom prst="roundRect">
+            <a:avLst>
+              <a:gd name="adj" fmla="val 6000"/>
+            </a:avLst>
+          </a:prstGeom>
+          <a:solidFill>
+            <a:srgbClr val="EEF8ED"/>
+          </a:solidFill>
+          <a:ln w="12700">
+            <a:solidFill>
+              <a:srgbClr val="B9D7E6"/>
+            </a:solidFill>
+            <a:prstDash val="solid"/>
+          </a:ln>
+        </p:spPr>
+      </p:sp>
+      <p:sp>
+        <p:nvSpPr>
+          <p:cNvPr id="12" name="Text 10"/>
+          <p:cNvSpPr/>
+          <p:nvPr/>
+        </p:nvSpPr>
+        <p:spPr>
+          <a:xfrm>
+            <a:off x="8074152" y="1563624"/>
+            <a:ext cx="2825496" cy="201168"/>
+          </a:xfrm>
+          <a:prstGeom prst="rect">
+            <a:avLst/>
+          </a:prstGeom>
+          <a:noFill/>
+          <a:ln/>
+        </p:spPr>
+        <p:txBody>
+          <a:bodyPr wrap="square" lIns="0" tIns="0" rIns="0" bIns="0" rtlCol="0" anchor="ctr"/>
+          <a:lstStyle/>
+          <a:p>
             <a:pPr indent="0" marL="0">
               <a:buNone/>
             </a:pPr>
             <a:r>
-              <a:rPr lang="en-US" sz="1420" dirty="0">
+              <a:rPr lang="en-US" sz="950" b="1" dirty="0">
+                <a:solidFill>
+                  <a:srgbClr val="0068B7"/>
+                </a:solidFill>
+                <a:latin typeface="Aptos" pitchFamily="34" charset="0"/>
+                <a:ea typeface="Aptos" pitchFamily="34" charset="-122"/>
+                <a:cs typeface="Aptos" pitchFamily="34" charset="-120"/>
+              </a:rPr>
+              <a:t>Key idea</a:t>
+            </a:r>
+            <a:endParaRPr lang="en-US" sz="950" dirty="0"/>
+          </a:p>
+        </p:txBody>
+      </p:sp>
+      <p:sp>
+        <p:nvSpPr>
+          <p:cNvPr id="13" name="Text 11"/>
+          <p:cNvSpPr/>
+          <p:nvPr/>
+        </p:nvSpPr>
+        <p:spPr>
+          <a:xfrm>
+            <a:off x="8074152" y="1856232"/>
+            <a:ext cx="2825496" cy="1261872"/>
+          </a:xfrm>
+          <a:prstGeom prst="rect">
+            <a:avLst/>
+          </a:prstGeom>
+          <a:noFill/>
+          <a:ln/>
+        </p:spPr>
+        <p:txBody>
+          <a:bodyPr wrap="square" lIns="0" tIns="0" rIns="0" bIns="0" rtlCol="0" anchor="t">
+            <a:normAutofit/>
+          </a:bodyPr>
+          <a:lstStyle/>
+          <a:p>
+            <a:pPr indent="0" marL="0">
+              <a:buNone/>
+            </a:pPr>
+            <a:r>
+              <a:rPr lang="en-US" sz="1250" dirty="0">
                 <a:solidFill>
                   <a:srgbClr val="17364A"/>
                 </a:solidFill>
@@ -3218,9 +3983,116 @@
                 <a:ea typeface="Aptos" pitchFamily="34" charset="-122"/>
                 <a:cs typeface="Aptos" pitchFamily="34" charset="-120"/>
               </a:rPr>
-              <a:t>Which current or proposed AI use case in your agency raises this leadership or governance issue most clearly? Who currently has authority to make decisions about this issue, and is that authority documented? What evidence would governance or leadership need before approving the use case?</a:t>
-            </a:r>
-            <a:endParaRPr lang="en-US" sz="1420" dirty="0"/>
+              <a:t>One risk is pilot dependency.</a:t>
+            </a:r>
+            <a:endParaRPr lang="en-US" sz="1250" dirty="0"/>
+          </a:p>
+        </p:txBody>
+      </p:sp>
+      <p:sp>
+        <p:nvSpPr>
+          <p:cNvPr id="14" name="Shape 12"/>
+          <p:cNvSpPr/>
+          <p:nvPr/>
+        </p:nvSpPr>
+        <p:spPr>
+          <a:xfrm>
+            <a:off x="7909560" y="3520440"/>
+            <a:ext cx="3154680" cy="1737360"/>
+          </a:xfrm>
+          <a:prstGeom prst="roundRect">
+            <a:avLst>
+              <a:gd name="adj" fmla="val 6316"/>
+            </a:avLst>
+          </a:prstGeom>
+          <a:solidFill>
+            <a:srgbClr val="EAF6F8"/>
+          </a:solidFill>
+          <a:ln w="12700">
+            <a:solidFill>
+              <a:srgbClr val="B9D7E6"/>
+            </a:solidFill>
+            <a:prstDash val="solid"/>
+          </a:ln>
+        </p:spPr>
+      </p:sp>
+      <p:sp>
+        <p:nvSpPr>
+          <p:cNvPr id="15" name="Text 13"/>
+          <p:cNvSpPr/>
+          <p:nvPr/>
+        </p:nvSpPr>
+        <p:spPr>
+          <a:xfrm>
+            <a:off x="8074152" y="3666744"/>
+            <a:ext cx="2825496" cy="201168"/>
+          </a:xfrm>
+          <a:prstGeom prst="rect">
+            <a:avLst/>
+          </a:prstGeom>
+          <a:noFill/>
+          <a:ln/>
+        </p:spPr>
+        <p:txBody>
+          <a:bodyPr wrap="square" lIns="0" tIns="0" rIns="0" bIns="0" rtlCol="0" anchor="ctr"/>
+          <a:lstStyle/>
+          <a:p>
+            <a:pPr indent="0" marL="0">
+              <a:buNone/>
+            </a:pPr>
+            <a:r>
+              <a:rPr lang="en-US" sz="950" b="1" dirty="0">
+                <a:solidFill>
+                  <a:srgbClr val="0068B7"/>
+                </a:solidFill>
+                <a:latin typeface="Aptos" pitchFamily="34" charset="0"/>
+                <a:ea typeface="Aptos" pitchFamily="34" charset="-122"/>
+                <a:cs typeface="Aptos" pitchFamily="34" charset="-120"/>
+              </a:rPr>
+              <a:t>Use this for</a:t>
+            </a:r>
+            <a:endParaRPr lang="en-US" sz="950" dirty="0"/>
+          </a:p>
+        </p:txBody>
+      </p:sp>
+      <p:sp>
+        <p:nvSpPr>
+          <p:cNvPr id="16" name="Text 14"/>
+          <p:cNvSpPr/>
+          <p:nvPr/>
+        </p:nvSpPr>
+        <p:spPr>
+          <a:xfrm>
+            <a:off x="8074152" y="3959352"/>
+            <a:ext cx="2825496" cy="1170432"/>
+          </a:xfrm>
+          <a:prstGeom prst="rect">
+            <a:avLst/>
+          </a:prstGeom>
+          <a:noFill/>
+          <a:ln/>
+        </p:spPr>
+        <p:txBody>
+          <a:bodyPr wrap="square" lIns="0" tIns="0" rIns="0" bIns="0" rtlCol="0" anchor="t">
+            <a:normAutofit/>
+          </a:bodyPr>
+          <a:lstStyle/>
+          <a:p>
+            <a:pPr indent="0" marL="0">
+              <a:buNone/>
+            </a:pPr>
+            <a:r>
+              <a:rPr lang="en-US" sz="1250" dirty="0">
+                <a:solidFill>
+                  <a:srgbClr val="17364A"/>
+                </a:solidFill>
+                <a:latin typeface="Aptos" pitchFamily="34" charset="0"/>
+                <a:ea typeface="Aptos" pitchFamily="34" charset="-122"/>
+                <a:cs typeface="Aptos" pitchFamily="34" charset="-120"/>
+              </a:rPr>
+              <a:t>Connect the concept to public health decisions, safeguards, documentation, or implementation work.</a:t>
+            </a:r>
+            <a:endParaRPr lang="en-US" sz="1250" dirty="0"/>
           </a:p>
         </p:txBody>
       </p:sp>
@@ -3283,7 +4155,32 @@
       </p:sp>
       <p:sp>
         <p:nvSpPr>
-          <p:cNvPr id="3" name="Text 1"/>
+          <p:cNvPr id="3" name="Shape 1"/>
+          <p:cNvSpPr/>
+          <p:nvPr/>
+        </p:nvSpPr>
+        <p:spPr>
+          <a:xfrm>
+            <a:off x="0" y="164592"/>
+            <a:ext cx="146304" cy="6693408"/>
+          </a:xfrm>
+          <a:prstGeom prst="rect">
+            <a:avLst/>
+          </a:prstGeom>
+          <a:solidFill>
+            <a:srgbClr val="2F8A28"/>
+          </a:solidFill>
+          <a:ln w="12700">
+            <a:solidFill>
+              <a:srgbClr val="2F8A28"/>
+            </a:solidFill>
+            <a:prstDash val="solid"/>
+          </a:ln>
+        </p:spPr>
+      </p:sp>
+      <p:sp>
+        <p:nvSpPr>
+          <p:cNvPr id="4" name="Text 2"/>
           <p:cNvSpPr/>
           <p:nvPr/>
         </p:nvSpPr>
@@ -3322,7 +4219,7 @@
       </p:sp>
       <p:sp>
         <p:nvSpPr>
-          <p:cNvPr id="4" name="Text 2"/>
+          <p:cNvPr id="5" name="Text 3"/>
           <p:cNvSpPr/>
           <p:nvPr/>
         </p:nvSpPr>
@@ -3361,7 +4258,7 @@
       </p:sp>
       <p:sp>
         <p:nvSpPr>
-          <p:cNvPr id="5" name="Text 3"/>
+          <p:cNvPr id="6" name="Text 4"/>
           <p:cNvSpPr/>
           <p:nvPr/>
         </p:nvSpPr>
@@ -3400,13 +4297,77 @@
       </p:sp>
       <p:sp>
         <p:nvSpPr>
-          <p:cNvPr id="6" name="Text 4"/>
+          <p:cNvPr id="7" name="Shape 5"/>
           <p:cNvSpPr/>
           <p:nvPr/>
         </p:nvSpPr>
         <p:spPr>
           <a:xfrm>
             <a:off x="640080" y="658368"/>
+            <a:ext cx="420624" cy="420624"/>
+          </a:xfrm>
+          <a:prstGeom prst="ellipse">
+            <a:avLst/>
+          </a:prstGeom>
+          <a:solidFill>
+            <a:srgbClr val="0068B7"/>
+          </a:solidFill>
+          <a:ln w="12700">
+            <a:solidFill>
+              <a:srgbClr val="0068B7"/>
+            </a:solidFill>
+            <a:prstDash val="solid"/>
+          </a:ln>
+        </p:spPr>
+      </p:sp>
+      <p:sp>
+        <p:nvSpPr>
+          <p:cNvPr id="8" name="Text 6"/>
+          <p:cNvSpPr/>
+          <p:nvPr/>
+        </p:nvSpPr>
+        <p:spPr>
+          <a:xfrm>
+            <a:off x="640080" y="731520"/>
+            <a:ext cx="420624" cy="164592"/>
+          </a:xfrm>
+          <a:prstGeom prst="rect">
+            <a:avLst/>
+          </a:prstGeom>
+          <a:noFill/>
+          <a:ln/>
+        </p:spPr>
+        <p:txBody>
+          <a:bodyPr wrap="square" lIns="0" tIns="0" rIns="0" bIns="0" rtlCol="0" anchor="ctr"/>
+          <a:lstStyle/>
+          <a:p>
+            <a:pPr algn="ctr" indent="0" marL="0">
+              <a:buNone/>
+            </a:pPr>
+            <a:r>
+              <a:rPr lang="en-US" sz="1100" b="1" dirty="0">
+                <a:solidFill>
+                  <a:srgbClr val="FFFFFF"/>
+                </a:solidFill>
+                <a:latin typeface="Aptos" pitchFamily="34" charset="0"/>
+                <a:ea typeface="Aptos" pitchFamily="34" charset="-122"/>
+                <a:cs typeface="Aptos" pitchFamily="34" charset="-120"/>
+              </a:rPr>
+              <a:t>8</a:t>
+            </a:r>
+            <a:endParaRPr lang="en-US" sz="1100" dirty="0"/>
+          </a:p>
+        </p:txBody>
+      </p:sp>
+      <p:sp>
+        <p:nvSpPr>
+          <p:cNvPr id="9" name="Text 7"/>
+          <p:cNvSpPr/>
+          <p:nvPr/>
+        </p:nvSpPr>
+        <p:spPr>
+          <a:xfrm>
+            <a:off x="640080" y="621792"/>
             <a:ext cx="10881360" cy="566928"/>
           </a:xfrm>
           <a:prstGeom prst="rect">
@@ -3433,7 +4394,7 @@
                 <a:ea typeface="Aptos Display" pitchFamily="34" charset="-122"/>
                 <a:cs typeface="Aptos Display" pitchFamily="34" charset="-120"/>
               </a:rPr>
-              <a:t>Reflection Questions Continued</a:t>
+              <a:t>Application to AI-Supported Workflows</a:t>
             </a:r>
             <a:endParaRPr lang="en-US" sz="2700" dirty="0"/>
           </a:p>
@@ -3441,32 +4402,178 @@
       </p:sp>
       <p:sp>
         <p:nvSpPr>
-          <p:cNvPr id="7" name="Text 5"/>
-          <p:cNvSpPr/>
-          <p:nvPr/>
-        </p:nvSpPr>
-        <p:spPr>
-          <a:xfrm>
-            <a:off x="822960" y="1325880"/>
-            <a:ext cx="10378440" cy="4800600"/>
-          </a:xfrm>
-          <a:prstGeom prst="rect">
-            <a:avLst/>
-          </a:prstGeom>
-          <a:noFill/>
-          <a:ln/>
-        </p:spPr>
-        <p:txBody>
-          <a:bodyPr wrap="square" lIns="1016" tIns="1016" rIns="1016" bIns="1016" rtlCol="0" anchor="t">
+          <p:cNvPr id="10" name="Text 8"/>
+          <p:cNvSpPr/>
+          <p:nvPr/>
+        </p:nvSpPr>
+        <p:spPr>
+          <a:xfrm>
+            <a:off x="868680" y="1417320"/>
+            <a:ext cx="6675120" cy="4434840"/>
+          </a:xfrm>
+          <a:prstGeom prst="rect">
+            <a:avLst/>
+          </a:prstGeom>
+          <a:noFill/>
+          <a:ln/>
+        </p:spPr>
+        <p:txBody>
+          <a:bodyPr wrap="square" lIns="635" tIns="635" rIns="635" bIns="635" rtlCol="0" anchor="t">
             <a:normAutofit/>
           </a:bodyPr>
           <a:lstStyle/>
           <a:p>
+            <a:r>
+              <a:rPr lang="en-US" sz="1700" dirty="0">
+                <a:solidFill>
+                  <a:srgbClr val="17364A"/>
+                </a:solidFill>
+                <a:latin typeface="Aptos" pitchFamily="34" charset="0"/>
+                <a:ea typeface="Aptos" pitchFamily="34" charset="-122"/>
+                <a:cs typeface="Aptos" pitchFamily="34" charset="-120"/>
+              </a:rPr>
+              <a:t>Generative AI sustainability requires prompt and source updates, user training, output review, and policy alignment.</a:t>
+            </a:r>
+            <a:endParaRPr lang="en-US" sz="1700" dirty="0"/>
+          </a:p>
+          <a:p>
+            <a:r>
+              <a:rPr lang="en-US" sz="1700" dirty="0">
+                <a:solidFill>
+                  <a:srgbClr val="17364A"/>
+                </a:solidFill>
+                <a:latin typeface="Aptos" pitchFamily="34" charset="0"/>
+                <a:ea typeface="Aptos" pitchFamily="34" charset="-122"/>
+                <a:cs typeface="Aptos" pitchFamily="34" charset="-120"/>
+              </a:rPr>
+              <a:t>Predictive analytics sustainability requires drift monitoring, recalibration, subgroup review, and documentation.</a:t>
+            </a:r>
+            <a:endParaRPr lang="en-US" sz="1700" dirty="0"/>
+          </a:p>
+          <a:p>
+            <a:r>
+              <a:rPr lang="en-US" sz="1700" dirty="0">
+                <a:solidFill>
+                  <a:srgbClr val="17364A"/>
+                </a:solidFill>
+                <a:latin typeface="Aptos" pitchFamily="34" charset="0"/>
+                <a:ea typeface="Aptos" pitchFamily="34" charset="-122"/>
+                <a:cs typeface="Aptos" pitchFamily="34" charset="-120"/>
+              </a:rPr>
+              <a:t>Agentic AI sustainability requires continued security review, permission management, incident drills, and rollback testing.</a:t>
+            </a:r>
+            <a:endParaRPr lang="en-US" sz="1700" dirty="0"/>
+          </a:p>
+          <a:p>
+            <a:r>
+              <a:rPr lang="en-US" sz="1700" dirty="0">
+                <a:solidFill>
+                  <a:srgbClr val="17364A"/>
+                </a:solidFill>
+                <a:latin typeface="Aptos" pitchFamily="34" charset="0"/>
+                <a:ea typeface="Aptos" pitchFamily="34" charset="-122"/>
+                <a:cs typeface="Aptos" pitchFamily="34" charset="-120"/>
+              </a:rPr>
+              <a:t>Lifecycle funding should match the safeguards required by the AI type.</a:t>
+            </a:r>
+            <a:endParaRPr lang="en-US" sz="1700" dirty="0"/>
+          </a:p>
+        </p:txBody>
+      </p:sp>
+      <p:sp>
+        <p:nvSpPr>
+          <p:cNvPr id="11" name="Shape 9"/>
+          <p:cNvSpPr/>
+          <p:nvPr/>
+        </p:nvSpPr>
+        <p:spPr>
+          <a:xfrm>
+            <a:off x="7909560" y="1417320"/>
+            <a:ext cx="3154680" cy="1828800"/>
+          </a:xfrm>
+          <a:prstGeom prst="roundRect">
+            <a:avLst>
+              <a:gd name="adj" fmla="val 6000"/>
+            </a:avLst>
+          </a:prstGeom>
+          <a:solidFill>
+            <a:srgbClr val="EEF8ED"/>
+          </a:solidFill>
+          <a:ln w="12700">
+            <a:solidFill>
+              <a:srgbClr val="B9D7E6"/>
+            </a:solidFill>
+            <a:prstDash val="solid"/>
+          </a:ln>
+        </p:spPr>
+      </p:sp>
+      <p:sp>
+        <p:nvSpPr>
+          <p:cNvPr id="12" name="Text 10"/>
+          <p:cNvSpPr/>
+          <p:nvPr/>
+        </p:nvSpPr>
+        <p:spPr>
+          <a:xfrm>
+            <a:off x="8074152" y="1563624"/>
+            <a:ext cx="2825496" cy="201168"/>
+          </a:xfrm>
+          <a:prstGeom prst="rect">
+            <a:avLst/>
+          </a:prstGeom>
+          <a:noFill/>
+          <a:ln/>
+        </p:spPr>
+        <p:txBody>
+          <a:bodyPr wrap="square" lIns="0" tIns="0" rIns="0" bIns="0" rtlCol="0" anchor="ctr"/>
+          <a:lstStyle/>
+          <a:p>
             <a:pPr indent="0" marL="0">
               <a:buNone/>
             </a:pPr>
             <a:r>
-              <a:rPr lang="en-US" sz="1420" dirty="0">
+              <a:rPr lang="en-US" sz="950" b="1" dirty="0">
+                <a:solidFill>
+                  <a:srgbClr val="0068B7"/>
+                </a:solidFill>
+                <a:latin typeface="Aptos" pitchFamily="34" charset="0"/>
+                <a:ea typeface="Aptos" pitchFamily="34" charset="-122"/>
+                <a:cs typeface="Aptos" pitchFamily="34" charset="-120"/>
+              </a:rPr>
+              <a:t>Key idea</a:t>
+            </a:r>
+            <a:endParaRPr lang="en-US" sz="950" dirty="0"/>
+          </a:p>
+        </p:txBody>
+      </p:sp>
+      <p:sp>
+        <p:nvSpPr>
+          <p:cNvPr id="13" name="Text 11"/>
+          <p:cNvSpPr/>
+          <p:nvPr/>
+        </p:nvSpPr>
+        <p:spPr>
+          <a:xfrm>
+            <a:off x="8074152" y="1856232"/>
+            <a:ext cx="2825496" cy="1261872"/>
+          </a:xfrm>
+          <a:prstGeom prst="rect">
+            <a:avLst/>
+          </a:prstGeom>
+          <a:noFill/>
+          <a:ln/>
+        </p:spPr>
+        <p:txBody>
+          <a:bodyPr wrap="square" lIns="0" tIns="0" rIns="0" bIns="0" rtlCol="0" anchor="t">
+            <a:normAutofit/>
+          </a:bodyPr>
+          <a:lstStyle/>
+          <a:p>
+            <a:pPr indent="0" marL="0">
+              <a:buNone/>
+            </a:pPr>
+            <a:r>
+              <a:rPr lang="en-US" sz="1250" dirty="0">
                 <a:solidFill>
                   <a:srgbClr val="17364A"/>
                 </a:solidFill>
@@ -3474,9 +4581,116 @@
                 <a:ea typeface="Aptos" pitchFamily="34" charset="-122"/>
                 <a:cs typeface="Aptos" pitchFamily="34" charset="-120"/>
               </a:rPr>
-              <a:t>Which staff, partners, or communities would be affected if this issue were handled poorly? What policy, process, or artifact should be created or updated after this module?</a:t>
-            </a:r>
-            <a:endParaRPr lang="en-US" sz="1420" dirty="0"/>
+              <a:t>Generative AI sustainability requires prompt and source updates, user training, output review, and policy alignment.</a:t>
+            </a:r>
+            <a:endParaRPr lang="en-US" sz="1250" dirty="0"/>
+          </a:p>
+        </p:txBody>
+      </p:sp>
+      <p:sp>
+        <p:nvSpPr>
+          <p:cNvPr id="14" name="Shape 12"/>
+          <p:cNvSpPr/>
+          <p:nvPr/>
+        </p:nvSpPr>
+        <p:spPr>
+          <a:xfrm>
+            <a:off x="7909560" y="3520440"/>
+            <a:ext cx="3154680" cy="1737360"/>
+          </a:xfrm>
+          <a:prstGeom prst="roundRect">
+            <a:avLst>
+              <a:gd name="adj" fmla="val 6316"/>
+            </a:avLst>
+          </a:prstGeom>
+          <a:solidFill>
+            <a:srgbClr val="EAF6F8"/>
+          </a:solidFill>
+          <a:ln w="12700">
+            <a:solidFill>
+              <a:srgbClr val="B9D7E6"/>
+            </a:solidFill>
+            <a:prstDash val="solid"/>
+          </a:ln>
+        </p:spPr>
+      </p:sp>
+      <p:sp>
+        <p:nvSpPr>
+          <p:cNvPr id="15" name="Text 13"/>
+          <p:cNvSpPr/>
+          <p:nvPr/>
+        </p:nvSpPr>
+        <p:spPr>
+          <a:xfrm>
+            <a:off x="8074152" y="3666744"/>
+            <a:ext cx="2825496" cy="201168"/>
+          </a:xfrm>
+          <a:prstGeom prst="rect">
+            <a:avLst/>
+          </a:prstGeom>
+          <a:noFill/>
+          <a:ln/>
+        </p:spPr>
+        <p:txBody>
+          <a:bodyPr wrap="square" lIns="0" tIns="0" rIns="0" bIns="0" rtlCol="0" anchor="ctr"/>
+          <a:lstStyle/>
+          <a:p>
+            <a:pPr indent="0" marL="0">
+              <a:buNone/>
+            </a:pPr>
+            <a:r>
+              <a:rPr lang="en-US" sz="950" b="1" dirty="0">
+                <a:solidFill>
+                  <a:srgbClr val="0068B7"/>
+                </a:solidFill>
+                <a:latin typeface="Aptos" pitchFamily="34" charset="0"/>
+                <a:ea typeface="Aptos" pitchFamily="34" charset="-122"/>
+                <a:cs typeface="Aptos" pitchFamily="34" charset="-120"/>
+              </a:rPr>
+              <a:t>Use this for</a:t>
+            </a:r>
+            <a:endParaRPr lang="en-US" sz="950" dirty="0"/>
+          </a:p>
+        </p:txBody>
+      </p:sp>
+      <p:sp>
+        <p:nvSpPr>
+          <p:cNvPr id="16" name="Text 14"/>
+          <p:cNvSpPr/>
+          <p:nvPr/>
+        </p:nvSpPr>
+        <p:spPr>
+          <a:xfrm>
+            <a:off x="8074152" y="3959352"/>
+            <a:ext cx="2825496" cy="1170432"/>
+          </a:xfrm>
+          <a:prstGeom prst="rect">
+            <a:avLst/>
+          </a:prstGeom>
+          <a:noFill/>
+          <a:ln/>
+        </p:spPr>
+        <p:txBody>
+          <a:bodyPr wrap="square" lIns="0" tIns="0" rIns="0" bIns="0" rtlCol="0" anchor="t">
+            <a:normAutofit/>
+          </a:bodyPr>
+          <a:lstStyle/>
+          <a:p>
+            <a:pPr indent="0" marL="0">
+              <a:buNone/>
+            </a:pPr>
+            <a:r>
+              <a:rPr lang="en-US" sz="1250" dirty="0">
+                <a:solidFill>
+                  <a:srgbClr val="17364A"/>
+                </a:solidFill>
+                <a:latin typeface="Aptos" pitchFamily="34" charset="0"/>
+                <a:ea typeface="Aptos" pitchFamily="34" charset="-122"/>
+                <a:cs typeface="Aptos" pitchFamily="34" charset="-120"/>
+              </a:rPr>
+              <a:t>Connect the concept to public health decisions, safeguards, documentation, or implementation work.</a:t>
+            </a:r>
+            <a:endParaRPr lang="en-US" sz="1250" dirty="0"/>
           </a:p>
         </p:txBody>
       </p:sp>
@@ -3539,7 +4753,32 @@
       </p:sp>
       <p:sp>
         <p:nvSpPr>
-          <p:cNvPr id="3" name="Text 1"/>
+          <p:cNvPr id="3" name="Shape 1"/>
+          <p:cNvSpPr/>
+          <p:nvPr/>
+        </p:nvSpPr>
+        <p:spPr>
+          <a:xfrm>
+            <a:off x="0" y="164592"/>
+            <a:ext cx="146304" cy="6693408"/>
+          </a:xfrm>
+          <a:prstGeom prst="rect">
+            <a:avLst/>
+          </a:prstGeom>
+          <a:solidFill>
+            <a:srgbClr val="2F8A28"/>
+          </a:solidFill>
+          <a:ln w="12700">
+            <a:solidFill>
+              <a:srgbClr val="2F8A28"/>
+            </a:solidFill>
+            <a:prstDash val="solid"/>
+          </a:ln>
+        </p:spPr>
+      </p:sp>
+      <p:sp>
+        <p:nvSpPr>
+          <p:cNvPr id="4" name="Text 2"/>
           <p:cNvSpPr/>
           <p:nvPr/>
         </p:nvSpPr>
@@ -3578,7 +4817,7 @@
       </p:sp>
       <p:sp>
         <p:nvSpPr>
-          <p:cNvPr id="4" name="Text 2"/>
+          <p:cNvPr id="5" name="Text 3"/>
           <p:cNvSpPr/>
           <p:nvPr/>
         </p:nvSpPr>
@@ -3617,7 +4856,7 @@
       </p:sp>
       <p:sp>
         <p:nvSpPr>
-          <p:cNvPr id="5" name="Text 3"/>
+          <p:cNvPr id="6" name="Text 4"/>
           <p:cNvSpPr/>
           <p:nvPr/>
         </p:nvSpPr>
@@ -3656,13 +4895,77 @@
       </p:sp>
       <p:sp>
         <p:nvSpPr>
-          <p:cNvPr id="6" name="Text 4"/>
+          <p:cNvPr id="7" name="Shape 5"/>
           <p:cNvSpPr/>
           <p:nvPr/>
         </p:nvSpPr>
         <p:spPr>
           <a:xfrm>
             <a:off x="640080" y="658368"/>
+            <a:ext cx="420624" cy="420624"/>
+          </a:xfrm>
+          <a:prstGeom prst="ellipse">
+            <a:avLst/>
+          </a:prstGeom>
+          <a:solidFill>
+            <a:srgbClr val="0068B7"/>
+          </a:solidFill>
+          <a:ln w="12700">
+            <a:solidFill>
+              <a:srgbClr val="0068B7"/>
+            </a:solidFill>
+            <a:prstDash val="solid"/>
+          </a:ln>
+        </p:spPr>
+      </p:sp>
+      <p:sp>
+        <p:nvSpPr>
+          <p:cNvPr id="8" name="Text 6"/>
+          <p:cNvSpPr/>
+          <p:nvPr/>
+        </p:nvSpPr>
+        <p:spPr>
+          <a:xfrm>
+            <a:off x="640080" y="731520"/>
+            <a:ext cx="420624" cy="164592"/>
+          </a:xfrm>
+          <a:prstGeom prst="rect">
+            <a:avLst/>
+          </a:prstGeom>
+          <a:noFill/>
+          <a:ln/>
+        </p:spPr>
+        <p:txBody>
+          <a:bodyPr wrap="square" lIns="0" tIns="0" rIns="0" bIns="0" rtlCol="0" anchor="ctr"/>
+          <a:lstStyle/>
+          <a:p>
+            <a:pPr algn="ctr" indent="0" marL="0">
+              <a:buNone/>
+            </a:pPr>
+            <a:r>
+              <a:rPr lang="en-US" sz="1100" b="1" dirty="0">
+                <a:solidFill>
+                  <a:srgbClr val="FFFFFF"/>
+                </a:solidFill>
+                <a:latin typeface="Aptos" pitchFamily="34" charset="0"/>
+                <a:ea typeface="Aptos" pitchFamily="34" charset="-122"/>
+                <a:cs typeface="Aptos" pitchFamily="34" charset="-120"/>
+              </a:rPr>
+              <a:t>9</a:t>
+            </a:r>
+            <a:endParaRPr lang="en-US" sz="1100" dirty="0"/>
+          </a:p>
+        </p:txBody>
+      </p:sp>
+      <p:sp>
+        <p:nvSpPr>
+          <p:cNvPr id="9" name="Text 7"/>
+          <p:cNvSpPr/>
+          <p:nvPr/>
+        </p:nvSpPr>
+        <p:spPr>
+          <a:xfrm>
+            <a:off x="640080" y="621792"/>
             <a:ext cx="10881360" cy="566928"/>
           </a:xfrm>
           <a:prstGeom prst="rect">
@@ -3689,7 +4992,7 @@
                 <a:ea typeface="Aptos Display" pitchFamily="34" charset="-122"/>
                 <a:cs typeface="Aptos Display" pitchFamily="34" charset="-120"/>
               </a:rPr>
-              <a:t>Practical Exercise</a:t>
+              <a:t>Reflection Questions</a:t>
             </a:r>
             <a:endParaRPr lang="en-US" sz="2700" dirty="0"/>
           </a:p>
@@ -3697,32 +5000,164 @@
       </p:sp>
       <p:sp>
         <p:nvSpPr>
-          <p:cNvPr id="7" name="Text 5"/>
-          <p:cNvSpPr/>
-          <p:nvPr/>
-        </p:nvSpPr>
-        <p:spPr>
-          <a:xfrm>
-            <a:off x="822960" y="1325880"/>
-            <a:ext cx="10378440" cy="4800600"/>
-          </a:xfrm>
-          <a:prstGeom prst="rect">
-            <a:avLst/>
-          </a:prstGeom>
-          <a:noFill/>
-          <a:ln/>
-        </p:spPr>
-        <p:txBody>
-          <a:bodyPr wrap="square" lIns="1016" tIns="1016" rIns="1016" bIns="1016" rtlCol="0" anchor="t">
+          <p:cNvPr id="10" name="Text 8"/>
+          <p:cNvSpPr/>
+          <p:nvPr/>
+        </p:nvSpPr>
+        <p:spPr>
+          <a:xfrm>
+            <a:off x="868680" y="1417320"/>
+            <a:ext cx="6675120" cy="4434840"/>
+          </a:xfrm>
+          <a:prstGeom prst="rect">
+            <a:avLst/>
+          </a:prstGeom>
+          <a:noFill/>
+          <a:ln/>
+        </p:spPr>
+        <p:txBody>
+          <a:bodyPr wrap="square" lIns="635" tIns="635" rIns="635" bIns="635" rtlCol="0" anchor="t">
             <a:normAutofit/>
           </a:bodyPr>
           <a:lstStyle/>
           <a:p>
+            <a:r>
+              <a:rPr lang="en-US" sz="1700" dirty="0">
+                <a:solidFill>
+                  <a:srgbClr val="17364A"/>
+                </a:solidFill>
+                <a:latin typeface="Aptos" pitchFamily="34" charset="0"/>
+                <a:ea typeface="Aptos" pitchFamily="34" charset="-122"/>
+                <a:cs typeface="Aptos" pitchFamily="34" charset="-120"/>
+              </a:rPr>
+              <a:t>Which current or proposed AI use case in your agency raises this leadership or governance issue most clearly?</a:t>
+            </a:r>
+            <a:endParaRPr lang="en-US" sz="1700" dirty="0"/>
+          </a:p>
+          <a:p>
+            <a:r>
+              <a:rPr lang="en-US" sz="1700" dirty="0">
+                <a:solidFill>
+                  <a:srgbClr val="17364A"/>
+                </a:solidFill>
+                <a:latin typeface="Aptos" pitchFamily="34" charset="0"/>
+                <a:ea typeface="Aptos" pitchFamily="34" charset="-122"/>
+                <a:cs typeface="Aptos" pitchFamily="34" charset="-120"/>
+              </a:rPr>
+              <a:t>Who currently has authority to make decisions about this issue, and is that authority documented?</a:t>
+            </a:r>
+            <a:endParaRPr lang="en-US" sz="1700" dirty="0"/>
+          </a:p>
+          <a:p>
+            <a:r>
+              <a:rPr lang="en-US" sz="1700" dirty="0">
+                <a:solidFill>
+                  <a:srgbClr val="17364A"/>
+                </a:solidFill>
+                <a:latin typeface="Aptos" pitchFamily="34" charset="0"/>
+                <a:ea typeface="Aptos" pitchFamily="34" charset="-122"/>
+                <a:cs typeface="Aptos" pitchFamily="34" charset="-120"/>
+              </a:rPr>
+              <a:t>What evidence would governance or leadership need before approving the use case?</a:t>
+            </a:r>
+            <a:endParaRPr lang="en-US" sz="1700" dirty="0"/>
+          </a:p>
+        </p:txBody>
+      </p:sp>
+      <p:sp>
+        <p:nvSpPr>
+          <p:cNvPr id="11" name="Shape 9"/>
+          <p:cNvSpPr/>
+          <p:nvPr/>
+        </p:nvSpPr>
+        <p:spPr>
+          <a:xfrm>
+            <a:off x="7909560" y="1417320"/>
+            <a:ext cx="3154680" cy="1828800"/>
+          </a:xfrm>
+          <a:prstGeom prst="roundRect">
+            <a:avLst>
+              <a:gd name="adj" fmla="val 6000"/>
+            </a:avLst>
+          </a:prstGeom>
+          <a:solidFill>
+            <a:srgbClr val="EEF8ED"/>
+          </a:solidFill>
+          <a:ln w="12700">
+            <a:solidFill>
+              <a:srgbClr val="B9D7E6"/>
+            </a:solidFill>
+            <a:prstDash val="solid"/>
+          </a:ln>
+        </p:spPr>
+      </p:sp>
+      <p:sp>
+        <p:nvSpPr>
+          <p:cNvPr id="12" name="Text 10"/>
+          <p:cNvSpPr/>
+          <p:nvPr/>
+        </p:nvSpPr>
+        <p:spPr>
+          <a:xfrm>
+            <a:off x="8074152" y="1563624"/>
+            <a:ext cx="2825496" cy="201168"/>
+          </a:xfrm>
+          <a:prstGeom prst="rect">
+            <a:avLst/>
+          </a:prstGeom>
+          <a:noFill/>
+          <a:ln/>
+        </p:spPr>
+        <p:txBody>
+          <a:bodyPr wrap="square" lIns="0" tIns="0" rIns="0" bIns="0" rtlCol="0" anchor="ctr"/>
+          <a:lstStyle/>
+          <a:p>
             <a:pPr indent="0" marL="0">
               <a:buNone/>
             </a:pPr>
             <a:r>
-              <a:rPr lang="en-US" sz="1420" dirty="0">
+              <a:rPr lang="en-US" sz="950" b="1" dirty="0">
+                <a:solidFill>
+                  <a:srgbClr val="0068B7"/>
+                </a:solidFill>
+                <a:latin typeface="Aptos" pitchFamily="34" charset="0"/>
+                <a:ea typeface="Aptos" pitchFamily="34" charset="-122"/>
+                <a:cs typeface="Aptos" pitchFamily="34" charset="-120"/>
+              </a:rPr>
+              <a:t>Key idea</a:t>
+            </a:r>
+            <a:endParaRPr lang="en-US" sz="950" dirty="0"/>
+          </a:p>
+        </p:txBody>
+      </p:sp>
+      <p:sp>
+        <p:nvSpPr>
+          <p:cNvPr id="13" name="Text 11"/>
+          <p:cNvSpPr/>
+          <p:nvPr/>
+        </p:nvSpPr>
+        <p:spPr>
+          <a:xfrm>
+            <a:off x="8074152" y="1856232"/>
+            <a:ext cx="2825496" cy="1261872"/>
+          </a:xfrm>
+          <a:prstGeom prst="rect">
+            <a:avLst/>
+          </a:prstGeom>
+          <a:noFill/>
+          <a:ln/>
+        </p:spPr>
+        <p:txBody>
+          <a:bodyPr wrap="square" lIns="0" tIns="0" rIns="0" bIns="0" rtlCol="0" anchor="t">
+            <a:normAutofit/>
+          </a:bodyPr>
+          <a:lstStyle/>
+          <a:p>
+            <a:pPr indent="0" marL="0">
+              <a:buNone/>
+            </a:pPr>
+            <a:r>
+              <a:rPr lang="en-US" sz="1250" dirty="0">
                 <a:solidFill>
                   <a:srgbClr val="17364A"/>
                 </a:solidFill>
@@ -3730,9 +5165,116 @@
                 <a:ea typeface="Aptos" pitchFamily="34" charset="-122"/>
                 <a:cs typeface="Aptos" pitchFamily="34" charset="-120"/>
               </a:rPr>
-              <a:t>Create a lifecycle funding and sustainability plan for one AI use case. Include costs, owners, funding sources, monitoring, update cadence, vendor management, training, fallback process, and sunset criteria.</a:t>
-            </a:r>
-            <a:endParaRPr lang="en-US" sz="1420" dirty="0"/>
+              <a:t>Which current or proposed AI use case in your agency raises this leadership or governance issue most clearly?</a:t>
+            </a:r>
+            <a:endParaRPr lang="en-US" sz="1250" dirty="0"/>
+          </a:p>
+        </p:txBody>
+      </p:sp>
+      <p:sp>
+        <p:nvSpPr>
+          <p:cNvPr id="14" name="Shape 12"/>
+          <p:cNvSpPr/>
+          <p:nvPr/>
+        </p:nvSpPr>
+        <p:spPr>
+          <a:xfrm>
+            <a:off x="7909560" y="3520440"/>
+            <a:ext cx="3154680" cy="1737360"/>
+          </a:xfrm>
+          <a:prstGeom prst="roundRect">
+            <a:avLst>
+              <a:gd name="adj" fmla="val 6316"/>
+            </a:avLst>
+          </a:prstGeom>
+          <a:solidFill>
+            <a:srgbClr val="EAF6F8"/>
+          </a:solidFill>
+          <a:ln w="12700">
+            <a:solidFill>
+              <a:srgbClr val="B9D7E6"/>
+            </a:solidFill>
+            <a:prstDash val="solid"/>
+          </a:ln>
+        </p:spPr>
+      </p:sp>
+      <p:sp>
+        <p:nvSpPr>
+          <p:cNvPr id="15" name="Text 13"/>
+          <p:cNvSpPr/>
+          <p:nvPr/>
+        </p:nvSpPr>
+        <p:spPr>
+          <a:xfrm>
+            <a:off x="8074152" y="3666744"/>
+            <a:ext cx="2825496" cy="201168"/>
+          </a:xfrm>
+          <a:prstGeom prst="rect">
+            <a:avLst/>
+          </a:prstGeom>
+          <a:noFill/>
+          <a:ln/>
+        </p:spPr>
+        <p:txBody>
+          <a:bodyPr wrap="square" lIns="0" tIns="0" rIns="0" bIns="0" rtlCol="0" anchor="ctr"/>
+          <a:lstStyle/>
+          <a:p>
+            <a:pPr indent="0" marL="0">
+              <a:buNone/>
+            </a:pPr>
+            <a:r>
+              <a:rPr lang="en-US" sz="950" b="1" dirty="0">
+                <a:solidFill>
+                  <a:srgbClr val="0068B7"/>
+                </a:solidFill>
+                <a:latin typeface="Aptos" pitchFamily="34" charset="0"/>
+                <a:ea typeface="Aptos" pitchFamily="34" charset="-122"/>
+                <a:cs typeface="Aptos" pitchFamily="34" charset="-120"/>
+              </a:rPr>
+              <a:t>Use this for</a:t>
+            </a:r>
+            <a:endParaRPr lang="en-US" sz="950" dirty="0"/>
+          </a:p>
+        </p:txBody>
+      </p:sp>
+      <p:sp>
+        <p:nvSpPr>
+          <p:cNvPr id="16" name="Text 14"/>
+          <p:cNvSpPr/>
+          <p:nvPr/>
+        </p:nvSpPr>
+        <p:spPr>
+          <a:xfrm>
+            <a:off x="8074152" y="3959352"/>
+            <a:ext cx="2825496" cy="1170432"/>
+          </a:xfrm>
+          <a:prstGeom prst="rect">
+            <a:avLst/>
+          </a:prstGeom>
+          <a:noFill/>
+          <a:ln/>
+        </p:spPr>
+        <p:txBody>
+          <a:bodyPr wrap="square" lIns="0" tIns="0" rIns="0" bIns="0" rtlCol="0" anchor="t">
+            <a:normAutofit/>
+          </a:bodyPr>
+          <a:lstStyle/>
+          <a:p>
+            <a:pPr indent="0" marL="0">
+              <a:buNone/>
+            </a:pPr>
+            <a:r>
+              <a:rPr lang="en-US" sz="1250" dirty="0">
+                <a:solidFill>
+                  <a:srgbClr val="17364A"/>
+                </a:solidFill>
+                <a:latin typeface="Aptos" pitchFamily="34" charset="0"/>
+                <a:ea typeface="Aptos" pitchFamily="34" charset="-122"/>
+                <a:cs typeface="Aptos" pitchFamily="34" charset="-120"/>
+              </a:rPr>
+              <a:t>Connect the concept to public health decisions, safeguards, documentation, or implementation work.</a:t>
+            </a:r>
+            <a:endParaRPr lang="en-US" sz="1250" dirty="0"/>
           </a:p>
         </p:txBody>
       </p:sp>
@@ -3795,7 +5337,32 @@
       </p:sp>
       <p:sp>
         <p:nvSpPr>
-          <p:cNvPr id="3" name="Text 1"/>
+          <p:cNvPr id="3" name="Shape 1"/>
+          <p:cNvSpPr/>
+          <p:nvPr/>
+        </p:nvSpPr>
+        <p:spPr>
+          <a:xfrm>
+            <a:off x="0" y="164592"/>
+            <a:ext cx="146304" cy="6693408"/>
+          </a:xfrm>
+          <a:prstGeom prst="rect">
+            <a:avLst/>
+          </a:prstGeom>
+          <a:solidFill>
+            <a:srgbClr val="2F8A28"/>
+          </a:solidFill>
+          <a:ln w="12700">
+            <a:solidFill>
+              <a:srgbClr val="2F8A28"/>
+            </a:solidFill>
+            <a:prstDash val="solid"/>
+          </a:ln>
+        </p:spPr>
+      </p:sp>
+      <p:sp>
+        <p:nvSpPr>
+          <p:cNvPr id="4" name="Text 2"/>
           <p:cNvSpPr/>
           <p:nvPr/>
         </p:nvSpPr>
@@ -3834,7 +5401,7 @@
       </p:sp>
       <p:sp>
         <p:nvSpPr>
-          <p:cNvPr id="4" name="Text 2"/>
+          <p:cNvPr id="5" name="Text 3"/>
           <p:cNvSpPr/>
           <p:nvPr/>
         </p:nvSpPr>
@@ -3873,7 +5440,7 @@
       </p:sp>
       <p:sp>
         <p:nvSpPr>
-          <p:cNvPr id="5" name="Text 3"/>
+          <p:cNvPr id="6" name="Text 4"/>
           <p:cNvSpPr/>
           <p:nvPr/>
         </p:nvSpPr>
@@ -3912,7 +5479,7 @@
       </p:sp>
       <p:sp>
         <p:nvSpPr>
-          <p:cNvPr id="6" name="Text 4"/>
+          <p:cNvPr id="7" name="Text 5"/>
           <p:cNvSpPr/>
           <p:nvPr/>
         </p:nvSpPr>
@@ -3945,7 +5512,7 @@
                 <a:ea typeface="Aptos Display" pitchFamily="34" charset="-122"/>
                 <a:cs typeface="Aptos Display" pitchFamily="34" charset="-120"/>
               </a:rPr>
-              <a:t>Before You Begin</a:t>
+              <a:t>Reflection Questions Continued</a:t>
             </a:r>
             <a:endParaRPr lang="en-US" sz="2700" dirty="0"/>
           </a:p>
@@ -3953,32 +5520,150 @@
       </p:sp>
       <p:sp>
         <p:nvSpPr>
-          <p:cNvPr id="7" name="Text 5"/>
-          <p:cNvSpPr/>
-          <p:nvPr/>
-        </p:nvSpPr>
-        <p:spPr>
-          <a:xfrm>
-            <a:off x="822960" y="1325880"/>
-            <a:ext cx="10378440" cy="4800600"/>
-          </a:xfrm>
-          <a:prstGeom prst="rect">
-            <a:avLst/>
-          </a:prstGeom>
-          <a:noFill/>
-          <a:ln/>
-        </p:spPr>
-        <p:txBody>
-          <a:bodyPr wrap="square" lIns="1016" tIns="1016" rIns="1016" bIns="1016" rtlCol="0" anchor="t">
+          <p:cNvPr id="8" name="Text 6"/>
+          <p:cNvSpPr/>
+          <p:nvPr/>
+        </p:nvSpPr>
+        <p:spPr>
+          <a:xfrm>
+            <a:off x="868680" y="1417320"/>
+            <a:ext cx="6675120" cy="4434840"/>
+          </a:xfrm>
+          <a:prstGeom prst="rect">
+            <a:avLst/>
+          </a:prstGeom>
+          <a:noFill/>
+          <a:ln/>
+        </p:spPr>
+        <p:txBody>
+          <a:bodyPr wrap="square" lIns="635" tIns="635" rIns="635" bIns="635" rtlCol="0" anchor="t">
             <a:normAutofit/>
           </a:bodyPr>
           <a:lstStyle/>
           <a:p>
+            <a:r>
+              <a:rPr lang="en-US" sz="1700" dirty="0">
+                <a:solidFill>
+                  <a:srgbClr val="17364A"/>
+                </a:solidFill>
+                <a:latin typeface="Aptos" pitchFamily="34" charset="0"/>
+                <a:ea typeface="Aptos" pitchFamily="34" charset="-122"/>
+                <a:cs typeface="Aptos" pitchFamily="34" charset="-120"/>
+              </a:rPr>
+              <a:t>Which staff, partners, or communities would be affected if this issue were handled poorly?</a:t>
+            </a:r>
+            <a:endParaRPr lang="en-US" sz="1700" dirty="0"/>
+          </a:p>
+          <a:p>
+            <a:r>
+              <a:rPr lang="en-US" sz="1700" dirty="0">
+                <a:solidFill>
+                  <a:srgbClr val="17364A"/>
+                </a:solidFill>
+                <a:latin typeface="Aptos" pitchFamily="34" charset="0"/>
+                <a:ea typeface="Aptos" pitchFamily="34" charset="-122"/>
+                <a:cs typeface="Aptos" pitchFamily="34" charset="-120"/>
+              </a:rPr>
+              <a:t>What policy, process, or artifact should be created or updated after this module?</a:t>
+            </a:r>
+            <a:endParaRPr lang="en-US" sz="1700" dirty="0"/>
+          </a:p>
+        </p:txBody>
+      </p:sp>
+      <p:sp>
+        <p:nvSpPr>
+          <p:cNvPr id="9" name="Shape 7"/>
+          <p:cNvSpPr/>
+          <p:nvPr/>
+        </p:nvSpPr>
+        <p:spPr>
+          <a:xfrm>
+            <a:off x="7909560" y="1417320"/>
+            <a:ext cx="3154680" cy="1828800"/>
+          </a:xfrm>
+          <a:prstGeom prst="roundRect">
+            <a:avLst>
+              <a:gd name="adj" fmla="val 6000"/>
+            </a:avLst>
+          </a:prstGeom>
+          <a:solidFill>
+            <a:srgbClr val="EEF8ED"/>
+          </a:solidFill>
+          <a:ln w="12700">
+            <a:solidFill>
+              <a:srgbClr val="B9D7E6"/>
+            </a:solidFill>
+            <a:prstDash val="solid"/>
+          </a:ln>
+        </p:spPr>
+      </p:sp>
+      <p:sp>
+        <p:nvSpPr>
+          <p:cNvPr id="10" name="Text 8"/>
+          <p:cNvSpPr/>
+          <p:nvPr/>
+        </p:nvSpPr>
+        <p:spPr>
+          <a:xfrm>
+            <a:off x="8074152" y="1563624"/>
+            <a:ext cx="2825496" cy="201168"/>
+          </a:xfrm>
+          <a:prstGeom prst="rect">
+            <a:avLst/>
+          </a:prstGeom>
+          <a:noFill/>
+          <a:ln/>
+        </p:spPr>
+        <p:txBody>
+          <a:bodyPr wrap="square" lIns="0" tIns="0" rIns="0" bIns="0" rtlCol="0" anchor="ctr"/>
+          <a:lstStyle/>
+          <a:p>
             <a:pPr indent="0" marL="0">
               <a:buNone/>
             </a:pPr>
             <a:r>
-              <a:rPr lang="en-US" sz="1420" dirty="0">
+              <a:rPr lang="en-US" sz="950" b="1" dirty="0">
+                <a:solidFill>
+                  <a:srgbClr val="0068B7"/>
+                </a:solidFill>
+                <a:latin typeface="Aptos" pitchFamily="34" charset="0"/>
+                <a:ea typeface="Aptos" pitchFamily="34" charset="-122"/>
+                <a:cs typeface="Aptos" pitchFamily="34" charset="-120"/>
+              </a:rPr>
+              <a:t>Key idea</a:t>
+            </a:r>
+            <a:endParaRPr lang="en-US" sz="950" dirty="0"/>
+          </a:p>
+        </p:txBody>
+      </p:sp>
+      <p:sp>
+        <p:nvSpPr>
+          <p:cNvPr id="11" name="Text 9"/>
+          <p:cNvSpPr/>
+          <p:nvPr/>
+        </p:nvSpPr>
+        <p:spPr>
+          <a:xfrm>
+            <a:off x="8074152" y="1856232"/>
+            <a:ext cx="2825496" cy="1261872"/>
+          </a:xfrm>
+          <a:prstGeom prst="rect">
+            <a:avLst/>
+          </a:prstGeom>
+          <a:noFill/>
+          <a:ln/>
+        </p:spPr>
+        <p:txBody>
+          <a:bodyPr wrap="square" lIns="0" tIns="0" rIns="0" bIns="0" rtlCol="0" anchor="t">
+            <a:normAutofit/>
+          </a:bodyPr>
+          <a:lstStyle/>
+          <a:p>
+            <a:pPr indent="0" marL="0">
+              <a:buNone/>
+            </a:pPr>
+            <a:r>
+              <a:rPr lang="en-US" sz="1250" dirty="0">
                 <a:solidFill>
                   <a:srgbClr val="17364A"/>
                 </a:solidFill>
@@ -3986,9 +5671,116 @@
                 <a:ea typeface="Aptos" pitchFamily="34" charset="-122"/>
                 <a:cs typeface="Aptos" pitchFamily="34" charset="-120"/>
               </a:rPr>
-              <a:t>Choose a real or realistic public health AI use case. Document assumptions, unresolved questions, and which agency roles would need to review the artifact before it is adopted. The exercise should produce a work product that could support governance review, leadership discussion, implementation planning, or policy development.</a:t>
-            </a:r>
-            <a:endParaRPr lang="en-US" sz="1420" dirty="0"/>
+              <a:t>Which staff, partners, or communities would be affected if this issue were handled poorly?</a:t>
+            </a:r>
+            <a:endParaRPr lang="en-US" sz="1250" dirty="0"/>
+          </a:p>
+        </p:txBody>
+      </p:sp>
+      <p:sp>
+        <p:nvSpPr>
+          <p:cNvPr id="12" name="Shape 10"/>
+          <p:cNvSpPr/>
+          <p:nvPr/>
+        </p:nvSpPr>
+        <p:spPr>
+          <a:xfrm>
+            <a:off x="7909560" y="3520440"/>
+            <a:ext cx="3154680" cy="1737360"/>
+          </a:xfrm>
+          <a:prstGeom prst="roundRect">
+            <a:avLst>
+              <a:gd name="adj" fmla="val 6316"/>
+            </a:avLst>
+          </a:prstGeom>
+          <a:solidFill>
+            <a:srgbClr val="EAF6F8"/>
+          </a:solidFill>
+          <a:ln w="12700">
+            <a:solidFill>
+              <a:srgbClr val="B9D7E6"/>
+            </a:solidFill>
+            <a:prstDash val="solid"/>
+          </a:ln>
+        </p:spPr>
+      </p:sp>
+      <p:sp>
+        <p:nvSpPr>
+          <p:cNvPr id="13" name="Text 11"/>
+          <p:cNvSpPr/>
+          <p:nvPr/>
+        </p:nvSpPr>
+        <p:spPr>
+          <a:xfrm>
+            <a:off x="8074152" y="3666744"/>
+            <a:ext cx="2825496" cy="201168"/>
+          </a:xfrm>
+          <a:prstGeom prst="rect">
+            <a:avLst/>
+          </a:prstGeom>
+          <a:noFill/>
+          <a:ln/>
+        </p:spPr>
+        <p:txBody>
+          <a:bodyPr wrap="square" lIns="0" tIns="0" rIns="0" bIns="0" rtlCol="0" anchor="ctr"/>
+          <a:lstStyle/>
+          <a:p>
+            <a:pPr indent="0" marL="0">
+              <a:buNone/>
+            </a:pPr>
+            <a:r>
+              <a:rPr lang="en-US" sz="950" b="1" dirty="0">
+                <a:solidFill>
+                  <a:srgbClr val="0068B7"/>
+                </a:solidFill>
+                <a:latin typeface="Aptos" pitchFamily="34" charset="0"/>
+                <a:ea typeface="Aptos" pitchFamily="34" charset="-122"/>
+                <a:cs typeface="Aptos" pitchFamily="34" charset="-120"/>
+              </a:rPr>
+              <a:t>Use this for</a:t>
+            </a:r>
+            <a:endParaRPr lang="en-US" sz="950" dirty="0"/>
+          </a:p>
+        </p:txBody>
+      </p:sp>
+      <p:sp>
+        <p:nvSpPr>
+          <p:cNvPr id="14" name="Text 12"/>
+          <p:cNvSpPr/>
+          <p:nvPr/>
+        </p:nvSpPr>
+        <p:spPr>
+          <a:xfrm>
+            <a:off x="8074152" y="3959352"/>
+            <a:ext cx="2825496" cy="1170432"/>
+          </a:xfrm>
+          <a:prstGeom prst="rect">
+            <a:avLst/>
+          </a:prstGeom>
+          <a:noFill/>
+          <a:ln/>
+        </p:spPr>
+        <p:txBody>
+          <a:bodyPr wrap="square" lIns="0" tIns="0" rIns="0" bIns="0" rtlCol="0" anchor="t">
+            <a:normAutofit/>
+          </a:bodyPr>
+          <a:lstStyle/>
+          <a:p>
+            <a:pPr indent="0" marL="0">
+              <a:buNone/>
+            </a:pPr>
+            <a:r>
+              <a:rPr lang="en-US" sz="1250" dirty="0">
+                <a:solidFill>
+                  <a:srgbClr val="17364A"/>
+                </a:solidFill>
+                <a:latin typeface="Aptos" pitchFamily="34" charset="0"/>
+                <a:ea typeface="Aptos" pitchFamily="34" charset="-122"/>
+                <a:cs typeface="Aptos" pitchFamily="34" charset="-120"/>
+              </a:rPr>
+              <a:t>Connect the concept to public health decisions, safeguards, documentation, or implementation work.</a:t>
+            </a:r>
+            <a:endParaRPr lang="en-US" sz="1250" dirty="0"/>
           </a:p>
         </p:txBody>
       </p:sp>
@@ -4051,7 +5843,32 @@
       </p:sp>
       <p:sp>
         <p:nvSpPr>
-          <p:cNvPr id="3" name="Text 1"/>
+          <p:cNvPr id="3" name="Shape 1"/>
+          <p:cNvSpPr/>
+          <p:nvPr/>
+        </p:nvSpPr>
+        <p:spPr>
+          <a:xfrm>
+            <a:off x="0" y="164592"/>
+            <a:ext cx="146304" cy="6693408"/>
+          </a:xfrm>
+          <a:prstGeom prst="rect">
+            <a:avLst/>
+          </a:prstGeom>
+          <a:solidFill>
+            <a:srgbClr val="2F8A28"/>
+          </a:solidFill>
+          <a:ln w="12700">
+            <a:solidFill>
+              <a:srgbClr val="2F8A28"/>
+            </a:solidFill>
+            <a:prstDash val="solid"/>
+          </a:ln>
+        </p:spPr>
+      </p:sp>
+      <p:sp>
+        <p:nvSpPr>
+          <p:cNvPr id="4" name="Text 2"/>
           <p:cNvSpPr/>
           <p:nvPr/>
         </p:nvSpPr>
@@ -4090,7 +5907,7 @@
       </p:sp>
       <p:sp>
         <p:nvSpPr>
-          <p:cNvPr id="4" name="Text 2"/>
+          <p:cNvPr id="5" name="Text 3"/>
           <p:cNvSpPr/>
           <p:nvPr/>
         </p:nvSpPr>
@@ -4129,7 +5946,7 @@
       </p:sp>
       <p:sp>
         <p:nvSpPr>
-          <p:cNvPr id="5" name="Text 3"/>
+          <p:cNvPr id="6" name="Text 4"/>
           <p:cNvSpPr/>
           <p:nvPr/>
         </p:nvSpPr>
@@ -4168,13 +5985,77 @@
       </p:sp>
       <p:sp>
         <p:nvSpPr>
-          <p:cNvPr id="6" name="Text 4"/>
+          <p:cNvPr id="7" name="Shape 5"/>
           <p:cNvSpPr/>
           <p:nvPr/>
         </p:nvSpPr>
         <p:spPr>
           <a:xfrm>
             <a:off x="640080" y="658368"/>
+            <a:ext cx="420624" cy="420624"/>
+          </a:xfrm>
+          <a:prstGeom prst="ellipse">
+            <a:avLst/>
+          </a:prstGeom>
+          <a:solidFill>
+            <a:srgbClr val="0068B7"/>
+          </a:solidFill>
+          <a:ln w="12700">
+            <a:solidFill>
+              <a:srgbClr val="0068B7"/>
+            </a:solidFill>
+            <a:prstDash val="solid"/>
+          </a:ln>
+        </p:spPr>
+      </p:sp>
+      <p:sp>
+        <p:nvSpPr>
+          <p:cNvPr id="8" name="Text 6"/>
+          <p:cNvSpPr/>
+          <p:nvPr/>
+        </p:nvSpPr>
+        <p:spPr>
+          <a:xfrm>
+            <a:off x="640080" y="731520"/>
+            <a:ext cx="420624" cy="164592"/>
+          </a:xfrm>
+          <a:prstGeom prst="rect">
+            <a:avLst/>
+          </a:prstGeom>
+          <a:noFill/>
+          <a:ln/>
+        </p:spPr>
+        <p:txBody>
+          <a:bodyPr wrap="square" lIns="0" tIns="0" rIns="0" bIns="0" rtlCol="0" anchor="ctr"/>
+          <a:lstStyle/>
+          <a:p>
+            <a:pPr algn="ctr" indent="0" marL="0">
+              <a:buNone/>
+            </a:pPr>
+            <a:r>
+              <a:rPr lang="en-US" sz="1100" b="1" dirty="0">
+                <a:solidFill>
+                  <a:srgbClr val="FFFFFF"/>
+                </a:solidFill>
+                <a:latin typeface="Aptos" pitchFamily="34" charset="0"/>
+                <a:ea typeface="Aptos" pitchFamily="34" charset="-122"/>
+                <a:cs typeface="Aptos" pitchFamily="34" charset="-120"/>
+              </a:rPr>
+              <a:t>10</a:t>
+            </a:r>
+            <a:endParaRPr lang="en-US" sz="1100" dirty="0"/>
+          </a:p>
+        </p:txBody>
+      </p:sp>
+      <p:sp>
+        <p:nvSpPr>
+          <p:cNvPr id="9" name="Text 7"/>
+          <p:cNvSpPr/>
+          <p:nvPr/>
+        </p:nvSpPr>
+        <p:spPr>
+          <a:xfrm>
+            <a:off x="640080" y="621792"/>
             <a:ext cx="10881360" cy="566928"/>
           </a:xfrm>
           <a:prstGeom prst="rect">
@@ -4201,7 +6082,7 @@
                 <a:ea typeface="Aptos Display" pitchFamily="34" charset="-122"/>
                 <a:cs typeface="Aptos Display" pitchFamily="34" charset="-120"/>
               </a:rPr>
-              <a:t>Expected Artifact or Evidence</a:t>
+              <a:t>Practical Exercise</a:t>
             </a:r>
             <a:endParaRPr lang="en-US" sz="2700" dirty="0"/>
           </a:p>
@@ -4209,32 +6090,150 @@
       </p:sp>
       <p:sp>
         <p:nvSpPr>
-          <p:cNvPr id="7" name="Text 5"/>
-          <p:cNvSpPr/>
-          <p:nvPr/>
-        </p:nvSpPr>
-        <p:spPr>
-          <a:xfrm>
-            <a:off x="822960" y="1325880"/>
-            <a:ext cx="10378440" cy="4800600"/>
-          </a:xfrm>
-          <a:prstGeom prst="rect">
-            <a:avLst/>
-          </a:prstGeom>
-          <a:noFill/>
-          <a:ln/>
-        </p:spPr>
-        <p:txBody>
-          <a:bodyPr wrap="square" lIns="1016" tIns="1016" rIns="1016" bIns="1016" rtlCol="0" anchor="t">
+          <p:cNvPr id="10" name="Text 8"/>
+          <p:cNvSpPr/>
+          <p:nvPr/>
+        </p:nvSpPr>
+        <p:spPr>
+          <a:xfrm>
+            <a:off x="868680" y="1417320"/>
+            <a:ext cx="6675120" cy="4434840"/>
+          </a:xfrm>
+          <a:prstGeom prst="rect">
+            <a:avLst/>
+          </a:prstGeom>
+          <a:noFill/>
+          <a:ln/>
+        </p:spPr>
+        <p:txBody>
+          <a:bodyPr wrap="square" lIns="635" tIns="635" rIns="635" bIns="635" rtlCol="0" anchor="t">
             <a:normAutofit/>
           </a:bodyPr>
           <a:lstStyle/>
           <a:p>
+            <a:r>
+              <a:rPr lang="en-US" sz="1700" dirty="0">
+                <a:solidFill>
+                  <a:srgbClr val="17364A"/>
+                </a:solidFill>
+                <a:latin typeface="Aptos" pitchFamily="34" charset="0"/>
+                <a:ea typeface="Aptos" pitchFamily="34" charset="-122"/>
+                <a:cs typeface="Aptos" pitchFamily="34" charset="-120"/>
+              </a:rPr>
+              <a:t>Create a lifecycle funding and sustainability plan for one AI use case.</a:t>
+            </a:r>
+            <a:endParaRPr lang="en-US" sz="1700" dirty="0"/>
+          </a:p>
+          <a:p>
+            <a:r>
+              <a:rPr lang="en-US" sz="1700" dirty="0">
+                <a:solidFill>
+                  <a:srgbClr val="17364A"/>
+                </a:solidFill>
+                <a:latin typeface="Aptos" pitchFamily="34" charset="0"/>
+                <a:ea typeface="Aptos" pitchFamily="34" charset="-122"/>
+                <a:cs typeface="Aptos" pitchFamily="34" charset="-120"/>
+              </a:rPr>
+              <a:t>Include costs, owners, funding sources, monitoring, update cadence, vendor management, training, fallback process, and.</a:t>
+            </a:r>
+            <a:endParaRPr lang="en-US" sz="1700" dirty="0"/>
+          </a:p>
+        </p:txBody>
+      </p:sp>
+      <p:sp>
+        <p:nvSpPr>
+          <p:cNvPr id="11" name="Shape 9"/>
+          <p:cNvSpPr/>
+          <p:nvPr/>
+        </p:nvSpPr>
+        <p:spPr>
+          <a:xfrm>
+            <a:off x="7909560" y="1417320"/>
+            <a:ext cx="3154680" cy="1828800"/>
+          </a:xfrm>
+          <a:prstGeom prst="roundRect">
+            <a:avLst>
+              <a:gd name="adj" fmla="val 6000"/>
+            </a:avLst>
+          </a:prstGeom>
+          <a:solidFill>
+            <a:srgbClr val="EEF8ED"/>
+          </a:solidFill>
+          <a:ln w="12700">
+            <a:solidFill>
+              <a:srgbClr val="B9D7E6"/>
+            </a:solidFill>
+            <a:prstDash val="solid"/>
+          </a:ln>
+        </p:spPr>
+      </p:sp>
+      <p:sp>
+        <p:nvSpPr>
+          <p:cNvPr id="12" name="Text 10"/>
+          <p:cNvSpPr/>
+          <p:nvPr/>
+        </p:nvSpPr>
+        <p:spPr>
+          <a:xfrm>
+            <a:off x="8074152" y="1563624"/>
+            <a:ext cx="2825496" cy="201168"/>
+          </a:xfrm>
+          <a:prstGeom prst="rect">
+            <a:avLst/>
+          </a:prstGeom>
+          <a:noFill/>
+          <a:ln/>
+        </p:spPr>
+        <p:txBody>
+          <a:bodyPr wrap="square" lIns="0" tIns="0" rIns="0" bIns="0" rtlCol="0" anchor="ctr"/>
+          <a:lstStyle/>
+          <a:p>
             <a:pPr indent="0" marL="0">
               <a:buNone/>
             </a:pPr>
             <a:r>
-              <a:rPr lang="en-US" sz="1420" dirty="0">
+              <a:rPr lang="en-US" sz="950" b="1" dirty="0">
+                <a:solidFill>
+                  <a:srgbClr val="0068B7"/>
+                </a:solidFill>
+                <a:latin typeface="Aptos" pitchFamily="34" charset="0"/>
+                <a:ea typeface="Aptos" pitchFamily="34" charset="-122"/>
+                <a:cs typeface="Aptos" pitchFamily="34" charset="-120"/>
+              </a:rPr>
+              <a:t>Key idea</a:t>
+            </a:r>
+            <a:endParaRPr lang="en-US" sz="950" dirty="0"/>
+          </a:p>
+        </p:txBody>
+      </p:sp>
+      <p:sp>
+        <p:nvSpPr>
+          <p:cNvPr id="13" name="Text 11"/>
+          <p:cNvSpPr/>
+          <p:nvPr/>
+        </p:nvSpPr>
+        <p:spPr>
+          <a:xfrm>
+            <a:off x="8074152" y="1856232"/>
+            <a:ext cx="2825496" cy="1261872"/>
+          </a:xfrm>
+          <a:prstGeom prst="rect">
+            <a:avLst/>
+          </a:prstGeom>
+          <a:noFill/>
+          <a:ln/>
+        </p:spPr>
+        <p:txBody>
+          <a:bodyPr wrap="square" lIns="0" tIns="0" rIns="0" bIns="0" rtlCol="0" anchor="t">
+            <a:normAutofit/>
+          </a:bodyPr>
+          <a:lstStyle/>
+          <a:p>
+            <a:pPr indent="0" marL="0">
+              <a:buNone/>
+            </a:pPr>
+            <a:r>
+              <a:rPr lang="en-US" sz="1250" dirty="0">
                 <a:solidFill>
                   <a:srgbClr val="17364A"/>
                 </a:solidFill>
@@ -4242,9 +6241,116 @@
                 <a:ea typeface="Aptos" pitchFamily="34" charset="-122"/>
                 <a:cs typeface="Aptos" pitchFamily="34" charset="-120"/>
               </a:rPr>
-              <a:t>Sustainability plan; lifecycle cost list; ownership map; continuation and sunset criteria; rollback or fallback plan.</a:t>
-            </a:r>
-            <a:endParaRPr lang="en-US" sz="1420" dirty="0"/>
+              <a:t>Create a lifecycle funding and sustainability plan for one AI use case.</a:t>
+            </a:r>
+            <a:endParaRPr lang="en-US" sz="1250" dirty="0"/>
+          </a:p>
+        </p:txBody>
+      </p:sp>
+      <p:sp>
+        <p:nvSpPr>
+          <p:cNvPr id="14" name="Shape 12"/>
+          <p:cNvSpPr/>
+          <p:nvPr/>
+        </p:nvSpPr>
+        <p:spPr>
+          <a:xfrm>
+            <a:off x="7909560" y="3520440"/>
+            <a:ext cx="3154680" cy="1737360"/>
+          </a:xfrm>
+          <a:prstGeom prst="roundRect">
+            <a:avLst>
+              <a:gd name="adj" fmla="val 6316"/>
+            </a:avLst>
+          </a:prstGeom>
+          <a:solidFill>
+            <a:srgbClr val="EAF6F8"/>
+          </a:solidFill>
+          <a:ln w="12700">
+            <a:solidFill>
+              <a:srgbClr val="B9D7E6"/>
+            </a:solidFill>
+            <a:prstDash val="solid"/>
+          </a:ln>
+        </p:spPr>
+      </p:sp>
+      <p:sp>
+        <p:nvSpPr>
+          <p:cNvPr id="15" name="Text 13"/>
+          <p:cNvSpPr/>
+          <p:nvPr/>
+        </p:nvSpPr>
+        <p:spPr>
+          <a:xfrm>
+            <a:off x="8074152" y="3666744"/>
+            <a:ext cx="2825496" cy="201168"/>
+          </a:xfrm>
+          <a:prstGeom prst="rect">
+            <a:avLst/>
+          </a:prstGeom>
+          <a:noFill/>
+          <a:ln/>
+        </p:spPr>
+        <p:txBody>
+          <a:bodyPr wrap="square" lIns="0" tIns="0" rIns="0" bIns="0" rtlCol="0" anchor="ctr"/>
+          <a:lstStyle/>
+          <a:p>
+            <a:pPr indent="0" marL="0">
+              <a:buNone/>
+            </a:pPr>
+            <a:r>
+              <a:rPr lang="en-US" sz="950" b="1" dirty="0">
+                <a:solidFill>
+                  <a:srgbClr val="0068B7"/>
+                </a:solidFill>
+                <a:latin typeface="Aptos" pitchFamily="34" charset="0"/>
+                <a:ea typeface="Aptos" pitchFamily="34" charset="-122"/>
+                <a:cs typeface="Aptos" pitchFamily="34" charset="-120"/>
+              </a:rPr>
+              <a:t>Use this for</a:t>
+            </a:r>
+            <a:endParaRPr lang="en-US" sz="950" dirty="0"/>
+          </a:p>
+        </p:txBody>
+      </p:sp>
+      <p:sp>
+        <p:nvSpPr>
+          <p:cNvPr id="16" name="Text 14"/>
+          <p:cNvSpPr/>
+          <p:nvPr/>
+        </p:nvSpPr>
+        <p:spPr>
+          <a:xfrm>
+            <a:off x="8074152" y="3959352"/>
+            <a:ext cx="2825496" cy="1170432"/>
+          </a:xfrm>
+          <a:prstGeom prst="rect">
+            <a:avLst/>
+          </a:prstGeom>
+          <a:noFill/>
+          <a:ln/>
+        </p:spPr>
+        <p:txBody>
+          <a:bodyPr wrap="square" lIns="0" tIns="0" rIns="0" bIns="0" rtlCol="0" anchor="t">
+            <a:normAutofit/>
+          </a:bodyPr>
+          <a:lstStyle/>
+          <a:p>
+            <a:pPr indent="0" marL="0">
+              <a:buNone/>
+            </a:pPr>
+            <a:r>
+              <a:rPr lang="en-US" sz="1250" dirty="0">
+                <a:solidFill>
+                  <a:srgbClr val="17364A"/>
+                </a:solidFill>
+                <a:latin typeface="Aptos" pitchFamily="34" charset="0"/>
+                <a:ea typeface="Aptos" pitchFamily="34" charset="-122"/>
+                <a:cs typeface="Aptos" pitchFamily="34" charset="-120"/>
+              </a:rPr>
+              <a:t>Connect the concept to public health decisions, safeguards, documentation, or implementation work.</a:t>
+            </a:r>
+            <a:endParaRPr lang="en-US" sz="1250" dirty="0"/>
           </a:p>
         </p:txBody>
       </p:sp>
@@ -4307,7 +6413,32 @@
       </p:sp>
       <p:sp>
         <p:nvSpPr>
-          <p:cNvPr id="3" name="Text 1"/>
+          <p:cNvPr id="3" name="Shape 1"/>
+          <p:cNvSpPr/>
+          <p:nvPr/>
+        </p:nvSpPr>
+        <p:spPr>
+          <a:xfrm>
+            <a:off x="0" y="164592"/>
+            <a:ext cx="146304" cy="6693408"/>
+          </a:xfrm>
+          <a:prstGeom prst="rect">
+            <a:avLst/>
+          </a:prstGeom>
+          <a:solidFill>
+            <a:srgbClr val="2F8A28"/>
+          </a:solidFill>
+          <a:ln w="12700">
+            <a:solidFill>
+              <a:srgbClr val="2F8A28"/>
+            </a:solidFill>
+            <a:prstDash val="solid"/>
+          </a:ln>
+        </p:spPr>
+      </p:sp>
+      <p:sp>
+        <p:nvSpPr>
+          <p:cNvPr id="4" name="Text 2"/>
           <p:cNvSpPr/>
           <p:nvPr/>
         </p:nvSpPr>
@@ -4346,7 +6477,7 @@
       </p:sp>
       <p:sp>
         <p:nvSpPr>
-          <p:cNvPr id="4" name="Text 2"/>
+          <p:cNvPr id="5" name="Text 3"/>
           <p:cNvSpPr/>
           <p:nvPr/>
         </p:nvSpPr>
@@ -4385,7 +6516,7 @@
       </p:sp>
       <p:sp>
         <p:nvSpPr>
-          <p:cNvPr id="5" name="Text 3"/>
+          <p:cNvPr id="6" name="Text 4"/>
           <p:cNvSpPr/>
           <p:nvPr/>
         </p:nvSpPr>
@@ -4424,13 +6555,77 @@
       </p:sp>
       <p:sp>
         <p:nvSpPr>
-          <p:cNvPr id="6" name="Text 4"/>
+          <p:cNvPr id="7" name="Shape 5"/>
           <p:cNvSpPr/>
           <p:nvPr/>
         </p:nvSpPr>
         <p:spPr>
           <a:xfrm>
             <a:off x="640080" y="658368"/>
+            <a:ext cx="420624" cy="420624"/>
+          </a:xfrm>
+          <a:prstGeom prst="ellipse">
+            <a:avLst/>
+          </a:prstGeom>
+          <a:solidFill>
+            <a:srgbClr val="0068B7"/>
+          </a:solidFill>
+          <a:ln w="12700">
+            <a:solidFill>
+              <a:srgbClr val="0068B7"/>
+            </a:solidFill>
+            <a:prstDash val="solid"/>
+          </a:ln>
+        </p:spPr>
+      </p:sp>
+      <p:sp>
+        <p:nvSpPr>
+          <p:cNvPr id="8" name="Text 6"/>
+          <p:cNvSpPr/>
+          <p:nvPr/>
+        </p:nvSpPr>
+        <p:spPr>
+          <a:xfrm>
+            <a:off x="640080" y="731520"/>
+            <a:ext cx="420624" cy="164592"/>
+          </a:xfrm>
+          <a:prstGeom prst="rect">
+            <a:avLst/>
+          </a:prstGeom>
+          <a:noFill/>
+          <a:ln/>
+        </p:spPr>
+        <p:txBody>
+          <a:bodyPr wrap="square" lIns="0" tIns="0" rIns="0" bIns="0" rtlCol="0" anchor="ctr"/>
+          <a:lstStyle/>
+          <a:p>
+            <a:pPr algn="ctr" indent="0" marL="0">
+              <a:buNone/>
+            </a:pPr>
+            <a:r>
+              <a:rPr lang="en-US" sz="1100" b="1" dirty="0">
+                <a:solidFill>
+                  <a:srgbClr val="FFFFFF"/>
+                </a:solidFill>
+                <a:latin typeface="Aptos" pitchFamily="34" charset="0"/>
+                <a:ea typeface="Aptos" pitchFamily="34" charset="-122"/>
+                <a:cs typeface="Aptos" pitchFamily="34" charset="-120"/>
+              </a:rPr>
+              <a:t>11</a:t>
+            </a:r>
+            <a:endParaRPr lang="en-US" sz="1100" dirty="0"/>
+          </a:p>
+        </p:txBody>
+      </p:sp>
+      <p:sp>
+        <p:nvSpPr>
+          <p:cNvPr id="9" name="Text 7"/>
+          <p:cNvSpPr/>
+          <p:nvPr/>
+        </p:nvSpPr>
+        <p:spPr>
+          <a:xfrm>
+            <a:off x="640080" y="621792"/>
             <a:ext cx="10881360" cy="566928"/>
           </a:xfrm>
           <a:prstGeom prst="rect">
@@ -4457,7 +6652,7 @@
                 <a:ea typeface="Aptos Display" pitchFamily="34" charset="-122"/>
                 <a:cs typeface="Aptos Display" pitchFamily="34" charset="-120"/>
               </a:rPr>
-              <a:t>Expected Assignment</a:t>
+              <a:t>Before You Begin</a:t>
             </a:r>
             <a:endParaRPr lang="en-US" sz="2700" dirty="0"/>
           </a:p>
@@ -4465,14 +6660,14 @@
       </p:sp>
       <p:sp>
         <p:nvSpPr>
-          <p:cNvPr id="7" name="Text 5"/>
-          <p:cNvSpPr/>
-          <p:nvPr/>
-        </p:nvSpPr>
-        <p:spPr>
-          <a:xfrm>
-            <a:off x="822960" y="1325880"/>
-            <a:ext cx="10378440" cy="4800600"/>
+          <p:cNvPr id="10" name="Text 8"/>
+          <p:cNvSpPr/>
+          <p:nvPr/>
+        </p:nvSpPr>
+        <p:spPr>
+          <a:xfrm>
+            <a:off x="868680" y="1417320"/>
+            <a:ext cx="6675120" cy="4434840"/>
           </a:xfrm>
           <a:prstGeom prst="rect">
             <a:avLst/>
@@ -4487,7 +6682,7 @@
           <a:lstStyle/>
           <a:p>
             <a:r>
-              <a:rPr lang="en-US" sz="1450" dirty="0">
+              <a:rPr lang="en-US" sz="1700" dirty="0">
                 <a:solidFill>
                   <a:srgbClr val="17364A"/>
                 </a:solidFill>
@@ -4495,9 +6690,251 @@
                 <a:ea typeface="Aptos" pitchFamily="34" charset="-122"/>
                 <a:cs typeface="Aptos" pitchFamily="34" charset="-120"/>
               </a:rPr>
-              <a:t>Sustainability plan; lifecycle cost list; ownership map; continuation and sunset criteria; rollback or fallback plan.</a:t>
-            </a:r>
-            <a:endParaRPr lang="en-US" sz="1450" dirty="0"/>
+              <a:t>Choose a real or realistic public health AI use case.</a:t>
+            </a:r>
+            <a:endParaRPr lang="en-US" sz="1700" dirty="0"/>
+          </a:p>
+          <a:p>
+            <a:r>
+              <a:rPr lang="en-US" sz="1700" dirty="0">
+                <a:solidFill>
+                  <a:srgbClr val="17364A"/>
+                </a:solidFill>
+                <a:latin typeface="Aptos" pitchFamily="34" charset="0"/>
+                <a:ea typeface="Aptos" pitchFamily="34" charset="-122"/>
+                <a:cs typeface="Aptos" pitchFamily="34" charset="-120"/>
+              </a:rPr>
+              <a:t>Document assumptions, unresolved questions, and which agency roles would need to review the artifact before it is adopted.</a:t>
+            </a:r>
+            <a:endParaRPr lang="en-US" sz="1700" dirty="0"/>
+          </a:p>
+          <a:p>
+            <a:r>
+              <a:rPr lang="en-US" sz="1700" dirty="0">
+                <a:solidFill>
+                  <a:srgbClr val="17364A"/>
+                </a:solidFill>
+                <a:latin typeface="Aptos" pitchFamily="34" charset="0"/>
+                <a:ea typeface="Aptos" pitchFamily="34" charset="-122"/>
+                <a:cs typeface="Aptos" pitchFamily="34" charset="-120"/>
+              </a:rPr>
+              <a:t>The exercise should produce a work product that could support governance review, leadership discussion, implementation.</a:t>
+            </a:r>
+            <a:endParaRPr lang="en-US" sz="1700" dirty="0"/>
+          </a:p>
+        </p:txBody>
+      </p:sp>
+      <p:sp>
+        <p:nvSpPr>
+          <p:cNvPr id="11" name="Shape 9"/>
+          <p:cNvSpPr/>
+          <p:nvPr/>
+        </p:nvSpPr>
+        <p:spPr>
+          <a:xfrm>
+            <a:off x="7909560" y="1417320"/>
+            <a:ext cx="3154680" cy="1828800"/>
+          </a:xfrm>
+          <a:prstGeom prst="roundRect">
+            <a:avLst>
+              <a:gd name="adj" fmla="val 6000"/>
+            </a:avLst>
+          </a:prstGeom>
+          <a:solidFill>
+            <a:srgbClr val="EEF8ED"/>
+          </a:solidFill>
+          <a:ln w="12700">
+            <a:solidFill>
+              <a:srgbClr val="B9D7E6"/>
+            </a:solidFill>
+            <a:prstDash val="solid"/>
+          </a:ln>
+        </p:spPr>
+      </p:sp>
+      <p:sp>
+        <p:nvSpPr>
+          <p:cNvPr id="12" name="Text 10"/>
+          <p:cNvSpPr/>
+          <p:nvPr/>
+        </p:nvSpPr>
+        <p:spPr>
+          <a:xfrm>
+            <a:off x="8074152" y="1563624"/>
+            <a:ext cx="2825496" cy="201168"/>
+          </a:xfrm>
+          <a:prstGeom prst="rect">
+            <a:avLst/>
+          </a:prstGeom>
+          <a:noFill/>
+          <a:ln/>
+        </p:spPr>
+        <p:txBody>
+          <a:bodyPr wrap="square" lIns="0" tIns="0" rIns="0" bIns="0" rtlCol="0" anchor="ctr"/>
+          <a:lstStyle/>
+          <a:p>
+            <a:pPr indent="0" marL="0">
+              <a:buNone/>
+            </a:pPr>
+            <a:r>
+              <a:rPr lang="en-US" sz="950" b="1" dirty="0">
+                <a:solidFill>
+                  <a:srgbClr val="0068B7"/>
+                </a:solidFill>
+                <a:latin typeface="Aptos" pitchFamily="34" charset="0"/>
+                <a:ea typeface="Aptos" pitchFamily="34" charset="-122"/>
+                <a:cs typeface="Aptos" pitchFamily="34" charset="-120"/>
+              </a:rPr>
+              <a:t>Key idea</a:t>
+            </a:r>
+            <a:endParaRPr lang="en-US" sz="950" dirty="0"/>
+          </a:p>
+        </p:txBody>
+      </p:sp>
+      <p:sp>
+        <p:nvSpPr>
+          <p:cNvPr id="13" name="Text 11"/>
+          <p:cNvSpPr/>
+          <p:nvPr/>
+        </p:nvSpPr>
+        <p:spPr>
+          <a:xfrm>
+            <a:off x="8074152" y="1856232"/>
+            <a:ext cx="2825496" cy="1261872"/>
+          </a:xfrm>
+          <a:prstGeom prst="rect">
+            <a:avLst/>
+          </a:prstGeom>
+          <a:noFill/>
+          <a:ln/>
+        </p:spPr>
+        <p:txBody>
+          <a:bodyPr wrap="square" lIns="0" tIns="0" rIns="0" bIns="0" rtlCol="0" anchor="t">
+            <a:normAutofit/>
+          </a:bodyPr>
+          <a:lstStyle/>
+          <a:p>
+            <a:pPr indent="0" marL="0">
+              <a:buNone/>
+            </a:pPr>
+            <a:r>
+              <a:rPr lang="en-US" sz="1250" dirty="0">
+                <a:solidFill>
+                  <a:srgbClr val="17364A"/>
+                </a:solidFill>
+                <a:latin typeface="Aptos" pitchFamily="34" charset="0"/>
+                <a:ea typeface="Aptos" pitchFamily="34" charset="-122"/>
+                <a:cs typeface="Aptos" pitchFamily="34" charset="-120"/>
+              </a:rPr>
+              <a:t>Choose a real or realistic public health AI use case.</a:t>
+            </a:r>
+            <a:endParaRPr lang="en-US" sz="1250" dirty="0"/>
+          </a:p>
+        </p:txBody>
+      </p:sp>
+      <p:sp>
+        <p:nvSpPr>
+          <p:cNvPr id="14" name="Shape 12"/>
+          <p:cNvSpPr/>
+          <p:nvPr/>
+        </p:nvSpPr>
+        <p:spPr>
+          <a:xfrm>
+            <a:off x="7909560" y="3520440"/>
+            <a:ext cx="3154680" cy="1737360"/>
+          </a:xfrm>
+          <a:prstGeom prst="roundRect">
+            <a:avLst>
+              <a:gd name="adj" fmla="val 6316"/>
+            </a:avLst>
+          </a:prstGeom>
+          <a:solidFill>
+            <a:srgbClr val="EAF6F8"/>
+          </a:solidFill>
+          <a:ln w="12700">
+            <a:solidFill>
+              <a:srgbClr val="B9D7E6"/>
+            </a:solidFill>
+            <a:prstDash val="solid"/>
+          </a:ln>
+        </p:spPr>
+      </p:sp>
+      <p:sp>
+        <p:nvSpPr>
+          <p:cNvPr id="15" name="Text 13"/>
+          <p:cNvSpPr/>
+          <p:nvPr/>
+        </p:nvSpPr>
+        <p:spPr>
+          <a:xfrm>
+            <a:off x="8074152" y="3666744"/>
+            <a:ext cx="2825496" cy="201168"/>
+          </a:xfrm>
+          <a:prstGeom prst="rect">
+            <a:avLst/>
+          </a:prstGeom>
+          <a:noFill/>
+          <a:ln/>
+        </p:spPr>
+        <p:txBody>
+          <a:bodyPr wrap="square" lIns="0" tIns="0" rIns="0" bIns="0" rtlCol="0" anchor="ctr"/>
+          <a:lstStyle/>
+          <a:p>
+            <a:pPr indent="0" marL="0">
+              <a:buNone/>
+            </a:pPr>
+            <a:r>
+              <a:rPr lang="en-US" sz="950" b="1" dirty="0">
+                <a:solidFill>
+                  <a:srgbClr val="0068B7"/>
+                </a:solidFill>
+                <a:latin typeface="Aptos" pitchFamily="34" charset="0"/>
+                <a:ea typeface="Aptos" pitchFamily="34" charset="-122"/>
+                <a:cs typeface="Aptos" pitchFamily="34" charset="-120"/>
+              </a:rPr>
+              <a:t>Use this for</a:t>
+            </a:r>
+            <a:endParaRPr lang="en-US" sz="950" dirty="0"/>
+          </a:p>
+        </p:txBody>
+      </p:sp>
+      <p:sp>
+        <p:nvSpPr>
+          <p:cNvPr id="16" name="Text 14"/>
+          <p:cNvSpPr/>
+          <p:nvPr/>
+        </p:nvSpPr>
+        <p:spPr>
+          <a:xfrm>
+            <a:off x="8074152" y="3959352"/>
+            <a:ext cx="2825496" cy="1170432"/>
+          </a:xfrm>
+          <a:prstGeom prst="rect">
+            <a:avLst/>
+          </a:prstGeom>
+          <a:noFill/>
+          <a:ln/>
+        </p:spPr>
+        <p:txBody>
+          <a:bodyPr wrap="square" lIns="0" tIns="0" rIns="0" bIns="0" rtlCol="0" anchor="t">
+            <a:normAutofit/>
+          </a:bodyPr>
+          <a:lstStyle/>
+          <a:p>
+            <a:pPr indent="0" marL="0">
+              <a:buNone/>
+            </a:pPr>
+            <a:r>
+              <a:rPr lang="en-US" sz="1250" dirty="0">
+                <a:solidFill>
+                  <a:srgbClr val="17364A"/>
+                </a:solidFill>
+                <a:latin typeface="Aptos" pitchFamily="34" charset="0"/>
+                <a:ea typeface="Aptos" pitchFamily="34" charset="-122"/>
+                <a:cs typeface="Aptos" pitchFamily="34" charset="-120"/>
+              </a:rPr>
+              <a:t>Connect the concept to public health decisions, safeguards, documentation, or implementation work.</a:t>
+            </a:r>
+            <a:endParaRPr lang="en-US" sz="1250" dirty="0"/>
           </a:p>
         </p:txBody>
       </p:sp>
@@ -4560,7 +6997,32 @@
       </p:sp>
       <p:sp>
         <p:nvSpPr>
-          <p:cNvPr id="3" name="Text 1"/>
+          <p:cNvPr id="3" name="Shape 1"/>
+          <p:cNvSpPr/>
+          <p:nvPr/>
+        </p:nvSpPr>
+        <p:spPr>
+          <a:xfrm>
+            <a:off x="0" y="164592"/>
+            <a:ext cx="146304" cy="6693408"/>
+          </a:xfrm>
+          <a:prstGeom prst="rect">
+            <a:avLst/>
+          </a:prstGeom>
+          <a:solidFill>
+            <a:srgbClr val="2F8A28"/>
+          </a:solidFill>
+          <a:ln w="12700">
+            <a:solidFill>
+              <a:srgbClr val="2F8A28"/>
+            </a:solidFill>
+            <a:prstDash val="solid"/>
+          </a:ln>
+        </p:spPr>
+      </p:sp>
+      <p:sp>
+        <p:nvSpPr>
+          <p:cNvPr id="4" name="Text 2"/>
           <p:cNvSpPr/>
           <p:nvPr/>
         </p:nvSpPr>
@@ -4599,7 +7061,7 @@
       </p:sp>
       <p:sp>
         <p:nvSpPr>
-          <p:cNvPr id="4" name="Text 2"/>
+          <p:cNvPr id="5" name="Text 3"/>
           <p:cNvSpPr/>
           <p:nvPr/>
         </p:nvSpPr>
@@ -4638,7 +7100,7 @@
       </p:sp>
       <p:sp>
         <p:nvSpPr>
-          <p:cNvPr id="5" name="Text 3"/>
+          <p:cNvPr id="6" name="Text 4"/>
           <p:cNvSpPr/>
           <p:nvPr/>
         </p:nvSpPr>
@@ -4677,13 +7139,77 @@
       </p:sp>
       <p:sp>
         <p:nvSpPr>
-          <p:cNvPr id="6" name="Text 4"/>
+          <p:cNvPr id="7" name="Shape 5"/>
           <p:cNvSpPr/>
           <p:nvPr/>
         </p:nvSpPr>
         <p:spPr>
           <a:xfrm>
             <a:off x="640080" y="658368"/>
+            <a:ext cx="420624" cy="420624"/>
+          </a:xfrm>
+          <a:prstGeom prst="ellipse">
+            <a:avLst/>
+          </a:prstGeom>
+          <a:solidFill>
+            <a:srgbClr val="0068B7"/>
+          </a:solidFill>
+          <a:ln w="12700">
+            <a:solidFill>
+              <a:srgbClr val="0068B7"/>
+            </a:solidFill>
+            <a:prstDash val="solid"/>
+          </a:ln>
+        </p:spPr>
+      </p:sp>
+      <p:sp>
+        <p:nvSpPr>
+          <p:cNvPr id="8" name="Text 6"/>
+          <p:cNvSpPr/>
+          <p:nvPr/>
+        </p:nvSpPr>
+        <p:spPr>
+          <a:xfrm>
+            <a:off x="640080" y="731520"/>
+            <a:ext cx="420624" cy="164592"/>
+          </a:xfrm>
+          <a:prstGeom prst="rect">
+            <a:avLst/>
+          </a:prstGeom>
+          <a:noFill/>
+          <a:ln/>
+        </p:spPr>
+        <p:txBody>
+          <a:bodyPr wrap="square" lIns="0" tIns="0" rIns="0" bIns="0" rtlCol="0" anchor="ctr"/>
+          <a:lstStyle/>
+          <a:p>
+            <a:pPr algn="ctr" indent="0" marL="0">
+              <a:buNone/>
+            </a:pPr>
+            <a:r>
+              <a:rPr lang="en-US" sz="1100" b="1" dirty="0">
+                <a:solidFill>
+                  <a:srgbClr val="FFFFFF"/>
+                </a:solidFill>
+                <a:latin typeface="Aptos" pitchFamily="34" charset="0"/>
+                <a:ea typeface="Aptos" pitchFamily="34" charset="-122"/>
+                <a:cs typeface="Aptos" pitchFamily="34" charset="-120"/>
+              </a:rPr>
+              <a:t>12</a:t>
+            </a:r>
+            <a:endParaRPr lang="en-US" sz="1100" dirty="0"/>
+          </a:p>
+        </p:txBody>
+      </p:sp>
+      <p:sp>
+        <p:nvSpPr>
+          <p:cNvPr id="9" name="Text 7"/>
+          <p:cNvSpPr/>
+          <p:nvPr/>
+        </p:nvSpPr>
+        <p:spPr>
+          <a:xfrm>
+            <a:off x="640080" y="621792"/>
             <a:ext cx="10881360" cy="566928"/>
           </a:xfrm>
           <a:prstGeom prst="rect">
@@ -4710,7 +7236,7 @@
                 <a:ea typeface="Aptos Display" pitchFamily="34" charset="-122"/>
                 <a:cs typeface="Aptos Display" pitchFamily="34" charset="-120"/>
               </a:rPr>
-              <a:t>Knowledge Check</a:t>
+              <a:t>Expected Artifact or Evidence</a:t>
             </a:r>
             <a:endParaRPr lang="en-US" sz="2700" dirty="0"/>
           </a:p>
@@ -4718,14 +7244,14 @@
       </p:sp>
       <p:sp>
         <p:nvSpPr>
-          <p:cNvPr id="7" name="Text 5"/>
-          <p:cNvSpPr/>
-          <p:nvPr/>
-        </p:nvSpPr>
-        <p:spPr>
-          <a:xfrm>
-            <a:off x="822960" y="1325880"/>
-            <a:ext cx="10378440" cy="4800600"/>
+          <p:cNvPr id="10" name="Text 8"/>
+          <p:cNvSpPr/>
+          <p:nvPr/>
+        </p:nvSpPr>
+        <p:spPr>
+          <a:xfrm>
+            <a:off x="868680" y="1417320"/>
+            <a:ext cx="6675120" cy="4434840"/>
           </a:xfrm>
           <a:prstGeom prst="rect">
             <a:avLst/>
@@ -4740,7 +7266,7 @@
           <a:lstStyle/>
           <a:p>
             <a:r>
-              <a:rPr lang="en-US" sz="1450" dirty="0">
+              <a:rPr lang="en-US" sz="1700" dirty="0">
                 <a:solidFill>
                   <a:srgbClr val="17364A"/>
                 </a:solidFill>
@@ -4748,13 +7274,106 @@
                 <a:ea typeface="Aptos" pitchFamily="34" charset="-122"/>
                 <a:cs typeface="Aptos" pitchFamily="34" charset="-120"/>
               </a:rPr>
-              <a:t>1. What is the strongest reason this module topic belongs in AI leadership and governance training?</a:t>
-            </a:r>
-            <a:endParaRPr lang="en-US" sz="1450" dirty="0"/>
-          </a:p>
-          <a:p>
-            <a:r>
-              <a:rPr lang="en-US" sz="1450" dirty="0">
+              <a:t>Sustainability plan; lifecycle cost list; ownership map; continuation and sunset criteria; rollback or fallback plan.</a:t>
+            </a:r>
+            <a:endParaRPr lang="en-US" sz="1700" dirty="0"/>
+          </a:p>
+        </p:txBody>
+      </p:sp>
+      <p:sp>
+        <p:nvSpPr>
+          <p:cNvPr id="11" name="Shape 9"/>
+          <p:cNvSpPr/>
+          <p:nvPr/>
+        </p:nvSpPr>
+        <p:spPr>
+          <a:xfrm>
+            <a:off x="7909560" y="1417320"/>
+            <a:ext cx="3154680" cy="1828800"/>
+          </a:xfrm>
+          <a:prstGeom prst="roundRect">
+            <a:avLst>
+              <a:gd name="adj" fmla="val 6000"/>
+            </a:avLst>
+          </a:prstGeom>
+          <a:solidFill>
+            <a:srgbClr val="EEF8ED"/>
+          </a:solidFill>
+          <a:ln w="12700">
+            <a:solidFill>
+              <a:srgbClr val="B9D7E6"/>
+            </a:solidFill>
+            <a:prstDash val="solid"/>
+          </a:ln>
+        </p:spPr>
+      </p:sp>
+      <p:sp>
+        <p:nvSpPr>
+          <p:cNvPr id="12" name="Text 10"/>
+          <p:cNvSpPr/>
+          <p:nvPr/>
+        </p:nvSpPr>
+        <p:spPr>
+          <a:xfrm>
+            <a:off x="8074152" y="1563624"/>
+            <a:ext cx="2825496" cy="201168"/>
+          </a:xfrm>
+          <a:prstGeom prst="rect">
+            <a:avLst/>
+          </a:prstGeom>
+          <a:noFill/>
+          <a:ln/>
+        </p:spPr>
+        <p:txBody>
+          <a:bodyPr wrap="square" lIns="0" tIns="0" rIns="0" bIns="0" rtlCol="0" anchor="ctr"/>
+          <a:lstStyle/>
+          <a:p>
+            <a:pPr indent="0" marL="0">
+              <a:buNone/>
+            </a:pPr>
+            <a:r>
+              <a:rPr lang="en-US" sz="950" b="1" dirty="0">
+                <a:solidFill>
+                  <a:srgbClr val="0068B7"/>
+                </a:solidFill>
+                <a:latin typeface="Aptos" pitchFamily="34" charset="0"/>
+                <a:ea typeface="Aptos" pitchFamily="34" charset="-122"/>
+                <a:cs typeface="Aptos" pitchFamily="34" charset="-120"/>
+              </a:rPr>
+              <a:t>Key idea</a:t>
+            </a:r>
+            <a:endParaRPr lang="en-US" sz="950" dirty="0"/>
+          </a:p>
+        </p:txBody>
+      </p:sp>
+      <p:sp>
+        <p:nvSpPr>
+          <p:cNvPr id="13" name="Text 11"/>
+          <p:cNvSpPr/>
+          <p:nvPr/>
+        </p:nvSpPr>
+        <p:spPr>
+          <a:xfrm>
+            <a:off x="8074152" y="1856232"/>
+            <a:ext cx="2825496" cy="1261872"/>
+          </a:xfrm>
+          <a:prstGeom prst="rect">
+            <a:avLst/>
+          </a:prstGeom>
+          <a:noFill/>
+          <a:ln/>
+        </p:spPr>
+        <p:txBody>
+          <a:bodyPr wrap="square" lIns="0" tIns="0" rIns="0" bIns="0" rtlCol="0" anchor="t">
+            <a:normAutofit/>
+          </a:bodyPr>
+          <a:lstStyle/>
+          <a:p>
+            <a:pPr indent="0" marL="0">
+              <a:buNone/>
+            </a:pPr>
+            <a:r>
+              <a:rPr lang="en-US" sz="1250" dirty="0">
                 <a:solidFill>
                   <a:srgbClr val="17364A"/>
                 </a:solidFill>
@@ -4762,13 +7381,106 @@
                 <a:ea typeface="Aptos" pitchFamily="34" charset="-122"/>
                 <a:cs typeface="Aptos" pitchFamily="34" charset="-120"/>
               </a:rPr>
-              <a:t>2. Which practice best supports accountable public health AI governance?</a:t>
-            </a:r>
-            <a:endParaRPr lang="en-US" sz="1450" dirty="0"/>
-          </a:p>
-          <a:p>
-            <a:r>
-              <a:rPr lang="en-US" sz="1450" dirty="0">
+              <a:t>Sustainability plan; lifecycle cost list; ownership map; continuation and sunset criteria; rollback or fallback plan.</a:t>
+            </a:r>
+            <a:endParaRPr lang="en-US" sz="1250" dirty="0"/>
+          </a:p>
+        </p:txBody>
+      </p:sp>
+      <p:sp>
+        <p:nvSpPr>
+          <p:cNvPr id="14" name="Shape 12"/>
+          <p:cNvSpPr/>
+          <p:nvPr/>
+        </p:nvSpPr>
+        <p:spPr>
+          <a:xfrm>
+            <a:off x="7909560" y="3520440"/>
+            <a:ext cx="3154680" cy="1737360"/>
+          </a:xfrm>
+          <a:prstGeom prst="roundRect">
+            <a:avLst>
+              <a:gd name="adj" fmla="val 6316"/>
+            </a:avLst>
+          </a:prstGeom>
+          <a:solidFill>
+            <a:srgbClr val="EAF6F8"/>
+          </a:solidFill>
+          <a:ln w="12700">
+            <a:solidFill>
+              <a:srgbClr val="B9D7E6"/>
+            </a:solidFill>
+            <a:prstDash val="solid"/>
+          </a:ln>
+        </p:spPr>
+      </p:sp>
+      <p:sp>
+        <p:nvSpPr>
+          <p:cNvPr id="15" name="Text 13"/>
+          <p:cNvSpPr/>
+          <p:nvPr/>
+        </p:nvSpPr>
+        <p:spPr>
+          <a:xfrm>
+            <a:off x="8074152" y="3666744"/>
+            <a:ext cx="2825496" cy="201168"/>
+          </a:xfrm>
+          <a:prstGeom prst="rect">
+            <a:avLst/>
+          </a:prstGeom>
+          <a:noFill/>
+          <a:ln/>
+        </p:spPr>
+        <p:txBody>
+          <a:bodyPr wrap="square" lIns="0" tIns="0" rIns="0" bIns="0" rtlCol="0" anchor="ctr"/>
+          <a:lstStyle/>
+          <a:p>
+            <a:pPr indent="0" marL="0">
+              <a:buNone/>
+            </a:pPr>
+            <a:r>
+              <a:rPr lang="en-US" sz="950" b="1" dirty="0">
+                <a:solidFill>
+                  <a:srgbClr val="0068B7"/>
+                </a:solidFill>
+                <a:latin typeface="Aptos" pitchFamily="34" charset="0"/>
+                <a:ea typeface="Aptos" pitchFamily="34" charset="-122"/>
+                <a:cs typeface="Aptos" pitchFamily="34" charset="-120"/>
+              </a:rPr>
+              <a:t>Use this for</a:t>
+            </a:r>
+            <a:endParaRPr lang="en-US" sz="950" dirty="0"/>
+          </a:p>
+        </p:txBody>
+      </p:sp>
+      <p:sp>
+        <p:nvSpPr>
+          <p:cNvPr id="16" name="Text 14"/>
+          <p:cNvSpPr/>
+          <p:nvPr/>
+        </p:nvSpPr>
+        <p:spPr>
+          <a:xfrm>
+            <a:off x="8074152" y="3959352"/>
+            <a:ext cx="2825496" cy="1170432"/>
+          </a:xfrm>
+          <a:prstGeom prst="rect">
+            <a:avLst/>
+          </a:prstGeom>
+          <a:noFill/>
+          <a:ln/>
+        </p:spPr>
+        <p:txBody>
+          <a:bodyPr wrap="square" lIns="0" tIns="0" rIns="0" bIns="0" rtlCol="0" anchor="t">
+            <a:normAutofit/>
+          </a:bodyPr>
+          <a:lstStyle/>
+          <a:p>
+            <a:pPr indent="0" marL="0">
+              <a:buNone/>
+            </a:pPr>
+            <a:r>
+              <a:rPr lang="en-US" sz="1250" dirty="0">
                 <a:solidFill>
                   <a:srgbClr val="17364A"/>
                 </a:solidFill>
@@ -4776,37 +7488,9 @@
                 <a:ea typeface="Aptos" pitchFamily="34" charset="-122"/>
                 <a:cs typeface="Aptos" pitchFamily="34" charset="-120"/>
               </a:rPr>
-              <a:t>3. When should an AI use case be escalated for leadership or governance review?</a:t>
-            </a:r>
-            <a:endParaRPr lang="en-US" sz="1450" dirty="0"/>
-          </a:p>
-          <a:p>
-            <a:r>
-              <a:rPr lang="en-US" sz="1450" dirty="0">
-                <a:solidFill>
-                  <a:srgbClr val="17364A"/>
-                </a:solidFill>
-                <a:latin typeface="Aptos" pitchFamily="34" charset="0"/>
-                <a:ea typeface="Aptos" pitchFamily="34" charset="-122"/>
-                <a:cs typeface="Aptos" pitchFamily="34" charset="-120"/>
-              </a:rPr>
-              <a:t>4. What is weak evidence of completion for a leadership and governance module?</a:t>
-            </a:r>
-            <a:endParaRPr lang="en-US" sz="1450" dirty="0"/>
-          </a:p>
-          <a:p>
-            <a:r>
-              <a:rPr lang="en-US" sz="1450" dirty="0">
-                <a:solidFill>
-                  <a:srgbClr val="17364A"/>
-                </a:solidFill>
-                <a:latin typeface="Aptos" pitchFamily="34" charset="0"/>
-                <a:ea typeface="Aptos" pitchFamily="34" charset="-122"/>
-                <a:cs typeface="Aptos" pitchFamily="34" charset="-120"/>
-              </a:rPr>
-              <a:t>5. What should leaders do when an AI use case has meaningful benefits but unresolved risks?</a:t>
-            </a:r>
-            <a:endParaRPr lang="en-US" sz="1450" dirty="0"/>
+              <a:t>Connect the concept to public health decisions, safeguards, documentation, or implementation work.</a:t>
+            </a:r>
+            <a:endParaRPr lang="en-US" sz="1250" dirty="0"/>
           </a:p>
         </p:txBody>
       </p:sp>
@@ -4869,7 +7553,32 @@
       </p:sp>
       <p:sp>
         <p:nvSpPr>
-          <p:cNvPr id="3" name="Text 1"/>
+          <p:cNvPr id="3" name="Shape 1"/>
+          <p:cNvSpPr/>
+          <p:nvPr/>
+        </p:nvSpPr>
+        <p:spPr>
+          <a:xfrm>
+            <a:off x="0" y="164592"/>
+            <a:ext cx="146304" cy="6693408"/>
+          </a:xfrm>
+          <a:prstGeom prst="rect">
+            <a:avLst/>
+          </a:prstGeom>
+          <a:solidFill>
+            <a:srgbClr val="2F8A28"/>
+          </a:solidFill>
+          <a:ln w="12700">
+            <a:solidFill>
+              <a:srgbClr val="2F8A28"/>
+            </a:solidFill>
+            <a:prstDash val="solid"/>
+          </a:ln>
+        </p:spPr>
+      </p:sp>
+      <p:sp>
+        <p:nvSpPr>
+          <p:cNvPr id="4" name="Text 2"/>
           <p:cNvSpPr/>
           <p:nvPr/>
         </p:nvSpPr>
@@ -4908,7 +7617,7 @@
       </p:sp>
       <p:sp>
         <p:nvSpPr>
-          <p:cNvPr id="4" name="Text 2"/>
+          <p:cNvPr id="5" name="Text 3"/>
           <p:cNvSpPr/>
           <p:nvPr/>
         </p:nvSpPr>
@@ -4947,7 +7656,7 @@
       </p:sp>
       <p:sp>
         <p:nvSpPr>
-          <p:cNvPr id="5" name="Text 3"/>
+          <p:cNvPr id="6" name="Text 4"/>
           <p:cNvSpPr/>
           <p:nvPr/>
         </p:nvSpPr>
@@ -4986,13 +7695,77 @@
       </p:sp>
       <p:sp>
         <p:nvSpPr>
-          <p:cNvPr id="6" name="Text 4"/>
+          <p:cNvPr id="7" name="Shape 5"/>
           <p:cNvSpPr/>
           <p:nvPr/>
         </p:nvSpPr>
         <p:spPr>
           <a:xfrm>
             <a:off x="640080" y="658368"/>
+            <a:ext cx="420624" cy="420624"/>
+          </a:xfrm>
+          <a:prstGeom prst="ellipse">
+            <a:avLst/>
+          </a:prstGeom>
+          <a:solidFill>
+            <a:srgbClr val="0068B7"/>
+          </a:solidFill>
+          <a:ln w="12700">
+            <a:solidFill>
+              <a:srgbClr val="0068B7"/>
+            </a:solidFill>
+            <a:prstDash val="solid"/>
+          </a:ln>
+        </p:spPr>
+      </p:sp>
+      <p:sp>
+        <p:nvSpPr>
+          <p:cNvPr id="8" name="Text 6"/>
+          <p:cNvSpPr/>
+          <p:nvPr/>
+        </p:nvSpPr>
+        <p:spPr>
+          <a:xfrm>
+            <a:off x="640080" y="731520"/>
+            <a:ext cx="420624" cy="164592"/>
+          </a:xfrm>
+          <a:prstGeom prst="rect">
+            <a:avLst/>
+          </a:prstGeom>
+          <a:noFill/>
+          <a:ln/>
+        </p:spPr>
+        <p:txBody>
+          <a:bodyPr wrap="square" lIns="0" tIns="0" rIns="0" bIns="0" rtlCol="0" anchor="ctr"/>
+          <a:lstStyle/>
+          <a:p>
+            <a:pPr algn="ctr" indent="0" marL="0">
+              <a:buNone/>
+            </a:pPr>
+            <a:r>
+              <a:rPr lang="en-US" sz="1100" b="1" dirty="0">
+                <a:solidFill>
+                  <a:srgbClr val="FFFFFF"/>
+                </a:solidFill>
+                <a:latin typeface="Aptos" pitchFamily="34" charset="0"/>
+                <a:ea typeface="Aptos" pitchFamily="34" charset="-122"/>
+                <a:cs typeface="Aptos" pitchFamily="34" charset="-120"/>
+              </a:rPr>
+              <a:t>13</a:t>
+            </a:r>
+            <a:endParaRPr lang="en-US" sz="1100" dirty="0"/>
+          </a:p>
+        </p:txBody>
+      </p:sp>
+      <p:sp>
+        <p:nvSpPr>
+          <p:cNvPr id="9" name="Text 7"/>
+          <p:cNvSpPr/>
+          <p:nvPr/>
+        </p:nvSpPr>
+        <p:spPr>
+          <a:xfrm>
+            <a:off x="640080" y="621792"/>
             <a:ext cx="10881360" cy="566928"/>
           </a:xfrm>
           <a:prstGeom prst="rect">
@@ -5019,7 +7792,7 @@
                 <a:ea typeface="Aptos Display" pitchFamily="34" charset="-122"/>
                 <a:cs typeface="Aptos Display" pitchFamily="34" charset="-120"/>
               </a:rPr>
-              <a:t>References and Resources</a:t>
+              <a:t>Expected Assignment</a:t>
             </a:r>
             <a:endParaRPr lang="en-US" sz="2700" dirty="0"/>
           </a:p>
@@ -5027,14 +7800,14 @@
       </p:sp>
       <p:sp>
         <p:nvSpPr>
-          <p:cNvPr id="7" name="Text 5"/>
-          <p:cNvSpPr/>
-          <p:nvPr/>
-        </p:nvSpPr>
-        <p:spPr>
-          <a:xfrm>
-            <a:off x="822960" y="1325880"/>
-            <a:ext cx="10378440" cy="4800600"/>
+          <p:cNvPr id="10" name="Text 8"/>
+          <p:cNvSpPr/>
+          <p:nvPr/>
+        </p:nvSpPr>
+        <p:spPr>
+          <a:xfrm>
+            <a:off x="868680" y="1417320"/>
+            <a:ext cx="6675120" cy="4434840"/>
           </a:xfrm>
           <a:prstGeom prst="rect">
             <a:avLst/>
@@ -5049,7 +7822,7 @@
           <a:lstStyle/>
           <a:p>
             <a:r>
-              <a:rPr lang="en-US" sz="1450" dirty="0">
+              <a:rPr lang="en-US" sz="1700" dirty="0">
                 <a:solidFill>
                   <a:srgbClr val="17364A"/>
                 </a:solidFill>
@@ -5057,13 +7830,106 @@
                 <a:ea typeface="Aptos" pitchFamily="34" charset="-122"/>
                 <a:cs typeface="Aptos" pitchFamily="34" charset="-120"/>
               </a:rPr>
-              <a:t>NIST Artificial Intelligence Risk Management Framework (AI RMF 1.0): https://www.nist.gov/itl/ai-risk-management-framework</a:t>
-            </a:r>
-            <a:endParaRPr lang="en-US" sz="1450" dirty="0"/>
-          </a:p>
-          <a:p>
-            <a:r>
-              <a:rPr lang="en-US" sz="1450" dirty="0">
+              <a:t>Sustainability plan; lifecycle cost list; ownership map; continuation and sunset criteria; rollback or fallback plan.</a:t>
+            </a:r>
+            <a:endParaRPr lang="en-US" sz="1700" dirty="0"/>
+          </a:p>
+        </p:txBody>
+      </p:sp>
+      <p:sp>
+        <p:nvSpPr>
+          <p:cNvPr id="11" name="Shape 9"/>
+          <p:cNvSpPr/>
+          <p:nvPr/>
+        </p:nvSpPr>
+        <p:spPr>
+          <a:xfrm>
+            <a:off x="7909560" y="1417320"/>
+            <a:ext cx="3154680" cy="1828800"/>
+          </a:xfrm>
+          <a:prstGeom prst="roundRect">
+            <a:avLst>
+              <a:gd name="adj" fmla="val 6000"/>
+            </a:avLst>
+          </a:prstGeom>
+          <a:solidFill>
+            <a:srgbClr val="EEF8ED"/>
+          </a:solidFill>
+          <a:ln w="12700">
+            <a:solidFill>
+              <a:srgbClr val="B9D7E6"/>
+            </a:solidFill>
+            <a:prstDash val="solid"/>
+          </a:ln>
+        </p:spPr>
+      </p:sp>
+      <p:sp>
+        <p:nvSpPr>
+          <p:cNvPr id="12" name="Text 10"/>
+          <p:cNvSpPr/>
+          <p:nvPr/>
+        </p:nvSpPr>
+        <p:spPr>
+          <a:xfrm>
+            <a:off x="8074152" y="1563624"/>
+            <a:ext cx="2825496" cy="201168"/>
+          </a:xfrm>
+          <a:prstGeom prst="rect">
+            <a:avLst/>
+          </a:prstGeom>
+          <a:noFill/>
+          <a:ln/>
+        </p:spPr>
+        <p:txBody>
+          <a:bodyPr wrap="square" lIns="0" tIns="0" rIns="0" bIns="0" rtlCol="0" anchor="ctr"/>
+          <a:lstStyle/>
+          <a:p>
+            <a:pPr indent="0" marL="0">
+              <a:buNone/>
+            </a:pPr>
+            <a:r>
+              <a:rPr lang="en-US" sz="950" b="1" dirty="0">
+                <a:solidFill>
+                  <a:srgbClr val="0068B7"/>
+                </a:solidFill>
+                <a:latin typeface="Aptos" pitchFamily="34" charset="0"/>
+                <a:ea typeface="Aptos" pitchFamily="34" charset="-122"/>
+                <a:cs typeface="Aptos" pitchFamily="34" charset="-120"/>
+              </a:rPr>
+              <a:t>Key idea</a:t>
+            </a:r>
+            <a:endParaRPr lang="en-US" sz="950" dirty="0"/>
+          </a:p>
+        </p:txBody>
+      </p:sp>
+      <p:sp>
+        <p:nvSpPr>
+          <p:cNvPr id="13" name="Text 11"/>
+          <p:cNvSpPr/>
+          <p:nvPr/>
+        </p:nvSpPr>
+        <p:spPr>
+          <a:xfrm>
+            <a:off x="8074152" y="1856232"/>
+            <a:ext cx="2825496" cy="1261872"/>
+          </a:xfrm>
+          <a:prstGeom prst="rect">
+            <a:avLst/>
+          </a:prstGeom>
+          <a:noFill/>
+          <a:ln/>
+        </p:spPr>
+        <p:txBody>
+          <a:bodyPr wrap="square" lIns="0" tIns="0" rIns="0" bIns="0" rtlCol="0" anchor="t">
+            <a:normAutofit/>
+          </a:bodyPr>
+          <a:lstStyle/>
+          <a:p>
+            <a:pPr indent="0" marL="0">
+              <a:buNone/>
+            </a:pPr>
+            <a:r>
+              <a:rPr lang="en-US" sz="1250" dirty="0">
                 <a:solidFill>
                   <a:srgbClr val="17364A"/>
                 </a:solidFill>
@@ -5071,13 +7937,106 @@
                 <a:ea typeface="Aptos" pitchFamily="34" charset="-122"/>
                 <a:cs typeface="Aptos" pitchFamily="34" charset="-120"/>
               </a:rPr>
-              <a:t>NIST Generative AI Profile: https://www.nist.gov/publications/artificial-intelligence-risk-management-framework-generative-artificial-intelligence</a:t>
-            </a:r>
-            <a:endParaRPr lang="en-US" sz="1450" dirty="0"/>
-          </a:p>
-          <a:p>
-            <a:r>
-              <a:rPr lang="en-US" sz="1450" dirty="0">
+              <a:t>Sustainability plan; lifecycle cost list; ownership map; continuation and sunset criteria; rollback or fallback plan.</a:t>
+            </a:r>
+            <a:endParaRPr lang="en-US" sz="1250" dirty="0"/>
+          </a:p>
+        </p:txBody>
+      </p:sp>
+      <p:sp>
+        <p:nvSpPr>
+          <p:cNvPr id="14" name="Shape 12"/>
+          <p:cNvSpPr/>
+          <p:nvPr/>
+        </p:nvSpPr>
+        <p:spPr>
+          <a:xfrm>
+            <a:off x="7909560" y="3520440"/>
+            <a:ext cx="3154680" cy="1737360"/>
+          </a:xfrm>
+          <a:prstGeom prst="roundRect">
+            <a:avLst>
+              <a:gd name="adj" fmla="val 6316"/>
+            </a:avLst>
+          </a:prstGeom>
+          <a:solidFill>
+            <a:srgbClr val="EAF6F8"/>
+          </a:solidFill>
+          <a:ln w="12700">
+            <a:solidFill>
+              <a:srgbClr val="B9D7E6"/>
+            </a:solidFill>
+            <a:prstDash val="solid"/>
+          </a:ln>
+        </p:spPr>
+      </p:sp>
+      <p:sp>
+        <p:nvSpPr>
+          <p:cNvPr id="15" name="Text 13"/>
+          <p:cNvSpPr/>
+          <p:nvPr/>
+        </p:nvSpPr>
+        <p:spPr>
+          <a:xfrm>
+            <a:off x="8074152" y="3666744"/>
+            <a:ext cx="2825496" cy="201168"/>
+          </a:xfrm>
+          <a:prstGeom prst="rect">
+            <a:avLst/>
+          </a:prstGeom>
+          <a:noFill/>
+          <a:ln/>
+        </p:spPr>
+        <p:txBody>
+          <a:bodyPr wrap="square" lIns="0" tIns="0" rIns="0" bIns="0" rtlCol="0" anchor="ctr"/>
+          <a:lstStyle/>
+          <a:p>
+            <a:pPr indent="0" marL="0">
+              <a:buNone/>
+            </a:pPr>
+            <a:r>
+              <a:rPr lang="en-US" sz="950" b="1" dirty="0">
+                <a:solidFill>
+                  <a:srgbClr val="0068B7"/>
+                </a:solidFill>
+                <a:latin typeface="Aptos" pitchFamily="34" charset="0"/>
+                <a:ea typeface="Aptos" pitchFamily="34" charset="-122"/>
+                <a:cs typeface="Aptos" pitchFamily="34" charset="-120"/>
+              </a:rPr>
+              <a:t>Use this for</a:t>
+            </a:r>
+            <a:endParaRPr lang="en-US" sz="950" dirty="0"/>
+          </a:p>
+        </p:txBody>
+      </p:sp>
+      <p:sp>
+        <p:nvSpPr>
+          <p:cNvPr id="16" name="Text 14"/>
+          <p:cNvSpPr/>
+          <p:nvPr/>
+        </p:nvSpPr>
+        <p:spPr>
+          <a:xfrm>
+            <a:off x="8074152" y="3959352"/>
+            <a:ext cx="2825496" cy="1170432"/>
+          </a:xfrm>
+          <a:prstGeom prst="rect">
+            <a:avLst/>
+          </a:prstGeom>
+          <a:noFill/>
+          <a:ln/>
+        </p:spPr>
+        <p:txBody>
+          <a:bodyPr wrap="square" lIns="0" tIns="0" rIns="0" bIns="0" rtlCol="0" anchor="t">
+            <a:normAutofit/>
+          </a:bodyPr>
+          <a:lstStyle/>
+          <a:p>
+            <a:pPr indent="0" marL="0">
+              <a:buNone/>
+            </a:pPr>
+            <a:r>
+              <a:rPr lang="en-US" sz="1250" dirty="0">
                 <a:solidFill>
                   <a:srgbClr val="17364A"/>
                 </a:solidFill>
@@ -5085,37 +8044,9 @@
                 <a:ea typeface="Aptos" pitchFamily="34" charset="-122"/>
                 <a:cs typeface="Aptos" pitchFamily="34" charset="-120"/>
               </a:rPr>
-              <a:t>NIST Privacy Framework</a:t>
-            </a:r>
-            <a:endParaRPr lang="en-US" sz="1450" dirty="0"/>
-          </a:p>
-          <a:p>
-            <a:r>
-              <a:rPr lang="en-US" sz="1450" dirty="0">
-                <a:solidFill>
-                  <a:srgbClr val="17364A"/>
-                </a:solidFill>
-                <a:latin typeface="Aptos" pitchFamily="34" charset="0"/>
-                <a:ea typeface="Aptos" pitchFamily="34" charset="-122"/>
-                <a:cs typeface="Aptos" pitchFamily="34" charset="-120"/>
-              </a:rPr>
-              <a:t>CDC Public Health Data Strategy and Data Modernization resources: https://www.cdc.gov/public-health-data-strategy/php/about/index.html</a:t>
-            </a:r>
-            <a:endParaRPr lang="en-US" sz="1450" dirty="0"/>
-          </a:p>
-          <a:p>
-            <a:r>
-              <a:rPr lang="en-US" sz="1450" dirty="0">
-                <a:solidFill>
-                  <a:srgbClr val="17364A"/>
-                </a:solidFill>
-                <a:latin typeface="Aptos" pitchFamily="34" charset="0"/>
-                <a:ea typeface="Aptos" pitchFamily="34" charset="-122"/>
-                <a:cs typeface="Aptos" pitchFamily="34" charset="-120"/>
-              </a:rPr>
-              <a:t>WHO Ethics and Governance of Artificial Intelligence for Health: https://www.who.int/publications/i/item/9789240029200</a:t>
-            </a:r>
-            <a:endParaRPr lang="en-US" sz="1450" dirty="0"/>
+              <a:t>Connect the concept to public health decisions, safeguards, documentation, or implementation work.</a:t>
+            </a:r>
+            <a:endParaRPr lang="en-US" sz="1250" dirty="0"/>
           </a:p>
         </p:txBody>
       </p:sp>
@@ -5178,7 +8109,32 @@
       </p:sp>
       <p:sp>
         <p:nvSpPr>
-          <p:cNvPr id="3" name="Text 1"/>
+          <p:cNvPr id="3" name="Shape 1"/>
+          <p:cNvSpPr/>
+          <p:nvPr/>
+        </p:nvSpPr>
+        <p:spPr>
+          <a:xfrm>
+            <a:off x="0" y="164592"/>
+            <a:ext cx="146304" cy="6693408"/>
+          </a:xfrm>
+          <a:prstGeom prst="rect">
+            <a:avLst/>
+          </a:prstGeom>
+          <a:solidFill>
+            <a:srgbClr val="2F8A28"/>
+          </a:solidFill>
+          <a:ln w="12700">
+            <a:solidFill>
+              <a:srgbClr val="2F8A28"/>
+            </a:solidFill>
+            <a:prstDash val="solid"/>
+          </a:ln>
+        </p:spPr>
+      </p:sp>
+      <p:sp>
+        <p:nvSpPr>
+          <p:cNvPr id="4" name="Text 2"/>
           <p:cNvSpPr/>
           <p:nvPr/>
         </p:nvSpPr>
@@ -5217,7 +8173,7 @@
       </p:sp>
       <p:sp>
         <p:nvSpPr>
-          <p:cNvPr id="4" name="Text 2"/>
+          <p:cNvPr id="5" name="Text 3"/>
           <p:cNvSpPr/>
           <p:nvPr/>
         </p:nvSpPr>
@@ -5256,7 +8212,7 @@
       </p:sp>
       <p:sp>
         <p:nvSpPr>
-          <p:cNvPr id="5" name="Text 3"/>
+          <p:cNvPr id="6" name="Text 4"/>
           <p:cNvSpPr/>
           <p:nvPr/>
         </p:nvSpPr>
@@ -5295,13 +8251,77 @@
       </p:sp>
       <p:sp>
         <p:nvSpPr>
-          <p:cNvPr id="6" name="Text 4"/>
+          <p:cNvPr id="7" name="Shape 5"/>
           <p:cNvSpPr/>
           <p:nvPr/>
         </p:nvSpPr>
         <p:spPr>
           <a:xfrm>
             <a:off x="640080" y="658368"/>
+            <a:ext cx="420624" cy="420624"/>
+          </a:xfrm>
+          <a:prstGeom prst="ellipse">
+            <a:avLst/>
+          </a:prstGeom>
+          <a:solidFill>
+            <a:srgbClr val="0068B7"/>
+          </a:solidFill>
+          <a:ln w="12700">
+            <a:solidFill>
+              <a:srgbClr val="0068B7"/>
+            </a:solidFill>
+            <a:prstDash val="solid"/>
+          </a:ln>
+        </p:spPr>
+      </p:sp>
+      <p:sp>
+        <p:nvSpPr>
+          <p:cNvPr id="8" name="Text 6"/>
+          <p:cNvSpPr/>
+          <p:nvPr/>
+        </p:nvSpPr>
+        <p:spPr>
+          <a:xfrm>
+            <a:off x="640080" y="731520"/>
+            <a:ext cx="420624" cy="164592"/>
+          </a:xfrm>
+          <a:prstGeom prst="rect">
+            <a:avLst/>
+          </a:prstGeom>
+          <a:noFill/>
+          <a:ln/>
+        </p:spPr>
+        <p:txBody>
+          <a:bodyPr wrap="square" lIns="0" tIns="0" rIns="0" bIns="0" rtlCol="0" anchor="ctr"/>
+          <a:lstStyle/>
+          <a:p>
+            <a:pPr algn="ctr" indent="0" marL="0">
+              <a:buNone/>
+            </a:pPr>
+            <a:r>
+              <a:rPr lang="en-US" sz="1100" b="1" dirty="0">
+                <a:solidFill>
+                  <a:srgbClr val="FFFFFF"/>
+                </a:solidFill>
+                <a:latin typeface="Aptos" pitchFamily="34" charset="0"/>
+                <a:ea typeface="Aptos" pitchFamily="34" charset="-122"/>
+                <a:cs typeface="Aptos" pitchFamily="34" charset="-120"/>
+              </a:rPr>
+              <a:t>14</a:t>
+            </a:r>
+            <a:endParaRPr lang="en-US" sz="1100" dirty="0"/>
+          </a:p>
+        </p:txBody>
+      </p:sp>
+      <p:sp>
+        <p:nvSpPr>
+          <p:cNvPr id="9" name="Text 7"/>
+          <p:cNvSpPr/>
+          <p:nvPr/>
+        </p:nvSpPr>
+        <p:spPr>
+          <a:xfrm>
+            <a:off x="640080" y="621792"/>
             <a:ext cx="10881360" cy="566928"/>
           </a:xfrm>
           <a:prstGeom prst="rect">
@@ -5328,7 +8348,7 @@
                 <a:ea typeface="Aptos Display" pitchFamily="34" charset="-122"/>
                 <a:cs typeface="Aptos Display" pitchFamily="34" charset="-120"/>
               </a:rPr>
-              <a:t>References and Resources Continued</a:t>
+              <a:t>Knowledge Check</a:t>
             </a:r>
             <a:endParaRPr lang="en-US" sz="2700" dirty="0"/>
           </a:p>
@@ -5336,14 +8356,14 @@
       </p:sp>
       <p:sp>
         <p:nvSpPr>
-          <p:cNvPr id="7" name="Text 5"/>
-          <p:cNvSpPr/>
-          <p:nvPr/>
-        </p:nvSpPr>
-        <p:spPr>
-          <a:xfrm>
-            <a:off x="822960" y="1325880"/>
-            <a:ext cx="10378440" cy="4800600"/>
+          <p:cNvPr id="10" name="Text 8"/>
+          <p:cNvSpPr/>
+          <p:nvPr/>
+        </p:nvSpPr>
+        <p:spPr>
+          <a:xfrm>
+            <a:off x="868680" y="1417320"/>
+            <a:ext cx="6675120" cy="4434840"/>
           </a:xfrm>
           <a:prstGeom prst="rect">
             <a:avLst/>
@@ -5358,7 +8378,7 @@
           <a:lstStyle/>
           <a:p>
             <a:r>
-              <a:rPr lang="en-US" sz="1450" dirty="0">
+              <a:rPr lang="en-US" sz="1700" dirty="0">
                 <a:solidFill>
                   <a:srgbClr val="17364A"/>
                 </a:solidFill>
@@ -5366,13 +8386,13 @@
                 <a:ea typeface="Aptos" pitchFamily="34" charset="-122"/>
                 <a:cs typeface="Aptos" pitchFamily="34" charset="-120"/>
               </a:rPr>
-              <a:t>OMB Memorandum M-24-10 on federal AI governance, risk management, and innovation, where relevant to public-sector governance models</a:t>
-            </a:r>
-            <a:endParaRPr lang="en-US" sz="1450" dirty="0"/>
-          </a:p>
-          <a:p>
-            <a:r>
-              <a:rPr lang="en-US" sz="1450" dirty="0">
+              <a:t>1. What is the strongest reason this module topic belongs in AI leadership and governance training?</a:t>
+            </a:r>
+            <a:endParaRPr lang="en-US" sz="1700" dirty="0"/>
+          </a:p>
+          <a:p>
+            <a:r>
+              <a:rPr lang="en-US" sz="1700" dirty="0">
                 <a:solidFill>
                   <a:srgbClr val="17364A"/>
                 </a:solidFill>
@@ -5380,9 +8400,251 @@
                 <a:ea typeface="Aptos" pitchFamily="34" charset="-122"/>
                 <a:cs typeface="Aptos" pitchFamily="34" charset="-120"/>
               </a:rPr>
-              <a:t>Agency strategic plans, procurement policies, privacy policies, cybersecurity policies, records policies, and equity plans</a:t>
-            </a:r>
-            <a:endParaRPr lang="en-US" sz="1450" dirty="0"/>
+              <a:t>2. Which practice best supports accountable public health AI governance?</a:t>
+            </a:r>
+            <a:endParaRPr lang="en-US" sz="1700" dirty="0"/>
+          </a:p>
+          <a:p>
+            <a:r>
+              <a:rPr lang="en-US" sz="1700" dirty="0">
+                <a:solidFill>
+                  <a:srgbClr val="17364A"/>
+                </a:solidFill>
+                <a:latin typeface="Aptos" pitchFamily="34" charset="0"/>
+                <a:ea typeface="Aptos" pitchFamily="34" charset="-122"/>
+                <a:cs typeface="Aptos" pitchFamily="34" charset="-120"/>
+              </a:rPr>
+              <a:t>3. When should an AI use case be escalated for leadership or governance review?</a:t>
+            </a:r>
+            <a:endParaRPr lang="en-US" sz="1700" dirty="0"/>
+          </a:p>
+          <a:p>
+            <a:r>
+              <a:rPr lang="en-US" sz="1700" dirty="0">
+                <a:solidFill>
+                  <a:srgbClr val="17364A"/>
+                </a:solidFill>
+                <a:latin typeface="Aptos" pitchFamily="34" charset="0"/>
+                <a:ea typeface="Aptos" pitchFamily="34" charset="-122"/>
+                <a:cs typeface="Aptos" pitchFamily="34" charset="-120"/>
+              </a:rPr>
+              <a:t>4. What is weak evidence of completion for a leadership and governance module?</a:t>
+            </a:r>
+            <a:endParaRPr lang="en-US" sz="1700" dirty="0"/>
+          </a:p>
+        </p:txBody>
+      </p:sp>
+      <p:sp>
+        <p:nvSpPr>
+          <p:cNvPr id="11" name="Shape 9"/>
+          <p:cNvSpPr/>
+          <p:nvPr/>
+        </p:nvSpPr>
+        <p:spPr>
+          <a:xfrm>
+            <a:off x="7909560" y="1417320"/>
+            <a:ext cx="3154680" cy="1828800"/>
+          </a:xfrm>
+          <a:prstGeom prst="roundRect">
+            <a:avLst>
+              <a:gd name="adj" fmla="val 6000"/>
+            </a:avLst>
+          </a:prstGeom>
+          <a:solidFill>
+            <a:srgbClr val="EEF8ED"/>
+          </a:solidFill>
+          <a:ln w="12700">
+            <a:solidFill>
+              <a:srgbClr val="B9D7E6"/>
+            </a:solidFill>
+            <a:prstDash val="solid"/>
+          </a:ln>
+        </p:spPr>
+      </p:sp>
+      <p:sp>
+        <p:nvSpPr>
+          <p:cNvPr id="12" name="Text 10"/>
+          <p:cNvSpPr/>
+          <p:nvPr/>
+        </p:nvSpPr>
+        <p:spPr>
+          <a:xfrm>
+            <a:off x="8074152" y="1563624"/>
+            <a:ext cx="2825496" cy="201168"/>
+          </a:xfrm>
+          <a:prstGeom prst="rect">
+            <a:avLst/>
+          </a:prstGeom>
+          <a:noFill/>
+          <a:ln/>
+        </p:spPr>
+        <p:txBody>
+          <a:bodyPr wrap="square" lIns="0" tIns="0" rIns="0" bIns="0" rtlCol="0" anchor="ctr"/>
+          <a:lstStyle/>
+          <a:p>
+            <a:pPr indent="0" marL="0">
+              <a:buNone/>
+            </a:pPr>
+            <a:r>
+              <a:rPr lang="en-US" sz="950" b="1" dirty="0">
+                <a:solidFill>
+                  <a:srgbClr val="0068B7"/>
+                </a:solidFill>
+                <a:latin typeface="Aptos" pitchFamily="34" charset="0"/>
+                <a:ea typeface="Aptos" pitchFamily="34" charset="-122"/>
+                <a:cs typeface="Aptos" pitchFamily="34" charset="-120"/>
+              </a:rPr>
+              <a:t>Key idea</a:t>
+            </a:r>
+            <a:endParaRPr lang="en-US" sz="950" dirty="0"/>
+          </a:p>
+        </p:txBody>
+      </p:sp>
+      <p:sp>
+        <p:nvSpPr>
+          <p:cNvPr id="13" name="Text 11"/>
+          <p:cNvSpPr/>
+          <p:nvPr/>
+        </p:nvSpPr>
+        <p:spPr>
+          <a:xfrm>
+            <a:off x="8074152" y="1856232"/>
+            <a:ext cx="2825496" cy="1261872"/>
+          </a:xfrm>
+          <a:prstGeom prst="rect">
+            <a:avLst/>
+          </a:prstGeom>
+          <a:noFill/>
+          <a:ln/>
+        </p:spPr>
+        <p:txBody>
+          <a:bodyPr wrap="square" lIns="0" tIns="0" rIns="0" bIns="0" rtlCol="0" anchor="t">
+            <a:normAutofit/>
+          </a:bodyPr>
+          <a:lstStyle/>
+          <a:p>
+            <a:pPr indent="0" marL="0">
+              <a:buNone/>
+            </a:pPr>
+            <a:r>
+              <a:rPr lang="en-US" sz="1250" dirty="0">
+                <a:solidFill>
+                  <a:srgbClr val="17364A"/>
+                </a:solidFill>
+                <a:latin typeface="Aptos" pitchFamily="34" charset="0"/>
+                <a:ea typeface="Aptos" pitchFamily="34" charset="-122"/>
+                <a:cs typeface="Aptos" pitchFamily="34" charset="-120"/>
+              </a:rPr>
+              <a:t>1. What is the strongest reason this module topic belongs in AI leadership and governance training?</a:t>
+            </a:r>
+            <a:endParaRPr lang="en-US" sz="1250" dirty="0"/>
+          </a:p>
+        </p:txBody>
+      </p:sp>
+      <p:sp>
+        <p:nvSpPr>
+          <p:cNvPr id="14" name="Shape 12"/>
+          <p:cNvSpPr/>
+          <p:nvPr/>
+        </p:nvSpPr>
+        <p:spPr>
+          <a:xfrm>
+            <a:off x="7909560" y="3520440"/>
+            <a:ext cx="3154680" cy="1737360"/>
+          </a:xfrm>
+          <a:prstGeom prst="roundRect">
+            <a:avLst>
+              <a:gd name="adj" fmla="val 6316"/>
+            </a:avLst>
+          </a:prstGeom>
+          <a:solidFill>
+            <a:srgbClr val="EAF6F8"/>
+          </a:solidFill>
+          <a:ln w="12700">
+            <a:solidFill>
+              <a:srgbClr val="B9D7E6"/>
+            </a:solidFill>
+            <a:prstDash val="solid"/>
+          </a:ln>
+        </p:spPr>
+      </p:sp>
+      <p:sp>
+        <p:nvSpPr>
+          <p:cNvPr id="15" name="Text 13"/>
+          <p:cNvSpPr/>
+          <p:nvPr/>
+        </p:nvSpPr>
+        <p:spPr>
+          <a:xfrm>
+            <a:off x="8074152" y="3666744"/>
+            <a:ext cx="2825496" cy="201168"/>
+          </a:xfrm>
+          <a:prstGeom prst="rect">
+            <a:avLst/>
+          </a:prstGeom>
+          <a:noFill/>
+          <a:ln/>
+        </p:spPr>
+        <p:txBody>
+          <a:bodyPr wrap="square" lIns="0" tIns="0" rIns="0" bIns="0" rtlCol="0" anchor="ctr"/>
+          <a:lstStyle/>
+          <a:p>
+            <a:pPr indent="0" marL="0">
+              <a:buNone/>
+            </a:pPr>
+            <a:r>
+              <a:rPr lang="en-US" sz="950" b="1" dirty="0">
+                <a:solidFill>
+                  <a:srgbClr val="0068B7"/>
+                </a:solidFill>
+                <a:latin typeface="Aptos" pitchFamily="34" charset="0"/>
+                <a:ea typeface="Aptos" pitchFamily="34" charset="-122"/>
+                <a:cs typeface="Aptos" pitchFamily="34" charset="-120"/>
+              </a:rPr>
+              <a:t>Use this for</a:t>
+            </a:r>
+            <a:endParaRPr lang="en-US" sz="950" dirty="0"/>
+          </a:p>
+        </p:txBody>
+      </p:sp>
+      <p:sp>
+        <p:nvSpPr>
+          <p:cNvPr id="16" name="Text 14"/>
+          <p:cNvSpPr/>
+          <p:nvPr/>
+        </p:nvSpPr>
+        <p:spPr>
+          <a:xfrm>
+            <a:off x="8074152" y="3959352"/>
+            <a:ext cx="2825496" cy="1170432"/>
+          </a:xfrm>
+          <a:prstGeom prst="rect">
+            <a:avLst/>
+          </a:prstGeom>
+          <a:noFill/>
+          <a:ln/>
+        </p:spPr>
+        <p:txBody>
+          <a:bodyPr wrap="square" lIns="0" tIns="0" rIns="0" bIns="0" rtlCol="0" anchor="t">
+            <a:normAutofit/>
+          </a:bodyPr>
+          <a:lstStyle/>
+          <a:p>
+            <a:pPr indent="0" marL="0">
+              <a:buNone/>
+            </a:pPr>
+            <a:r>
+              <a:rPr lang="en-US" sz="1250" dirty="0">
+                <a:solidFill>
+                  <a:srgbClr val="17364A"/>
+                </a:solidFill>
+                <a:latin typeface="Aptos" pitchFamily="34" charset="0"/>
+                <a:ea typeface="Aptos" pitchFamily="34" charset="-122"/>
+                <a:cs typeface="Aptos" pitchFamily="34" charset="-120"/>
+              </a:rPr>
+              <a:t>Connect the concept to public health decisions, safeguards, documentation, or implementation work.</a:t>
+            </a:r>
+            <a:endParaRPr lang="en-US" sz="1250" dirty="0"/>
           </a:p>
         </p:txBody>
       </p:sp>
@@ -5445,7 +8707,32 @@
       </p:sp>
       <p:sp>
         <p:nvSpPr>
-          <p:cNvPr id="3" name="Text 1"/>
+          <p:cNvPr id="3" name="Shape 1"/>
+          <p:cNvSpPr/>
+          <p:nvPr/>
+        </p:nvSpPr>
+        <p:spPr>
+          <a:xfrm>
+            <a:off x="0" y="164592"/>
+            <a:ext cx="146304" cy="6693408"/>
+          </a:xfrm>
+          <a:prstGeom prst="rect">
+            <a:avLst/>
+          </a:prstGeom>
+          <a:solidFill>
+            <a:srgbClr val="2F8A28"/>
+          </a:solidFill>
+          <a:ln w="12700">
+            <a:solidFill>
+              <a:srgbClr val="2F8A28"/>
+            </a:solidFill>
+            <a:prstDash val="solid"/>
+          </a:ln>
+        </p:spPr>
+      </p:sp>
+      <p:sp>
+        <p:nvSpPr>
+          <p:cNvPr id="4" name="Text 2"/>
           <p:cNvSpPr/>
           <p:nvPr/>
         </p:nvSpPr>
@@ -5484,7 +8771,7 @@
       </p:sp>
       <p:sp>
         <p:nvSpPr>
-          <p:cNvPr id="4" name="Text 2"/>
+          <p:cNvPr id="5" name="Text 3"/>
           <p:cNvSpPr/>
           <p:nvPr/>
         </p:nvSpPr>
@@ -5523,7 +8810,7 @@
       </p:sp>
       <p:sp>
         <p:nvSpPr>
-          <p:cNvPr id="5" name="Text 3"/>
+          <p:cNvPr id="6" name="Text 4"/>
           <p:cNvSpPr/>
           <p:nvPr/>
         </p:nvSpPr>
@@ -5562,7 +8849,7 @@
       </p:sp>
       <p:sp>
         <p:nvSpPr>
-          <p:cNvPr id="6" name="Text 4"/>
+          <p:cNvPr id="7" name="Text 5"/>
           <p:cNvSpPr/>
           <p:nvPr/>
         </p:nvSpPr>
@@ -5595,7 +8882,7 @@
                 <a:ea typeface="Aptos Display" pitchFamily="34" charset="-122"/>
                 <a:cs typeface="Aptos Display" pitchFamily="34" charset="-120"/>
               </a:rPr>
-              <a:t>Module Context</a:t>
+              <a:t>What this module helps you do</a:t>
             </a:r>
             <a:endParaRPr lang="en-US" sz="2700" dirty="0"/>
           </a:p>
@@ -5603,14 +8890,14 @@
       </p:sp>
       <p:sp>
         <p:nvSpPr>
-          <p:cNvPr id="7" name="Text 5"/>
-          <p:cNvSpPr/>
-          <p:nvPr/>
-        </p:nvSpPr>
-        <p:spPr>
-          <a:xfrm>
-            <a:off x="822960" y="1325880"/>
-            <a:ext cx="10378440" cy="1371600"/>
+          <p:cNvPr id="8" name="Text 6"/>
+          <p:cNvSpPr/>
+          <p:nvPr/>
+        </p:nvSpPr>
+        <p:spPr>
+          <a:xfrm>
+            <a:off x="868680" y="1417320"/>
+            <a:ext cx="6675120" cy="3291840"/>
           </a:xfrm>
           <a:prstGeom prst="rect">
             <a:avLst/>
@@ -5625,7 +8912,7 @@
           <a:lstStyle/>
           <a:p>
             <a:r>
-              <a:rPr lang="en-US" sz="1600" dirty="0">
+              <a:rPr lang="en-US" sz="1700" dirty="0">
                 <a:solidFill>
                   <a:srgbClr val="17364A"/>
                 </a:solidFill>
@@ -5633,13 +8920,13 @@
                 <a:ea typeface="Aptos" pitchFamily="34" charset="-122"/>
                 <a:cs typeface="Aptos" pitchFamily="34" charset="-120"/>
               </a:rPr>
-              <a:t>Level: advanced/leadership</a:t>
-            </a:r>
-            <a:endParaRPr lang="en-US" sz="1600" dirty="0"/>
-          </a:p>
-          <a:p>
-            <a:r>
-              <a:rPr lang="en-US" sz="1600" dirty="0">
+              <a:t>Responsible AI does not end at launch.</a:t>
+            </a:r>
+            <a:endParaRPr lang="en-US" sz="1700" dirty="0"/>
+          </a:p>
+          <a:p>
+            <a:r>
+              <a:rPr lang="en-US" sz="1700" dirty="0">
                 <a:solidFill>
                   <a:srgbClr val="17364A"/>
                 </a:solidFill>
@@ -5647,13 +8934,13 @@
                 <a:ea typeface="Aptos" pitchFamily="34" charset="-122"/>
                 <a:cs typeface="Aptos" pitchFamily="34" charset="-120"/>
               </a:rPr>
-              <a:t>Primary track: Public Health Executive Leadership Track</a:t>
-            </a:r>
-            <a:endParaRPr lang="en-US" sz="1600" dirty="0"/>
-          </a:p>
-          <a:p>
-            <a:r>
-              <a:rPr lang="en-US" sz="1600" dirty="0">
+              <a:t>AI tools require ongoing funding, staff time, monitoring, updates, vendor management, training, incident response, documentation, and eventual.</a:t>
+            </a:r>
+            <a:endParaRPr lang="en-US" sz="1700" dirty="0"/>
+          </a:p>
+          <a:p>
+            <a:r>
+              <a:rPr lang="en-US" sz="1700" dirty="0">
                 <a:solidFill>
                   <a:srgbClr val="17364A"/>
                 </a:solidFill>
@@ -5661,31 +8948,111 @@
                 <a:ea typeface="Aptos" pitchFamily="34" charset="-122"/>
                 <a:cs typeface="Aptos" pitchFamily="34" charset="-120"/>
               </a:rPr>
-              <a:t>Appears in tracks: governance-security</a:t>
-            </a:r>
-            <a:endParaRPr lang="en-US" sz="1600" dirty="0"/>
-          </a:p>
-        </p:txBody>
-      </p:sp>
-      <p:sp>
-        <p:nvSpPr>
-          <p:cNvPr id="8" name="Text 6"/>
-          <p:cNvSpPr/>
-          <p:nvPr/>
-        </p:nvSpPr>
-        <p:spPr>
-          <a:xfrm>
-            <a:off x="822960" y="2743200"/>
-            <a:ext cx="10378440" cy="2834640"/>
-          </a:xfrm>
-          <a:prstGeom prst="rect">
-            <a:avLst/>
-          </a:prstGeom>
-          <a:noFill/>
-          <a:ln/>
-        </p:spPr>
-        <p:txBody>
-          <a:bodyPr wrap="square" lIns="1016" tIns="1016" rIns="1016" bIns="1016" rtlCol="0" anchor="t">
+              <a:t>Sustainability planning ensures that AI-supported workflows do not become unfunded, unmonitored, or outdated after the initial pilot or grant period.</a:t>
+            </a:r>
+            <a:endParaRPr lang="en-US" sz="1700" dirty="0"/>
+          </a:p>
+          <a:p>
+            <a:r>
+              <a:rPr lang="en-US" sz="1700" dirty="0">
+                <a:solidFill>
+                  <a:srgbClr val="17364A"/>
+                </a:solidFill>
+                <a:latin typeface="Aptos" pitchFamily="34" charset="0"/>
+                <a:ea typeface="Aptos" pitchFamily="34" charset="-122"/>
+                <a:cs typeface="Aptos" pitchFamily="34" charset="-120"/>
+              </a:rPr>
+              <a:t>This module helps leaders plan for the full AI lifecycle.</a:t>
+            </a:r>
+            <a:endParaRPr lang="en-US" sz="1700" dirty="0"/>
+          </a:p>
+        </p:txBody>
+      </p:sp>
+      <p:sp>
+        <p:nvSpPr>
+          <p:cNvPr id="9" name="Shape 7"/>
+          <p:cNvSpPr/>
+          <p:nvPr/>
+        </p:nvSpPr>
+        <p:spPr>
+          <a:xfrm>
+            <a:off x="7909560" y="1417320"/>
+            <a:ext cx="3154680" cy="1920240"/>
+          </a:xfrm>
+          <a:prstGeom prst="roundRect">
+            <a:avLst>
+              <a:gd name="adj" fmla="val 5714"/>
+            </a:avLst>
+          </a:prstGeom>
+          <a:solidFill>
+            <a:srgbClr val="EAF6F8"/>
+          </a:solidFill>
+          <a:ln w="12700">
+            <a:solidFill>
+              <a:srgbClr val="B9D7E6"/>
+            </a:solidFill>
+            <a:prstDash val="solid"/>
+          </a:ln>
+        </p:spPr>
+      </p:sp>
+      <p:sp>
+        <p:nvSpPr>
+          <p:cNvPr id="10" name="Text 8"/>
+          <p:cNvSpPr/>
+          <p:nvPr/>
+        </p:nvSpPr>
+        <p:spPr>
+          <a:xfrm>
+            <a:off x="8074152" y="1563624"/>
+            <a:ext cx="2825496" cy="201168"/>
+          </a:xfrm>
+          <a:prstGeom prst="rect">
+            <a:avLst/>
+          </a:prstGeom>
+          <a:noFill/>
+          <a:ln/>
+        </p:spPr>
+        <p:txBody>
+          <a:bodyPr wrap="square" lIns="0" tIns="0" rIns="0" bIns="0" rtlCol="0" anchor="ctr"/>
+          <a:lstStyle/>
+          <a:p>
+            <a:pPr indent="0" marL="0">
+              <a:buNone/>
+            </a:pPr>
+            <a:r>
+              <a:rPr lang="en-US" sz="950" b="1" dirty="0">
+                <a:solidFill>
+                  <a:srgbClr val="0068B7"/>
+                </a:solidFill>
+                <a:latin typeface="Aptos" pitchFamily="34" charset="0"/>
+                <a:ea typeface="Aptos" pitchFamily="34" charset="-122"/>
+                <a:cs typeface="Aptos" pitchFamily="34" charset="-120"/>
+              </a:rPr>
+              <a:t>Module details</a:t>
+            </a:r>
+            <a:endParaRPr lang="en-US" sz="950" dirty="0"/>
+          </a:p>
+        </p:txBody>
+      </p:sp>
+      <p:sp>
+        <p:nvSpPr>
+          <p:cNvPr id="11" name="Text 9"/>
+          <p:cNvSpPr/>
+          <p:nvPr/>
+        </p:nvSpPr>
+        <p:spPr>
+          <a:xfrm>
+            <a:off x="8074152" y="1856232"/>
+            <a:ext cx="2825496" cy="1353312"/>
+          </a:xfrm>
+          <a:prstGeom prst="rect">
+            <a:avLst/>
+          </a:prstGeom>
+          <a:noFill/>
+          <a:ln/>
+        </p:spPr>
+        <p:txBody>
+          <a:bodyPr wrap="square" lIns="0" tIns="0" rIns="0" bIns="0" rtlCol="0" anchor="t">
             <a:normAutofit/>
           </a:bodyPr>
           <a:lstStyle/>
@@ -5694,7 +9061,7 @@
               <a:buNone/>
             </a:pPr>
             <a:r>
-              <a:rPr lang="en-US" sz="1400" dirty="0">
+              <a:rPr lang="en-US" sz="1250" dirty="0">
                 <a:solidFill>
                   <a:srgbClr val="17364A"/>
                 </a:solidFill>
@@ -5702,9 +9069,1254 @@
                 <a:ea typeface="Aptos" pitchFamily="34" charset="-122"/>
                 <a:cs typeface="Aptos" pitchFamily="34" charset="-120"/>
               </a:rPr>
-              <a:t>Responsible AI does not end at launch. AI tools require ongoing funding, staff time, monitoring, updates, vendor management, training, incident response, documentation, and eventual retirement. Sustainability planning ensures that AI-supported workflows do not become unfunded, unmonitored, or outdated after the initial pilot or grant period ends. This module helps leaders plan for the full AI lifecycle. It focuses on funding models, ownership, maintenance, monitoring, contract renewal, retraining, policy updates, user support, accessibility updates, cybersecurity review, and sunset criteria. The module emphasizes that a tool should not be approved if the agency cannot reasonably sustain the safeguards needed for responsible use.</a:t>
-            </a:r>
-            <a:endParaRPr lang="en-US" sz="1400" dirty="0"/>
+              <a:t>Level: advanced/leadership</a:t>
+            </a:r>
+            <a:endParaRPr lang="en-US" sz="1250" dirty="0"/>
+          </a:p>
+          <a:p>
+            <a:pPr indent="0" marL="0">
+              <a:buNone/>
+            </a:pPr>
+            <a:r>
+              <a:rPr lang="en-US" sz="1250" dirty="0">
+                <a:solidFill>
+                  <a:srgbClr val="17364A"/>
+                </a:solidFill>
+                <a:latin typeface="Aptos" pitchFamily="34" charset="0"/>
+                <a:ea typeface="Aptos" pitchFamily="34" charset="-122"/>
+                <a:cs typeface="Aptos" pitchFamily="34" charset="-120"/>
+              </a:rPr>
+              <a:t>Primary track: Public Health Executive Leadership Track</a:t>
+            </a:r>
+            <a:endParaRPr lang="en-US" sz="1250" dirty="0"/>
+          </a:p>
+          <a:p>
+            <a:pPr indent="0" marL="0">
+              <a:buNone/>
+            </a:pPr>
+            <a:r>
+              <a:rPr lang="en-US" sz="1250" dirty="0">
+                <a:solidFill>
+                  <a:srgbClr val="17364A"/>
+                </a:solidFill>
+                <a:latin typeface="Aptos" pitchFamily="34" charset="0"/>
+                <a:ea typeface="Aptos" pitchFamily="34" charset="-122"/>
+                <a:cs typeface="Aptos" pitchFamily="34" charset="-120"/>
+              </a:rPr>
+              <a:t>Appears in tracks: governance-security</a:t>
+            </a:r>
+            <a:endParaRPr lang="en-US" sz="1250" dirty="0"/>
+          </a:p>
+        </p:txBody>
+      </p:sp>
+      <p:sp>
+        <p:nvSpPr>
+          <p:cNvPr id="12" name="Shape 10"/>
+          <p:cNvSpPr/>
+          <p:nvPr/>
+        </p:nvSpPr>
+        <p:spPr>
+          <a:xfrm>
+            <a:off x="7909560" y="3611880"/>
+            <a:ext cx="3154680" cy="1783080"/>
+          </a:xfrm>
+          <a:prstGeom prst="roundRect">
+            <a:avLst>
+              <a:gd name="adj" fmla="val 6154"/>
+            </a:avLst>
+          </a:prstGeom>
+          <a:solidFill>
+            <a:srgbClr val="EEF8ED"/>
+          </a:solidFill>
+          <a:ln w="12700">
+            <a:solidFill>
+              <a:srgbClr val="B9D7E6"/>
+            </a:solidFill>
+            <a:prstDash val="solid"/>
+          </a:ln>
+        </p:spPr>
+      </p:sp>
+      <p:sp>
+        <p:nvSpPr>
+          <p:cNvPr id="13" name="Text 11"/>
+          <p:cNvSpPr/>
+          <p:nvPr/>
+        </p:nvSpPr>
+        <p:spPr>
+          <a:xfrm>
+            <a:off x="8074152" y="3758184"/>
+            <a:ext cx="2825496" cy="201168"/>
+          </a:xfrm>
+          <a:prstGeom prst="rect">
+            <a:avLst/>
+          </a:prstGeom>
+          <a:noFill/>
+          <a:ln/>
+        </p:spPr>
+        <p:txBody>
+          <a:bodyPr wrap="square" lIns="0" tIns="0" rIns="0" bIns="0" rtlCol="0" anchor="ctr"/>
+          <a:lstStyle/>
+          <a:p>
+            <a:pPr indent="0" marL="0">
+              <a:buNone/>
+            </a:pPr>
+            <a:r>
+              <a:rPr lang="en-US" sz="950" b="1" dirty="0">
+                <a:solidFill>
+                  <a:srgbClr val="0068B7"/>
+                </a:solidFill>
+                <a:latin typeface="Aptos" pitchFamily="34" charset="0"/>
+                <a:ea typeface="Aptos" pitchFamily="34" charset="-122"/>
+                <a:cs typeface="Aptos" pitchFamily="34" charset="-120"/>
+              </a:rPr>
+              <a:t>Learning approach</a:t>
+            </a:r>
+            <a:endParaRPr lang="en-US" sz="950" dirty="0"/>
+          </a:p>
+        </p:txBody>
+      </p:sp>
+      <p:sp>
+        <p:nvSpPr>
+          <p:cNvPr id="14" name="Text 12"/>
+          <p:cNvSpPr/>
+          <p:nvPr/>
+        </p:nvSpPr>
+        <p:spPr>
+          <a:xfrm>
+            <a:off x="8074152" y="4050792"/>
+            <a:ext cx="2825496" cy="1216152"/>
+          </a:xfrm>
+          <a:prstGeom prst="rect">
+            <a:avLst/>
+          </a:prstGeom>
+          <a:noFill/>
+          <a:ln/>
+        </p:spPr>
+        <p:txBody>
+          <a:bodyPr wrap="square" lIns="0" tIns="0" rIns="0" bIns="0" rtlCol="0" anchor="t">
+            <a:normAutofit/>
+          </a:bodyPr>
+          <a:lstStyle/>
+          <a:p>
+            <a:pPr indent="0" marL="0">
+              <a:buNone/>
+            </a:pPr>
+            <a:r>
+              <a:rPr lang="en-US" sz="1250" dirty="0">
+                <a:solidFill>
+                  <a:srgbClr val="17364A"/>
+                </a:solidFill>
+                <a:latin typeface="Aptos" pitchFamily="34" charset="0"/>
+                <a:ea typeface="Aptos" pitchFamily="34" charset="-122"/>
+                <a:cs typeface="Aptos" pitchFamily="34" charset="-120"/>
+              </a:rPr>
+              <a:t>Review the core ideas, complete the practical exercise, check your understanding, and use the related plays and tools to apply the lesson.</a:t>
+            </a:r>
+            <a:endParaRPr lang="en-US" sz="1250" dirty="0"/>
+          </a:p>
+        </p:txBody>
+      </p:sp>
+    </p:spTree>
+  </p:cSld>
+  <p:clrMapOvr>
+    <a:masterClrMapping/>
+  </p:clrMapOvr>
+</p:sld>
+</file>
+
+<file path=ppt/slides/slide20.xml><?xml version="1.0" encoding="utf-8"?>
+<p:sld xmlns:a="http://schemas.openxmlformats.org/drawingml/2006/main" xmlns:r="http://schemas.openxmlformats.org/officeDocument/2006/relationships" xmlns:p="http://schemas.openxmlformats.org/presentationml/2006/main">
+  <p:cSld name="Slide 20">
+    <p:bg>
+      <p:bgPr>
+        <a:solidFill>
+          <a:srgbClr val="F7FBFD"/>
+        </a:solidFill>
+      </p:bgPr>
+    </p:bg>
+    <p:spTree>
+      <p:nvGrpSpPr>
+        <p:cNvPr id="1" name=""/>
+        <p:cNvGrpSpPr/>
+        <p:nvPr/>
+      </p:nvGrpSpPr>
+      <p:grpSpPr>
+        <a:xfrm>
+          <a:off x="0" y="0"/>
+          <a:ext cx="0" cy="0"/>
+          <a:chOff x="0" y="0"/>
+          <a:chExt cx="0" cy="0"/>
+        </a:xfrm>
+      </p:grpSpPr>
+      <p:sp>
+        <p:nvSpPr>
+          <p:cNvPr id="2" name="Shape 0"/>
+          <p:cNvSpPr/>
+          <p:nvPr/>
+        </p:nvSpPr>
+        <p:spPr>
+          <a:xfrm>
+            <a:off x="0" y="0"/>
+            <a:ext cx="12191695" cy="164592"/>
+          </a:xfrm>
+          <a:prstGeom prst="rect">
+            <a:avLst/>
+          </a:prstGeom>
+          <a:solidFill>
+            <a:srgbClr val="0068B7"/>
+          </a:solidFill>
+          <a:ln w="12700">
+            <a:solidFill>
+              <a:srgbClr val="0068B7"/>
+            </a:solidFill>
+            <a:prstDash val="solid"/>
+          </a:ln>
+        </p:spPr>
+      </p:sp>
+      <p:sp>
+        <p:nvSpPr>
+          <p:cNvPr id="3" name="Shape 1"/>
+          <p:cNvSpPr/>
+          <p:nvPr/>
+        </p:nvSpPr>
+        <p:spPr>
+          <a:xfrm>
+            <a:off x="0" y="164592"/>
+            <a:ext cx="146304" cy="6693408"/>
+          </a:xfrm>
+          <a:prstGeom prst="rect">
+            <a:avLst/>
+          </a:prstGeom>
+          <a:solidFill>
+            <a:srgbClr val="2F8A28"/>
+          </a:solidFill>
+          <a:ln w="12700">
+            <a:solidFill>
+              <a:srgbClr val="2F8A28"/>
+            </a:solidFill>
+            <a:prstDash val="solid"/>
+          </a:ln>
+        </p:spPr>
+      </p:sp>
+      <p:sp>
+        <p:nvSpPr>
+          <p:cNvPr id="4" name="Text 2"/>
+          <p:cNvSpPr/>
+          <p:nvPr/>
+        </p:nvSpPr>
+        <p:spPr>
+          <a:xfrm>
+            <a:off x="502920" y="292608"/>
+            <a:ext cx="10149840" cy="256032"/>
+          </a:xfrm>
+          <a:prstGeom prst="rect">
+            <a:avLst/>
+          </a:prstGeom>
+          <a:noFill/>
+          <a:ln/>
+        </p:spPr>
+        <p:txBody>
+          <a:bodyPr wrap="square" lIns="0" tIns="0" rIns="0" bIns="0" rtlCol="0" anchor="ctr"/>
+          <a:lstStyle/>
+          <a:p>
+            <a:pPr indent="0" marL="0">
+              <a:buNone/>
+            </a:pPr>
+            <a:r>
+              <a:rPr lang="en-US" sz="900" b="1" dirty="0">
+                <a:solidFill>
+                  <a:srgbClr val="5F7181"/>
+                </a:solidFill>
+                <a:latin typeface="Aptos" pitchFamily="34" charset="0"/>
+                <a:ea typeface="Aptos" pitchFamily="34" charset="-122"/>
+                <a:cs typeface="Aptos" pitchFamily="34" charset="-120"/>
+              </a:rPr>
+              <a:t>AI Sustainability and Lifecycle Funding</a:t>
+            </a:r>
+            <a:endParaRPr lang="en-US" sz="900" dirty="0"/>
+          </a:p>
+        </p:txBody>
+      </p:sp>
+      <p:sp>
+        <p:nvSpPr>
+          <p:cNvPr id="5" name="Text 3"/>
+          <p:cNvSpPr/>
+          <p:nvPr/>
+        </p:nvSpPr>
+        <p:spPr>
+          <a:xfrm>
+            <a:off x="502920" y="6537960"/>
+            <a:ext cx="7772400" cy="201168"/>
+          </a:xfrm>
+          <a:prstGeom prst="rect">
+            <a:avLst/>
+          </a:prstGeom>
+          <a:noFill/>
+          <a:ln/>
+        </p:spPr>
+        <p:txBody>
+          <a:bodyPr wrap="square" lIns="0" tIns="0" rIns="0" bIns="0" rtlCol="0" anchor="ctr"/>
+          <a:lstStyle/>
+          <a:p>
+            <a:pPr indent="0" marL="0">
+              <a:buNone/>
+            </a:pPr>
+            <a:r>
+              <a:rPr lang="en-US" sz="800" dirty="0">
+                <a:solidFill>
+                  <a:srgbClr val="5F7181"/>
+                </a:solidFill>
+                <a:latin typeface="Aptos" pitchFamily="34" charset="0"/>
+                <a:ea typeface="Aptos" pitchFamily="34" charset="-122"/>
+                <a:cs typeface="Aptos" pitchFamily="34" charset="-120"/>
+              </a:rPr>
+              <a:t>AI Playbook and Toolkit for Public Health Departments</a:t>
+            </a:r>
+            <a:endParaRPr lang="en-US" sz="800" dirty="0"/>
+          </a:p>
+        </p:txBody>
+      </p:sp>
+      <p:sp>
+        <p:nvSpPr>
+          <p:cNvPr id="6" name="Text 4"/>
+          <p:cNvSpPr/>
+          <p:nvPr/>
+        </p:nvSpPr>
+        <p:spPr>
+          <a:xfrm>
+            <a:off x="9966960" y="6537960"/>
+            <a:ext cx="1645920" cy="201168"/>
+          </a:xfrm>
+          <a:prstGeom prst="rect">
+            <a:avLst/>
+          </a:prstGeom>
+          <a:noFill/>
+          <a:ln/>
+        </p:spPr>
+        <p:txBody>
+          <a:bodyPr wrap="square" lIns="0" tIns="0" rIns="0" bIns="0" rtlCol="0" anchor="ctr"/>
+          <a:lstStyle/>
+          <a:p>
+            <a:pPr algn="r" indent="0" marL="0">
+              <a:buNone/>
+            </a:pPr>
+            <a:r>
+              <a:rPr lang="en-US" sz="800" dirty="0">
+                <a:solidFill>
+                  <a:srgbClr val="5F7181"/>
+                </a:solidFill>
+                <a:latin typeface="Aptos" pitchFamily="34" charset="0"/>
+                <a:ea typeface="Aptos" pitchFamily="34" charset="-122"/>
+                <a:cs typeface="Aptos" pitchFamily="34" charset="-120"/>
+              </a:rPr>
+              <a:t>© Paula Soper</a:t>
+            </a:r>
+            <a:endParaRPr lang="en-US" sz="800" dirty="0"/>
+          </a:p>
+        </p:txBody>
+      </p:sp>
+      <p:sp>
+        <p:nvSpPr>
+          <p:cNvPr id="7" name="Shape 5"/>
+          <p:cNvSpPr/>
+          <p:nvPr/>
+        </p:nvSpPr>
+        <p:spPr>
+          <a:xfrm>
+            <a:off x="640080" y="658368"/>
+            <a:ext cx="420624" cy="420624"/>
+          </a:xfrm>
+          <a:prstGeom prst="ellipse">
+            <a:avLst/>
+          </a:prstGeom>
+          <a:solidFill>
+            <a:srgbClr val="0068B7"/>
+          </a:solidFill>
+          <a:ln w="12700">
+            <a:solidFill>
+              <a:srgbClr val="0068B7"/>
+            </a:solidFill>
+            <a:prstDash val="solid"/>
+          </a:ln>
+        </p:spPr>
+      </p:sp>
+      <p:sp>
+        <p:nvSpPr>
+          <p:cNvPr id="8" name="Text 6"/>
+          <p:cNvSpPr/>
+          <p:nvPr/>
+        </p:nvSpPr>
+        <p:spPr>
+          <a:xfrm>
+            <a:off x="640080" y="731520"/>
+            <a:ext cx="420624" cy="164592"/>
+          </a:xfrm>
+          <a:prstGeom prst="rect">
+            <a:avLst/>
+          </a:prstGeom>
+          <a:noFill/>
+          <a:ln/>
+        </p:spPr>
+        <p:txBody>
+          <a:bodyPr wrap="square" lIns="0" tIns="0" rIns="0" bIns="0" rtlCol="0" anchor="ctr"/>
+          <a:lstStyle/>
+          <a:p>
+            <a:pPr algn="ctr" indent="0" marL="0">
+              <a:buNone/>
+            </a:pPr>
+            <a:r>
+              <a:rPr lang="en-US" sz="1100" b="1" dirty="0">
+                <a:solidFill>
+                  <a:srgbClr val="FFFFFF"/>
+                </a:solidFill>
+                <a:latin typeface="Aptos" pitchFamily="34" charset="0"/>
+                <a:ea typeface="Aptos" pitchFamily="34" charset="-122"/>
+                <a:cs typeface="Aptos" pitchFamily="34" charset="-120"/>
+              </a:rPr>
+              <a:t>15</a:t>
+            </a:r>
+            <a:endParaRPr lang="en-US" sz="1100" dirty="0"/>
+          </a:p>
+        </p:txBody>
+      </p:sp>
+      <p:sp>
+        <p:nvSpPr>
+          <p:cNvPr id="9" name="Text 7"/>
+          <p:cNvSpPr/>
+          <p:nvPr/>
+        </p:nvSpPr>
+        <p:spPr>
+          <a:xfrm>
+            <a:off x="640080" y="621792"/>
+            <a:ext cx="10881360" cy="566928"/>
+          </a:xfrm>
+          <a:prstGeom prst="rect">
+            <a:avLst/>
+          </a:prstGeom>
+          <a:noFill/>
+          <a:ln/>
+        </p:spPr>
+        <p:txBody>
+          <a:bodyPr wrap="square" lIns="0" tIns="0" rIns="0" bIns="0" rtlCol="0" anchor="ctr">
+            <a:normAutofit/>
+          </a:bodyPr>
+          <a:lstStyle/>
+          <a:p>
+            <a:pPr indent="0" marL="0">
+              <a:buNone/>
+            </a:pPr>
+            <a:r>
+              <a:rPr lang="en-US" sz="2700" b="1" dirty="0">
+                <a:solidFill>
+                  <a:srgbClr val="003A63"/>
+                </a:solidFill>
+                <a:latin typeface="Aptos Display" pitchFamily="34" charset="0"/>
+                <a:ea typeface="Aptos Display" pitchFamily="34" charset="-122"/>
+                <a:cs typeface="Aptos Display" pitchFamily="34" charset="-120"/>
+              </a:rPr>
+              <a:t>References and Resources</a:t>
+            </a:r>
+            <a:endParaRPr lang="en-US" sz="2700" dirty="0"/>
+          </a:p>
+        </p:txBody>
+      </p:sp>
+      <p:sp>
+        <p:nvSpPr>
+          <p:cNvPr id="10" name="Text 8"/>
+          <p:cNvSpPr/>
+          <p:nvPr/>
+        </p:nvSpPr>
+        <p:spPr>
+          <a:xfrm>
+            <a:off x="868680" y="1417320"/>
+            <a:ext cx="6675120" cy="4434840"/>
+          </a:xfrm>
+          <a:prstGeom prst="rect">
+            <a:avLst/>
+          </a:prstGeom>
+          <a:noFill/>
+          <a:ln/>
+        </p:spPr>
+        <p:txBody>
+          <a:bodyPr wrap="square" lIns="635" tIns="635" rIns="635" bIns="635" rtlCol="0" anchor="t">
+            <a:normAutofit/>
+          </a:bodyPr>
+          <a:lstStyle/>
+          <a:p>
+            <a:r>
+              <a:rPr lang="en-US" sz="1700" dirty="0">
+                <a:solidFill>
+                  <a:srgbClr val="17364A"/>
+                </a:solidFill>
+                <a:latin typeface="Aptos" pitchFamily="34" charset="0"/>
+                <a:ea typeface="Aptos" pitchFamily="34" charset="-122"/>
+                <a:cs typeface="Aptos" pitchFamily="34" charset="-120"/>
+              </a:rPr>
+              <a:t>NIST Artificial Intelligence Risk Management Framework (AI RMF 1.0): https://www.nist.gov/itl/ai-risk-management-framework</a:t>
+            </a:r>
+            <a:endParaRPr lang="en-US" sz="1700" dirty="0"/>
+          </a:p>
+          <a:p>
+            <a:r>
+              <a:rPr lang="en-US" sz="1700" dirty="0">
+                <a:solidFill>
+                  <a:srgbClr val="17364A"/>
+                </a:solidFill>
+                <a:latin typeface="Aptos" pitchFamily="34" charset="0"/>
+                <a:ea typeface="Aptos" pitchFamily="34" charset="-122"/>
+                <a:cs typeface="Aptos" pitchFamily="34" charset="-120"/>
+              </a:rPr>
+              <a:t>NIST Generative AI Profile:.</a:t>
+            </a:r>
+            <a:endParaRPr lang="en-US" sz="1700" dirty="0"/>
+          </a:p>
+          <a:p>
+            <a:r>
+              <a:rPr lang="en-US" sz="1700" dirty="0">
+                <a:solidFill>
+                  <a:srgbClr val="17364A"/>
+                </a:solidFill>
+                <a:latin typeface="Aptos" pitchFamily="34" charset="0"/>
+                <a:ea typeface="Aptos" pitchFamily="34" charset="-122"/>
+                <a:cs typeface="Aptos" pitchFamily="34" charset="-120"/>
+              </a:rPr>
+              <a:t>NIST Privacy Framework</a:t>
+            </a:r>
+            <a:endParaRPr lang="en-US" sz="1700" dirty="0"/>
+          </a:p>
+          <a:p>
+            <a:r>
+              <a:rPr lang="en-US" sz="1700" dirty="0">
+                <a:solidFill>
+                  <a:srgbClr val="17364A"/>
+                </a:solidFill>
+                <a:latin typeface="Aptos" pitchFamily="34" charset="0"/>
+                <a:ea typeface="Aptos" pitchFamily="34" charset="-122"/>
+                <a:cs typeface="Aptos" pitchFamily="34" charset="-120"/>
+              </a:rPr>
+              <a:t>CDC Public Health Data Strategy and Data Modernization resources:.</a:t>
+            </a:r>
+            <a:endParaRPr lang="en-US" sz="1700" dirty="0"/>
+          </a:p>
+        </p:txBody>
+      </p:sp>
+      <p:sp>
+        <p:nvSpPr>
+          <p:cNvPr id="11" name="Shape 9"/>
+          <p:cNvSpPr/>
+          <p:nvPr/>
+        </p:nvSpPr>
+        <p:spPr>
+          <a:xfrm>
+            <a:off x="7909560" y="1417320"/>
+            <a:ext cx="3154680" cy="1828800"/>
+          </a:xfrm>
+          <a:prstGeom prst="roundRect">
+            <a:avLst>
+              <a:gd name="adj" fmla="val 6000"/>
+            </a:avLst>
+          </a:prstGeom>
+          <a:solidFill>
+            <a:srgbClr val="EEF8ED"/>
+          </a:solidFill>
+          <a:ln w="12700">
+            <a:solidFill>
+              <a:srgbClr val="B9D7E6"/>
+            </a:solidFill>
+            <a:prstDash val="solid"/>
+          </a:ln>
+        </p:spPr>
+      </p:sp>
+      <p:sp>
+        <p:nvSpPr>
+          <p:cNvPr id="12" name="Text 10"/>
+          <p:cNvSpPr/>
+          <p:nvPr/>
+        </p:nvSpPr>
+        <p:spPr>
+          <a:xfrm>
+            <a:off x="8074152" y="1563624"/>
+            <a:ext cx="2825496" cy="201168"/>
+          </a:xfrm>
+          <a:prstGeom prst="rect">
+            <a:avLst/>
+          </a:prstGeom>
+          <a:noFill/>
+          <a:ln/>
+        </p:spPr>
+        <p:txBody>
+          <a:bodyPr wrap="square" lIns="0" tIns="0" rIns="0" bIns="0" rtlCol="0" anchor="ctr"/>
+          <a:lstStyle/>
+          <a:p>
+            <a:pPr indent="0" marL="0">
+              <a:buNone/>
+            </a:pPr>
+            <a:r>
+              <a:rPr lang="en-US" sz="950" b="1" dirty="0">
+                <a:solidFill>
+                  <a:srgbClr val="0068B7"/>
+                </a:solidFill>
+                <a:latin typeface="Aptos" pitchFamily="34" charset="0"/>
+                <a:ea typeface="Aptos" pitchFamily="34" charset="-122"/>
+                <a:cs typeface="Aptos" pitchFamily="34" charset="-120"/>
+              </a:rPr>
+              <a:t>Key idea</a:t>
+            </a:r>
+            <a:endParaRPr lang="en-US" sz="950" dirty="0"/>
+          </a:p>
+        </p:txBody>
+      </p:sp>
+      <p:sp>
+        <p:nvSpPr>
+          <p:cNvPr id="13" name="Text 11"/>
+          <p:cNvSpPr/>
+          <p:nvPr/>
+        </p:nvSpPr>
+        <p:spPr>
+          <a:xfrm>
+            <a:off x="8074152" y="1856232"/>
+            <a:ext cx="2825496" cy="1261872"/>
+          </a:xfrm>
+          <a:prstGeom prst="rect">
+            <a:avLst/>
+          </a:prstGeom>
+          <a:noFill/>
+          <a:ln/>
+        </p:spPr>
+        <p:txBody>
+          <a:bodyPr wrap="square" lIns="0" tIns="0" rIns="0" bIns="0" rtlCol="0" anchor="t">
+            <a:normAutofit/>
+          </a:bodyPr>
+          <a:lstStyle/>
+          <a:p>
+            <a:pPr indent="0" marL="0">
+              <a:buNone/>
+            </a:pPr>
+            <a:r>
+              <a:rPr lang="en-US" sz="1250" dirty="0">
+                <a:solidFill>
+                  <a:srgbClr val="17364A"/>
+                </a:solidFill>
+                <a:latin typeface="Aptos" pitchFamily="34" charset="0"/>
+                <a:ea typeface="Aptos" pitchFamily="34" charset="-122"/>
+                <a:cs typeface="Aptos" pitchFamily="34" charset="-120"/>
+              </a:rPr>
+              <a:t>NIST Artificial Intelligence Risk Management Framework (AI RMF 1.0): https://www.nist.gov/itl/ai-risk-management-framework</a:t>
+            </a:r>
+            <a:endParaRPr lang="en-US" sz="1250" dirty="0"/>
+          </a:p>
+        </p:txBody>
+      </p:sp>
+      <p:sp>
+        <p:nvSpPr>
+          <p:cNvPr id="14" name="Shape 12"/>
+          <p:cNvSpPr/>
+          <p:nvPr/>
+        </p:nvSpPr>
+        <p:spPr>
+          <a:xfrm>
+            <a:off x="7909560" y="3520440"/>
+            <a:ext cx="3154680" cy="1737360"/>
+          </a:xfrm>
+          <a:prstGeom prst="roundRect">
+            <a:avLst>
+              <a:gd name="adj" fmla="val 6316"/>
+            </a:avLst>
+          </a:prstGeom>
+          <a:solidFill>
+            <a:srgbClr val="EAF6F8"/>
+          </a:solidFill>
+          <a:ln w="12700">
+            <a:solidFill>
+              <a:srgbClr val="B9D7E6"/>
+            </a:solidFill>
+            <a:prstDash val="solid"/>
+          </a:ln>
+        </p:spPr>
+      </p:sp>
+      <p:sp>
+        <p:nvSpPr>
+          <p:cNvPr id="15" name="Text 13"/>
+          <p:cNvSpPr/>
+          <p:nvPr/>
+        </p:nvSpPr>
+        <p:spPr>
+          <a:xfrm>
+            <a:off x="8074152" y="3666744"/>
+            <a:ext cx="2825496" cy="201168"/>
+          </a:xfrm>
+          <a:prstGeom prst="rect">
+            <a:avLst/>
+          </a:prstGeom>
+          <a:noFill/>
+          <a:ln/>
+        </p:spPr>
+        <p:txBody>
+          <a:bodyPr wrap="square" lIns="0" tIns="0" rIns="0" bIns="0" rtlCol="0" anchor="ctr"/>
+          <a:lstStyle/>
+          <a:p>
+            <a:pPr indent="0" marL="0">
+              <a:buNone/>
+            </a:pPr>
+            <a:r>
+              <a:rPr lang="en-US" sz="950" b="1" dirty="0">
+                <a:solidFill>
+                  <a:srgbClr val="0068B7"/>
+                </a:solidFill>
+                <a:latin typeface="Aptos" pitchFamily="34" charset="0"/>
+                <a:ea typeface="Aptos" pitchFamily="34" charset="-122"/>
+                <a:cs typeface="Aptos" pitchFamily="34" charset="-120"/>
+              </a:rPr>
+              <a:t>Use this for</a:t>
+            </a:r>
+            <a:endParaRPr lang="en-US" sz="950" dirty="0"/>
+          </a:p>
+        </p:txBody>
+      </p:sp>
+      <p:sp>
+        <p:nvSpPr>
+          <p:cNvPr id="16" name="Text 14"/>
+          <p:cNvSpPr/>
+          <p:nvPr/>
+        </p:nvSpPr>
+        <p:spPr>
+          <a:xfrm>
+            <a:off x="8074152" y="3959352"/>
+            <a:ext cx="2825496" cy="1170432"/>
+          </a:xfrm>
+          <a:prstGeom prst="rect">
+            <a:avLst/>
+          </a:prstGeom>
+          <a:noFill/>
+          <a:ln/>
+        </p:spPr>
+        <p:txBody>
+          <a:bodyPr wrap="square" lIns="0" tIns="0" rIns="0" bIns="0" rtlCol="0" anchor="t">
+            <a:normAutofit/>
+          </a:bodyPr>
+          <a:lstStyle/>
+          <a:p>
+            <a:pPr indent="0" marL="0">
+              <a:buNone/>
+            </a:pPr>
+            <a:r>
+              <a:rPr lang="en-US" sz="1250" dirty="0">
+                <a:solidFill>
+                  <a:srgbClr val="17364A"/>
+                </a:solidFill>
+                <a:latin typeface="Aptos" pitchFamily="34" charset="0"/>
+                <a:ea typeface="Aptos" pitchFamily="34" charset="-122"/>
+                <a:cs typeface="Aptos" pitchFamily="34" charset="-120"/>
+              </a:rPr>
+              <a:t>Connect the concept to public health decisions, safeguards, documentation, or implementation work.</a:t>
+            </a:r>
+            <a:endParaRPr lang="en-US" sz="1250" dirty="0"/>
+          </a:p>
+        </p:txBody>
+      </p:sp>
+    </p:spTree>
+  </p:cSld>
+  <p:clrMapOvr>
+    <a:masterClrMapping/>
+  </p:clrMapOvr>
+</p:sld>
+</file>
+
+<file path=ppt/slides/slide21.xml><?xml version="1.0" encoding="utf-8"?>
+<p:sld xmlns:a="http://schemas.openxmlformats.org/drawingml/2006/main" xmlns:r="http://schemas.openxmlformats.org/officeDocument/2006/relationships" xmlns:p="http://schemas.openxmlformats.org/presentationml/2006/main">
+  <p:cSld name="Slide 21">
+    <p:bg>
+      <p:bgPr>
+        <a:solidFill>
+          <a:srgbClr val="F7FBFD"/>
+        </a:solidFill>
+      </p:bgPr>
+    </p:bg>
+    <p:spTree>
+      <p:nvGrpSpPr>
+        <p:cNvPr id="1" name=""/>
+        <p:cNvGrpSpPr/>
+        <p:nvPr/>
+      </p:nvGrpSpPr>
+      <p:grpSpPr>
+        <a:xfrm>
+          <a:off x="0" y="0"/>
+          <a:ext cx="0" cy="0"/>
+          <a:chOff x="0" y="0"/>
+          <a:chExt cx="0" cy="0"/>
+        </a:xfrm>
+      </p:grpSpPr>
+      <p:sp>
+        <p:nvSpPr>
+          <p:cNvPr id="2" name="Shape 0"/>
+          <p:cNvSpPr/>
+          <p:nvPr/>
+        </p:nvSpPr>
+        <p:spPr>
+          <a:xfrm>
+            <a:off x="0" y="0"/>
+            <a:ext cx="12191695" cy="164592"/>
+          </a:xfrm>
+          <a:prstGeom prst="rect">
+            <a:avLst/>
+          </a:prstGeom>
+          <a:solidFill>
+            <a:srgbClr val="0068B7"/>
+          </a:solidFill>
+          <a:ln w="12700">
+            <a:solidFill>
+              <a:srgbClr val="0068B7"/>
+            </a:solidFill>
+            <a:prstDash val="solid"/>
+          </a:ln>
+        </p:spPr>
+      </p:sp>
+      <p:sp>
+        <p:nvSpPr>
+          <p:cNvPr id="3" name="Shape 1"/>
+          <p:cNvSpPr/>
+          <p:nvPr/>
+        </p:nvSpPr>
+        <p:spPr>
+          <a:xfrm>
+            <a:off x="0" y="164592"/>
+            <a:ext cx="146304" cy="6693408"/>
+          </a:xfrm>
+          <a:prstGeom prst="rect">
+            <a:avLst/>
+          </a:prstGeom>
+          <a:solidFill>
+            <a:srgbClr val="2F8A28"/>
+          </a:solidFill>
+          <a:ln w="12700">
+            <a:solidFill>
+              <a:srgbClr val="2F8A28"/>
+            </a:solidFill>
+            <a:prstDash val="solid"/>
+          </a:ln>
+        </p:spPr>
+      </p:sp>
+      <p:sp>
+        <p:nvSpPr>
+          <p:cNvPr id="4" name="Text 2"/>
+          <p:cNvSpPr/>
+          <p:nvPr/>
+        </p:nvSpPr>
+        <p:spPr>
+          <a:xfrm>
+            <a:off x="502920" y="292608"/>
+            <a:ext cx="10149840" cy="256032"/>
+          </a:xfrm>
+          <a:prstGeom prst="rect">
+            <a:avLst/>
+          </a:prstGeom>
+          <a:noFill/>
+          <a:ln/>
+        </p:spPr>
+        <p:txBody>
+          <a:bodyPr wrap="square" lIns="0" tIns="0" rIns="0" bIns="0" rtlCol="0" anchor="ctr"/>
+          <a:lstStyle/>
+          <a:p>
+            <a:pPr indent="0" marL="0">
+              <a:buNone/>
+            </a:pPr>
+            <a:r>
+              <a:rPr lang="en-US" sz="900" b="1" dirty="0">
+                <a:solidFill>
+                  <a:srgbClr val="5F7181"/>
+                </a:solidFill>
+                <a:latin typeface="Aptos" pitchFamily="34" charset="0"/>
+                <a:ea typeface="Aptos" pitchFamily="34" charset="-122"/>
+                <a:cs typeface="Aptos" pitchFamily="34" charset="-120"/>
+              </a:rPr>
+              <a:t>AI Sustainability and Lifecycle Funding</a:t>
+            </a:r>
+            <a:endParaRPr lang="en-US" sz="900" dirty="0"/>
+          </a:p>
+        </p:txBody>
+      </p:sp>
+      <p:sp>
+        <p:nvSpPr>
+          <p:cNvPr id="5" name="Text 3"/>
+          <p:cNvSpPr/>
+          <p:nvPr/>
+        </p:nvSpPr>
+        <p:spPr>
+          <a:xfrm>
+            <a:off x="502920" y="6537960"/>
+            <a:ext cx="7772400" cy="201168"/>
+          </a:xfrm>
+          <a:prstGeom prst="rect">
+            <a:avLst/>
+          </a:prstGeom>
+          <a:noFill/>
+          <a:ln/>
+        </p:spPr>
+        <p:txBody>
+          <a:bodyPr wrap="square" lIns="0" tIns="0" rIns="0" bIns="0" rtlCol="0" anchor="ctr"/>
+          <a:lstStyle/>
+          <a:p>
+            <a:pPr indent="0" marL="0">
+              <a:buNone/>
+            </a:pPr>
+            <a:r>
+              <a:rPr lang="en-US" sz="800" dirty="0">
+                <a:solidFill>
+                  <a:srgbClr val="5F7181"/>
+                </a:solidFill>
+                <a:latin typeface="Aptos" pitchFamily="34" charset="0"/>
+                <a:ea typeface="Aptos" pitchFamily="34" charset="-122"/>
+                <a:cs typeface="Aptos" pitchFamily="34" charset="-120"/>
+              </a:rPr>
+              <a:t>AI Playbook and Toolkit for Public Health Departments</a:t>
+            </a:r>
+            <a:endParaRPr lang="en-US" sz="800" dirty="0"/>
+          </a:p>
+        </p:txBody>
+      </p:sp>
+      <p:sp>
+        <p:nvSpPr>
+          <p:cNvPr id="6" name="Text 4"/>
+          <p:cNvSpPr/>
+          <p:nvPr/>
+        </p:nvSpPr>
+        <p:spPr>
+          <a:xfrm>
+            <a:off x="9966960" y="6537960"/>
+            <a:ext cx="1645920" cy="201168"/>
+          </a:xfrm>
+          <a:prstGeom prst="rect">
+            <a:avLst/>
+          </a:prstGeom>
+          <a:noFill/>
+          <a:ln/>
+        </p:spPr>
+        <p:txBody>
+          <a:bodyPr wrap="square" lIns="0" tIns="0" rIns="0" bIns="0" rtlCol="0" anchor="ctr"/>
+          <a:lstStyle/>
+          <a:p>
+            <a:pPr algn="r" indent="0" marL="0">
+              <a:buNone/>
+            </a:pPr>
+            <a:r>
+              <a:rPr lang="en-US" sz="800" dirty="0">
+                <a:solidFill>
+                  <a:srgbClr val="5F7181"/>
+                </a:solidFill>
+                <a:latin typeface="Aptos" pitchFamily="34" charset="0"/>
+                <a:ea typeface="Aptos" pitchFamily="34" charset="-122"/>
+                <a:cs typeface="Aptos" pitchFamily="34" charset="-120"/>
+              </a:rPr>
+              <a:t>© Paula Soper</a:t>
+            </a:r>
+            <a:endParaRPr lang="en-US" sz="800" dirty="0"/>
+          </a:p>
+        </p:txBody>
+      </p:sp>
+      <p:sp>
+        <p:nvSpPr>
+          <p:cNvPr id="7" name="Text 5"/>
+          <p:cNvSpPr/>
+          <p:nvPr/>
+        </p:nvSpPr>
+        <p:spPr>
+          <a:xfrm>
+            <a:off x="640080" y="658368"/>
+            <a:ext cx="10881360" cy="566928"/>
+          </a:xfrm>
+          <a:prstGeom prst="rect">
+            <a:avLst/>
+          </a:prstGeom>
+          <a:noFill/>
+          <a:ln/>
+        </p:spPr>
+        <p:txBody>
+          <a:bodyPr wrap="square" lIns="0" tIns="0" rIns="0" bIns="0" rtlCol="0" anchor="ctr">
+            <a:normAutofit/>
+          </a:bodyPr>
+          <a:lstStyle/>
+          <a:p>
+            <a:pPr indent="0" marL="0">
+              <a:buNone/>
+            </a:pPr>
+            <a:r>
+              <a:rPr lang="en-US" sz="2700" b="1" dirty="0">
+                <a:solidFill>
+                  <a:srgbClr val="003A63"/>
+                </a:solidFill>
+                <a:latin typeface="Aptos Display" pitchFamily="34" charset="0"/>
+                <a:ea typeface="Aptos Display" pitchFamily="34" charset="-122"/>
+                <a:cs typeface="Aptos Display" pitchFamily="34" charset="-120"/>
+              </a:rPr>
+              <a:t>References and Resources Continued</a:t>
+            </a:r>
+            <a:endParaRPr lang="en-US" sz="2700" dirty="0"/>
+          </a:p>
+        </p:txBody>
+      </p:sp>
+      <p:sp>
+        <p:nvSpPr>
+          <p:cNvPr id="8" name="Text 6"/>
+          <p:cNvSpPr/>
+          <p:nvPr/>
+        </p:nvSpPr>
+        <p:spPr>
+          <a:xfrm>
+            <a:off x="868680" y="1417320"/>
+            <a:ext cx="6675120" cy="4434840"/>
+          </a:xfrm>
+          <a:prstGeom prst="rect">
+            <a:avLst/>
+          </a:prstGeom>
+          <a:noFill/>
+          <a:ln/>
+        </p:spPr>
+        <p:txBody>
+          <a:bodyPr wrap="square" lIns="635" tIns="635" rIns="635" bIns="635" rtlCol="0" anchor="t">
+            <a:normAutofit/>
+          </a:bodyPr>
+          <a:lstStyle/>
+          <a:p>
+            <a:r>
+              <a:rPr lang="en-US" sz="1700" dirty="0">
+                <a:solidFill>
+                  <a:srgbClr val="17364A"/>
+                </a:solidFill>
+                <a:latin typeface="Aptos" pitchFamily="34" charset="0"/>
+                <a:ea typeface="Aptos" pitchFamily="34" charset="-122"/>
+                <a:cs typeface="Aptos" pitchFamily="34" charset="-120"/>
+              </a:rPr>
+              <a:t>OMB Memorandum M-24-10 on federal AI governance, risk management, and innovation, where relevant to public-sector governance.</a:t>
+            </a:r>
+            <a:endParaRPr lang="en-US" sz="1700" dirty="0"/>
+          </a:p>
+          <a:p>
+            <a:r>
+              <a:rPr lang="en-US" sz="1700" dirty="0">
+                <a:solidFill>
+                  <a:srgbClr val="17364A"/>
+                </a:solidFill>
+                <a:latin typeface="Aptos" pitchFamily="34" charset="0"/>
+                <a:ea typeface="Aptos" pitchFamily="34" charset="-122"/>
+                <a:cs typeface="Aptos" pitchFamily="34" charset="-120"/>
+              </a:rPr>
+              <a:t>Agency strategic plans, procurement policies, privacy policies, cybersecurity policies, records policies, and equity plans</a:t>
+            </a:r>
+            <a:endParaRPr lang="en-US" sz="1700" dirty="0"/>
+          </a:p>
+        </p:txBody>
+      </p:sp>
+      <p:sp>
+        <p:nvSpPr>
+          <p:cNvPr id="9" name="Shape 7"/>
+          <p:cNvSpPr/>
+          <p:nvPr/>
+        </p:nvSpPr>
+        <p:spPr>
+          <a:xfrm>
+            <a:off x="7909560" y="1417320"/>
+            <a:ext cx="3154680" cy="1828800"/>
+          </a:xfrm>
+          <a:prstGeom prst="roundRect">
+            <a:avLst>
+              <a:gd name="adj" fmla="val 6000"/>
+            </a:avLst>
+          </a:prstGeom>
+          <a:solidFill>
+            <a:srgbClr val="EEF8ED"/>
+          </a:solidFill>
+          <a:ln w="12700">
+            <a:solidFill>
+              <a:srgbClr val="B9D7E6"/>
+            </a:solidFill>
+            <a:prstDash val="solid"/>
+          </a:ln>
+        </p:spPr>
+      </p:sp>
+      <p:sp>
+        <p:nvSpPr>
+          <p:cNvPr id="10" name="Text 8"/>
+          <p:cNvSpPr/>
+          <p:nvPr/>
+        </p:nvSpPr>
+        <p:spPr>
+          <a:xfrm>
+            <a:off x="8074152" y="1563624"/>
+            <a:ext cx="2825496" cy="201168"/>
+          </a:xfrm>
+          <a:prstGeom prst="rect">
+            <a:avLst/>
+          </a:prstGeom>
+          <a:noFill/>
+          <a:ln/>
+        </p:spPr>
+        <p:txBody>
+          <a:bodyPr wrap="square" lIns="0" tIns="0" rIns="0" bIns="0" rtlCol="0" anchor="ctr"/>
+          <a:lstStyle/>
+          <a:p>
+            <a:pPr indent="0" marL="0">
+              <a:buNone/>
+            </a:pPr>
+            <a:r>
+              <a:rPr lang="en-US" sz="950" b="1" dirty="0">
+                <a:solidFill>
+                  <a:srgbClr val="0068B7"/>
+                </a:solidFill>
+                <a:latin typeface="Aptos" pitchFamily="34" charset="0"/>
+                <a:ea typeface="Aptos" pitchFamily="34" charset="-122"/>
+                <a:cs typeface="Aptos" pitchFamily="34" charset="-120"/>
+              </a:rPr>
+              <a:t>Key idea</a:t>
+            </a:r>
+            <a:endParaRPr lang="en-US" sz="950" dirty="0"/>
+          </a:p>
+        </p:txBody>
+      </p:sp>
+      <p:sp>
+        <p:nvSpPr>
+          <p:cNvPr id="11" name="Text 9"/>
+          <p:cNvSpPr/>
+          <p:nvPr/>
+        </p:nvSpPr>
+        <p:spPr>
+          <a:xfrm>
+            <a:off x="8074152" y="1856232"/>
+            <a:ext cx="2825496" cy="1261872"/>
+          </a:xfrm>
+          <a:prstGeom prst="rect">
+            <a:avLst/>
+          </a:prstGeom>
+          <a:noFill/>
+          <a:ln/>
+        </p:spPr>
+        <p:txBody>
+          <a:bodyPr wrap="square" lIns="0" tIns="0" rIns="0" bIns="0" rtlCol="0" anchor="t">
+            <a:normAutofit/>
+          </a:bodyPr>
+          <a:lstStyle/>
+          <a:p>
+            <a:pPr indent="0" marL="0">
+              <a:buNone/>
+            </a:pPr>
+            <a:r>
+              <a:rPr lang="en-US" sz="1250" dirty="0">
+                <a:solidFill>
+                  <a:srgbClr val="17364A"/>
+                </a:solidFill>
+                <a:latin typeface="Aptos" pitchFamily="34" charset="0"/>
+                <a:ea typeface="Aptos" pitchFamily="34" charset="-122"/>
+                <a:cs typeface="Aptos" pitchFamily="34" charset="-120"/>
+              </a:rPr>
+              <a:t>OMB Memorandum M-24-10 on federal AI governance, risk management, and innovation, where relevant to public-sector governance.</a:t>
+            </a:r>
+            <a:endParaRPr lang="en-US" sz="1250" dirty="0"/>
+          </a:p>
+        </p:txBody>
+      </p:sp>
+      <p:sp>
+        <p:nvSpPr>
+          <p:cNvPr id="12" name="Shape 10"/>
+          <p:cNvSpPr/>
+          <p:nvPr/>
+        </p:nvSpPr>
+        <p:spPr>
+          <a:xfrm>
+            <a:off x="7909560" y="3520440"/>
+            <a:ext cx="3154680" cy="1737360"/>
+          </a:xfrm>
+          <a:prstGeom prst="roundRect">
+            <a:avLst>
+              <a:gd name="adj" fmla="val 6316"/>
+            </a:avLst>
+          </a:prstGeom>
+          <a:solidFill>
+            <a:srgbClr val="EAF6F8"/>
+          </a:solidFill>
+          <a:ln w="12700">
+            <a:solidFill>
+              <a:srgbClr val="B9D7E6"/>
+            </a:solidFill>
+            <a:prstDash val="solid"/>
+          </a:ln>
+        </p:spPr>
+      </p:sp>
+      <p:sp>
+        <p:nvSpPr>
+          <p:cNvPr id="13" name="Text 11"/>
+          <p:cNvSpPr/>
+          <p:nvPr/>
+        </p:nvSpPr>
+        <p:spPr>
+          <a:xfrm>
+            <a:off x="8074152" y="3666744"/>
+            <a:ext cx="2825496" cy="201168"/>
+          </a:xfrm>
+          <a:prstGeom prst="rect">
+            <a:avLst/>
+          </a:prstGeom>
+          <a:noFill/>
+          <a:ln/>
+        </p:spPr>
+        <p:txBody>
+          <a:bodyPr wrap="square" lIns="0" tIns="0" rIns="0" bIns="0" rtlCol="0" anchor="ctr"/>
+          <a:lstStyle/>
+          <a:p>
+            <a:pPr indent="0" marL="0">
+              <a:buNone/>
+            </a:pPr>
+            <a:r>
+              <a:rPr lang="en-US" sz="950" b="1" dirty="0">
+                <a:solidFill>
+                  <a:srgbClr val="0068B7"/>
+                </a:solidFill>
+                <a:latin typeface="Aptos" pitchFamily="34" charset="0"/>
+                <a:ea typeface="Aptos" pitchFamily="34" charset="-122"/>
+                <a:cs typeface="Aptos" pitchFamily="34" charset="-120"/>
+              </a:rPr>
+              <a:t>Use this for</a:t>
+            </a:r>
+            <a:endParaRPr lang="en-US" sz="950" dirty="0"/>
+          </a:p>
+        </p:txBody>
+      </p:sp>
+      <p:sp>
+        <p:nvSpPr>
+          <p:cNvPr id="14" name="Text 12"/>
+          <p:cNvSpPr/>
+          <p:nvPr/>
+        </p:nvSpPr>
+        <p:spPr>
+          <a:xfrm>
+            <a:off x="8074152" y="3959352"/>
+            <a:ext cx="2825496" cy="1170432"/>
+          </a:xfrm>
+          <a:prstGeom prst="rect">
+            <a:avLst/>
+          </a:prstGeom>
+          <a:noFill/>
+          <a:ln/>
+        </p:spPr>
+        <p:txBody>
+          <a:bodyPr wrap="square" lIns="0" tIns="0" rIns="0" bIns="0" rtlCol="0" anchor="t">
+            <a:normAutofit/>
+          </a:bodyPr>
+          <a:lstStyle/>
+          <a:p>
+            <a:pPr indent="0" marL="0">
+              <a:buNone/>
+            </a:pPr>
+            <a:r>
+              <a:rPr lang="en-US" sz="1250" dirty="0">
+                <a:solidFill>
+                  <a:srgbClr val="17364A"/>
+                </a:solidFill>
+                <a:latin typeface="Aptos" pitchFamily="34" charset="0"/>
+                <a:ea typeface="Aptos" pitchFamily="34" charset="-122"/>
+                <a:cs typeface="Aptos" pitchFamily="34" charset="-120"/>
+              </a:rPr>
+              <a:t>Connect the concept to public health decisions, safeguards, documentation, or implementation work.</a:t>
+            </a:r>
+            <a:endParaRPr lang="en-US" sz="1250" dirty="0"/>
           </a:p>
         </p:txBody>
       </p:sp>
@@ -5767,7 +10379,32 @@
       </p:sp>
       <p:sp>
         <p:nvSpPr>
-          <p:cNvPr id="3" name="Text 1"/>
+          <p:cNvPr id="3" name="Shape 1"/>
+          <p:cNvSpPr/>
+          <p:nvPr/>
+        </p:nvSpPr>
+        <p:spPr>
+          <a:xfrm>
+            <a:off x="0" y="164592"/>
+            <a:ext cx="146304" cy="6693408"/>
+          </a:xfrm>
+          <a:prstGeom prst="rect">
+            <a:avLst/>
+          </a:prstGeom>
+          <a:solidFill>
+            <a:srgbClr val="2F8A28"/>
+          </a:solidFill>
+          <a:ln w="12700">
+            <a:solidFill>
+              <a:srgbClr val="2F8A28"/>
+            </a:solidFill>
+            <a:prstDash val="solid"/>
+          </a:ln>
+        </p:spPr>
+      </p:sp>
+      <p:sp>
+        <p:nvSpPr>
+          <p:cNvPr id="4" name="Text 2"/>
           <p:cNvSpPr/>
           <p:nvPr/>
         </p:nvSpPr>
@@ -5806,7 +10443,7 @@
       </p:sp>
       <p:sp>
         <p:nvSpPr>
-          <p:cNvPr id="4" name="Text 2"/>
+          <p:cNvPr id="5" name="Text 3"/>
           <p:cNvSpPr/>
           <p:nvPr/>
         </p:nvSpPr>
@@ -5845,7 +10482,7 @@
       </p:sp>
       <p:sp>
         <p:nvSpPr>
-          <p:cNvPr id="5" name="Text 3"/>
+          <p:cNvPr id="6" name="Text 4"/>
           <p:cNvSpPr/>
           <p:nvPr/>
         </p:nvSpPr>
@@ -5884,7 +10521,7 @@
       </p:sp>
       <p:sp>
         <p:nvSpPr>
-          <p:cNvPr id="6" name="Text 4"/>
+          <p:cNvPr id="7" name="Text 5"/>
           <p:cNvSpPr/>
           <p:nvPr/>
         </p:nvSpPr>
@@ -5917,7 +10554,7 @@
                 <a:ea typeface="Aptos Display" pitchFamily="34" charset="-122"/>
                 <a:cs typeface="Aptos Display" pitchFamily="34" charset="-120"/>
               </a:rPr>
-              <a:t>Learning Objectives</a:t>
+              <a:t>How this module connects to the playbook</a:t>
             </a:r>
             <a:endParaRPr lang="en-US" sz="2700" dirty="0"/>
           </a:p>
@@ -5925,14 +10562,14 @@
       </p:sp>
       <p:sp>
         <p:nvSpPr>
-          <p:cNvPr id="7" name="Text 5"/>
-          <p:cNvSpPr/>
-          <p:nvPr/>
-        </p:nvSpPr>
-        <p:spPr>
-          <a:xfrm>
-            <a:off x="822960" y="1325880"/>
-            <a:ext cx="10378440" cy="4800600"/>
+          <p:cNvPr id="8" name="Text 6"/>
+          <p:cNvSpPr/>
+          <p:nvPr/>
+        </p:nvSpPr>
+        <p:spPr>
+          <a:xfrm>
+            <a:off x="868680" y="1417320"/>
+            <a:ext cx="6903720" cy="4480560"/>
           </a:xfrm>
           <a:prstGeom prst="rect">
             <a:avLst/>
@@ -5947,7 +10584,7 @@
           <a:lstStyle/>
           <a:p>
             <a:r>
-              <a:rPr lang="en-US" sz="1450" dirty="0">
+              <a:rPr lang="en-US" sz="1540" dirty="0">
                 <a:solidFill>
                   <a:srgbClr val="17364A"/>
                 </a:solidFill>
@@ -5955,13 +10592,13 @@
                 <a:ea typeface="Aptos" pitchFamily="34" charset="-122"/>
                 <a:cs typeface="Aptos" pitchFamily="34" charset="-120"/>
               </a:rPr>
-              <a:t>Explain why AI sustainability must be planned before launch.</a:t>
-            </a:r>
-            <a:endParaRPr lang="en-US" sz="1450" dirty="0"/>
-          </a:p>
-          <a:p>
-            <a:r>
-              <a:rPr lang="en-US" sz="1450" dirty="0">
+              <a:t>Play 11: Build and Deploy AI Solutions - This lesson informs Play 11 by helping learners connect the lesson topic to build and deploy.</a:t>
+            </a:r>
+            <a:endParaRPr lang="en-US" sz="1540" dirty="0"/>
+          </a:p>
+          <a:p>
+            <a:r>
+              <a:rPr lang="en-US" sz="1540" dirty="0">
                 <a:solidFill>
                   <a:srgbClr val="17364A"/>
                 </a:solidFill>
@@ -5969,13 +10606,13 @@
                 <a:ea typeface="Aptos" pitchFamily="34" charset="-122"/>
                 <a:cs typeface="Aptos" pitchFamily="34" charset="-120"/>
               </a:rPr>
-              <a:t>Identify lifecycle costs and responsibilities for AI tools and workflows.</a:t>
-            </a:r>
-            <a:endParaRPr lang="en-US" sz="1450" dirty="0"/>
-          </a:p>
-          <a:p>
-            <a:r>
-              <a:rPr lang="en-US" sz="1450" dirty="0">
+              <a:t>Play 8: Develop a Funding Strategy - This lesson informs Play 8 by helping learners connect the lesson topic to develop a funding.</a:t>
+            </a:r>
+            <a:endParaRPr lang="en-US" sz="1540" dirty="0"/>
+          </a:p>
+          <a:p>
+            <a:r>
+              <a:rPr lang="en-US" sz="1540" dirty="0">
                 <a:solidFill>
                   <a:srgbClr val="17364A"/>
                 </a:solidFill>
@@ -5983,13 +10620,13 @@
                 <a:ea typeface="Aptos" pitchFamily="34" charset="-122"/>
                 <a:cs typeface="Aptos" pitchFamily="34" charset="-120"/>
               </a:rPr>
-              <a:t>Develop sustainability criteria for moving from pilot to operational use.</a:t>
-            </a:r>
-            <a:endParaRPr lang="en-US" sz="1450" dirty="0"/>
-          </a:p>
-          <a:p>
-            <a:r>
-              <a:rPr lang="en-US" sz="1450" dirty="0">
+              <a:t>Play 3: Establish AI Governance - This lesson informs Play 3 by helping learners connect the lesson topic to establish ai governance.</a:t>
+            </a:r>
+            <a:endParaRPr lang="en-US" sz="1540" dirty="0"/>
+          </a:p>
+          <a:p>
+            <a:r>
+              <a:rPr lang="en-US" sz="1540" dirty="0">
                 <a:solidFill>
                   <a:srgbClr val="17364A"/>
                 </a:solidFill>
@@ -5997,13 +10634,106 @@
                 <a:ea typeface="Aptos" pitchFamily="34" charset="-122"/>
                 <a:cs typeface="Aptos" pitchFamily="34" charset="-120"/>
               </a:rPr>
-              <a:t>Define sunset, pause, and retirement criteria for AI use cases.</a:t>
-            </a:r>
-            <a:endParaRPr lang="en-US" sz="1450" dirty="0"/>
-          </a:p>
-          <a:p>
-            <a:r>
-              <a:rPr lang="en-US" sz="1450" dirty="0">
+              <a:t>Play 1: Vision &amp; Guardrails - This lesson informs Play 1 by helping learners connect the lesson topic to vision &amp; guardrails work in.</a:t>
+            </a:r>
+            <a:endParaRPr lang="en-US" sz="1540" dirty="0"/>
+          </a:p>
+        </p:txBody>
+      </p:sp>
+      <p:sp>
+        <p:nvSpPr>
+          <p:cNvPr id="9" name="Shape 7"/>
+          <p:cNvSpPr/>
+          <p:nvPr/>
+        </p:nvSpPr>
+        <p:spPr>
+          <a:xfrm>
+            <a:off x="8046720" y="1417320"/>
+            <a:ext cx="3063240" cy="2103120"/>
+          </a:xfrm>
+          <a:prstGeom prst="roundRect">
+            <a:avLst>
+              <a:gd name="adj" fmla="val 5217"/>
+            </a:avLst>
+          </a:prstGeom>
+          <a:solidFill>
+            <a:srgbClr val="EEF8ED"/>
+          </a:solidFill>
+          <a:ln w="12700">
+            <a:solidFill>
+              <a:srgbClr val="B9D7E6"/>
+            </a:solidFill>
+            <a:prstDash val="solid"/>
+          </a:ln>
+        </p:spPr>
+      </p:sp>
+      <p:sp>
+        <p:nvSpPr>
+          <p:cNvPr id="10" name="Text 8"/>
+          <p:cNvSpPr/>
+          <p:nvPr/>
+        </p:nvSpPr>
+        <p:spPr>
+          <a:xfrm>
+            <a:off x="8211312" y="1563624"/>
+            <a:ext cx="2734056" cy="201168"/>
+          </a:xfrm>
+          <a:prstGeom prst="rect">
+            <a:avLst/>
+          </a:prstGeom>
+          <a:noFill/>
+          <a:ln/>
+        </p:spPr>
+        <p:txBody>
+          <a:bodyPr wrap="square" lIns="0" tIns="0" rIns="0" bIns="0" rtlCol="0" anchor="ctr"/>
+          <a:lstStyle/>
+          <a:p>
+            <a:pPr indent="0" marL="0">
+              <a:buNone/>
+            </a:pPr>
+            <a:r>
+              <a:rPr lang="en-US" sz="950" b="1" dirty="0">
+                <a:solidFill>
+                  <a:srgbClr val="0068B7"/>
+                </a:solidFill>
+                <a:latin typeface="Aptos" pitchFamily="34" charset="0"/>
+                <a:ea typeface="Aptos" pitchFamily="34" charset="-122"/>
+                <a:cs typeface="Aptos" pitchFamily="34" charset="-120"/>
+              </a:rPr>
+              <a:t>Apply the lesson</a:t>
+            </a:r>
+            <a:endParaRPr lang="en-US" sz="950" dirty="0"/>
+          </a:p>
+        </p:txBody>
+      </p:sp>
+      <p:sp>
+        <p:nvSpPr>
+          <p:cNvPr id="11" name="Text 9"/>
+          <p:cNvSpPr/>
+          <p:nvPr/>
+        </p:nvSpPr>
+        <p:spPr>
+          <a:xfrm>
+            <a:off x="8211312" y="1856232"/>
+            <a:ext cx="2734056" cy="1536192"/>
+          </a:xfrm>
+          <a:prstGeom prst="rect">
+            <a:avLst/>
+          </a:prstGeom>
+          <a:noFill/>
+          <a:ln/>
+        </p:spPr>
+        <p:txBody>
+          <a:bodyPr wrap="square" lIns="0" tIns="0" rIns="0" bIns="0" rtlCol="0" anchor="t">
+            <a:normAutofit/>
+          </a:bodyPr>
+          <a:lstStyle/>
+          <a:p>
+            <a:pPr indent="0" marL="0">
+              <a:buNone/>
+            </a:pPr>
+            <a:r>
+              <a:rPr lang="en-US" sz="1250" dirty="0">
                 <a:solidFill>
                   <a:srgbClr val="17364A"/>
                 </a:solidFill>
@@ -6011,9 +10741,116 @@
                 <a:ea typeface="Aptos" pitchFamily="34" charset="-122"/>
                 <a:cs typeface="Aptos" pitchFamily="34" charset="-120"/>
               </a:rPr>
-              <a:t>Produce an AI lifecycle funding and sustainability plan.</a:t>
-            </a:r>
-            <a:endParaRPr lang="en-US" sz="1450" dirty="0"/>
+              <a:t>Use the related plays to identify decisions, participants, timing, approvals, and documentation needed for responsible implementation.</a:t>
+            </a:r>
+            <a:endParaRPr lang="en-US" sz="1250" dirty="0"/>
+          </a:p>
+        </p:txBody>
+      </p:sp>
+      <p:sp>
+        <p:nvSpPr>
+          <p:cNvPr id="12" name="Shape 10"/>
+          <p:cNvSpPr/>
+          <p:nvPr/>
+        </p:nvSpPr>
+        <p:spPr>
+          <a:xfrm>
+            <a:off x="8046720" y="3794760"/>
+            <a:ext cx="3063240" cy="1508760"/>
+          </a:xfrm>
+          <a:prstGeom prst="roundRect">
+            <a:avLst>
+              <a:gd name="adj" fmla="val 7273"/>
+            </a:avLst>
+          </a:prstGeom>
+          <a:solidFill>
+            <a:srgbClr val="FFF4D9"/>
+          </a:solidFill>
+          <a:ln w="12700">
+            <a:solidFill>
+              <a:srgbClr val="B9D7E6"/>
+            </a:solidFill>
+            <a:prstDash val="solid"/>
+          </a:ln>
+        </p:spPr>
+      </p:sp>
+      <p:sp>
+        <p:nvSpPr>
+          <p:cNvPr id="13" name="Text 11"/>
+          <p:cNvSpPr/>
+          <p:nvPr/>
+        </p:nvSpPr>
+        <p:spPr>
+          <a:xfrm>
+            <a:off x="8211312" y="3941064"/>
+            <a:ext cx="2734056" cy="201168"/>
+          </a:xfrm>
+          <a:prstGeom prst="rect">
+            <a:avLst/>
+          </a:prstGeom>
+          <a:noFill/>
+          <a:ln/>
+        </p:spPr>
+        <p:txBody>
+          <a:bodyPr wrap="square" lIns="0" tIns="0" rIns="0" bIns="0" rtlCol="0" anchor="ctr"/>
+          <a:lstStyle/>
+          <a:p>
+            <a:pPr indent="0" marL="0">
+              <a:buNone/>
+            </a:pPr>
+            <a:r>
+              <a:rPr lang="en-US" sz="950" b="1" dirty="0">
+                <a:solidFill>
+                  <a:srgbClr val="0068B7"/>
+                </a:solidFill>
+                <a:latin typeface="Aptos" pitchFamily="34" charset="0"/>
+                <a:ea typeface="Aptos" pitchFamily="34" charset="-122"/>
+                <a:cs typeface="Aptos" pitchFamily="34" charset="-120"/>
+              </a:rPr>
+              <a:t>Keep in mind</a:t>
+            </a:r>
+            <a:endParaRPr lang="en-US" sz="950" dirty="0"/>
+          </a:p>
+        </p:txBody>
+      </p:sp>
+      <p:sp>
+        <p:nvSpPr>
+          <p:cNvPr id="14" name="Text 12"/>
+          <p:cNvSpPr/>
+          <p:nvPr/>
+        </p:nvSpPr>
+        <p:spPr>
+          <a:xfrm>
+            <a:off x="8211312" y="4233672"/>
+            <a:ext cx="2734056" cy="941832"/>
+          </a:xfrm>
+          <a:prstGeom prst="rect">
+            <a:avLst/>
+          </a:prstGeom>
+          <a:noFill/>
+          <a:ln/>
+        </p:spPr>
+        <p:txBody>
+          <a:bodyPr wrap="square" lIns="0" tIns="0" rIns="0" bIns="0" rtlCol="0" anchor="t">
+            <a:normAutofit/>
+          </a:bodyPr>
+          <a:lstStyle/>
+          <a:p>
+            <a:pPr indent="0" marL="0">
+              <a:buNone/>
+            </a:pPr>
+            <a:r>
+              <a:rPr lang="en-US" sz="1250" dirty="0">
+                <a:solidFill>
+                  <a:srgbClr val="17364A"/>
+                </a:solidFill>
+                <a:latin typeface="Aptos" pitchFamily="34" charset="0"/>
+                <a:ea typeface="Aptos" pitchFamily="34" charset="-122"/>
+                <a:cs typeface="Aptos" pitchFamily="34" charset="-120"/>
+              </a:rPr>
+              <a:t>The playbook connection helps turn training into agency work, not just individual knowledge.</a:t>
+            </a:r>
+            <a:endParaRPr lang="en-US" sz="1250" dirty="0"/>
           </a:p>
         </p:txBody>
       </p:sp>
@@ -6076,7 +10913,32 @@
       </p:sp>
       <p:sp>
         <p:nvSpPr>
-          <p:cNvPr id="3" name="Text 1"/>
+          <p:cNvPr id="3" name="Shape 1"/>
+          <p:cNvSpPr/>
+          <p:nvPr/>
+        </p:nvSpPr>
+        <p:spPr>
+          <a:xfrm>
+            <a:off x="0" y="164592"/>
+            <a:ext cx="146304" cy="6693408"/>
+          </a:xfrm>
+          <a:prstGeom prst="rect">
+            <a:avLst/>
+          </a:prstGeom>
+          <a:solidFill>
+            <a:srgbClr val="2F8A28"/>
+          </a:solidFill>
+          <a:ln w="12700">
+            <a:solidFill>
+              <a:srgbClr val="2F8A28"/>
+            </a:solidFill>
+            <a:prstDash val="solid"/>
+          </a:ln>
+        </p:spPr>
+      </p:sp>
+      <p:sp>
+        <p:nvSpPr>
+          <p:cNvPr id="4" name="Text 2"/>
           <p:cNvSpPr/>
           <p:nvPr/>
         </p:nvSpPr>
@@ -6115,7 +10977,7 @@
       </p:sp>
       <p:sp>
         <p:nvSpPr>
-          <p:cNvPr id="4" name="Text 2"/>
+          <p:cNvPr id="5" name="Text 3"/>
           <p:cNvSpPr/>
           <p:nvPr/>
         </p:nvSpPr>
@@ -6154,7 +11016,7 @@
       </p:sp>
       <p:sp>
         <p:nvSpPr>
-          <p:cNvPr id="5" name="Text 3"/>
+          <p:cNvPr id="6" name="Text 4"/>
           <p:cNvSpPr/>
           <p:nvPr/>
         </p:nvSpPr>
@@ -6193,7 +11055,7 @@
       </p:sp>
       <p:sp>
         <p:nvSpPr>
-          <p:cNvPr id="6" name="Text 4"/>
+          <p:cNvPr id="7" name="Text 5"/>
           <p:cNvSpPr/>
           <p:nvPr/>
         </p:nvSpPr>
@@ -6226,7 +11088,7 @@
                 <a:ea typeface="Aptos Display" pitchFamily="34" charset="-122"/>
                 <a:cs typeface="Aptos Display" pitchFamily="34" charset="-120"/>
               </a:rPr>
-              <a:t>Module Overview</a:t>
+              <a:t>Related toolkit resources</a:t>
             </a:r>
             <a:endParaRPr lang="en-US" sz="2700" dirty="0"/>
           </a:p>
@@ -6234,32 +11096,192 @@
       </p:sp>
       <p:sp>
         <p:nvSpPr>
-          <p:cNvPr id="7" name="Text 5"/>
-          <p:cNvSpPr/>
-          <p:nvPr/>
-        </p:nvSpPr>
-        <p:spPr>
-          <a:xfrm>
-            <a:off x="822960" y="1325880"/>
-            <a:ext cx="10378440" cy="4800600"/>
-          </a:xfrm>
-          <a:prstGeom prst="rect">
-            <a:avLst/>
-          </a:prstGeom>
-          <a:noFill/>
-          <a:ln/>
-        </p:spPr>
-        <p:txBody>
-          <a:bodyPr wrap="square" lIns="1016" tIns="1016" rIns="1016" bIns="1016" rtlCol="0" anchor="t">
+          <p:cNvPr id="8" name="Text 6"/>
+          <p:cNvSpPr/>
+          <p:nvPr/>
+        </p:nvSpPr>
+        <p:spPr>
+          <a:xfrm>
+            <a:off x="868680" y="1417320"/>
+            <a:ext cx="6903720" cy="4480560"/>
+          </a:xfrm>
+          <a:prstGeom prst="rect">
+            <a:avLst/>
+          </a:prstGeom>
+          <a:noFill/>
+          <a:ln/>
+        </p:spPr>
+        <p:txBody>
+          <a:bodyPr wrap="square" lIns="635" tIns="635" rIns="635" bIns="635" rtlCol="0" anchor="t">
             <a:normAutofit/>
           </a:bodyPr>
           <a:lstStyle/>
           <a:p>
+            <a:r>
+              <a:rPr lang="en-US" sz="1460" dirty="0">
+                <a:solidFill>
+                  <a:srgbClr val="17364A"/>
+                </a:solidFill>
+                <a:latin typeface="Aptos" pitchFamily="34" charset="0"/>
+                <a:ea typeface="Aptos" pitchFamily="34" charset="-122"/>
+                <a:cs typeface="Aptos" pitchFamily="34" charset="-120"/>
+              </a:rPr>
+              <a:t>Tool 33: Funding Strategy Checklists (Checklist) - Use this tool to complete or strengthen the practical exercise for the module.</a:t>
+            </a:r>
+            <a:endParaRPr lang="en-US" sz="1460" dirty="0"/>
+          </a:p>
+          <a:p>
+            <a:r>
+              <a:rPr lang="en-US" sz="1460" dirty="0">
+                <a:solidFill>
+                  <a:srgbClr val="17364A"/>
+                </a:solidFill>
+                <a:latin typeface="Aptos" pitchFamily="34" charset="0"/>
+                <a:ea typeface="Aptos" pitchFamily="34" charset="-122"/>
+                <a:cs typeface="Aptos" pitchFamily="34" charset="-120"/>
+              </a:rPr>
+              <a:t>Tool 35: AI Total Cost of Ownership and Sustainability Worksheet (Worksheet) - Use this tool to complete or strengthen the practical.</a:t>
+            </a:r>
+            <a:endParaRPr lang="en-US" sz="1460" dirty="0"/>
+          </a:p>
+          <a:p>
+            <a:r>
+              <a:rPr lang="en-US" sz="1460" dirty="0">
+                <a:solidFill>
+                  <a:srgbClr val="17364A"/>
+                </a:solidFill>
+                <a:latin typeface="Aptos" pitchFamily="34" charset="0"/>
+                <a:ea typeface="Aptos" pitchFamily="34" charset="-122"/>
+                <a:cs typeface="Aptos" pitchFamily="34" charset="-120"/>
+              </a:rPr>
+              <a:t>Tool 32: Vendor Evaluation Checklist (Checklist) - Use this tool to complete or strengthen the practical exercise for the module.</a:t>
+            </a:r>
+            <a:endParaRPr lang="en-US" sz="1460" dirty="0"/>
+          </a:p>
+          <a:p>
+            <a:r>
+              <a:rPr lang="en-US" sz="1460" dirty="0">
+                <a:solidFill>
+                  <a:srgbClr val="17364A"/>
+                </a:solidFill>
+                <a:latin typeface="Aptos" pitchFamily="34" charset="0"/>
+                <a:ea typeface="Aptos" pitchFamily="34" charset="-122"/>
+                <a:cs typeface="Aptos" pitchFamily="34" charset="-120"/>
+              </a:rPr>
+              <a:t>Tool 34: STLT AI Procurement and Vendor Addendum (Checklist) - Use this tool to complete or strengthen the practical exercise for the.</a:t>
+            </a:r>
+            <a:endParaRPr lang="en-US" sz="1460" dirty="0"/>
+          </a:p>
+          <a:p>
+            <a:r>
+              <a:rPr lang="en-US" sz="1460" dirty="0">
+                <a:solidFill>
+                  <a:srgbClr val="17364A"/>
+                </a:solidFill>
+                <a:latin typeface="Aptos" pitchFamily="34" charset="0"/>
+                <a:ea typeface="Aptos" pitchFamily="34" charset="-122"/>
+                <a:cs typeface="Aptos" pitchFamily="34" charset="-120"/>
+              </a:rPr>
+              <a:t>Tool 3: Equity Impact Assessment Checklist (Checklist) - Use this tool to complete or strengthen the practical exercise for the.</a:t>
+            </a:r>
+            <a:endParaRPr lang="en-US" sz="1460" dirty="0"/>
+          </a:p>
+        </p:txBody>
+      </p:sp>
+      <p:sp>
+        <p:nvSpPr>
+          <p:cNvPr id="9" name="Shape 7"/>
+          <p:cNvSpPr/>
+          <p:nvPr/>
+        </p:nvSpPr>
+        <p:spPr>
+          <a:xfrm>
+            <a:off x="8046720" y="1417320"/>
+            <a:ext cx="3063240" cy="2103120"/>
+          </a:xfrm>
+          <a:prstGeom prst="roundRect">
+            <a:avLst>
+              <a:gd name="adj" fmla="val 5217"/>
+            </a:avLst>
+          </a:prstGeom>
+          <a:solidFill>
+            <a:srgbClr val="EAF6F8"/>
+          </a:solidFill>
+          <a:ln w="12700">
+            <a:solidFill>
+              <a:srgbClr val="B9D7E6"/>
+            </a:solidFill>
+            <a:prstDash val="solid"/>
+          </a:ln>
+        </p:spPr>
+      </p:sp>
+      <p:sp>
+        <p:nvSpPr>
+          <p:cNvPr id="10" name="Text 8"/>
+          <p:cNvSpPr/>
+          <p:nvPr/>
+        </p:nvSpPr>
+        <p:spPr>
+          <a:xfrm>
+            <a:off x="8211312" y="1563624"/>
+            <a:ext cx="2734056" cy="201168"/>
+          </a:xfrm>
+          <a:prstGeom prst="rect">
+            <a:avLst/>
+          </a:prstGeom>
+          <a:noFill/>
+          <a:ln/>
+        </p:spPr>
+        <p:txBody>
+          <a:bodyPr wrap="square" lIns="0" tIns="0" rIns="0" bIns="0" rtlCol="0" anchor="ctr"/>
+          <a:lstStyle/>
+          <a:p>
             <a:pPr indent="0" marL="0">
               <a:buNone/>
             </a:pPr>
             <a:r>
-              <a:rPr lang="en-US" sz="1420" dirty="0">
+              <a:rPr lang="en-US" sz="950" b="1" dirty="0">
+                <a:solidFill>
+                  <a:srgbClr val="0068B7"/>
+                </a:solidFill>
+                <a:latin typeface="Aptos" pitchFamily="34" charset="0"/>
+                <a:ea typeface="Aptos" pitchFamily="34" charset="-122"/>
+                <a:cs typeface="Aptos" pitchFamily="34" charset="-120"/>
+              </a:rPr>
+              <a:t>Use the tools</a:t>
+            </a:r>
+            <a:endParaRPr lang="en-US" sz="950" dirty="0"/>
+          </a:p>
+        </p:txBody>
+      </p:sp>
+      <p:sp>
+        <p:nvSpPr>
+          <p:cNvPr id="11" name="Text 9"/>
+          <p:cNvSpPr/>
+          <p:nvPr/>
+        </p:nvSpPr>
+        <p:spPr>
+          <a:xfrm>
+            <a:off x="8211312" y="1856232"/>
+            <a:ext cx="2734056" cy="1536192"/>
+          </a:xfrm>
+          <a:prstGeom prst="rect">
+            <a:avLst/>
+          </a:prstGeom>
+          <a:noFill/>
+          <a:ln/>
+        </p:spPr>
+        <p:txBody>
+          <a:bodyPr wrap="square" lIns="0" tIns="0" rIns="0" bIns="0" rtlCol="0" anchor="t">
+            <a:normAutofit/>
+          </a:bodyPr>
+          <a:lstStyle/>
+          <a:p>
+            <a:pPr indent="0" marL="0">
+              <a:buNone/>
+            </a:pPr>
+            <a:r>
+              <a:rPr lang="en-US" sz="1250" dirty="0">
                 <a:solidFill>
                   <a:srgbClr val="17364A"/>
                 </a:solidFill>
@@ -6267,9 +11289,116 @@
                 <a:ea typeface="Aptos" pitchFamily="34" charset="-122"/>
                 <a:cs typeface="Aptos" pitchFamily="34" charset="-120"/>
               </a:rPr>
-              <a:t>Responsible AI does not end at launch. AI tools require ongoing funding, staff time, monitoring, updates, vendor management, training, incident response, documentation, and eventual retirement. Sustainability planning ensures that AI-supported workflows do not become unfunded, unmonitored, or outdated after the initial pilot or grant period ends. This module helps leaders plan for the full AI lifecycle. It focuses on funding models, ownership, maintenance, monitoring, contract renewal, retraining, policy updates, user support, accessibility updates, cybersecurity review, and sunset criteria. The module emphasizes that a tool should not be approved if the agency cannot reasonably sustain the safeguards needed for responsible use.</a:t>
-            </a:r>
-            <a:endParaRPr lang="en-US" sz="1420" dirty="0"/>
+              <a:t>Use linked tools when your department needs a structured worksheet, template, checklist, review process, or documentation artifact.</a:t>
+            </a:r>
+            <a:endParaRPr lang="en-US" sz="1250" dirty="0"/>
+          </a:p>
+        </p:txBody>
+      </p:sp>
+      <p:sp>
+        <p:nvSpPr>
+          <p:cNvPr id="12" name="Shape 10"/>
+          <p:cNvSpPr/>
+          <p:nvPr/>
+        </p:nvSpPr>
+        <p:spPr>
+          <a:xfrm>
+            <a:off x="8046720" y="3794760"/>
+            <a:ext cx="3063240" cy="1508760"/>
+          </a:xfrm>
+          <a:prstGeom prst="roundRect">
+            <a:avLst>
+              <a:gd name="adj" fmla="val 7273"/>
+            </a:avLst>
+          </a:prstGeom>
+          <a:solidFill>
+            <a:srgbClr val="EEF8ED"/>
+          </a:solidFill>
+          <a:ln w="12700">
+            <a:solidFill>
+              <a:srgbClr val="B9D7E6"/>
+            </a:solidFill>
+            <a:prstDash val="solid"/>
+          </a:ln>
+        </p:spPr>
+      </p:sp>
+      <p:sp>
+        <p:nvSpPr>
+          <p:cNvPr id="13" name="Text 11"/>
+          <p:cNvSpPr/>
+          <p:nvPr/>
+        </p:nvSpPr>
+        <p:spPr>
+          <a:xfrm>
+            <a:off x="8211312" y="3941064"/>
+            <a:ext cx="2734056" cy="201168"/>
+          </a:xfrm>
+          <a:prstGeom prst="rect">
+            <a:avLst/>
+          </a:prstGeom>
+          <a:noFill/>
+          <a:ln/>
+        </p:spPr>
+        <p:txBody>
+          <a:bodyPr wrap="square" lIns="0" tIns="0" rIns="0" bIns="0" rtlCol="0" anchor="ctr"/>
+          <a:lstStyle/>
+          <a:p>
+            <a:pPr indent="0" marL="0">
+              <a:buNone/>
+            </a:pPr>
+            <a:r>
+              <a:rPr lang="en-US" sz="950" b="1" dirty="0">
+                <a:solidFill>
+                  <a:srgbClr val="0068B7"/>
+                </a:solidFill>
+                <a:latin typeface="Aptos" pitchFamily="34" charset="0"/>
+                <a:ea typeface="Aptos" pitchFamily="34" charset="-122"/>
+                <a:cs typeface="Aptos" pitchFamily="34" charset="-120"/>
+              </a:rPr>
+              <a:t>Avoid duplication</a:t>
+            </a:r>
+            <a:endParaRPr lang="en-US" sz="950" dirty="0"/>
+          </a:p>
+        </p:txBody>
+      </p:sp>
+      <p:sp>
+        <p:nvSpPr>
+          <p:cNvPr id="14" name="Text 12"/>
+          <p:cNvSpPr/>
+          <p:nvPr/>
+        </p:nvSpPr>
+        <p:spPr>
+          <a:xfrm>
+            <a:off x="8211312" y="4233672"/>
+            <a:ext cx="2734056" cy="941832"/>
+          </a:xfrm>
+          <a:prstGeom prst="rect">
+            <a:avLst/>
+          </a:prstGeom>
+          <a:noFill/>
+          <a:ln/>
+        </p:spPr>
+        <p:txBody>
+          <a:bodyPr wrap="square" lIns="0" tIns="0" rIns="0" bIns="0" rtlCol="0" anchor="t">
+            <a:normAutofit/>
+          </a:bodyPr>
+          <a:lstStyle/>
+          <a:p>
+            <a:pPr indent="0" marL="0">
+              <a:buNone/>
+            </a:pPr>
+            <a:r>
+              <a:rPr lang="en-US" sz="1250" dirty="0">
+                <a:solidFill>
+                  <a:srgbClr val="17364A"/>
+                </a:solidFill>
+                <a:latin typeface="Aptos" pitchFamily="34" charset="0"/>
+                <a:ea typeface="Aptos" pitchFamily="34" charset="-122"/>
+                <a:cs typeface="Aptos" pitchFamily="34" charset="-120"/>
+              </a:rPr>
+              <a:t>If your department already has a strong equivalent tool, adapt or use the existing process instead of recreating it.</a:t>
+            </a:r>
+            <a:endParaRPr lang="en-US" sz="1250" dirty="0"/>
           </a:p>
         </p:txBody>
       </p:sp>
@@ -6332,7 +11461,32 @@
       </p:sp>
       <p:sp>
         <p:nvSpPr>
-          <p:cNvPr id="3" name="Text 1"/>
+          <p:cNvPr id="3" name="Shape 1"/>
+          <p:cNvSpPr/>
+          <p:nvPr/>
+        </p:nvSpPr>
+        <p:spPr>
+          <a:xfrm>
+            <a:off x="0" y="164592"/>
+            <a:ext cx="146304" cy="6693408"/>
+          </a:xfrm>
+          <a:prstGeom prst="rect">
+            <a:avLst/>
+          </a:prstGeom>
+          <a:solidFill>
+            <a:srgbClr val="2F8A28"/>
+          </a:solidFill>
+          <a:ln w="12700">
+            <a:solidFill>
+              <a:srgbClr val="2F8A28"/>
+            </a:solidFill>
+            <a:prstDash val="solid"/>
+          </a:ln>
+        </p:spPr>
+      </p:sp>
+      <p:sp>
+        <p:nvSpPr>
+          <p:cNvPr id="4" name="Text 2"/>
           <p:cNvSpPr/>
           <p:nvPr/>
         </p:nvSpPr>
@@ -6371,7 +11525,7 @@
       </p:sp>
       <p:sp>
         <p:nvSpPr>
-          <p:cNvPr id="4" name="Text 2"/>
+          <p:cNvPr id="5" name="Text 3"/>
           <p:cNvSpPr/>
           <p:nvPr/>
         </p:nvSpPr>
@@ -6410,7 +11564,7 @@
       </p:sp>
       <p:sp>
         <p:nvSpPr>
-          <p:cNvPr id="5" name="Text 3"/>
+          <p:cNvPr id="6" name="Text 4"/>
           <p:cNvSpPr/>
           <p:nvPr/>
         </p:nvSpPr>
@@ -6449,13 +11603,77 @@
       </p:sp>
       <p:sp>
         <p:nvSpPr>
-          <p:cNvPr id="6" name="Text 4"/>
+          <p:cNvPr id="7" name="Shape 5"/>
           <p:cNvSpPr/>
           <p:nvPr/>
         </p:nvSpPr>
         <p:spPr>
           <a:xfrm>
             <a:off x="640080" y="658368"/>
+            <a:ext cx="420624" cy="420624"/>
+          </a:xfrm>
+          <a:prstGeom prst="ellipse">
+            <a:avLst/>
+          </a:prstGeom>
+          <a:solidFill>
+            <a:srgbClr val="0068B7"/>
+          </a:solidFill>
+          <a:ln w="12700">
+            <a:solidFill>
+              <a:srgbClr val="0068B7"/>
+            </a:solidFill>
+            <a:prstDash val="solid"/>
+          </a:ln>
+        </p:spPr>
+      </p:sp>
+      <p:sp>
+        <p:nvSpPr>
+          <p:cNvPr id="8" name="Text 6"/>
+          <p:cNvSpPr/>
+          <p:nvPr/>
+        </p:nvSpPr>
+        <p:spPr>
+          <a:xfrm>
+            <a:off x="640080" y="731520"/>
+            <a:ext cx="420624" cy="164592"/>
+          </a:xfrm>
+          <a:prstGeom prst="rect">
+            <a:avLst/>
+          </a:prstGeom>
+          <a:noFill/>
+          <a:ln/>
+        </p:spPr>
+        <p:txBody>
+          <a:bodyPr wrap="square" lIns="0" tIns="0" rIns="0" bIns="0" rtlCol="0" anchor="ctr"/>
+          <a:lstStyle/>
+          <a:p>
+            <a:pPr algn="ctr" indent="0" marL="0">
+              <a:buNone/>
+            </a:pPr>
+            <a:r>
+              <a:rPr lang="en-US" sz="1100" b="1" dirty="0">
+                <a:solidFill>
+                  <a:srgbClr val="FFFFFF"/>
+                </a:solidFill>
+                <a:latin typeface="Aptos" pitchFamily="34" charset="0"/>
+                <a:ea typeface="Aptos" pitchFamily="34" charset="-122"/>
+                <a:cs typeface="Aptos" pitchFamily="34" charset="-120"/>
+              </a:rPr>
+              <a:t>1</a:t>
+            </a:r>
+            <a:endParaRPr lang="en-US" sz="1100" dirty="0"/>
+          </a:p>
+        </p:txBody>
+      </p:sp>
+      <p:sp>
+        <p:nvSpPr>
+          <p:cNvPr id="9" name="Text 7"/>
+          <p:cNvSpPr/>
+          <p:nvPr/>
+        </p:nvSpPr>
+        <p:spPr>
+          <a:xfrm>
+            <a:off x="640080" y="621792"/>
             <a:ext cx="10881360" cy="566928"/>
           </a:xfrm>
           <a:prstGeom prst="rect">
@@ -6482,7 +11700,7 @@
                 <a:ea typeface="Aptos Display" pitchFamily="34" charset="-122"/>
                 <a:cs typeface="Aptos Display" pitchFamily="34" charset="-120"/>
               </a:rPr>
-              <a:t>Jurisdiction and Agency Policy Note</a:t>
+              <a:t>Learning Objectives</a:t>
             </a:r>
             <a:endParaRPr lang="en-US" sz="2700" dirty="0"/>
           </a:p>
@@ -6490,32 +11708,178 @@
       </p:sp>
       <p:sp>
         <p:nvSpPr>
-          <p:cNvPr id="7" name="Text 5"/>
-          <p:cNvSpPr/>
-          <p:nvPr/>
-        </p:nvSpPr>
-        <p:spPr>
-          <a:xfrm>
-            <a:off x="822960" y="1325880"/>
-            <a:ext cx="10378440" cy="4800600"/>
-          </a:xfrm>
-          <a:prstGeom prst="rect">
-            <a:avLst/>
-          </a:prstGeom>
-          <a:noFill/>
-          <a:ln/>
-        </p:spPr>
-        <p:txBody>
-          <a:bodyPr wrap="square" lIns="1016" tIns="1016" rIns="1016" bIns="1016" rtlCol="0" anchor="t">
+          <p:cNvPr id="10" name="Text 8"/>
+          <p:cNvSpPr/>
+          <p:nvPr/>
+        </p:nvSpPr>
+        <p:spPr>
+          <a:xfrm>
+            <a:off x="868680" y="1417320"/>
+            <a:ext cx="6675120" cy="4434840"/>
+          </a:xfrm>
+          <a:prstGeom prst="rect">
+            <a:avLst/>
+          </a:prstGeom>
+          <a:noFill/>
+          <a:ln/>
+        </p:spPr>
+        <p:txBody>
+          <a:bodyPr wrap="square" lIns="635" tIns="635" rIns="635" bIns="635" rtlCol="0" anchor="t">
             <a:normAutofit/>
           </a:bodyPr>
           <a:lstStyle/>
           <a:p>
+            <a:r>
+              <a:rPr lang="en-US" sz="1700" dirty="0">
+                <a:solidFill>
+                  <a:srgbClr val="17364A"/>
+                </a:solidFill>
+                <a:latin typeface="Aptos" pitchFamily="34" charset="0"/>
+                <a:ea typeface="Aptos" pitchFamily="34" charset="-122"/>
+                <a:cs typeface="Aptos" pitchFamily="34" charset="-120"/>
+              </a:rPr>
+              <a:t>Explain why AI sustainability must be planned before launch.</a:t>
+            </a:r>
+            <a:endParaRPr lang="en-US" sz="1700" dirty="0"/>
+          </a:p>
+          <a:p>
+            <a:r>
+              <a:rPr lang="en-US" sz="1700" dirty="0">
+                <a:solidFill>
+                  <a:srgbClr val="17364A"/>
+                </a:solidFill>
+                <a:latin typeface="Aptos" pitchFamily="34" charset="0"/>
+                <a:ea typeface="Aptos" pitchFamily="34" charset="-122"/>
+                <a:cs typeface="Aptos" pitchFamily="34" charset="-120"/>
+              </a:rPr>
+              <a:t>Identify lifecycle costs and responsibilities for AI tools and workflows.</a:t>
+            </a:r>
+            <a:endParaRPr lang="en-US" sz="1700" dirty="0"/>
+          </a:p>
+          <a:p>
+            <a:r>
+              <a:rPr lang="en-US" sz="1700" dirty="0">
+                <a:solidFill>
+                  <a:srgbClr val="17364A"/>
+                </a:solidFill>
+                <a:latin typeface="Aptos" pitchFamily="34" charset="0"/>
+                <a:ea typeface="Aptos" pitchFamily="34" charset="-122"/>
+                <a:cs typeface="Aptos" pitchFamily="34" charset="-120"/>
+              </a:rPr>
+              <a:t>Develop sustainability criteria for moving from pilot to operational use.</a:t>
+            </a:r>
+            <a:endParaRPr lang="en-US" sz="1700" dirty="0"/>
+          </a:p>
+          <a:p>
+            <a:r>
+              <a:rPr lang="en-US" sz="1700" dirty="0">
+                <a:solidFill>
+                  <a:srgbClr val="17364A"/>
+                </a:solidFill>
+                <a:latin typeface="Aptos" pitchFamily="34" charset="0"/>
+                <a:ea typeface="Aptos" pitchFamily="34" charset="-122"/>
+                <a:cs typeface="Aptos" pitchFamily="34" charset="-120"/>
+              </a:rPr>
+              <a:t>Define sunset, pause, and retirement criteria for AI use cases.</a:t>
+            </a:r>
+            <a:endParaRPr lang="en-US" sz="1700" dirty="0"/>
+          </a:p>
+        </p:txBody>
+      </p:sp>
+      <p:sp>
+        <p:nvSpPr>
+          <p:cNvPr id="11" name="Shape 9"/>
+          <p:cNvSpPr/>
+          <p:nvPr/>
+        </p:nvSpPr>
+        <p:spPr>
+          <a:xfrm>
+            <a:off x="7909560" y="1417320"/>
+            <a:ext cx="3154680" cy="1828800"/>
+          </a:xfrm>
+          <a:prstGeom prst="roundRect">
+            <a:avLst>
+              <a:gd name="adj" fmla="val 6000"/>
+            </a:avLst>
+          </a:prstGeom>
+          <a:solidFill>
+            <a:srgbClr val="EEF8ED"/>
+          </a:solidFill>
+          <a:ln w="12700">
+            <a:solidFill>
+              <a:srgbClr val="B9D7E6"/>
+            </a:solidFill>
+            <a:prstDash val="solid"/>
+          </a:ln>
+        </p:spPr>
+      </p:sp>
+      <p:sp>
+        <p:nvSpPr>
+          <p:cNvPr id="12" name="Text 10"/>
+          <p:cNvSpPr/>
+          <p:nvPr/>
+        </p:nvSpPr>
+        <p:spPr>
+          <a:xfrm>
+            <a:off x="8074152" y="1563624"/>
+            <a:ext cx="2825496" cy="201168"/>
+          </a:xfrm>
+          <a:prstGeom prst="rect">
+            <a:avLst/>
+          </a:prstGeom>
+          <a:noFill/>
+          <a:ln/>
+        </p:spPr>
+        <p:txBody>
+          <a:bodyPr wrap="square" lIns="0" tIns="0" rIns="0" bIns="0" rtlCol="0" anchor="ctr"/>
+          <a:lstStyle/>
+          <a:p>
             <a:pPr indent="0" marL="0">
               <a:buNone/>
             </a:pPr>
             <a:r>
-              <a:rPr lang="en-US" sz="1420" dirty="0">
+              <a:rPr lang="en-US" sz="950" b="1" dirty="0">
+                <a:solidFill>
+                  <a:srgbClr val="0068B7"/>
+                </a:solidFill>
+                <a:latin typeface="Aptos" pitchFamily="34" charset="0"/>
+                <a:ea typeface="Aptos" pitchFamily="34" charset="-122"/>
+                <a:cs typeface="Aptos" pitchFamily="34" charset="-120"/>
+              </a:rPr>
+              <a:t>Key idea</a:t>
+            </a:r>
+            <a:endParaRPr lang="en-US" sz="950" dirty="0"/>
+          </a:p>
+        </p:txBody>
+      </p:sp>
+      <p:sp>
+        <p:nvSpPr>
+          <p:cNvPr id="13" name="Text 11"/>
+          <p:cNvSpPr/>
+          <p:nvPr/>
+        </p:nvSpPr>
+        <p:spPr>
+          <a:xfrm>
+            <a:off x="8074152" y="1856232"/>
+            <a:ext cx="2825496" cy="1261872"/>
+          </a:xfrm>
+          <a:prstGeom prst="rect">
+            <a:avLst/>
+          </a:prstGeom>
+          <a:noFill/>
+          <a:ln/>
+        </p:spPr>
+        <p:txBody>
+          <a:bodyPr wrap="square" lIns="0" tIns="0" rIns="0" bIns="0" rtlCol="0" anchor="t">
+            <a:normAutofit/>
+          </a:bodyPr>
+          <a:lstStyle/>
+          <a:p>
+            <a:pPr indent="0" marL="0">
+              <a:buNone/>
+            </a:pPr>
+            <a:r>
+              <a:rPr lang="en-US" sz="1250" dirty="0">
                 <a:solidFill>
                   <a:srgbClr val="17364A"/>
                 </a:solidFill>
@@ -6523,9 +11887,116 @@
                 <a:ea typeface="Aptos" pitchFamily="34" charset="-122"/>
                 <a:cs typeface="Aptos" pitchFamily="34" charset="-120"/>
               </a:rPr>
-              <a:t>This national-level module is intended for training and planning purposes. It does not replace legal, privacy, procurement, civil rights, records, or agency policy review. Learners should confirm applicable requirements in their own jurisdiction and organization before implementing AI-supported workflows.</a:t>
-            </a:r>
-            <a:endParaRPr lang="en-US" sz="1420" dirty="0"/>
+              <a:t>Explain why AI sustainability must be planned before launch.</a:t>
+            </a:r>
+            <a:endParaRPr lang="en-US" sz="1250" dirty="0"/>
+          </a:p>
+        </p:txBody>
+      </p:sp>
+      <p:sp>
+        <p:nvSpPr>
+          <p:cNvPr id="14" name="Shape 12"/>
+          <p:cNvSpPr/>
+          <p:nvPr/>
+        </p:nvSpPr>
+        <p:spPr>
+          <a:xfrm>
+            <a:off x="7909560" y="3520440"/>
+            <a:ext cx="3154680" cy="1737360"/>
+          </a:xfrm>
+          <a:prstGeom prst="roundRect">
+            <a:avLst>
+              <a:gd name="adj" fmla="val 6316"/>
+            </a:avLst>
+          </a:prstGeom>
+          <a:solidFill>
+            <a:srgbClr val="EAF6F8"/>
+          </a:solidFill>
+          <a:ln w="12700">
+            <a:solidFill>
+              <a:srgbClr val="B9D7E6"/>
+            </a:solidFill>
+            <a:prstDash val="solid"/>
+          </a:ln>
+        </p:spPr>
+      </p:sp>
+      <p:sp>
+        <p:nvSpPr>
+          <p:cNvPr id="15" name="Text 13"/>
+          <p:cNvSpPr/>
+          <p:nvPr/>
+        </p:nvSpPr>
+        <p:spPr>
+          <a:xfrm>
+            <a:off x="8074152" y="3666744"/>
+            <a:ext cx="2825496" cy="201168"/>
+          </a:xfrm>
+          <a:prstGeom prst="rect">
+            <a:avLst/>
+          </a:prstGeom>
+          <a:noFill/>
+          <a:ln/>
+        </p:spPr>
+        <p:txBody>
+          <a:bodyPr wrap="square" lIns="0" tIns="0" rIns="0" bIns="0" rtlCol="0" anchor="ctr"/>
+          <a:lstStyle/>
+          <a:p>
+            <a:pPr indent="0" marL="0">
+              <a:buNone/>
+            </a:pPr>
+            <a:r>
+              <a:rPr lang="en-US" sz="950" b="1" dirty="0">
+                <a:solidFill>
+                  <a:srgbClr val="0068B7"/>
+                </a:solidFill>
+                <a:latin typeface="Aptos" pitchFamily="34" charset="0"/>
+                <a:ea typeface="Aptos" pitchFamily="34" charset="-122"/>
+                <a:cs typeface="Aptos" pitchFamily="34" charset="-120"/>
+              </a:rPr>
+              <a:t>Use this for</a:t>
+            </a:r>
+            <a:endParaRPr lang="en-US" sz="950" dirty="0"/>
+          </a:p>
+        </p:txBody>
+      </p:sp>
+      <p:sp>
+        <p:nvSpPr>
+          <p:cNvPr id="16" name="Text 14"/>
+          <p:cNvSpPr/>
+          <p:nvPr/>
+        </p:nvSpPr>
+        <p:spPr>
+          <a:xfrm>
+            <a:off x="8074152" y="3959352"/>
+            <a:ext cx="2825496" cy="1170432"/>
+          </a:xfrm>
+          <a:prstGeom prst="rect">
+            <a:avLst/>
+          </a:prstGeom>
+          <a:noFill/>
+          <a:ln/>
+        </p:spPr>
+        <p:txBody>
+          <a:bodyPr wrap="square" lIns="0" tIns="0" rIns="0" bIns="0" rtlCol="0" anchor="t">
+            <a:normAutofit/>
+          </a:bodyPr>
+          <a:lstStyle/>
+          <a:p>
+            <a:pPr indent="0" marL="0">
+              <a:buNone/>
+            </a:pPr>
+            <a:r>
+              <a:rPr lang="en-US" sz="1250" dirty="0">
+                <a:solidFill>
+                  <a:srgbClr val="17364A"/>
+                </a:solidFill>
+                <a:latin typeface="Aptos" pitchFamily="34" charset="0"/>
+                <a:ea typeface="Aptos" pitchFamily="34" charset="-122"/>
+                <a:cs typeface="Aptos" pitchFamily="34" charset="-120"/>
+              </a:rPr>
+              <a:t>Connect the concept to public health decisions, safeguards, documentation, or implementation work.</a:t>
+            </a:r>
+            <a:endParaRPr lang="en-US" sz="1250" dirty="0"/>
           </a:p>
         </p:txBody>
       </p:sp>
@@ -6588,7 +12059,32 @@
       </p:sp>
       <p:sp>
         <p:nvSpPr>
-          <p:cNvPr id="3" name="Text 1"/>
+          <p:cNvPr id="3" name="Shape 1"/>
+          <p:cNvSpPr/>
+          <p:nvPr/>
+        </p:nvSpPr>
+        <p:spPr>
+          <a:xfrm>
+            <a:off x="0" y="164592"/>
+            <a:ext cx="146304" cy="6693408"/>
+          </a:xfrm>
+          <a:prstGeom prst="rect">
+            <a:avLst/>
+          </a:prstGeom>
+          <a:solidFill>
+            <a:srgbClr val="2F8A28"/>
+          </a:solidFill>
+          <a:ln w="12700">
+            <a:solidFill>
+              <a:srgbClr val="2F8A28"/>
+            </a:solidFill>
+            <a:prstDash val="solid"/>
+          </a:ln>
+        </p:spPr>
+      </p:sp>
+      <p:sp>
+        <p:nvSpPr>
+          <p:cNvPr id="4" name="Text 2"/>
           <p:cNvSpPr/>
           <p:nvPr/>
         </p:nvSpPr>
@@ -6627,7 +12123,7 @@
       </p:sp>
       <p:sp>
         <p:nvSpPr>
-          <p:cNvPr id="4" name="Text 2"/>
+          <p:cNvPr id="5" name="Text 3"/>
           <p:cNvSpPr/>
           <p:nvPr/>
         </p:nvSpPr>
@@ -6666,7 +12162,7 @@
       </p:sp>
       <p:sp>
         <p:nvSpPr>
-          <p:cNvPr id="5" name="Text 3"/>
+          <p:cNvPr id="6" name="Text 4"/>
           <p:cNvSpPr/>
           <p:nvPr/>
         </p:nvSpPr>
@@ -6705,13 +12201,77 @@
       </p:sp>
       <p:sp>
         <p:nvSpPr>
-          <p:cNvPr id="6" name="Text 4"/>
+          <p:cNvPr id="7" name="Shape 5"/>
           <p:cNvSpPr/>
           <p:nvPr/>
         </p:nvSpPr>
         <p:spPr>
           <a:xfrm>
             <a:off x="640080" y="658368"/>
+            <a:ext cx="420624" cy="420624"/>
+          </a:xfrm>
+          <a:prstGeom prst="ellipse">
+            <a:avLst/>
+          </a:prstGeom>
+          <a:solidFill>
+            <a:srgbClr val="0068B7"/>
+          </a:solidFill>
+          <a:ln w="12700">
+            <a:solidFill>
+              <a:srgbClr val="0068B7"/>
+            </a:solidFill>
+            <a:prstDash val="solid"/>
+          </a:ln>
+        </p:spPr>
+      </p:sp>
+      <p:sp>
+        <p:nvSpPr>
+          <p:cNvPr id="8" name="Text 6"/>
+          <p:cNvSpPr/>
+          <p:nvPr/>
+        </p:nvSpPr>
+        <p:spPr>
+          <a:xfrm>
+            <a:off x="640080" y="731520"/>
+            <a:ext cx="420624" cy="164592"/>
+          </a:xfrm>
+          <a:prstGeom prst="rect">
+            <a:avLst/>
+          </a:prstGeom>
+          <a:noFill/>
+          <a:ln/>
+        </p:spPr>
+        <p:txBody>
+          <a:bodyPr wrap="square" lIns="0" tIns="0" rIns="0" bIns="0" rtlCol="0" anchor="ctr"/>
+          <a:lstStyle/>
+          <a:p>
+            <a:pPr algn="ctr" indent="0" marL="0">
+              <a:buNone/>
+            </a:pPr>
+            <a:r>
+              <a:rPr lang="en-US" sz="1100" b="1" dirty="0">
+                <a:solidFill>
+                  <a:srgbClr val="FFFFFF"/>
+                </a:solidFill>
+                <a:latin typeface="Aptos" pitchFamily="34" charset="0"/>
+                <a:ea typeface="Aptos" pitchFamily="34" charset="-122"/>
+                <a:cs typeface="Aptos" pitchFamily="34" charset="-120"/>
+              </a:rPr>
+              <a:t>2</a:t>
+            </a:r>
+            <a:endParaRPr lang="en-US" sz="1100" dirty="0"/>
+          </a:p>
+        </p:txBody>
+      </p:sp>
+      <p:sp>
+        <p:nvSpPr>
+          <p:cNvPr id="9" name="Text 7"/>
+          <p:cNvSpPr/>
+          <p:nvPr/>
+        </p:nvSpPr>
+        <p:spPr>
+          <a:xfrm>
+            <a:off x="640080" y="621792"/>
             <a:ext cx="10881360" cy="566928"/>
           </a:xfrm>
           <a:prstGeom prst="rect">
@@ -6738,7 +12298,7 @@
                 <a:ea typeface="Aptos Display" pitchFamily="34" charset="-122"/>
                 <a:cs typeface="Aptos Display" pitchFamily="34" charset="-120"/>
               </a:rPr>
-              <a:t>Why This Topic Matters for Public Health AI</a:t>
+              <a:t>Module Overview</a:t>
             </a:r>
             <a:endParaRPr lang="en-US" sz="2700" dirty="0"/>
           </a:p>
@@ -6746,32 +12306,178 @@
       </p:sp>
       <p:sp>
         <p:nvSpPr>
-          <p:cNvPr id="7" name="Text 5"/>
-          <p:cNvSpPr/>
-          <p:nvPr/>
-        </p:nvSpPr>
-        <p:spPr>
-          <a:xfrm>
-            <a:off x="822960" y="1325880"/>
-            <a:ext cx="10378440" cy="4800600"/>
-          </a:xfrm>
-          <a:prstGeom prst="rect">
-            <a:avLst/>
-          </a:prstGeom>
-          <a:noFill/>
-          <a:ln/>
-        </p:spPr>
-        <p:txBody>
-          <a:bodyPr wrap="square" lIns="1016" tIns="1016" rIns="1016" bIns="1016" rtlCol="0" anchor="t">
+          <p:cNvPr id="10" name="Text 8"/>
+          <p:cNvSpPr/>
+          <p:nvPr/>
+        </p:nvSpPr>
+        <p:spPr>
+          <a:xfrm>
+            <a:off x="868680" y="1417320"/>
+            <a:ext cx="6675120" cy="4434840"/>
+          </a:xfrm>
+          <a:prstGeom prst="rect">
+            <a:avLst/>
+          </a:prstGeom>
+          <a:noFill/>
+          <a:ln/>
+        </p:spPr>
+        <p:txBody>
+          <a:bodyPr wrap="square" lIns="635" tIns="635" rIns="635" bIns="635" rtlCol="0" anchor="t">
             <a:normAutofit/>
           </a:bodyPr>
           <a:lstStyle/>
           <a:p>
+            <a:r>
+              <a:rPr lang="en-US" sz="1700" dirty="0">
+                <a:solidFill>
+                  <a:srgbClr val="17364A"/>
+                </a:solidFill>
+                <a:latin typeface="Aptos" pitchFamily="34" charset="0"/>
+                <a:ea typeface="Aptos" pitchFamily="34" charset="-122"/>
+                <a:cs typeface="Aptos" pitchFamily="34" charset="-120"/>
+              </a:rPr>
+              <a:t>Responsible AI does not end at launch.</a:t>
+            </a:r>
+            <a:endParaRPr lang="en-US" sz="1700" dirty="0"/>
+          </a:p>
+          <a:p>
+            <a:r>
+              <a:rPr lang="en-US" sz="1700" dirty="0">
+                <a:solidFill>
+                  <a:srgbClr val="17364A"/>
+                </a:solidFill>
+                <a:latin typeface="Aptos" pitchFamily="34" charset="0"/>
+                <a:ea typeface="Aptos" pitchFamily="34" charset="-122"/>
+                <a:cs typeface="Aptos" pitchFamily="34" charset="-120"/>
+              </a:rPr>
+              <a:t>AI tools require ongoing funding, staff time, monitoring, updates, vendor management, training, incident response,.</a:t>
+            </a:r>
+            <a:endParaRPr lang="en-US" sz="1700" dirty="0"/>
+          </a:p>
+          <a:p>
+            <a:r>
+              <a:rPr lang="en-US" sz="1700" dirty="0">
+                <a:solidFill>
+                  <a:srgbClr val="17364A"/>
+                </a:solidFill>
+                <a:latin typeface="Aptos" pitchFamily="34" charset="0"/>
+                <a:ea typeface="Aptos" pitchFamily="34" charset="-122"/>
+                <a:cs typeface="Aptos" pitchFamily="34" charset="-120"/>
+              </a:rPr>
+              <a:t>Sustainability planning ensures that AI-supported workflows do not become unfunded, unmonitored, or outdated after the.</a:t>
+            </a:r>
+            <a:endParaRPr lang="en-US" sz="1700" dirty="0"/>
+          </a:p>
+          <a:p>
+            <a:r>
+              <a:rPr lang="en-US" sz="1700" dirty="0">
+                <a:solidFill>
+                  <a:srgbClr val="17364A"/>
+                </a:solidFill>
+                <a:latin typeface="Aptos" pitchFamily="34" charset="0"/>
+                <a:ea typeface="Aptos" pitchFamily="34" charset="-122"/>
+                <a:cs typeface="Aptos" pitchFamily="34" charset="-120"/>
+              </a:rPr>
+              <a:t>This module helps leaders plan for the full AI lifecycle.</a:t>
+            </a:r>
+            <a:endParaRPr lang="en-US" sz="1700" dirty="0"/>
+          </a:p>
+        </p:txBody>
+      </p:sp>
+      <p:sp>
+        <p:nvSpPr>
+          <p:cNvPr id="11" name="Shape 9"/>
+          <p:cNvSpPr/>
+          <p:nvPr/>
+        </p:nvSpPr>
+        <p:spPr>
+          <a:xfrm>
+            <a:off x="7909560" y="1417320"/>
+            <a:ext cx="3154680" cy="1828800"/>
+          </a:xfrm>
+          <a:prstGeom prst="roundRect">
+            <a:avLst>
+              <a:gd name="adj" fmla="val 6000"/>
+            </a:avLst>
+          </a:prstGeom>
+          <a:solidFill>
+            <a:srgbClr val="EEF8ED"/>
+          </a:solidFill>
+          <a:ln w="12700">
+            <a:solidFill>
+              <a:srgbClr val="B9D7E6"/>
+            </a:solidFill>
+            <a:prstDash val="solid"/>
+          </a:ln>
+        </p:spPr>
+      </p:sp>
+      <p:sp>
+        <p:nvSpPr>
+          <p:cNvPr id="12" name="Text 10"/>
+          <p:cNvSpPr/>
+          <p:nvPr/>
+        </p:nvSpPr>
+        <p:spPr>
+          <a:xfrm>
+            <a:off x="8074152" y="1563624"/>
+            <a:ext cx="2825496" cy="201168"/>
+          </a:xfrm>
+          <a:prstGeom prst="rect">
+            <a:avLst/>
+          </a:prstGeom>
+          <a:noFill/>
+          <a:ln/>
+        </p:spPr>
+        <p:txBody>
+          <a:bodyPr wrap="square" lIns="0" tIns="0" rIns="0" bIns="0" rtlCol="0" anchor="ctr"/>
+          <a:lstStyle/>
+          <a:p>
             <a:pPr indent="0" marL="0">
               <a:buNone/>
             </a:pPr>
             <a:r>
-              <a:rPr lang="en-US" sz="1420" dirty="0">
+              <a:rPr lang="en-US" sz="950" b="1" dirty="0">
+                <a:solidFill>
+                  <a:srgbClr val="0068B7"/>
+                </a:solidFill>
+                <a:latin typeface="Aptos" pitchFamily="34" charset="0"/>
+                <a:ea typeface="Aptos" pitchFamily="34" charset="-122"/>
+                <a:cs typeface="Aptos" pitchFamily="34" charset="-120"/>
+              </a:rPr>
+              <a:t>Key idea</a:t>
+            </a:r>
+            <a:endParaRPr lang="en-US" sz="950" dirty="0"/>
+          </a:p>
+        </p:txBody>
+      </p:sp>
+      <p:sp>
+        <p:nvSpPr>
+          <p:cNvPr id="13" name="Text 11"/>
+          <p:cNvSpPr/>
+          <p:nvPr/>
+        </p:nvSpPr>
+        <p:spPr>
+          <a:xfrm>
+            <a:off x="8074152" y="1856232"/>
+            <a:ext cx="2825496" cy="1261872"/>
+          </a:xfrm>
+          <a:prstGeom prst="rect">
+            <a:avLst/>
+          </a:prstGeom>
+          <a:noFill/>
+          <a:ln/>
+        </p:spPr>
+        <p:txBody>
+          <a:bodyPr wrap="square" lIns="0" tIns="0" rIns="0" bIns="0" rtlCol="0" anchor="t">
+            <a:normAutofit/>
+          </a:bodyPr>
+          <a:lstStyle/>
+          <a:p>
+            <a:pPr indent="0" marL="0">
+              <a:buNone/>
+            </a:pPr>
+            <a:r>
+              <a:rPr lang="en-US" sz="1250" dirty="0">
                 <a:solidFill>
                   <a:srgbClr val="17364A"/>
                 </a:solidFill>
@@ -6779,9 +12485,116 @@
                 <a:ea typeface="Aptos" pitchFamily="34" charset="-122"/>
                 <a:cs typeface="Aptos" pitchFamily="34" charset="-120"/>
               </a:rPr>
-              <a:t>Many AI efforts begin as pilots, innovation projects, or grant-funded experiments. These projects may succeed technically but fail operationally if there is no plan for ongoing support. Public health agencies may be left with a tool that staff rely on but no budget for validation updates, vendor support, data integration maintenance, monitoring, or training new users. Sustainability is also a risk-control issue. AI tools can become unsafe when they are not maintained. Data sources change, regulations change, staff roles change, vendor models change, and public expectations change. A sustainability plan helps the agency decide whether the tool should continue, be modified, be replaced, or be retired.</a:t>
-            </a:r>
-            <a:endParaRPr lang="en-US" sz="1420" dirty="0"/>
+              <a:t>Responsible AI does not end at launch.</a:t>
+            </a:r>
+            <a:endParaRPr lang="en-US" sz="1250" dirty="0"/>
+          </a:p>
+        </p:txBody>
+      </p:sp>
+      <p:sp>
+        <p:nvSpPr>
+          <p:cNvPr id="14" name="Shape 12"/>
+          <p:cNvSpPr/>
+          <p:nvPr/>
+        </p:nvSpPr>
+        <p:spPr>
+          <a:xfrm>
+            <a:off x="7909560" y="3520440"/>
+            <a:ext cx="3154680" cy="1737360"/>
+          </a:xfrm>
+          <a:prstGeom prst="roundRect">
+            <a:avLst>
+              <a:gd name="adj" fmla="val 6316"/>
+            </a:avLst>
+          </a:prstGeom>
+          <a:solidFill>
+            <a:srgbClr val="EAF6F8"/>
+          </a:solidFill>
+          <a:ln w="12700">
+            <a:solidFill>
+              <a:srgbClr val="B9D7E6"/>
+            </a:solidFill>
+            <a:prstDash val="solid"/>
+          </a:ln>
+        </p:spPr>
+      </p:sp>
+      <p:sp>
+        <p:nvSpPr>
+          <p:cNvPr id="15" name="Text 13"/>
+          <p:cNvSpPr/>
+          <p:nvPr/>
+        </p:nvSpPr>
+        <p:spPr>
+          <a:xfrm>
+            <a:off x="8074152" y="3666744"/>
+            <a:ext cx="2825496" cy="201168"/>
+          </a:xfrm>
+          <a:prstGeom prst="rect">
+            <a:avLst/>
+          </a:prstGeom>
+          <a:noFill/>
+          <a:ln/>
+        </p:spPr>
+        <p:txBody>
+          <a:bodyPr wrap="square" lIns="0" tIns="0" rIns="0" bIns="0" rtlCol="0" anchor="ctr"/>
+          <a:lstStyle/>
+          <a:p>
+            <a:pPr indent="0" marL="0">
+              <a:buNone/>
+            </a:pPr>
+            <a:r>
+              <a:rPr lang="en-US" sz="950" b="1" dirty="0">
+                <a:solidFill>
+                  <a:srgbClr val="0068B7"/>
+                </a:solidFill>
+                <a:latin typeface="Aptos" pitchFamily="34" charset="0"/>
+                <a:ea typeface="Aptos" pitchFamily="34" charset="-122"/>
+                <a:cs typeface="Aptos" pitchFamily="34" charset="-120"/>
+              </a:rPr>
+              <a:t>Use this for</a:t>
+            </a:r>
+            <a:endParaRPr lang="en-US" sz="950" dirty="0"/>
+          </a:p>
+        </p:txBody>
+      </p:sp>
+      <p:sp>
+        <p:nvSpPr>
+          <p:cNvPr id="16" name="Text 14"/>
+          <p:cNvSpPr/>
+          <p:nvPr/>
+        </p:nvSpPr>
+        <p:spPr>
+          <a:xfrm>
+            <a:off x="8074152" y="3959352"/>
+            <a:ext cx="2825496" cy="1170432"/>
+          </a:xfrm>
+          <a:prstGeom prst="rect">
+            <a:avLst/>
+          </a:prstGeom>
+          <a:noFill/>
+          <a:ln/>
+        </p:spPr>
+        <p:txBody>
+          <a:bodyPr wrap="square" lIns="0" tIns="0" rIns="0" bIns="0" rtlCol="0" anchor="t">
+            <a:normAutofit/>
+          </a:bodyPr>
+          <a:lstStyle/>
+          <a:p>
+            <a:pPr indent="0" marL="0">
+              <a:buNone/>
+            </a:pPr>
+            <a:r>
+              <a:rPr lang="en-US" sz="1250" dirty="0">
+                <a:solidFill>
+                  <a:srgbClr val="17364A"/>
+                </a:solidFill>
+                <a:latin typeface="Aptos" pitchFamily="34" charset="0"/>
+                <a:ea typeface="Aptos" pitchFamily="34" charset="-122"/>
+                <a:cs typeface="Aptos" pitchFamily="34" charset="-120"/>
+              </a:rPr>
+              <a:t>Connect the concept to public health decisions, safeguards, documentation, or implementation work.</a:t>
+            </a:r>
+            <a:endParaRPr lang="en-US" sz="1250" dirty="0"/>
           </a:p>
         </p:txBody>
       </p:sp>
@@ -6844,7 +12657,32 @@
       </p:sp>
       <p:sp>
         <p:nvSpPr>
-          <p:cNvPr id="3" name="Text 1"/>
+          <p:cNvPr id="3" name="Shape 1"/>
+          <p:cNvSpPr/>
+          <p:nvPr/>
+        </p:nvSpPr>
+        <p:spPr>
+          <a:xfrm>
+            <a:off x="0" y="164592"/>
+            <a:ext cx="146304" cy="6693408"/>
+          </a:xfrm>
+          <a:prstGeom prst="rect">
+            <a:avLst/>
+          </a:prstGeom>
+          <a:solidFill>
+            <a:srgbClr val="2F8A28"/>
+          </a:solidFill>
+          <a:ln w="12700">
+            <a:solidFill>
+              <a:srgbClr val="2F8A28"/>
+            </a:solidFill>
+            <a:prstDash val="solid"/>
+          </a:ln>
+        </p:spPr>
+      </p:sp>
+      <p:sp>
+        <p:nvSpPr>
+          <p:cNvPr id="4" name="Text 2"/>
           <p:cNvSpPr/>
           <p:nvPr/>
         </p:nvSpPr>
@@ -6883,7 +12721,7 @@
       </p:sp>
       <p:sp>
         <p:nvSpPr>
-          <p:cNvPr id="4" name="Text 2"/>
+          <p:cNvPr id="5" name="Text 3"/>
           <p:cNvSpPr/>
           <p:nvPr/>
         </p:nvSpPr>
@@ -6922,7 +12760,7 @@
       </p:sp>
       <p:sp>
         <p:nvSpPr>
-          <p:cNvPr id="5" name="Text 3"/>
+          <p:cNvPr id="6" name="Text 4"/>
           <p:cNvSpPr/>
           <p:nvPr/>
         </p:nvSpPr>
@@ -6961,13 +12799,77 @@
       </p:sp>
       <p:sp>
         <p:nvSpPr>
-          <p:cNvPr id="6" name="Text 4"/>
+          <p:cNvPr id="7" name="Shape 5"/>
           <p:cNvSpPr/>
           <p:nvPr/>
         </p:nvSpPr>
         <p:spPr>
           <a:xfrm>
             <a:off x="640080" y="658368"/>
+            <a:ext cx="420624" cy="420624"/>
+          </a:xfrm>
+          <a:prstGeom prst="ellipse">
+            <a:avLst/>
+          </a:prstGeom>
+          <a:solidFill>
+            <a:srgbClr val="0068B7"/>
+          </a:solidFill>
+          <a:ln w="12700">
+            <a:solidFill>
+              <a:srgbClr val="0068B7"/>
+            </a:solidFill>
+            <a:prstDash val="solid"/>
+          </a:ln>
+        </p:spPr>
+      </p:sp>
+      <p:sp>
+        <p:nvSpPr>
+          <p:cNvPr id="8" name="Text 6"/>
+          <p:cNvSpPr/>
+          <p:nvPr/>
+        </p:nvSpPr>
+        <p:spPr>
+          <a:xfrm>
+            <a:off x="640080" y="731520"/>
+            <a:ext cx="420624" cy="164592"/>
+          </a:xfrm>
+          <a:prstGeom prst="rect">
+            <a:avLst/>
+          </a:prstGeom>
+          <a:noFill/>
+          <a:ln/>
+        </p:spPr>
+        <p:txBody>
+          <a:bodyPr wrap="square" lIns="0" tIns="0" rIns="0" bIns="0" rtlCol="0" anchor="ctr"/>
+          <a:lstStyle/>
+          <a:p>
+            <a:pPr algn="ctr" indent="0" marL="0">
+              <a:buNone/>
+            </a:pPr>
+            <a:r>
+              <a:rPr lang="en-US" sz="1100" b="1" dirty="0">
+                <a:solidFill>
+                  <a:srgbClr val="FFFFFF"/>
+                </a:solidFill>
+                <a:latin typeface="Aptos" pitchFamily="34" charset="0"/>
+                <a:ea typeface="Aptos" pitchFamily="34" charset="-122"/>
+                <a:cs typeface="Aptos" pitchFamily="34" charset="-120"/>
+              </a:rPr>
+              <a:t>3</a:t>
+            </a:r>
+            <a:endParaRPr lang="en-US" sz="1100" dirty="0"/>
+          </a:p>
+        </p:txBody>
+      </p:sp>
+      <p:sp>
+        <p:nvSpPr>
+          <p:cNvPr id="9" name="Text 7"/>
+          <p:cNvSpPr/>
+          <p:nvPr/>
+        </p:nvSpPr>
+        <p:spPr>
+          <a:xfrm>
+            <a:off x="640080" y="621792"/>
             <a:ext cx="10881360" cy="566928"/>
           </a:xfrm>
           <a:prstGeom prst="rect">
@@ -6994,7 +12896,7 @@
                 <a:ea typeface="Aptos Display" pitchFamily="34" charset="-122"/>
                 <a:cs typeface="Aptos Display" pitchFamily="34" charset="-120"/>
               </a:rPr>
-              <a:t>Public Health Example</a:t>
+              <a:t>Jurisdiction and Agency Policy Note</a:t>
             </a:r>
             <a:endParaRPr lang="en-US" sz="2700" dirty="0"/>
           </a:p>
@@ -7002,32 +12904,164 @@
       </p:sp>
       <p:sp>
         <p:nvSpPr>
-          <p:cNvPr id="7" name="Text 5"/>
-          <p:cNvSpPr/>
-          <p:nvPr/>
-        </p:nvSpPr>
-        <p:spPr>
-          <a:xfrm>
-            <a:off x="822960" y="1325880"/>
-            <a:ext cx="10378440" cy="4800600"/>
-          </a:xfrm>
-          <a:prstGeom prst="rect">
-            <a:avLst/>
-          </a:prstGeom>
-          <a:noFill/>
-          <a:ln/>
-        </p:spPr>
-        <p:txBody>
-          <a:bodyPr wrap="square" lIns="1016" tIns="1016" rIns="1016" bIns="1016" rtlCol="0" anchor="t">
+          <p:cNvPr id="10" name="Text 8"/>
+          <p:cNvSpPr/>
+          <p:nvPr/>
+        </p:nvSpPr>
+        <p:spPr>
+          <a:xfrm>
+            <a:off x="868680" y="1417320"/>
+            <a:ext cx="6675120" cy="4434840"/>
+          </a:xfrm>
+          <a:prstGeom prst="rect">
+            <a:avLst/>
+          </a:prstGeom>
+          <a:noFill/>
+          <a:ln/>
+        </p:spPr>
+        <p:txBody>
+          <a:bodyPr wrap="square" lIns="635" tIns="635" rIns="635" bIns="635" rtlCol="0" anchor="t">
             <a:normAutofit/>
           </a:bodyPr>
           <a:lstStyle/>
           <a:p>
+            <a:r>
+              <a:rPr lang="en-US" sz="1700" dirty="0">
+                <a:solidFill>
+                  <a:srgbClr val="17364A"/>
+                </a:solidFill>
+                <a:latin typeface="Aptos" pitchFamily="34" charset="0"/>
+                <a:ea typeface="Aptos" pitchFamily="34" charset="-122"/>
+                <a:cs typeface="Aptos" pitchFamily="34" charset="-120"/>
+              </a:rPr>
+              <a:t>This national-level module is intended for training and planning purposes.</a:t>
+            </a:r>
+            <a:endParaRPr lang="en-US" sz="1700" dirty="0"/>
+          </a:p>
+          <a:p>
+            <a:r>
+              <a:rPr lang="en-US" sz="1700" dirty="0">
+                <a:solidFill>
+                  <a:srgbClr val="17364A"/>
+                </a:solidFill>
+                <a:latin typeface="Aptos" pitchFamily="34" charset="0"/>
+                <a:ea typeface="Aptos" pitchFamily="34" charset="-122"/>
+                <a:cs typeface="Aptos" pitchFamily="34" charset="-120"/>
+              </a:rPr>
+              <a:t>It does not replace legal, privacy, procurement, civil rights, records, or agency policy review.</a:t>
+            </a:r>
+            <a:endParaRPr lang="en-US" sz="1700" dirty="0"/>
+          </a:p>
+          <a:p>
+            <a:r>
+              <a:rPr lang="en-US" sz="1700" dirty="0">
+                <a:solidFill>
+                  <a:srgbClr val="17364A"/>
+                </a:solidFill>
+                <a:latin typeface="Aptos" pitchFamily="34" charset="0"/>
+                <a:ea typeface="Aptos" pitchFamily="34" charset="-122"/>
+                <a:cs typeface="Aptos" pitchFamily="34" charset="-120"/>
+              </a:rPr>
+              <a:t>Learners should confirm applicable requirements in their own jurisdiction and organization before implementing AI-supported.</a:t>
+            </a:r>
+            <a:endParaRPr lang="en-US" sz="1700" dirty="0"/>
+          </a:p>
+        </p:txBody>
+      </p:sp>
+      <p:sp>
+        <p:nvSpPr>
+          <p:cNvPr id="11" name="Shape 9"/>
+          <p:cNvSpPr/>
+          <p:nvPr/>
+        </p:nvSpPr>
+        <p:spPr>
+          <a:xfrm>
+            <a:off x="7909560" y="1417320"/>
+            <a:ext cx="3154680" cy="1828800"/>
+          </a:xfrm>
+          <a:prstGeom prst="roundRect">
+            <a:avLst>
+              <a:gd name="adj" fmla="val 6000"/>
+            </a:avLst>
+          </a:prstGeom>
+          <a:solidFill>
+            <a:srgbClr val="EEF8ED"/>
+          </a:solidFill>
+          <a:ln w="12700">
+            <a:solidFill>
+              <a:srgbClr val="B9D7E6"/>
+            </a:solidFill>
+            <a:prstDash val="solid"/>
+          </a:ln>
+        </p:spPr>
+      </p:sp>
+      <p:sp>
+        <p:nvSpPr>
+          <p:cNvPr id="12" name="Text 10"/>
+          <p:cNvSpPr/>
+          <p:nvPr/>
+        </p:nvSpPr>
+        <p:spPr>
+          <a:xfrm>
+            <a:off x="8074152" y="1563624"/>
+            <a:ext cx="2825496" cy="201168"/>
+          </a:xfrm>
+          <a:prstGeom prst="rect">
+            <a:avLst/>
+          </a:prstGeom>
+          <a:noFill/>
+          <a:ln/>
+        </p:spPr>
+        <p:txBody>
+          <a:bodyPr wrap="square" lIns="0" tIns="0" rIns="0" bIns="0" rtlCol="0" anchor="ctr"/>
+          <a:lstStyle/>
+          <a:p>
             <a:pPr indent="0" marL="0">
               <a:buNone/>
             </a:pPr>
             <a:r>
-              <a:rPr lang="en-US" sz="1420" dirty="0">
+              <a:rPr lang="en-US" sz="950" b="1" dirty="0">
+                <a:solidFill>
+                  <a:srgbClr val="0068B7"/>
+                </a:solidFill>
+                <a:latin typeface="Aptos" pitchFamily="34" charset="0"/>
+                <a:ea typeface="Aptos" pitchFamily="34" charset="-122"/>
+                <a:cs typeface="Aptos" pitchFamily="34" charset="-120"/>
+              </a:rPr>
+              <a:t>Key idea</a:t>
+            </a:r>
+            <a:endParaRPr lang="en-US" sz="950" dirty="0"/>
+          </a:p>
+        </p:txBody>
+      </p:sp>
+      <p:sp>
+        <p:nvSpPr>
+          <p:cNvPr id="13" name="Text 11"/>
+          <p:cNvSpPr/>
+          <p:nvPr/>
+        </p:nvSpPr>
+        <p:spPr>
+          <a:xfrm>
+            <a:off x="8074152" y="1856232"/>
+            <a:ext cx="2825496" cy="1261872"/>
+          </a:xfrm>
+          <a:prstGeom prst="rect">
+            <a:avLst/>
+          </a:prstGeom>
+          <a:noFill/>
+          <a:ln/>
+        </p:spPr>
+        <p:txBody>
+          <a:bodyPr wrap="square" lIns="0" tIns="0" rIns="0" bIns="0" rtlCol="0" anchor="t">
+            <a:normAutofit/>
+          </a:bodyPr>
+          <a:lstStyle/>
+          <a:p>
+            <a:pPr indent="0" marL="0">
+              <a:buNone/>
+            </a:pPr>
+            <a:r>
+              <a:rPr lang="en-US" sz="1250" dirty="0">
                 <a:solidFill>
                   <a:srgbClr val="17364A"/>
                 </a:solidFill>
@@ -7035,9 +13069,116 @@
                 <a:ea typeface="Aptos" pitchFamily="34" charset="-122"/>
                 <a:cs typeface="Aptos" pitchFamily="34" charset="-120"/>
               </a:rPr>
-              <a:t>A grant funds a two-year AI pilot to help identify likely duplicate records in a public health system. The pilot improves efficiency, but the grant does not cover long-term hosting, monitoring, system upgrades, training, or validation after data sources change. When funding ends, staff continue relying on the tool even though no one is assigned to review performance. A sustainability plan would have addressed this before launch. It would define operational ownership, long-term funding, monitoring indicators, update cadence, user support, vendor responsibilities, and criteria for continuing or retiring the tool. It would also define a manual fallback process if the tool is paused.</a:t>
-            </a:r>
-            <a:endParaRPr lang="en-US" sz="1420" dirty="0"/>
+              <a:t>This national-level module is intended for training and planning purposes.</a:t>
+            </a:r>
+            <a:endParaRPr lang="en-US" sz="1250" dirty="0"/>
+          </a:p>
+        </p:txBody>
+      </p:sp>
+      <p:sp>
+        <p:nvSpPr>
+          <p:cNvPr id="14" name="Shape 12"/>
+          <p:cNvSpPr/>
+          <p:nvPr/>
+        </p:nvSpPr>
+        <p:spPr>
+          <a:xfrm>
+            <a:off x="7909560" y="3520440"/>
+            <a:ext cx="3154680" cy="1737360"/>
+          </a:xfrm>
+          <a:prstGeom prst="roundRect">
+            <a:avLst>
+              <a:gd name="adj" fmla="val 6316"/>
+            </a:avLst>
+          </a:prstGeom>
+          <a:solidFill>
+            <a:srgbClr val="EAF6F8"/>
+          </a:solidFill>
+          <a:ln w="12700">
+            <a:solidFill>
+              <a:srgbClr val="B9D7E6"/>
+            </a:solidFill>
+            <a:prstDash val="solid"/>
+          </a:ln>
+        </p:spPr>
+      </p:sp>
+      <p:sp>
+        <p:nvSpPr>
+          <p:cNvPr id="15" name="Text 13"/>
+          <p:cNvSpPr/>
+          <p:nvPr/>
+        </p:nvSpPr>
+        <p:spPr>
+          <a:xfrm>
+            <a:off x="8074152" y="3666744"/>
+            <a:ext cx="2825496" cy="201168"/>
+          </a:xfrm>
+          <a:prstGeom prst="rect">
+            <a:avLst/>
+          </a:prstGeom>
+          <a:noFill/>
+          <a:ln/>
+        </p:spPr>
+        <p:txBody>
+          <a:bodyPr wrap="square" lIns="0" tIns="0" rIns="0" bIns="0" rtlCol="0" anchor="ctr"/>
+          <a:lstStyle/>
+          <a:p>
+            <a:pPr indent="0" marL="0">
+              <a:buNone/>
+            </a:pPr>
+            <a:r>
+              <a:rPr lang="en-US" sz="950" b="1" dirty="0">
+                <a:solidFill>
+                  <a:srgbClr val="0068B7"/>
+                </a:solidFill>
+                <a:latin typeface="Aptos" pitchFamily="34" charset="0"/>
+                <a:ea typeface="Aptos" pitchFamily="34" charset="-122"/>
+                <a:cs typeface="Aptos" pitchFamily="34" charset="-120"/>
+              </a:rPr>
+              <a:t>Use this for</a:t>
+            </a:r>
+            <a:endParaRPr lang="en-US" sz="950" dirty="0"/>
+          </a:p>
+        </p:txBody>
+      </p:sp>
+      <p:sp>
+        <p:nvSpPr>
+          <p:cNvPr id="16" name="Text 14"/>
+          <p:cNvSpPr/>
+          <p:nvPr/>
+        </p:nvSpPr>
+        <p:spPr>
+          <a:xfrm>
+            <a:off x="8074152" y="3959352"/>
+            <a:ext cx="2825496" cy="1170432"/>
+          </a:xfrm>
+          <a:prstGeom prst="rect">
+            <a:avLst/>
+          </a:prstGeom>
+          <a:noFill/>
+          <a:ln/>
+        </p:spPr>
+        <p:txBody>
+          <a:bodyPr wrap="square" lIns="0" tIns="0" rIns="0" bIns="0" rtlCol="0" anchor="t">
+            <a:normAutofit/>
+          </a:bodyPr>
+          <a:lstStyle/>
+          <a:p>
+            <a:pPr indent="0" marL="0">
+              <a:buNone/>
+            </a:pPr>
+            <a:r>
+              <a:rPr lang="en-US" sz="1250" dirty="0">
+                <a:solidFill>
+                  <a:srgbClr val="17364A"/>
+                </a:solidFill>
+                <a:latin typeface="Aptos" pitchFamily="34" charset="0"/>
+                <a:ea typeface="Aptos" pitchFamily="34" charset="-122"/>
+                <a:cs typeface="Aptos" pitchFamily="34" charset="-120"/>
+              </a:rPr>
+              <a:t>Connect the concept to public health decisions, safeguards, documentation, or implementation work.</a:t>
+            </a:r>
+            <a:endParaRPr lang="en-US" sz="1250" dirty="0"/>
           </a:p>
         </p:txBody>
       </p:sp>
@@ -7100,7 +13241,32 @@
       </p:sp>
       <p:sp>
         <p:nvSpPr>
-          <p:cNvPr id="3" name="Text 1"/>
+          <p:cNvPr id="3" name="Shape 1"/>
+          <p:cNvSpPr/>
+          <p:nvPr/>
+        </p:nvSpPr>
+        <p:spPr>
+          <a:xfrm>
+            <a:off x="0" y="164592"/>
+            <a:ext cx="146304" cy="6693408"/>
+          </a:xfrm>
+          <a:prstGeom prst="rect">
+            <a:avLst/>
+          </a:prstGeom>
+          <a:solidFill>
+            <a:srgbClr val="2F8A28"/>
+          </a:solidFill>
+          <a:ln w="12700">
+            <a:solidFill>
+              <a:srgbClr val="2F8A28"/>
+            </a:solidFill>
+            <a:prstDash val="solid"/>
+          </a:ln>
+        </p:spPr>
+      </p:sp>
+      <p:sp>
+        <p:nvSpPr>
+          <p:cNvPr id="4" name="Text 2"/>
           <p:cNvSpPr/>
           <p:nvPr/>
         </p:nvSpPr>
@@ -7139,7 +13305,7 @@
       </p:sp>
       <p:sp>
         <p:nvSpPr>
-          <p:cNvPr id="4" name="Text 2"/>
+          <p:cNvPr id="5" name="Text 3"/>
           <p:cNvSpPr/>
           <p:nvPr/>
         </p:nvSpPr>
@@ -7178,7 +13344,7 @@
       </p:sp>
       <p:sp>
         <p:nvSpPr>
-          <p:cNvPr id="5" name="Text 3"/>
+          <p:cNvPr id="6" name="Text 4"/>
           <p:cNvSpPr/>
           <p:nvPr/>
         </p:nvSpPr>
@@ -7217,13 +13383,77 @@
       </p:sp>
       <p:sp>
         <p:nvSpPr>
-          <p:cNvPr id="6" name="Text 4"/>
+          <p:cNvPr id="7" name="Shape 5"/>
           <p:cNvSpPr/>
           <p:nvPr/>
         </p:nvSpPr>
         <p:spPr>
           <a:xfrm>
             <a:off x="640080" y="658368"/>
+            <a:ext cx="420624" cy="420624"/>
+          </a:xfrm>
+          <a:prstGeom prst="ellipse">
+            <a:avLst/>
+          </a:prstGeom>
+          <a:solidFill>
+            <a:srgbClr val="0068B7"/>
+          </a:solidFill>
+          <a:ln w="12700">
+            <a:solidFill>
+              <a:srgbClr val="0068B7"/>
+            </a:solidFill>
+            <a:prstDash val="solid"/>
+          </a:ln>
+        </p:spPr>
+      </p:sp>
+      <p:sp>
+        <p:nvSpPr>
+          <p:cNvPr id="8" name="Text 6"/>
+          <p:cNvSpPr/>
+          <p:nvPr/>
+        </p:nvSpPr>
+        <p:spPr>
+          <a:xfrm>
+            <a:off x="640080" y="731520"/>
+            <a:ext cx="420624" cy="164592"/>
+          </a:xfrm>
+          <a:prstGeom prst="rect">
+            <a:avLst/>
+          </a:prstGeom>
+          <a:noFill/>
+          <a:ln/>
+        </p:spPr>
+        <p:txBody>
+          <a:bodyPr wrap="square" lIns="0" tIns="0" rIns="0" bIns="0" rtlCol="0" anchor="ctr"/>
+          <a:lstStyle/>
+          <a:p>
+            <a:pPr algn="ctr" indent="0" marL="0">
+              <a:buNone/>
+            </a:pPr>
+            <a:r>
+              <a:rPr lang="en-US" sz="1100" b="1" dirty="0">
+                <a:solidFill>
+                  <a:srgbClr val="FFFFFF"/>
+                </a:solidFill>
+                <a:latin typeface="Aptos" pitchFamily="34" charset="0"/>
+                <a:ea typeface="Aptos" pitchFamily="34" charset="-122"/>
+                <a:cs typeface="Aptos" pitchFamily="34" charset="-120"/>
+              </a:rPr>
+              <a:t>4</a:t>
+            </a:r>
+            <a:endParaRPr lang="en-US" sz="1100" dirty="0"/>
+          </a:p>
+        </p:txBody>
+      </p:sp>
+      <p:sp>
+        <p:nvSpPr>
+          <p:cNvPr id="9" name="Text 7"/>
+          <p:cNvSpPr/>
+          <p:nvPr/>
+        </p:nvSpPr>
+        <p:spPr>
+          <a:xfrm>
+            <a:off x="640080" y="621792"/>
             <a:ext cx="10881360" cy="566928"/>
           </a:xfrm>
           <a:prstGeom prst="rect">
@@ -7250,7 +13480,7 @@
                 <a:ea typeface="Aptos Display" pitchFamily="34" charset="-122"/>
                 <a:cs typeface="Aptos Display" pitchFamily="34" charset="-120"/>
               </a:rPr>
-              <a:t>Technical and Governance Deep Dive</a:t>
+              <a:t>Why This Topic Matters for Public Health AI</a:t>
             </a:r>
             <a:endParaRPr lang="en-US" sz="2700" dirty="0"/>
           </a:p>
@@ -7258,32 +13488,178 @@
       </p:sp>
       <p:sp>
         <p:nvSpPr>
-          <p:cNvPr id="7" name="Text 5"/>
-          <p:cNvSpPr/>
-          <p:nvPr/>
-        </p:nvSpPr>
-        <p:spPr>
-          <a:xfrm>
-            <a:off x="822960" y="1325880"/>
-            <a:ext cx="10378440" cy="4800600"/>
-          </a:xfrm>
-          <a:prstGeom prst="rect">
-            <a:avLst/>
-          </a:prstGeom>
-          <a:noFill/>
-          <a:ln/>
-        </p:spPr>
-        <p:txBody>
-          <a:bodyPr wrap="square" lIns="1016" tIns="1016" rIns="1016" bIns="1016" rtlCol="0" anchor="t">
+          <p:cNvPr id="10" name="Text 8"/>
+          <p:cNvSpPr/>
+          <p:nvPr/>
+        </p:nvSpPr>
+        <p:spPr>
+          <a:xfrm>
+            <a:off x="868680" y="1417320"/>
+            <a:ext cx="6675120" cy="4434840"/>
+          </a:xfrm>
+          <a:prstGeom prst="rect">
+            <a:avLst/>
+          </a:prstGeom>
+          <a:noFill/>
+          <a:ln/>
+        </p:spPr>
+        <p:txBody>
+          <a:bodyPr wrap="square" lIns="635" tIns="635" rIns="635" bIns="635" rtlCol="0" anchor="t">
             <a:normAutofit/>
           </a:bodyPr>
           <a:lstStyle/>
           <a:p>
+            <a:r>
+              <a:rPr lang="en-US" sz="1700" dirty="0">
+                <a:solidFill>
+                  <a:srgbClr val="17364A"/>
+                </a:solidFill>
+                <a:latin typeface="Aptos" pitchFamily="34" charset="0"/>
+                <a:ea typeface="Aptos" pitchFamily="34" charset="-122"/>
+                <a:cs typeface="Aptos" pitchFamily="34" charset="-120"/>
+              </a:rPr>
+              <a:t>Many AI efforts begin as pilots, innovation projects, or grant-funded experiments.</a:t>
+            </a:r>
+            <a:endParaRPr lang="en-US" sz="1700" dirty="0"/>
+          </a:p>
+          <a:p>
+            <a:r>
+              <a:rPr lang="en-US" sz="1700" dirty="0">
+                <a:solidFill>
+                  <a:srgbClr val="17364A"/>
+                </a:solidFill>
+                <a:latin typeface="Aptos" pitchFamily="34" charset="0"/>
+                <a:ea typeface="Aptos" pitchFamily="34" charset="-122"/>
+                <a:cs typeface="Aptos" pitchFamily="34" charset="-120"/>
+              </a:rPr>
+              <a:t>These projects may succeed technically but fail operationally if there is no plan for ongoing support.</a:t>
+            </a:r>
+            <a:endParaRPr lang="en-US" sz="1700" dirty="0"/>
+          </a:p>
+          <a:p>
+            <a:r>
+              <a:rPr lang="en-US" sz="1700" dirty="0">
+                <a:solidFill>
+                  <a:srgbClr val="17364A"/>
+                </a:solidFill>
+                <a:latin typeface="Aptos" pitchFamily="34" charset="0"/>
+                <a:ea typeface="Aptos" pitchFamily="34" charset="-122"/>
+                <a:cs typeface="Aptos" pitchFamily="34" charset="-120"/>
+              </a:rPr>
+              <a:t>Public health agencies may be left with a tool that staff rely on but no budget for validation updates, vendor support,.</a:t>
+            </a:r>
+            <a:endParaRPr lang="en-US" sz="1700" dirty="0"/>
+          </a:p>
+          <a:p>
+            <a:r>
+              <a:rPr lang="en-US" sz="1700" dirty="0">
+                <a:solidFill>
+                  <a:srgbClr val="17364A"/>
+                </a:solidFill>
+                <a:latin typeface="Aptos" pitchFamily="34" charset="0"/>
+                <a:ea typeface="Aptos" pitchFamily="34" charset="-122"/>
+                <a:cs typeface="Aptos" pitchFamily="34" charset="-120"/>
+              </a:rPr>
+              <a:t>Sustainability is also a risk-control issue.</a:t>
+            </a:r>
+            <a:endParaRPr lang="en-US" sz="1700" dirty="0"/>
+          </a:p>
+        </p:txBody>
+      </p:sp>
+      <p:sp>
+        <p:nvSpPr>
+          <p:cNvPr id="11" name="Shape 9"/>
+          <p:cNvSpPr/>
+          <p:nvPr/>
+        </p:nvSpPr>
+        <p:spPr>
+          <a:xfrm>
+            <a:off x="7909560" y="1417320"/>
+            <a:ext cx="3154680" cy="1828800"/>
+          </a:xfrm>
+          <a:prstGeom prst="roundRect">
+            <a:avLst>
+              <a:gd name="adj" fmla="val 6000"/>
+            </a:avLst>
+          </a:prstGeom>
+          <a:solidFill>
+            <a:srgbClr val="EEF8ED"/>
+          </a:solidFill>
+          <a:ln w="12700">
+            <a:solidFill>
+              <a:srgbClr val="B9D7E6"/>
+            </a:solidFill>
+            <a:prstDash val="solid"/>
+          </a:ln>
+        </p:spPr>
+      </p:sp>
+      <p:sp>
+        <p:nvSpPr>
+          <p:cNvPr id="12" name="Text 10"/>
+          <p:cNvSpPr/>
+          <p:nvPr/>
+        </p:nvSpPr>
+        <p:spPr>
+          <a:xfrm>
+            <a:off x="8074152" y="1563624"/>
+            <a:ext cx="2825496" cy="201168"/>
+          </a:xfrm>
+          <a:prstGeom prst="rect">
+            <a:avLst/>
+          </a:prstGeom>
+          <a:noFill/>
+          <a:ln/>
+        </p:spPr>
+        <p:txBody>
+          <a:bodyPr wrap="square" lIns="0" tIns="0" rIns="0" bIns="0" rtlCol="0" anchor="ctr"/>
+          <a:lstStyle/>
+          <a:p>
             <a:pPr indent="0" marL="0">
               <a:buNone/>
             </a:pPr>
             <a:r>
-              <a:rPr lang="en-US" sz="1420" dirty="0">
+              <a:rPr lang="en-US" sz="950" b="1" dirty="0">
+                <a:solidFill>
+                  <a:srgbClr val="0068B7"/>
+                </a:solidFill>
+                <a:latin typeface="Aptos" pitchFamily="34" charset="0"/>
+                <a:ea typeface="Aptos" pitchFamily="34" charset="-122"/>
+                <a:cs typeface="Aptos" pitchFamily="34" charset="-120"/>
+              </a:rPr>
+              <a:t>Key idea</a:t>
+            </a:r>
+            <a:endParaRPr lang="en-US" sz="950" dirty="0"/>
+          </a:p>
+        </p:txBody>
+      </p:sp>
+      <p:sp>
+        <p:nvSpPr>
+          <p:cNvPr id="13" name="Text 11"/>
+          <p:cNvSpPr/>
+          <p:nvPr/>
+        </p:nvSpPr>
+        <p:spPr>
+          <a:xfrm>
+            <a:off x="8074152" y="1856232"/>
+            <a:ext cx="2825496" cy="1261872"/>
+          </a:xfrm>
+          <a:prstGeom prst="rect">
+            <a:avLst/>
+          </a:prstGeom>
+          <a:noFill/>
+          <a:ln/>
+        </p:spPr>
+        <p:txBody>
+          <a:bodyPr wrap="square" lIns="0" tIns="0" rIns="0" bIns="0" rtlCol="0" anchor="t">
+            <a:normAutofit/>
+          </a:bodyPr>
+          <a:lstStyle/>
+          <a:p>
+            <a:pPr indent="0" marL="0">
+              <a:buNone/>
+            </a:pPr>
+            <a:r>
+              <a:rPr lang="en-US" sz="1250" dirty="0">
                 <a:solidFill>
                   <a:srgbClr val="17364A"/>
                 </a:solidFill>
@@ -7291,9 +13667,116 @@
                 <a:ea typeface="Aptos" pitchFamily="34" charset="-122"/>
                 <a:cs typeface="Aptos" pitchFamily="34" charset="-120"/>
               </a:rPr>
-              <a:t>AI lifecycle planning should begin during intake and business case review. Leaders should ask whether the use case is a short-term experiment, a time-limited emergency support tool, or a long-term operational capability. Each category has different funding and governance needs. A time-limited tool may need clear end dates and data deletion rules. An operational tool needs sustained staffing, budget, contracts, monitoring, and training. Lifecycle costs include more than licenses. Agencies must consider integration maintenance, data pipeline monitoring, model evaluation, cybersecurity review, privacy review, accessibility updates, user support, vendor management, documentation, incident response, retraining or reconfiguration, and future procurement. These costs should be tied to ownership. If no role or budget owns a lifecycle function, the function may not happen. Sunset and retirement criteria are essential. A tool may be retired if it no longer aligns with agency priorities, if benefits are not realized, if risks outweigh value, if vendor terms change, if performance deteriorates, if data sources are no longer reliable, or if a better shared service becomes available. Retirement should be planned so staff know how to transition without disrupting public health operations.</a:t>
-            </a:r>
-            <a:endParaRPr lang="en-US" sz="1420" dirty="0"/>
+              <a:t>Many AI efforts begin as pilots, innovation projects, or grant-funded experiments.</a:t>
+            </a:r>
+            <a:endParaRPr lang="en-US" sz="1250" dirty="0"/>
+          </a:p>
+        </p:txBody>
+      </p:sp>
+      <p:sp>
+        <p:nvSpPr>
+          <p:cNvPr id="14" name="Shape 12"/>
+          <p:cNvSpPr/>
+          <p:nvPr/>
+        </p:nvSpPr>
+        <p:spPr>
+          <a:xfrm>
+            <a:off x="7909560" y="3520440"/>
+            <a:ext cx="3154680" cy="1737360"/>
+          </a:xfrm>
+          <a:prstGeom prst="roundRect">
+            <a:avLst>
+              <a:gd name="adj" fmla="val 6316"/>
+            </a:avLst>
+          </a:prstGeom>
+          <a:solidFill>
+            <a:srgbClr val="EAF6F8"/>
+          </a:solidFill>
+          <a:ln w="12700">
+            <a:solidFill>
+              <a:srgbClr val="B9D7E6"/>
+            </a:solidFill>
+            <a:prstDash val="solid"/>
+          </a:ln>
+        </p:spPr>
+      </p:sp>
+      <p:sp>
+        <p:nvSpPr>
+          <p:cNvPr id="15" name="Text 13"/>
+          <p:cNvSpPr/>
+          <p:nvPr/>
+        </p:nvSpPr>
+        <p:spPr>
+          <a:xfrm>
+            <a:off x="8074152" y="3666744"/>
+            <a:ext cx="2825496" cy="201168"/>
+          </a:xfrm>
+          <a:prstGeom prst="rect">
+            <a:avLst/>
+          </a:prstGeom>
+          <a:noFill/>
+          <a:ln/>
+        </p:spPr>
+        <p:txBody>
+          <a:bodyPr wrap="square" lIns="0" tIns="0" rIns="0" bIns="0" rtlCol="0" anchor="ctr"/>
+          <a:lstStyle/>
+          <a:p>
+            <a:pPr indent="0" marL="0">
+              <a:buNone/>
+            </a:pPr>
+            <a:r>
+              <a:rPr lang="en-US" sz="950" b="1" dirty="0">
+                <a:solidFill>
+                  <a:srgbClr val="0068B7"/>
+                </a:solidFill>
+                <a:latin typeface="Aptos" pitchFamily="34" charset="0"/>
+                <a:ea typeface="Aptos" pitchFamily="34" charset="-122"/>
+                <a:cs typeface="Aptos" pitchFamily="34" charset="-120"/>
+              </a:rPr>
+              <a:t>Use this for</a:t>
+            </a:r>
+            <a:endParaRPr lang="en-US" sz="950" dirty="0"/>
+          </a:p>
+        </p:txBody>
+      </p:sp>
+      <p:sp>
+        <p:nvSpPr>
+          <p:cNvPr id="16" name="Text 14"/>
+          <p:cNvSpPr/>
+          <p:nvPr/>
+        </p:nvSpPr>
+        <p:spPr>
+          <a:xfrm>
+            <a:off x="8074152" y="3959352"/>
+            <a:ext cx="2825496" cy="1170432"/>
+          </a:xfrm>
+          <a:prstGeom prst="rect">
+            <a:avLst/>
+          </a:prstGeom>
+          <a:noFill/>
+          <a:ln/>
+        </p:spPr>
+        <p:txBody>
+          <a:bodyPr wrap="square" lIns="0" tIns="0" rIns="0" bIns="0" rtlCol="0" anchor="t">
+            <a:normAutofit/>
+          </a:bodyPr>
+          <a:lstStyle/>
+          <a:p>
+            <a:pPr indent="0" marL="0">
+              <a:buNone/>
+            </a:pPr>
+            <a:r>
+              <a:rPr lang="en-US" sz="1250" dirty="0">
+                <a:solidFill>
+                  <a:srgbClr val="17364A"/>
+                </a:solidFill>
+                <a:latin typeface="Aptos" pitchFamily="34" charset="0"/>
+                <a:ea typeface="Aptos" pitchFamily="34" charset="-122"/>
+                <a:cs typeface="Aptos" pitchFamily="34" charset="-120"/>
+              </a:rPr>
+              <a:t>Connect the concept to public health decisions, safeguards, documentation, or implementation work.</a:t>
+            </a:r>
+            <a:endParaRPr lang="en-US" sz="1250" dirty="0"/>
           </a:p>
         </p:txBody>
       </p:sp>
@@ -7356,7 +13839,32 @@
       </p:sp>
       <p:sp>
         <p:nvSpPr>
-          <p:cNvPr id="3" name="Text 1"/>
+          <p:cNvPr id="3" name="Shape 1"/>
+          <p:cNvSpPr/>
+          <p:nvPr/>
+        </p:nvSpPr>
+        <p:spPr>
+          <a:xfrm>
+            <a:off x="0" y="164592"/>
+            <a:ext cx="146304" cy="6693408"/>
+          </a:xfrm>
+          <a:prstGeom prst="rect">
+            <a:avLst/>
+          </a:prstGeom>
+          <a:solidFill>
+            <a:srgbClr val="2F8A28"/>
+          </a:solidFill>
+          <a:ln w="12700">
+            <a:solidFill>
+              <a:srgbClr val="2F8A28"/>
+            </a:solidFill>
+            <a:prstDash val="solid"/>
+          </a:ln>
+        </p:spPr>
+      </p:sp>
+      <p:sp>
+        <p:nvSpPr>
+          <p:cNvPr id="4" name="Text 2"/>
           <p:cNvSpPr/>
           <p:nvPr/>
         </p:nvSpPr>
@@ -7395,7 +13903,7 @@
       </p:sp>
       <p:sp>
         <p:nvSpPr>
-          <p:cNvPr id="4" name="Text 2"/>
+          <p:cNvPr id="5" name="Text 3"/>
           <p:cNvSpPr/>
           <p:nvPr/>
         </p:nvSpPr>
@@ -7434,7 +13942,7 @@
       </p:sp>
       <p:sp>
         <p:nvSpPr>
-          <p:cNvPr id="5" name="Text 3"/>
+          <p:cNvPr id="6" name="Text 4"/>
           <p:cNvSpPr/>
           <p:nvPr/>
         </p:nvSpPr>
@@ -7473,13 +13981,77 @@
       </p:sp>
       <p:sp>
         <p:nvSpPr>
-          <p:cNvPr id="6" name="Text 4"/>
+          <p:cNvPr id="7" name="Shape 5"/>
           <p:cNvSpPr/>
           <p:nvPr/>
         </p:nvSpPr>
         <p:spPr>
           <a:xfrm>
             <a:off x="640080" y="658368"/>
+            <a:ext cx="420624" cy="420624"/>
+          </a:xfrm>
+          <a:prstGeom prst="ellipse">
+            <a:avLst/>
+          </a:prstGeom>
+          <a:solidFill>
+            <a:srgbClr val="0068B7"/>
+          </a:solidFill>
+          <a:ln w="12700">
+            <a:solidFill>
+              <a:srgbClr val="0068B7"/>
+            </a:solidFill>
+            <a:prstDash val="solid"/>
+          </a:ln>
+        </p:spPr>
+      </p:sp>
+      <p:sp>
+        <p:nvSpPr>
+          <p:cNvPr id="8" name="Text 6"/>
+          <p:cNvSpPr/>
+          <p:nvPr/>
+        </p:nvSpPr>
+        <p:spPr>
+          <a:xfrm>
+            <a:off x="640080" y="731520"/>
+            <a:ext cx="420624" cy="164592"/>
+          </a:xfrm>
+          <a:prstGeom prst="rect">
+            <a:avLst/>
+          </a:prstGeom>
+          <a:noFill/>
+          <a:ln/>
+        </p:spPr>
+        <p:txBody>
+          <a:bodyPr wrap="square" lIns="0" tIns="0" rIns="0" bIns="0" rtlCol="0" anchor="ctr"/>
+          <a:lstStyle/>
+          <a:p>
+            <a:pPr algn="ctr" indent="0" marL="0">
+              <a:buNone/>
+            </a:pPr>
+            <a:r>
+              <a:rPr lang="en-US" sz="1100" b="1" dirty="0">
+                <a:solidFill>
+                  <a:srgbClr val="FFFFFF"/>
+                </a:solidFill>
+                <a:latin typeface="Aptos" pitchFamily="34" charset="0"/>
+                <a:ea typeface="Aptos" pitchFamily="34" charset="-122"/>
+                <a:cs typeface="Aptos" pitchFamily="34" charset="-120"/>
+              </a:rPr>
+              <a:t>5</a:t>
+            </a:r>
+            <a:endParaRPr lang="en-US" sz="1100" dirty="0"/>
+          </a:p>
+        </p:txBody>
+      </p:sp>
+      <p:sp>
+        <p:nvSpPr>
+          <p:cNvPr id="9" name="Text 7"/>
+          <p:cNvSpPr/>
+          <p:nvPr/>
+        </p:nvSpPr>
+        <p:spPr>
+          <a:xfrm>
+            <a:off x="640080" y="621792"/>
             <a:ext cx="10881360" cy="566928"/>
           </a:xfrm>
           <a:prstGeom prst="rect">
@@ -7506,7 +14078,7 @@
                 <a:ea typeface="Aptos Display" pitchFamily="34" charset="-122"/>
                 <a:cs typeface="Aptos Display" pitchFamily="34" charset="-120"/>
               </a:rPr>
-              <a:t>Risks, Failure Modes, and Guardrails</a:t>
+              <a:t>Public Health Example</a:t>
             </a:r>
             <a:endParaRPr lang="en-US" sz="2700" dirty="0"/>
           </a:p>
@@ -7514,32 +14086,178 @@
       </p:sp>
       <p:sp>
         <p:nvSpPr>
-          <p:cNvPr id="7" name="Text 5"/>
-          <p:cNvSpPr/>
-          <p:nvPr/>
-        </p:nvSpPr>
-        <p:spPr>
-          <a:xfrm>
-            <a:off x="822960" y="1325880"/>
-            <a:ext cx="10378440" cy="4800600"/>
-          </a:xfrm>
-          <a:prstGeom prst="rect">
-            <a:avLst/>
-          </a:prstGeom>
-          <a:noFill/>
-          <a:ln/>
-        </p:spPr>
-        <p:txBody>
-          <a:bodyPr wrap="square" lIns="1016" tIns="1016" rIns="1016" bIns="1016" rtlCol="0" anchor="t">
+          <p:cNvPr id="10" name="Text 8"/>
+          <p:cNvSpPr/>
+          <p:nvPr/>
+        </p:nvSpPr>
+        <p:spPr>
+          <a:xfrm>
+            <a:off x="868680" y="1417320"/>
+            <a:ext cx="6675120" cy="4434840"/>
+          </a:xfrm>
+          <a:prstGeom prst="rect">
+            <a:avLst/>
+          </a:prstGeom>
+          <a:noFill/>
+          <a:ln/>
+        </p:spPr>
+        <p:txBody>
+          <a:bodyPr wrap="square" lIns="635" tIns="635" rIns="635" bIns="635" rtlCol="0" anchor="t">
             <a:normAutofit/>
           </a:bodyPr>
           <a:lstStyle/>
           <a:p>
+            <a:r>
+              <a:rPr lang="en-US" sz="1700" dirty="0">
+                <a:solidFill>
+                  <a:srgbClr val="17364A"/>
+                </a:solidFill>
+                <a:latin typeface="Aptos" pitchFamily="34" charset="0"/>
+                <a:ea typeface="Aptos" pitchFamily="34" charset="-122"/>
+                <a:cs typeface="Aptos" pitchFamily="34" charset="-120"/>
+              </a:rPr>
+              <a:t>A grant funds a two-year AI pilot to help identify likely duplicate records in a public health system.</a:t>
+            </a:r>
+            <a:endParaRPr lang="en-US" sz="1700" dirty="0"/>
+          </a:p>
+          <a:p>
+            <a:r>
+              <a:rPr lang="en-US" sz="1700" dirty="0">
+                <a:solidFill>
+                  <a:srgbClr val="17364A"/>
+                </a:solidFill>
+                <a:latin typeface="Aptos" pitchFamily="34" charset="0"/>
+                <a:ea typeface="Aptos" pitchFamily="34" charset="-122"/>
+                <a:cs typeface="Aptos" pitchFamily="34" charset="-120"/>
+              </a:rPr>
+              <a:t>The pilot improves efficiency, but the grant does not cover long-term hosting, monitoring, system upgrades, training, or.</a:t>
+            </a:r>
+            <a:endParaRPr lang="en-US" sz="1700" dirty="0"/>
+          </a:p>
+          <a:p>
+            <a:r>
+              <a:rPr lang="en-US" sz="1700" dirty="0">
+                <a:solidFill>
+                  <a:srgbClr val="17364A"/>
+                </a:solidFill>
+                <a:latin typeface="Aptos" pitchFamily="34" charset="0"/>
+                <a:ea typeface="Aptos" pitchFamily="34" charset="-122"/>
+                <a:cs typeface="Aptos" pitchFamily="34" charset="-120"/>
+              </a:rPr>
+              <a:t>When funding ends, staff continue relying on the tool even though no one is assigned to review performance.</a:t>
+            </a:r>
+            <a:endParaRPr lang="en-US" sz="1700" dirty="0"/>
+          </a:p>
+          <a:p>
+            <a:r>
+              <a:rPr lang="en-US" sz="1700" dirty="0">
+                <a:solidFill>
+                  <a:srgbClr val="17364A"/>
+                </a:solidFill>
+                <a:latin typeface="Aptos" pitchFamily="34" charset="0"/>
+                <a:ea typeface="Aptos" pitchFamily="34" charset="-122"/>
+                <a:cs typeface="Aptos" pitchFamily="34" charset="-120"/>
+              </a:rPr>
+              <a:t>A sustainability plan would have addressed this before launch.</a:t>
+            </a:r>
+            <a:endParaRPr lang="en-US" sz="1700" dirty="0"/>
+          </a:p>
+        </p:txBody>
+      </p:sp>
+      <p:sp>
+        <p:nvSpPr>
+          <p:cNvPr id="11" name="Shape 9"/>
+          <p:cNvSpPr/>
+          <p:nvPr/>
+        </p:nvSpPr>
+        <p:spPr>
+          <a:xfrm>
+            <a:off x="7909560" y="1417320"/>
+            <a:ext cx="3154680" cy="1828800"/>
+          </a:xfrm>
+          <a:prstGeom prst="roundRect">
+            <a:avLst>
+              <a:gd name="adj" fmla="val 6000"/>
+            </a:avLst>
+          </a:prstGeom>
+          <a:solidFill>
+            <a:srgbClr val="EEF8ED"/>
+          </a:solidFill>
+          <a:ln w="12700">
+            <a:solidFill>
+              <a:srgbClr val="B9D7E6"/>
+            </a:solidFill>
+            <a:prstDash val="solid"/>
+          </a:ln>
+        </p:spPr>
+      </p:sp>
+      <p:sp>
+        <p:nvSpPr>
+          <p:cNvPr id="12" name="Text 10"/>
+          <p:cNvSpPr/>
+          <p:nvPr/>
+        </p:nvSpPr>
+        <p:spPr>
+          <a:xfrm>
+            <a:off x="8074152" y="1563624"/>
+            <a:ext cx="2825496" cy="201168"/>
+          </a:xfrm>
+          <a:prstGeom prst="rect">
+            <a:avLst/>
+          </a:prstGeom>
+          <a:noFill/>
+          <a:ln/>
+        </p:spPr>
+        <p:txBody>
+          <a:bodyPr wrap="square" lIns="0" tIns="0" rIns="0" bIns="0" rtlCol="0" anchor="ctr"/>
+          <a:lstStyle/>
+          <a:p>
             <a:pPr indent="0" marL="0">
               <a:buNone/>
             </a:pPr>
             <a:r>
-              <a:rPr lang="en-US" sz="1420" dirty="0">
+              <a:rPr lang="en-US" sz="950" b="1" dirty="0">
+                <a:solidFill>
+                  <a:srgbClr val="0068B7"/>
+                </a:solidFill>
+                <a:latin typeface="Aptos" pitchFamily="34" charset="0"/>
+                <a:ea typeface="Aptos" pitchFamily="34" charset="-122"/>
+                <a:cs typeface="Aptos" pitchFamily="34" charset="-120"/>
+              </a:rPr>
+              <a:t>Key idea</a:t>
+            </a:r>
+            <a:endParaRPr lang="en-US" sz="950" dirty="0"/>
+          </a:p>
+        </p:txBody>
+      </p:sp>
+      <p:sp>
+        <p:nvSpPr>
+          <p:cNvPr id="13" name="Text 11"/>
+          <p:cNvSpPr/>
+          <p:nvPr/>
+        </p:nvSpPr>
+        <p:spPr>
+          <a:xfrm>
+            <a:off x="8074152" y="1856232"/>
+            <a:ext cx="2825496" cy="1261872"/>
+          </a:xfrm>
+          <a:prstGeom prst="rect">
+            <a:avLst/>
+          </a:prstGeom>
+          <a:noFill/>
+          <a:ln/>
+        </p:spPr>
+        <p:txBody>
+          <a:bodyPr wrap="square" lIns="0" tIns="0" rIns="0" bIns="0" rtlCol="0" anchor="t">
+            <a:normAutofit/>
+          </a:bodyPr>
+          <a:lstStyle/>
+          <a:p>
+            <a:pPr indent="0" marL="0">
+              <a:buNone/>
+            </a:pPr>
+            <a:r>
+              <a:rPr lang="en-US" sz="1250" dirty="0">
                 <a:solidFill>
                   <a:srgbClr val="17364A"/>
                 </a:solidFill>
@@ -7547,9 +14265,116 @@
                 <a:ea typeface="Aptos" pitchFamily="34" charset="-122"/>
                 <a:cs typeface="Aptos" pitchFamily="34" charset="-120"/>
               </a:rPr>
-              <a:t>One risk is pilot dependency. Staff may begin relying on a tool that was never funded or governed for long-term use. A guardrail is to define pilot duration, scale limits, success criteria, and continuation requirements before launch. Another risk is silent degradation. A tool may continue operating after data, policies, user behavior, or vendor models change. A guardrail is to require periodic lifecycle review and clear pause or sunset criteria.</a:t>
-            </a:r>
-            <a:endParaRPr lang="en-US" sz="1420" dirty="0"/>
+              <a:t>A grant funds a two-year AI pilot to help identify likely duplicate records in a public health system.</a:t>
+            </a:r>
+            <a:endParaRPr lang="en-US" sz="1250" dirty="0"/>
+          </a:p>
+        </p:txBody>
+      </p:sp>
+      <p:sp>
+        <p:nvSpPr>
+          <p:cNvPr id="14" name="Shape 12"/>
+          <p:cNvSpPr/>
+          <p:nvPr/>
+        </p:nvSpPr>
+        <p:spPr>
+          <a:xfrm>
+            <a:off x="7909560" y="3520440"/>
+            <a:ext cx="3154680" cy="1737360"/>
+          </a:xfrm>
+          <a:prstGeom prst="roundRect">
+            <a:avLst>
+              <a:gd name="adj" fmla="val 6316"/>
+            </a:avLst>
+          </a:prstGeom>
+          <a:solidFill>
+            <a:srgbClr val="EAF6F8"/>
+          </a:solidFill>
+          <a:ln w="12700">
+            <a:solidFill>
+              <a:srgbClr val="B9D7E6"/>
+            </a:solidFill>
+            <a:prstDash val="solid"/>
+          </a:ln>
+        </p:spPr>
+      </p:sp>
+      <p:sp>
+        <p:nvSpPr>
+          <p:cNvPr id="15" name="Text 13"/>
+          <p:cNvSpPr/>
+          <p:nvPr/>
+        </p:nvSpPr>
+        <p:spPr>
+          <a:xfrm>
+            <a:off x="8074152" y="3666744"/>
+            <a:ext cx="2825496" cy="201168"/>
+          </a:xfrm>
+          <a:prstGeom prst="rect">
+            <a:avLst/>
+          </a:prstGeom>
+          <a:noFill/>
+          <a:ln/>
+        </p:spPr>
+        <p:txBody>
+          <a:bodyPr wrap="square" lIns="0" tIns="0" rIns="0" bIns="0" rtlCol="0" anchor="ctr"/>
+          <a:lstStyle/>
+          <a:p>
+            <a:pPr indent="0" marL="0">
+              <a:buNone/>
+            </a:pPr>
+            <a:r>
+              <a:rPr lang="en-US" sz="950" b="1" dirty="0">
+                <a:solidFill>
+                  <a:srgbClr val="0068B7"/>
+                </a:solidFill>
+                <a:latin typeface="Aptos" pitchFamily="34" charset="0"/>
+                <a:ea typeface="Aptos" pitchFamily="34" charset="-122"/>
+                <a:cs typeface="Aptos" pitchFamily="34" charset="-120"/>
+              </a:rPr>
+              <a:t>Use this for</a:t>
+            </a:r>
+            <a:endParaRPr lang="en-US" sz="950" dirty="0"/>
+          </a:p>
+        </p:txBody>
+      </p:sp>
+      <p:sp>
+        <p:nvSpPr>
+          <p:cNvPr id="16" name="Text 14"/>
+          <p:cNvSpPr/>
+          <p:nvPr/>
+        </p:nvSpPr>
+        <p:spPr>
+          <a:xfrm>
+            <a:off x="8074152" y="3959352"/>
+            <a:ext cx="2825496" cy="1170432"/>
+          </a:xfrm>
+          <a:prstGeom prst="rect">
+            <a:avLst/>
+          </a:prstGeom>
+          <a:noFill/>
+          <a:ln/>
+        </p:spPr>
+        <p:txBody>
+          <a:bodyPr wrap="square" lIns="0" tIns="0" rIns="0" bIns="0" rtlCol="0" anchor="t">
+            <a:normAutofit/>
+          </a:bodyPr>
+          <a:lstStyle/>
+          <a:p>
+            <a:pPr indent="0" marL="0">
+              <a:buNone/>
+            </a:pPr>
+            <a:r>
+              <a:rPr lang="en-US" sz="1250" dirty="0">
+                <a:solidFill>
+                  <a:srgbClr val="17364A"/>
+                </a:solidFill>
+                <a:latin typeface="Aptos" pitchFamily="34" charset="0"/>
+                <a:ea typeface="Aptos" pitchFamily="34" charset="-122"/>
+                <a:cs typeface="Aptos" pitchFamily="34" charset="-120"/>
+              </a:rPr>
+              <a:t>Connect the concept to public health decisions, safeguards, documentation, or implementation work.</a:t>
+            </a:r>
+            <a:endParaRPr lang="en-US" sz="1250" dirty="0"/>
           </a:p>
         </p:txBody>
       </p:sp>

--- a/downloads/presentations/modules/lesson-37-ai-sustainability-and-lifecycle-funding.pptx
+++ b/downloads/presentations/modules/lesson-37-ai-sustainability-and-lifecycle-funding.pptx
@@ -2900,6 +2900,45 @@
           </a:p>
         </p:txBody>
       </p:sp>
+      <p:sp>
+        <p:nvSpPr>
+          <p:cNvPr id="8" name="Text 5"/>
+          <p:cNvSpPr/>
+          <p:nvPr/>
+        </p:nvSpPr>
+        <p:spPr>
+          <a:xfrm>
+            <a:off x="11137392" y="6510528"/>
+            <a:ext cx="411480" cy="201168"/>
+          </a:xfrm>
+          <a:prstGeom prst="rect">
+            <a:avLst/>
+          </a:prstGeom>
+          <a:noFill/>
+          <a:ln/>
+        </p:spPr>
+        <p:txBody>
+          <a:bodyPr wrap="square" lIns="0" tIns="0" rIns="0" bIns="0" rtlCol="0" anchor="ctr"/>
+          <a:lstStyle/>
+          <a:p>
+            <a:pPr algn="r" indent="0" marL="0">
+              <a:buNone/>
+            </a:pPr>
+            <a:r>
+              <a:rPr lang="en-US" sz="900" dirty="0">
+                <a:solidFill>
+                  <a:srgbClr val="5F7181"/>
+                </a:solidFill>
+                <a:latin typeface="Aptos" pitchFamily="34" charset="0"/>
+                <a:ea typeface="Aptos" pitchFamily="34" charset="-122"/>
+                <a:cs typeface="Aptos" pitchFamily="34" charset="-120"/>
+              </a:rPr>
+              <a:t>1</a:t>
+            </a:r>
+            <a:endParaRPr lang="en-US" sz="900" dirty="0"/>
+          </a:p>
+        </p:txBody>
+      </p:sp>
     </p:spTree>
   </p:cSld>
   <p:clrMapOvr>
@@ -3093,7 +3132,7 @@
                 <a:ea typeface="Aptos" pitchFamily="34" charset="-122"/>
                 <a:cs typeface="Aptos" pitchFamily="34" charset="-120"/>
               </a:rPr>
-              <a:t>© Paula Soper</a:t>
+              <a:t>Â© Paula Soper</a:t>
             </a:r>
             <a:endParaRPr lang="en-US" sz="800" dirty="0"/>
           </a:p>
@@ -3101,7 +3140,46 @@
       </p:sp>
       <p:sp>
         <p:nvSpPr>
-          <p:cNvPr id="7" name="Shape 5"/>
+          <p:cNvPr id="7" name="Text 5"/>
+          <p:cNvSpPr/>
+          <p:nvPr/>
+        </p:nvSpPr>
+        <p:spPr>
+          <a:xfrm>
+            <a:off x="11137392" y="6510528"/>
+            <a:ext cx="411480" cy="201168"/>
+          </a:xfrm>
+          <a:prstGeom prst="rect">
+            <a:avLst/>
+          </a:prstGeom>
+          <a:noFill/>
+          <a:ln/>
+        </p:spPr>
+        <p:txBody>
+          <a:bodyPr wrap="square" lIns="0" tIns="0" rIns="0" bIns="0" rtlCol="0" anchor="ctr"/>
+          <a:lstStyle/>
+          <a:p>
+            <a:pPr algn="r" indent="0" marL="0">
+              <a:buNone/>
+            </a:pPr>
+            <a:r>
+              <a:rPr lang="en-US" sz="900" dirty="0">
+                <a:solidFill>
+                  <a:srgbClr val="5F7181"/>
+                </a:solidFill>
+                <a:latin typeface="Aptos" pitchFamily="34" charset="0"/>
+                <a:ea typeface="Aptos" pitchFamily="34" charset="-122"/>
+                <a:cs typeface="Aptos" pitchFamily="34" charset="-120"/>
+              </a:rPr>
+              <a:t>10</a:t>
+            </a:r>
+            <a:endParaRPr lang="en-US" sz="900" dirty="0"/>
+          </a:p>
+        </p:txBody>
+      </p:sp>
+      <p:sp>
+        <p:nvSpPr>
+          <p:cNvPr id="8" name="Shape 6"/>
           <p:cNvSpPr/>
           <p:nvPr/>
         </p:nvSpPr>
@@ -3126,7 +3204,7 @@
       </p:sp>
       <p:sp>
         <p:nvSpPr>
-          <p:cNvPr id="8" name="Text 6"/>
+          <p:cNvPr id="9" name="Text 7"/>
           <p:cNvSpPr/>
           <p:nvPr/>
         </p:nvSpPr>
@@ -3165,14 +3243,14 @@
       </p:sp>
       <p:sp>
         <p:nvSpPr>
-          <p:cNvPr id="9" name="Text 7"/>
+          <p:cNvPr id="10" name="Text 8"/>
           <p:cNvSpPr/>
           <p:nvPr/>
         </p:nvSpPr>
         <p:spPr>
           <a:xfrm>
             <a:off x="640080" y="621792"/>
-            <a:ext cx="10881360" cy="566928"/>
+            <a:ext cx="10881360" cy="713232"/>
           </a:xfrm>
           <a:prstGeom prst="rect">
             <a:avLst/>
@@ -3190,7 +3268,7 @@
               <a:buNone/>
             </a:pPr>
             <a:r>
-              <a:rPr lang="en-US" sz="2700" b="1" dirty="0">
+              <a:rPr lang="en-US" sz="3400" b="1" dirty="0">
                 <a:solidFill>
                   <a:srgbClr val="003A63"/>
                 </a:solidFill>
@@ -3200,20 +3278,20 @@
               </a:rPr>
               <a:t>Technical and Governance Deep Dive</a:t>
             </a:r>
-            <a:endParaRPr lang="en-US" sz="2700" dirty="0"/>
-          </a:p>
-        </p:txBody>
-      </p:sp>
-      <p:sp>
-        <p:nvSpPr>
-          <p:cNvPr id="10" name="Text 8"/>
-          <p:cNvSpPr/>
-          <p:nvPr/>
-        </p:nvSpPr>
-        <p:spPr>
-          <a:xfrm>
-            <a:off x="868680" y="1417320"/>
-            <a:ext cx="6675120" cy="4434840"/>
+            <a:endParaRPr lang="en-US" sz="3400" dirty="0"/>
+          </a:p>
+        </p:txBody>
+      </p:sp>
+      <p:sp>
+        <p:nvSpPr>
+          <p:cNvPr id="11" name="Text 9"/>
+          <p:cNvSpPr/>
+          <p:nvPr/>
+        </p:nvSpPr>
+        <p:spPr>
+          <a:xfrm>
+            <a:off x="868680" y="1508760"/>
+            <a:ext cx="6537960" cy="4160520"/>
           </a:xfrm>
           <a:prstGeom prst="rect">
             <a:avLst/>
@@ -3228,7 +3306,7 @@
           <a:lstStyle/>
           <a:p>
             <a:r>
-              <a:rPr lang="en-US" sz="1700" dirty="0">
+              <a:rPr lang="en-US" sz="2100" dirty="0">
                 <a:solidFill>
                   <a:srgbClr val="17364A"/>
                 </a:solidFill>
@@ -3238,11 +3316,11 @@
               </a:rPr>
               <a:t>AI lifecycle planning should begin during intake and business case review.</a:t>
             </a:r>
-            <a:endParaRPr lang="en-US" sz="1700" dirty="0"/>
-          </a:p>
-          <a:p>
-            <a:r>
-              <a:rPr lang="en-US" sz="1700" dirty="0">
+            <a:endParaRPr lang="en-US" sz="2100" dirty="0"/>
+          </a:p>
+          <a:p>
+            <a:r>
+              <a:rPr lang="en-US" sz="2100" dirty="0">
                 <a:solidFill>
                   <a:srgbClr val="17364A"/>
                 </a:solidFill>
@@ -3250,13 +3328,13 @@
                 <a:ea typeface="Aptos" pitchFamily="34" charset="-122"/>
                 <a:cs typeface="Aptos" pitchFamily="34" charset="-120"/>
               </a:rPr>
-              <a:t>Leaders should ask whether the use case is a short-term experiment, a time-limited emergency support tool, or a long-term.</a:t>
-            </a:r>
-            <a:endParaRPr lang="en-US" sz="1700" dirty="0"/>
-          </a:p>
-          <a:p>
-            <a:r>
-              <a:rPr lang="en-US" sz="1700" dirty="0">
+              <a:t>Leaders should ask whether the use case is a short-term experiment, a time-limited emergency support.</a:t>
+            </a:r>
+            <a:endParaRPr lang="en-US" sz="2100" dirty="0"/>
+          </a:p>
+          <a:p>
+            <a:r>
+              <a:rPr lang="en-US" sz="2100" dirty="0">
                 <a:solidFill>
                   <a:srgbClr val="17364A"/>
                 </a:solidFill>
@@ -3266,27 +3344,13 @@
               </a:rPr>
               <a:t>Each category has different funding and governance needs.</a:t>
             </a:r>
-            <a:endParaRPr lang="en-US" sz="1700" dirty="0"/>
-          </a:p>
-          <a:p>
-            <a:r>
-              <a:rPr lang="en-US" sz="1700" dirty="0">
-                <a:solidFill>
-                  <a:srgbClr val="17364A"/>
-                </a:solidFill>
-                <a:latin typeface="Aptos" pitchFamily="34" charset="0"/>
-                <a:ea typeface="Aptos" pitchFamily="34" charset="-122"/>
-                <a:cs typeface="Aptos" pitchFamily="34" charset="-120"/>
-              </a:rPr>
-              <a:t>A time-limited tool may need clear end dates and data deletion rules.</a:t>
-            </a:r>
-            <a:endParaRPr lang="en-US" sz="1700" dirty="0"/>
-          </a:p>
-        </p:txBody>
-      </p:sp>
-      <p:sp>
-        <p:nvSpPr>
-          <p:cNvPr id="11" name="Shape 9"/>
+            <a:endParaRPr lang="en-US" sz="2100" dirty="0"/>
+          </a:p>
+        </p:txBody>
+      </p:sp>
+      <p:sp>
+        <p:nvSpPr>
+          <p:cNvPr id="12" name="Shape 10"/>
           <p:cNvSpPr/>
           <p:nvPr/>
         </p:nvSpPr>
@@ -3313,14 +3377,14 @@
       </p:sp>
       <p:sp>
         <p:nvSpPr>
-          <p:cNvPr id="12" name="Text 10"/>
+          <p:cNvPr id="13" name="Text 11"/>
           <p:cNvSpPr/>
           <p:nvPr/>
         </p:nvSpPr>
         <p:spPr>
           <a:xfrm>
             <a:off x="8074152" y="1563624"/>
-            <a:ext cx="2825496" cy="201168"/>
+            <a:ext cx="2825496" cy="256032"/>
           </a:xfrm>
           <a:prstGeom prst="rect">
             <a:avLst/>
@@ -3336,7 +3400,7 @@
               <a:buNone/>
             </a:pPr>
             <a:r>
-              <a:rPr lang="en-US" sz="950" b="1" dirty="0">
+              <a:rPr lang="en-US" sz="1300" b="1" dirty="0">
                 <a:solidFill>
                   <a:srgbClr val="0068B7"/>
                 </a:solidFill>
@@ -3346,20 +3410,20 @@
               </a:rPr>
               <a:t>Key idea</a:t>
             </a:r>
-            <a:endParaRPr lang="en-US" sz="950" dirty="0"/>
-          </a:p>
-        </p:txBody>
-      </p:sp>
-      <p:sp>
-        <p:nvSpPr>
-          <p:cNvPr id="13" name="Text 11"/>
-          <p:cNvSpPr/>
-          <p:nvPr/>
-        </p:nvSpPr>
-        <p:spPr>
-          <a:xfrm>
-            <a:off x="8074152" y="1856232"/>
-            <a:ext cx="2825496" cy="1261872"/>
+            <a:endParaRPr lang="en-US" sz="1300" dirty="0"/>
+          </a:p>
+        </p:txBody>
+      </p:sp>
+      <p:sp>
+        <p:nvSpPr>
+          <p:cNvPr id="14" name="Text 12"/>
+          <p:cNvSpPr/>
+          <p:nvPr/>
+        </p:nvSpPr>
+        <p:spPr>
+          <a:xfrm>
+            <a:off x="8074152" y="1920240"/>
+            <a:ext cx="2825496" cy="1188720"/>
           </a:xfrm>
           <a:prstGeom prst="rect">
             <a:avLst/>
@@ -3377,7 +3441,7 @@
               <a:buNone/>
             </a:pPr>
             <a:r>
-              <a:rPr lang="en-US" sz="1250" dirty="0">
+              <a:rPr lang="en-US" sz="1550" dirty="0">
                 <a:solidFill>
                   <a:srgbClr val="17364A"/>
                 </a:solidFill>
@@ -3387,13 +3451,13 @@
               </a:rPr>
               <a:t>AI lifecycle planning should begin during intake and business case review.</a:t>
             </a:r>
-            <a:endParaRPr lang="en-US" sz="1250" dirty="0"/>
-          </a:p>
-        </p:txBody>
-      </p:sp>
-      <p:sp>
-        <p:nvSpPr>
-          <p:cNvPr id="14" name="Shape 12"/>
+            <a:endParaRPr lang="en-US" sz="1550" dirty="0"/>
+          </a:p>
+        </p:txBody>
+      </p:sp>
+      <p:sp>
+        <p:nvSpPr>
+          <p:cNvPr id="15" name="Shape 13"/>
           <p:cNvSpPr/>
           <p:nvPr/>
         </p:nvSpPr>
@@ -3420,14 +3484,14 @@
       </p:sp>
       <p:sp>
         <p:nvSpPr>
-          <p:cNvPr id="15" name="Text 13"/>
+          <p:cNvPr id="16" name="Text 14"/>
           <p:cNvSpPr/>
           <p:nvPr/>
         </p:nvSpPr>
         <p:spPr>
           <a:xfrm>
             <a:off x="8074152" y="3666744"/>
-            <a:ext cx="2825496" cy="201168"/>
+            <a:ext cx="2825496" cy="256032"/>
           </a:xfrm>
           <a:prstGeom prst="rect">
             <a:avLst/>
@@ -3443,7 +3507,7 @@
               <a:buNone/>
             </a:pPr>
             <a:r>
-              <a:rPr lang="en-US" sz="950" b="1" dirty="0">
+              <a:rPr lang="en-US" sz="1300" b="1" dirty="0">
                 <a:solidFill>
                   <a:srgbClr val="0068B7"/>
                 </a:solidFill>
@@ -3453,20 +3517,20 @@
               </a:rPr>
               <a:t>Use this for</a:t>
             </a:r>
-            <a:endParaRPr lang="en-US" sz="950" dirty="0"/>
-          </a:p>
-        </p:txBody>
-      </p:sp>
-      <p:sp>
-        <p:nvSpPr>
-          <p:cNvPr id="16" name="Text 14"/>
-          <p:cNvSpPr/>
-          <p:nvPr/>
-        </p:nvSpPr>
-        <p:spPr>
-          <a:xfrm>
-            <a:off x="8074152" y="3959352"/>
-            <a:ext cx="2825496" cy="1170432"/>
+            <a:endParaRPr lang="en-US" sz="1300" dirty="0"/>
+          </a:p>
+        </p:txBody>
+      </p:sp>
+      <p:sp>
+        <p:nvSpPr>
+          <p:cNvPr id="17" name="Text 15"/>
+          <p:cNvSpPr/>
+          <p:nvPr/>
+        </p:nvSpPr>
+        <p:spPr>
+          <a:xfrm>
+            <a:off x="8074152" y="4023360"/>
+            <a:ext cx="2825496" cy="1097280"/>
           </a:xfrm>
           <a:prstGeom prst="rect">
             <a:avLst/>
@@ -3484,7 +3548,7 @@
               <a:buNone/>
             </a:pPr>
             <a:r>
-              <a:rPr lang="en-US" sz="1250" dirty="0">
+              <a:rPr lang="en-US" sz="1550" dirty="0">
                 <a:solidFill>
                   <a:srgbClr val="17364A"/>
                 </a:solidFill>
@@ -3494,7 +3558,7 @@
               </a:rPr>
               <a:t>Connect the concept to public health decisions, safeguards, documentation, or implementation work.</a:t>
             </a:r>
-            <a:endParaRPr lang="en-US" sz="1250" dirty="0"/>
+            <a:endParaRPr lang="en-US" sz="1550" dirty="0"/>
           </a:p>
         </p:txBody>
       </p:sp>
@@ -3691,7 +3755,7 @@
                 <a:ea typeface="Aptos" pitchFamily="34" charset="-122"/>
                 <a:cs typeface="Aptos" pitchFamily="34" charset="-120"/>
               </a:rPr>
-              <a:t>© Paula Soper</a:t>
+              <a:t>Â© Paula Soper</a:t>
             </a:r>
             <a:endParaRPr lang="en-US" sz="800" dirty="0"/>
           </a:p>
@@ -3699,7 +3763,46 @@
       </p:sp>
       <p:sp>
         <p:nvSpPr>
-          <p:cNvPr id="7" name="Shape 5"/>
+          <p:cNvPr id="7" name="Text 5"/>
+          <p:cNvSpPr/>
+          <p:nvPr/>
+        </p:nvSpPr>
+        <p:spPr>
+          <a:xfrm>
+            <a:off x="11137392" y="6510528"/>
+            <a:ext cx="411480" cy="201168"/>
+          </a:xfrm>
+          <a:prstGeom prst="rect">
+            <a:avLst/>
+          </a:prstGeom>
+          <a:noFill/>
+          <a:ln/>
+        </p:spPr>
+        <p:txBody>
+          <a:bodyPr wrap="square" lIns="0" tIns="0" rIns="0" bIns="0" rtlCol="0" anchor="ctr"/>
+          <a:lstStyle/>
+          <a:p>
+            <a:pPr algn="r" indent="0" marL="0">
+              <a:buNone/>
+            </a:pPr>
+            <a:r>
+              <a:rPr lang="en-US" sz="900" dirty="0">
+                <a:solidFill>
+                  <a:srgbClr val="5F7181"/>
+                </a:solidFill>
+                <a:latin typeface="Aptos" pitchFamily="34" charset="0"/>
+                <a:ea typeface="Aptos" pitchFamily="34" charset="-122"/>
+                <a:cs typeface="Aptos" pitchFamily="34" charset="-120"/>
+              </a:rPr>
+              <a:t>11</a:t>
+            </a:r>
+            <a:endParaRPr lang="en-US" sz="900" dirty="0"/>
+          </a:p>
+        </p:txBody>
+      </p:sp>
+      <p:sp>
+        <p:nvSpPr>
+          <p:cNvPr id="8" name="Shape 6"/>
           <p:cNvSpPr/>
           <p:nvPr/>
         </p:nvSpPr>
@@ -3724,7 +3827,7 @@
       </p:sp>
       <p:sp>
         <p:nvSpPr>
-          <p:cNvPr id="8" name="Text 6"/>
+          <p:cNvPr id="9" name="Text 7"/>
           <p:cNvSpPr/>
           <p:nvPr/>
         </p:nvSpPr>
@@ -3763,14 +3866,14 @@
       </p:sp>
       <p:sp>
         <p:nvSpPr>
-          <p:cNvPr id="9" name="Text 7"/>
+          <p:cNvPr id="10" name="Text 8"/>
           <p:cNvSpPr/>
           <p:nvPr/>
         </p:nvSpPr>
         <p:spPr>
           <a:xfrm>
             <a:off x="640080" y="621792"/>
-            <a:ext cx="10881360" cy="566928"/>
+            <a:ext cx="10881360" cy="713232"/>
           </a:xfrm>
           <a:prstGeom prst="rect">
             <a:avLst/>
@@ -3788,7 +3891,7 @@
               <a:buNone/>
             </a:pPr>
             <a:r>
-              <a:rPr lang="en-US" sz="2700" b="1" dirty="0">
+              <a:rPr lang="en-US" sz="3400" b="1" dirty="0">
                 <a:solidFill>
                   <a:srgbClr val="003A63"/>
                 </a:solidFill>
@@ -3798,20 +3901,20 @@
               </a:rPr>
               <a:t>Risks, Failure Modes, and Guardrails</a:t>
             </a:r>
-            <a:endParaRPr lang="en-US" sz="2700" dirty="0"/>
-          </a:p>
-        </p:txBody>
-      </p:sp>
-      <p:sp>
-        <p:nvSpPr>
-          <p:cNvPr id="10" name="Text 8"/>
-          <p:cNvSpPr/>
-          <p:nvPr/>
-        </p:nvSpPr>
-        <p:spPr>
-          <a:xfrm>
-            <a:off x="868680" y="1417320"/>
-            <a:ext cx="6675120" cy="4434840"/>
+            <a:endParaRPr lang="en-US" sz="3400" dirty="0"/>
+          </a:p>
+        </p:txBody>
+      </p:sp>
+      <p:sp>
+        <p:nvSpPr>
+          <p:cNvPr id="11" name="Text 9"/>
+          <p:cNvSpPr/>
+          <p:nvPr/>
+        </p:nvSpPr>
+        <p:spPr>
+          <a:xfrm>
+            <a:off x="868680" y="1508760"/>
+            <a:ext cx="6537960" cy="4160520"/>
           </a:xfrm>
           <a:prstGeom prst="rect">
             <a:avLst/>
@@ -3826,7 +3929,7 @@
           <a:lstStyle/>
           <a:p>
             <a:r>
-              <a:rPr lang="en-US" sz="1700" dirty="0">
+              <a:rPr lang="en-US" sz="2100" dirty="0">
                 <a:solidFill>
                   <a:srgbClr val="17364A"/>
                 </a:solidFill>
@@ -3836,11 +3939,11 @@
               </a:rPr>
               <a:t>One risk is pilot dependency.</a:t>
             </a:r>
-            <a:endParaRPr lang="en-US" sz="1700" dirty="0"/>
-          </a:p>
-          <a:p>
-            <a:r>
-              <a:rPr lang="en-US" sz="1700" dirty="0">
+            <a:endParaRPr lang="en-US" sz="2100" dirty="0"/>
+          </a:p>
+          <a:p>
+            <a:r>
+              <a:rPr lang="en-US" sz="2100" dirty="0">
                 <a:solidFill>
                   <a:srgbClr val="17364A"/>
                 </a:solidFill>
@@ -3850,11 +3953,11 @@
               </a:rPr>
               <a:t>Staff may begin relying on a tool that was never funded or governed for long-term use.</a:t>
             </a:r>
-            <a:endParaRPr lang="en-US" sz="1700" dirty="0"/>
-          </a:p>
-          <a:p>
-            <a:r>
-              <a:rPr lang="en-US" sz="1700" dirty="0">
+            <a:endParaRPr lang="en-US" sz="2100" dirty="0"/>
+          </a:p>
+          <a:p>
+            <a:r>
+              <a:rPr lang="en-US" sz="2100" dirty="0">
                 <a:solidFill>
                   <a:srgbClr val="17364A"/>
                 </a:solidFill>
@@ -3862,29 +3965,15 @@
                 <a:ea typeface="Aptos" pitchFamily="34" charset="-122"/>
                 <a:cs typeface="Aptos" pitchFamily="34" charset="-120"/>
               </a:rPr>
-              <a:t>A guardrail is to define pilot duration, scale limits, success criteria, and continuation requirements before launch.</a:t>
-            </a:r>
-            <a:endParaRPr lang="en-US" sz="1700" dirty="0"/>
-          </a:p>
-          <a:p>
-            <a:r>
-              <a:rPr lang="en-US" sz="1700" dirty="0">
-                <a:solidFill>
-                  <a:srgbClr val="17364A"/>
-                </a:solidFill>
-                <a:latin typeface="Aptos" pitchFamily="34" charset="0"/>
-                <a:ea typeface="Aptos" pitchFamily="34" charset="-122"/>
-                <a:cs typeface="Aptos" pitchFamily="34" charset="-120"/>
-              </a:rPr>
-              <a:t>Another risk is silent degradation.</a:t>
-            </a:r>
-            <a:endParaRPr lang="en-US" sz="1700" dirty="0"/>
-          </a:p>
-        </p:txBody>
-      </p:sp>
-      <p:sp>
-        <p:nvSpPr>
-          <p:cNvPr id="11" name="Shape 9"/>
+              <a:t>A guardrail is to define pilot duration, scale limits, success criteria, and continuation requirements.</a:t>
+            </a:r>
+            <a:endParaRPr lang="en-US" sz="2100" dirty="0"/>
+          </a:p>
+        </p:txBody>
+      </p:sp>
+      <p:sp>
+        <p:nvSpPr>
+          <p:cNvPr id="12" name="Shape 10"/>
           <p:cNvSpPr/>
           <p:nvPr/>
         </p:nvSpPr>
@@ -3911,14 +4000,14 @@
       </p:sp>
       <p:sp>
         <p:nvSpPr>
-          <p:cNvPr id="12" name="Text 10"/>
+          <p:cNvPr id="13" name="Text 11"/>
           <p:cNvSpPr/>
           <p:nvPr/>
         </p:nvSpPr>
         <p:spPr>
           <a:xfrm>
             <a:off x="8074152" y="1563624"/>
-            <a:ext cx="2825496" cy="201168"/>
+            <a:ext cx="2825496" cy="256032"/>
           </a:xfrm>
           <a:prstGeom prst="rect">
             <a:avLst/>
@@ -3934,7 +4023,7 @@
               <a:buNone/>
             </a:pPr>
             <a:r>
-              <a:rPr lang="en-US" sz="950" b="1" dirty="0">
+              <a:rPr lang="en-US" sz="1300" b="1" dirty="0">
                 <a:solidFill>
                   <a:srgbClr val="0068B7"/>
                 </a:solidFill>
@@ -3944,20 +4033,20 @@
               </a:rPr>
               <a:t>Key idea</a:t>
             </a:r>
-            <a:endParaRPr lang="en-US" sz="950" dirty="0"/>
-          </a:p>
-        </p:txBody>
-      </p:sp>
-      <p:sp>
-        <p:nvSpPr>
-          <p:cNvPr id="13" name="Text 11"/>
-          <p:cNvSpPr/>
-          <p:nvPr/>
-        </p:nvSpPr>
-        <p:spPr>
-          <a:xfrm>
-            <a:off x="8074152" y="1856232"/>
-            <a:ext cx="2825496" cy="1261872"/>
+            <a:endParaRPr lang="en-US" sz="1300" dirty="0"/>
+          </a:p>
+        </p:txBody>
+      </p:sp>
+      <p:sp>
+        <p:nvSpPr>
+          <p:cNvPr id="14" name="Text 12"/>
+          <p:cNvSpPr/>
+          <p:nvPr/>
+        </p:nvSpPr>
+        <p:spPr>
+          <a:xfrm>
+            <a:off x="8074152" y="1920240"/>
+            <a:ext cx="2825496" cy="1188720"/>
           </a:xfrm>
           <a:prstGeom prst="rect">
             <a:avLst/>
@@ -3975,7 +4064,7 @@
               <a:buNone/>
             </a:pPr>
             <a:r>
-              <a:rPr lang="en-US" sz="1250" dirty="0">
+              <a:rPr lang="en-US" sz="1550" dirty="0">
                 <a:solidFill>
                   <a:srgbClr val="17364A"/>
                 </a:solidFill>
@@ -3985,13 +4074,13 @@
               </a:rPr>
               <a:t>One risk is pilot dependency.</a:t>
             </a:r>
-            <a:endParaRPr lang="en-US" sz="1250" dirty="0"/>
-          </a:p>
-        </p:txBody>
-      </p:sp>
-      <p:sp>
-        <p:nvSpPr>
-          <p:cNvPr id="14" name="Shape 12"/>
+            <a:endParaRPr lang="en-US" sz="1550" dirty="0"/>
+          </a:p>
+        </p:txBody>
+      </p:sp>
+      <p:sp>
+        <p:nvSpPr>
+          <p:cNvPr id="15" name="Shape 13"/>
           <p:cNvSpPr/>
           <p:nvPr/>
         </p:nvSpPr>
@@ -4018,14 +4107,14 @@
       </p:sp>
       <p:sp>
         <p:nvSpPr>
-          <p:cNvPr id="15" name="Text 13"/>
+          <p:cNvPr id="16" name="Text 14"/>
           <p:cNvSpPr/>
           <p:nvPr/>
         </p:nvSpPr>
         <p:spPr>
           <a:xfrm>
             <a:off x="8074152" y="3666744"/>
-            <a:ext cx="2825496" cy="201168"/>
+            <a:ext cx="2825496" cy="256032"/>
           </a:xfrm>
           <a:prstGeom prst="rect">
             <a:avLst/>
@@ -4041,7 +4130,7 @@
               <a:buNone/>
             </a:pPr>
             <a:r>
-              <a:rPr lang="en-US" sz="950" b="1" dirty="0">
+              <a:rPr lang="en-US" sz="1300" b="1" dirty="0">
                 <a:solidFill>
                   <a:srgbClr val="0068B7"/>
                 </a:solidFill>
@@ -4051,20 +4140,20 @@
               </a:rPr>
               <a:t>Use this for</a:t>
             </a:r>
-            <a:endParaRPr lang="en-US" sz="950" dirty="0"/>
-          </a:p>
-        </p:txBody>
-      </p:sp>
-      <p:sp>
-        <p:nvSpPr>
-          <p:cNvPr id="16" name="Text 14"/>
-          <p:cNvSpPr/>
-          <p:nvPr/>
-        </p:nvSpPr>
-        <p:spPr>
-          <a:xfrm>
-            <a:off x="8074152" y="3959352"/>
-            <a:ext cx="2825496" cy="1170432"/>
+            <a:endParaRPr lang="en-US" sz="1300" dirty="0"/>
+          </a:p>
+        </p:txBody>
+      </p:sp>
+      <p:sp>
+        <p:nvSpPr>
+          <p:cNvPr id="17" name="Text 15"/>
+          <p:cNvSpPr/>
+          <p:nvPr/>
+        </p:nvSpPr>
+        <p:spPr>
+          <a:xfrm>
+            <a:off x="8074152" y="4023360"/>
+            <a:ext cx="2825496" cy="1097280"/>
           </a:xfrm>
           <a:prstGeom prst="rect">
             <a:avLst/>
@@ -4082,7 +4171,7 @@
               <a:buNone/>
             </a:pPr>
             <a:r>
-              <a:rPr lang="en-US" sz="1250" dirty="0">
+              <a:rPr lang="en-US" sz="1550" dirty="0">
                 <a:solidFill>
                   <a:srgbClr val="17364A"/>
                 </a:solidFill>
@@ -4092,7 +4181,7 @@
               </a:rPr>
               <a:t>Connect the concept to public health decisions, safeguards, documentation, or implementation work.</a:t>
             </a:r>
-            <a:endParaRPr lang="en-US" sz="1250" dirty="0"/>
+            <a:endParaRPr lang="en-US" sz="1550" dirty="0"/>
           </a:p>
         </p:txBody>
       </p:sp>
@@ -4289,7 +4378,7 @@
                 <a:ea typeface="Aptos" pitchFamily="34" charset="-122"/>
                 <a:cs typeface="Aptos" pitchFamily="34" charset="-120"/>
               </a:rPr>
-              <a:t>© Paula Soper</a:t>
+              <a:t>Â© Paula Soper</a:t>
             </a:r>
             <a:endParaRPr lang="en-US" sz="800" dirty="0"/>
           </a:p>
@@ -4297,7 +4386,46 @@
       </p:sp>
       <p:sp>
         <p:nvSpPr>
-          <p:cNvPr id="7" name="Shape 5"/>
+          <p:cNvPr id="7" name="Text 5"/>
+          <p:cNvSpPr/>
+          <p:nvPr/>
+        </p:nvSpPr>
+        <p:spPr>
+          <a:xfrm>
+            <a:off x="11137392" y="6510528"/>
+            <a:ext cx="411480" cy="201168"/>
+          </a:xfrm>
+          <a:prstGeom prst="rect">
+            <a:avLst/>
+          </a:prstGeom>
+          <a:noFill/>
+          <a:ln/>
+        </p:spPr>
+        <p:txBody>
+          <a:bodyPr wrap="square" lIns="0" tIns="0" rIns="0" bIns="0" rtlCol="0" anchor="ctr"/>
+          <a:lstStyle/>
+          <a:p>
+            <a:pPr algn="r" indent="0" marL="0">
+              <a:buNone/>
+            </a:pPr>
+            <a:r>
+              <a:rPr lang="en-US" sz="900" dirty="0">
+                <a:solidFill>
+                  <a:srgbClr val="5F7181"/>
+                </a:solidFill>
+                <a:latin typeface="Aptos" pitchFamily="34" charset="0"/>
+                <a:ea typeface="Aptos" pitchFamily="34" charset="-122"/>
+                <a:cs typeface="Aptos" pitchFamily="34" charset="-120"/>
+              </a:rPr>
+              <a:t>12</a:t>
+            </a:r>
+            <a:endParaRPr lang="en-US" sz="900" dirty="0"/>
+          </a:p>
+        </p:txBody>
+      </p:sp>
+      <p:sp>
+        <p:nvSpPr>
+          <p:cNvPr id="8" name="Shape 6"/>
           <p:cNvSpPr/>
           <p:nvPr/>
         </p:nvSpPr>
@@ -4322,7 +4450,7 @@
       </p:sp>
       <p:sp>
         <p:nvSpPr>
-          <p:cNvPr id="8" name="Text 6"/>
+          <p:cNvPr id="9" name="Text 7"/>
           <p:cNvSpPr/>
           <p:nvPr/>
         </p:nvSpPr>
@@ -4361,14 +4489,14 @@
       </p:sp>
       <p:sp>
         <p:nvSpPr>
-          <p:cNvPr id="9" name="Text 7"/>
+          <p:cNvPr id="10" name="Text 8"/>
           <p:cNvSpPr/>
           <p:nvPr/>
         </p:nvSpPr>
         <p:spPr>
           <a:xfrm>
             <a:off x="640080" y="621792"/>
-            <a:ext cx="10881360" cy="566928"/>
+            <a:ext cx="10881360" cy="713232"/>
           </a:xfrm>
           <a:prstGeom prst="rect">
             <a:avLst/>
@@ -4386,7 +4514,7 @@
               <a:buNone/>
             </a:pPr>
             <a:r>
-              <a:rPr lang="en-US" sz="2700" b="1" dirty="0">
+              <a:rPr lang="en-US" sz="3400" b="1" dirty="0">
                 <a:solidFill>
                   <a:srgbClr val="003A63"/>
                 </a:solidFill>
@@ -4396,20 +4524,20 @@
               </a:rPr>
               <a:t>Application to AI-Supported Workflows</a:t>
             </a:r>
-            <a:endParaRPr lang="en-US" sz="2700" dirty="0"/>
-          </a:p>
-        </p:txBody>
-      </p:sp>
-      <p:sp>
-        <p:nvSpPr>
-          <p:cNvPr id="10" name="Text 8"/>
-          <p:cNvSpPr/>
-          <p:nvPr/>
-        </p:nvSpPr>
-        <p:spPr>
-          <a:xfrm>
-            <a:off x="868680" y="1417320"/>
-            <a:ext cx="6675120" cy="4434840"/>
+            <a:endParaRPr lang="en-US" sz="3400" dirty="0"/>
+          </a:p>
+        </p:txBody>
+      </p:sp>
+      <p:sp>
+        <p:nvSpPr>
+          <p:cNvPr id="11" name="Text 9"/>
+          <p:cNvSpPr/>
+          <p:nvPr/>
+        </p:nvSpPr>
+        <p:spPr>
+          <a:xfrm>
+            <a:off x="868680" y="1508760"/>
+            <a:ext cx="6537960" cy="4160520"/>
           </a:xfrm>
           <a:prstGeom prst="rect">
             <a:avLst/>
@@ -4424,7 +4552,7 @@
           <a:lstStyle/>
           <a:p>
             <a:r>
-              <a:rPr lang="en-US" sz="1700" dirty="0">
+              <a:rPr lang="en-US" sz="2100" dirty="0">
                 <a:solidFill>
                   <a:srgbClr val="17364A"/>
                 </a:solidFill>
@@ -4432,13 +4560,13 @@
                 <a:ea typeface="Aptos" pitchFamily="34" charset="-122"/>
                 <a:cs typeface="Aptos" pitchFamily="34" charset="-120"/>
               </a:rPr>
-              <a:t>Generative AI sustainability requires prompt and source updates, user training, output review, and policy alignment.</a:t>
-            </a:r>
-            <a:endParaRPr lang="en-US" sz="1700" dirty="0"/>
-          </a:p>
-          <a:p>
-            <a:r>
-              <a:rPr lang="en-US" sz="1700" dirty="0">
+              <a:t>Generative AI sustainability requires prompt and source updates, user training, output review, and.</a:t>
+            </a:r>
+            <a:endParaRPr lang="en-US" sz="2100" dirty="0"/>
+          </a:p>
+          <a:p>
+            <a:r>
+              <a:rPr lang="en-US" sz="2100" dirty="0">
                 <a:solidFill>
                   <a:srgbClr val="17364A"/>
                 </a:solidFill>
@@ -4446,13 +4574,13 @@
                 <a:ea typeface="Aptos" pitchFamily="34" charset="-122"/>
                 <a:cs typeface="Aptos" pitchFamily="34" charset="-120"/>
               </a:rPr>
-              <a:t>Predictive analytics sustainability requires drift monitoring, recalibration, subgroup review, and documentation.</a:t>
-            </a:r>
-            <a:endParaRPr lang="en-US" sz="1700" dirty="0"/>
-          </a:p>
-          <a:p>
-            <a:r>
-              <a:rPr lang="en-US" sz="1700" dirty="0">
+              <a:t>Predictive analytics sustainability requires drift monitoring, recalibration, subgroup review, and.</a:t>
+            </a:r>
+            <a:endParaRPr lang="en-US" sz="2100" dirty="0"/>
+          </a:p>
+          <a:p>
+            <a:r>
+              <a:rPr lang="en-US" sz="2100" dirty="0">
                 <a:solidFill>
                   <a:srgbClr val="17364A"/>
                 </a:solidFill>
@@ -4460,29 +4588,15 @@
                 <a:ea typeface="Aptos" pitchFamily="34" charset="-122"/>
                 <a:cs typeface="Aptos" pitchFamily="34" charset="-120"/>
               </a:rPr>
-              <a:t>Agentic AI sustainability requires continued security review, permission management, incident drills, and rollback testing.</a:t>
-            </a:r>
-            <a:endParaRPr lang="en-US" sz="1700" dirty="0"/>
-          </a:p>
-          <a:p>
-            <a:r>
-              <a:rPr lang="en-US" sz="1700" dirty="0">
-                <a:solidFill>
-                  <a:srgbClr val="17364A"/>
-                </a:solidFill>
-                <a:latin typeface="Aptos" pitchFamily="34" charset="0"/>
-                <a:ea typeface="Aptos" pitchFamily="34" charset="-122"/>
-                <a:cs typeface="Aptos" pitchFamily="34" charset="-120"/>
-              </a:rPr>
-              <a:t>Lifecycle funding should match the safeguards required by the AI type.</a:t>
-            </a:r>
-            <a:endParaRPr lang="en-US" sz="1700" dirty="0"/>
-          </a:p>
-        </p:txBody>
-      </p:sp>
-      <p:sp>
-        <p:nvSpPr>
-          <p:cNvPr id="11" name="Shape 9"/>
+              <a:t>Agentic AI sustainability requires continued security review, permission management, incident drills,.</a:t>
+            </a:r>
+            <a:endParaRPr lang="en-US" sz="2100" dirty="0"/>
+          </a:p>
+        </p:txBody>
+      </p:sp>
+      <p:sp>
+        <p:nvSpPr>
+          <p:cNvPr id="12" name="Shape 10"/>
           <p:cNvSpPr/>
           <p:nvPr/>
         </p:nvSpPr>
@@ -4509,14 +4623,14 @@
       </p:sp>
       <p:sp>
         <p:nvSpPr>
-          <p:cNvPr id="12" name="Text 10"/>
+          <p:cNvPr id="13" name="Text 11"/>
           <p:cNvSpPr/>
           <p:nvPr/>
         </p:nvSpPr>
         <p:spPr>
           <a:xfrm>
             <a:off x="8074152" y="1563624"/>
-            <a:ext cx="2825496" cy="201168"/>
+            <a:ext cx="2825496" cy="256032"/>
           </a:xfrm>
           <a:prstGeom prst="rect">
             <a:avLst/>
@@ -4532,7 +4646,7 @@
               <a:buNone/>
             </a:pPr>
             <a:r>
-              <a:rPr lang="en-US" sz="950" b="1" dirty="0">
+              <a:rPr lang="en-US" sz="1300" b="1" dirty="0">
                 <a:solidFill>
                   <a:srgbClr val="0068B7"/>
                 </a:solidFill>
@@ -4542,20 +4656,20 @@
               </a:rPr>
               <a:t>Key idea</a:t>
             </a:r>
-            <a:endParaRPr lang="en-US" sz="950" dirty="0"/>
-          </a:p>
-        </p:txBody>
-      </p:sp>
-      <p:sp>
-        <p:nvSpPr>
-          <p:cNvPr id="13" name="Text 11"/>
-          <p:cNvSpPr/>
-          <p:nvPr/>
-        </p:nvSpPr>
-        <p:spPr>
-          <a:xfrm>
-            <a:off x="8074152" y="1856232"/>
-            <a:ext cx="2825496" cy="1261872"/>
+            <a:endParaRPr lang="en-US" sz="1300" dirty="0"/>
+          </a:p>
+        </p:txBody>
+      </p:sp>
+      <p:sp>
+        <p:nvSpPr>
+          <p:cNvPr id="14" name="Text 12"/>
+          <p:cNvSpPr/>
+          <p:nvPr/>
+        </p:nvSpPr>
+        <p:spPr>
+          <a:xfrm>
+            <a:off x="8074152" y="1920240"/>
+            <a:ext cx="2825496" cy="1188720"/>
           </a:xfrm>
           <a:prstGeom prst="rect">
             <a:avLst/>
@@ -4573,7 +4687,7 @@
               <a:buNone/>
             </a:pPr>
             <a:r>
-              <a:rPr lang="en-US" sz="1250" dirty="0">
+              <a:rPr lang="en-US" sz="1550" dirty="0">
                 <a:solidFill>
                   <a:srgbClr val="17364A"/>
                 </a:solidFill>
@@ -4581,15 +4695,15 @@
                 <a:ea typeface="Aptos" pitchFamily="34" charset="-122"/>
                 <a:cs typeface="Aptos" pitchFamily="34" charset="-120"/>
               </a:rPr>
-              <a:t>Generative AI sustainability requires prompt and source updates, user training, output review, and policy alignment.</a:t>
-            </a:r>
-            <a:endParaRPr lang="en-US" sz="1250" dirty="0"/>
-          </a:p>
-        </p:txBody>
-      </p:sp>
-      <p:sp>
-        <p:nvSpPr>
-          <p:cNvPr id="14" name="Shape 12"/>
+              <a:t>Generative AI sustainability requires prompt and source updates, user training, output review, and.</a:t>
+            </a:r>
+            <a:endParaRPr lang="en-US" sz="1550" dirty="0"/>
+          </a:p>
+        </p:txBody>
+      </p:sp>
+      <p:sp>
+        <p:nvSpPr>
+          <p:cNvPr id="15" name="Shape 13"/>
           <p:cNvSpPr/>
           <p:nvPr/>
         </p:nvSpPr>
@@ -4616,14 +4730,14 @@
       </p:sp>
       <p:sp>
         <p:nvSpPr>
-          <p:cNvPr id="15" name="Text 13"/>
+          <p:cNvPr id="16" name="Text 14"/>
           <p:cNvSpPr/>
           <p:nvPr/>
         </p:nvSpPr>
         <p:spPr>
           <a:xfrm>
             <a:off x="8074152" y="3666744"/>
-            <a:ext cx="2825496" cy="201168"/>
+            <a:ext cx="2825496" cy="256032"/>
           </a:xfrm>
           <a:prstGeom prst="rect">
             <a:avLst/>
@@ -4639,7 +4753,7 @@
               <a:buNone/>
             </a:pPr>
             <a:r>
-              <a:rPr lang="en-US" sz="950" b="1" dirty="0">
+              <a:rPr lang="en-US" sz="1300" b="1" dirty="0">
                 <a:solidFill>
                   <a:srgbClr val="0068B7"/>
                 </a:solidFill>
@@ -4649,20 +4763,20 @@
               </a:rPr>
               <a:t>Use this for</a:t>
             </a:r>
-            <a:endParaRPr lang="en-US" sz="950" dirty="0"/>
-          </a:p>
-        </p:txBody>
-      </p:sp>
-      <p:sp>
-        <p:nvSpPr>
-          <p:cNvPr id="16" name="Text 14"/>
-          <p:cNvSpPr/>
-          <p:nvPr/>
-        </p:nvSpPr>
-        <p:spPr>
-          <a:xfrm>
-            <a:off x="8074152" y="3959352"/>
-            <a:ext cx="2825496" cy="1170432"/>
+            <a:endParaRPr lang="en-US" sz="1300" dirty="0"/>
+          </a:p>
+        </p:txBody>
+      </p:sp>
+      <p:sp>
+        <p:nvSpPr>
+          <p:cNvPr id="17" name="Text 15"/>
+          <p:cNvSpPr/>
+          <p:nvPr/>
+        </p:nvSpPr>
+        <p:spPr>
+          <a:xfrm>
+            <a:off x="8074152" y="4023360"/>
+            <a:ext cx="2825496" cy="1097280"/>
           </a:xfrm>
           <a:prstGeom prst="rect">
             <a:avLst/>
@@ -4680,7 +4794,7 @@
               <a:buNone/>
             </a:pPr>
             <a:r>
-              <a:rPr lang="en-US" sz="1250" dirty="0">
+              <a:rPr lang="en-US" sz="1550" dirty="0">
                 <a:solidFill>
                   <a:srgbClr val="17364A"/>
                 </a:solidFill>
@@ -4690,7 +4804,7 @@
               </a:rPr>
               <a:t>Connect the concept to public health decisions, safeguards, documentation, or implementation work.</a:t>
             </a:r>
-            <a:endParaRPr lang="en-US" sz="1250" dirty="0"/>
+            <a:endParaRPr lang="en-US" sz="1550" dirty="0"/>
           </a:p>
         </p:txBody>
       </p:sp>
@@ -4887,7 +5001,7 @@
                 <a:ea typeface="Aptos" pitchFamily="34" charset="-122"/>
                 <a:cs typeface="Aptos" pitchFamily="34" charset="-120"/>
               </a:rPr>
-              <a:t>© Paula Soper</a:t>
+              <a:t>Â© Paula Soper</a:t>
             </a:r>
             <a:endParaRPr lang="en-US" sz="800" dirty="0"/>
           </a:p>
@@ -4895,7 +5009,46 @@
       </p:sp>
       <p:sp>
         <p:nvSpPr>
-          <p:cNvPr id="7" name="Shape 5"/>
+          <p:cNvPr id="7" name="Text 5"/>
+          <p:cNvSpPr/>
+          <p:nvPr/>
+        </p:nvSpPr>
+        <p:spPr>
+          <a:xfrm>
+            <a:off x="11137392" y="6510528"/>
+            <a:ext cx="411480" cy="201168"/>
+          </a:xfrm>
+          <a:prstGeom prst="rect">
+            <a:avLst/>
+          </a:prstGeom>
+          <a:noFill/>
+          <a:ln/>
+        </p:spPr>
+        <p:txBody>
+          <a:bodyPr wrap="square" lIns="0" tIns="0" rIns="0" bIns="0" rtlCol="0" anchor="ctr"/>
+          <a:lstStyle/>
+          <a:p>
+            <a:pPr algn="r" indent="0" marL="0">
+              <a:buNone/>
+            </a:pPr>
+            <a:r>
+              <a:rPr lang="en-US" sz="900" dirty="0">
+                <a:solidFill>
+                  <a:srgbClr val="5F7181"/>
+                </a:solidFill>
+                <a:latin typeface="Aptos" pitchFamily="34" charset="0"/>
+                <a:ea typeface="Aptos" pitchFamily="34" charset="-122"/>
+                <a:cs typeface="Aptos" pitchFamily="34" charset="-120"/>
+              </a:rPr>
+              <a:t>13</a:t>
+            </a:r>
+            <a:endParaRPr lang="en-US" sz="900" dirty="0"/>
+          </a:p>
+        </p:txBody>
+      </p:sp>
+      <p:sp>
+        <p:nvSpPr>
+          <p:cNvPr id="8" name="Shape 6"/>
           <p:cNvSpPr/>
           <p:nvPr/>
         </p:nvSpPr>
@@ -4920,7 +5073,7 @@
       </p:sp>
       <p:sp>
         <p:nvSpPr>
-          <p:cNvPr id="8" name="Text 6"/>
+          <p:cNvPr id="9" name="Text 7"/>
           <p:cNvSpPr/>
           <p:nvPr/>
         </p:nvSpPr>
@@ -4959,14 +5112,14 @@
       </p:sp>
       <p:sp>
         <p:nvSpPr>
-          <p:cNvPr id="9" name="Text 7"/>
+          <p:cNvPr id="10" name="Text 8"/>
           <p:cNvSpPr/>
           <p:nvPr/>
         </p:nvSpPr>
         <p:spPr>
           <a:xfrm>
             <a:off x="640080" y="621792"/>
-            <a:ext cx="10881360" cy="566928"/>
+            <a:ext cx="10881360" cy="713232"/>
           </a:xfrm>
           <a:prstGeom prst="rect">
             <a:avLst/>
@@ -4984,7 +5137,7 @@
               <a:buNone/>
             </a:pPr>
             <a:r>
-              <a:rPr lang="en-US" sz="2700" b="1" dirty="0">
+              <a:rPr lang="en-US" sz="3400" b="1" dirty="0">
                 <a:solidFill>
                   <a:srgbClr val="003A63"/>
                 </a:solidFill>
@@ -4994,20 +5147,20 @@
               </a:rPr>
               <a:t>Reflection Questions</a:t>
             </a:r>
-            <a:endParaRPr lang="en-US" sz="2700" dirty="0"/>
-          </a:p>
-        </p:txBody>
-      </p:sp>
-      <p:sp>
-        <p:nvSpPr>
-          <p:cNvPr id="10" name="Text 8"/>
-          <p:cNvSpPr/>
-          <p:nvPr/>
-        </p:nvSpPr>
-        <p:spPr>
-          <a:xfrm>
-            <a:off x="868680" y="1417320"/>
-            <a:ext cx="6675120" cy="4434840"/>
+            <a:endParaRPr lang="en-US" sz="3400" dirty="0"/>
+          </a:p>
+        </p:txBody>
+      </p:sp>
+      <p:sp>
+        <p:nvSpPr>
+          <p:cNvPr id="11" name="Text 9"/>
+          <p:cNvSpPr/>
+          <p:nvPr/>
+        </p:nvSpPr>
+        <p:spPr>
+          <a:xfrm>
+            <a:off x="868680" y="1508760"/>
+            <a:ext cx="6537960" cy="4160520"/>
           </a:xfrm>
           <a:prstGeom prst="rect">
             <a:avLst/>
@@ -5022,7 +5175,7 @@
           <a:lstStyle/>
           <a:p>
             <a:r>
-              <a:rPr lang="en-US" sz="1700" dirty="0">
+              <a:rPr lang="en-US" sz="2100" dirty="0">
                 <a:solidFill>
                   <a:srgbClr val="17364A"/>
                 </a:solidFill>
@@ -5030,13 +5183,13 @@
                 <a:ea typeface="Aptos" pitchFamily="34" charset="-122"/>
                 <a:cs typeface="Aptos" pitchFamily="34" charset="-120"/>
               </a:rPr>
-              <a:t>Which current or proposed AI use case in your agency raises this leadership or governance issue most clearly?</a:t>
-            </a:r>
-            <a:endParaRPr lang="en-US" sz="1700" dirty="0"/>
-          </a:p>
-          <a:p>
-            <a:r>
-              <a:rPr lang="en-US" sz="1700" dirty="0">
+              <a:t>Which current or proposed AI use case in your agency raises this leadership or governance issue most.</a:t>
+            </a:r>
+            <a:endParaRPr lang="en-US" sz="2100" dirty="0"/>
+          </a:p>
+          <a:p>
+            <a:r>
+              <a:rPr lang="en-US" sz="2100" dirty="0">
                 <a:solidFill>
                   <a:srgbClr val="17364A"/>
                 </a:solidFill>
@@ -5046,11 +5199,11 @@
               </a:rPr>
               <a:t>Who currently has authority to make decisions about this issue, and is that authority documented?</a:t>
             </a:r>
-            <a:endParaRPr lang="en-US" sz="1700" dirty="0"/>
-          </a:p>
-          <a:p>
-            <a:r>
-              <a:rPr lang="en-US" sz="1700" dirty="0">
+            <a:endParaRPr lang="en-US" sz="2100" dirty="0"/>
+          </a:p>
+          <a:p>
+            <a:r>
+              <a:rPr lang="en-US" sz="2100" dirty="0">
                 <a:solidFill>
                   <a:srgbClr val="17364A"/>
                 </a:solidFill>
@@ -5060,13 +5213,13 @@
               </a:rPr>
               <a:t>What evidence would governance or leadership need before approving the use case?</a:t>
             </a:r>
-            <a:endParaRPr lang="en-US" sz="1700" dirty="0"/>
-          </a:p>
-        </p:txBody>
-      </p:sp>
-      <p:sp>
-        <p:nvSpPr>
-          <p:cNvPr id="11" name="Shape 9"/>
+            <a:endParaRPr lang="en-US" sz="2100" dirty="0"/>
+          </a:p>
+        </p:txBody>
+      </p:sp>
+      <p:sp>
+        <p:nvSpPr>
+          <p:cNvPr id="12" name="Shape 10"/>
           <p:cNvSpPr/>
           <p:nvPr/>
         </p:nvSpPr>
@@ -5093,14 +5246,14 @@
       </p:sp>
       <p:sp>
         <p:nvSpPr>
-          <p:cNvPr id="12" name="Text 10"/>
+          <p:cNvPr id="13" name="Text 11"/>
           <p:cNvSpPr/>
           <p:nvPr/>
         </p:nvSpPr>
         <p:spPr>
           <a:xfrm>
             <a:off x="8074152" y="1563624"/>
-            <a:ext cx="2825496" cy="201168"/>
+            <a:ext cx="2825496" cy="256032"/>
           </a:xfrm>
           <a:prstGeom prst="rect">
             <a:avLst/>
@@ -5116,7 +5269,7 @@
               <a:buNone/>
             </a:pPr>
             <a:r>
-              <a:rPr lang="en-US" sz="950" b="1" dirty="0">
+              <a:rPr lang="en-US" sz="1300" b="1" dirty="0">
                 <a:solidFill>
                   <a:srgbClr val="0068B7"/>
                 </a:solidFill>
@@ -5126,20 +5279,20 @@
               </a:rPr>
               <a:t>Key idea</a:t>
             </a:r>
-            <a:endParaRPr lang="en-US" sz="950" dirty="0"/>
-          </a:p>
-        </p:txBody>
-      </p:sp>
-      <p:sp>
-        <p:nvSpPr>
-          <p:cNvPr id="13" name="Text 11"/>
-          <p:cNvSpPr/>
-          <p:nvPr/>
-        </p:nvSpPr>
-        <p:spPr>
-          <a:xfrm>
-            <a:off x="8074152" y="1856232"/>
-            <a:ext cx="2825496" cy="1261872"/>
+            <a:endParaRPr lang="en-US" sz="1300" dirty="0"/>
+          </a:p>
+        </p:txBody>
+      </p:sp>
+      <p:sp>
+        <p:nvSpPr>
+          <p:cNvPr id="14" name="Text 12"/>
+          <p:cNvSpPr/>
+          <p:nvPr/>
+        </p:nvSpPr>
+        <p:spPr>
+          <a:xfrm>
+            <a:off x="8074152" y="1920240"/>
+            <a:ext cx="2825496" cy="1188720"/>
           </a:xfrm>
           <a:prstGeom prst="rect">
             <a:avLst/>
@@ -5157,7 +5310,7 @@
               <a:buNone/>
             </a:pPr>
             <a:r>
-              <a:rPr lang="en-US" sz="1250" dirty="0">
+              <a:rPr lang="en-US" sz="1550" dirty="0">
                 <a:solidFill>
                   <a:srgbClr val="17364A"/>
                 </a:solidFill>
@@ -5165,15 +5318,15 @@
                 <a:ea typeface="Aptos" pitchFamily="34" charset="-122"/>
                 <a:cs typeface="Aptos" pitchFamily="34" charset="-120"/>
               </a:rPr>
-              <a:t>Which current or proposed AI use case in your agency raises this leadership or governance issue most clearly?</a:t>
-            </a:r>
-            <a:endParaRPr lang="en-US" sz="1250" dirty="0"/>
-          </a:p>
-        </p:txBody>
-      </p:sp>
-      <p:sp>
-        <p:nvSpPr>
-          <p:cNvPr id="14" name="Shape 12"/>
+              <a:t>Which current or proposed AI use case in your agency raises this leadership or governance issue most.</a:t>
+            </a:r>
+            <a:endParaRPr lang="en-US" sz="1550" dirty="0"/>
+          </a:p>
+        </p:txBody>
+      </p:sp>
+      <p:sp>
+        <p:nvSpPr>
+          <p:cNvPr id="15" name="Shape 13"/>
           <p:cNvSpPr/>
           <p:nvPr/>
         </p:nvSpPr>
@@ -5200,14 +5353,14 @@
       </p:sp>
       <p:sp>
         <p:nvSpPr>
-          <p:cNvPr id="15" name="Text 13"/>
+          <p:cNvPr id="16" name="Text 14"/>
           <p:cNvSpPr/>
           <p:nvPr/>
         </p:nvSpPr>
         <p:spPr>
           <a:xfrm>
             <a:off x="8074152" y="3666744"/>
-            <a:ext cx="2825496" cy="201168"/>
+            <a:ext cx="2825496" cy="256032"/>
           </a:xfrm>
           <a:prstGeom prst="rect">
             <a:avLst/>
@@ -5223,7 +5376,7 @@
               <a:buNone/>
             </a:pPr>
             <a:r>
-              <a:rPr lang="en-US" sz="950" b="1" dirty="0">
+              <a:rPr lang="en-US" sz="1300" b="1" dirty="0">
                 <a:solidFill>
                   <a:srgbClr val="0068B7"/>
                 </a:solidFill>
@@ -5233,20 +5386,20 @@
               </a:rPr>
               <a:t>Use this for</a:t>
             </a:r>
-            <a:endParaRPr lang="en-US" sz="950" dirty="0"/>
-          </a:p>
-        </p:txBody>
-      </p:sp>
-      <p:sp>
-        <p:nvSpPr>
-          <p:cNvPr id="16" name="Text 14"/>
-          <p:cNvSpPr/>
-          <p:nvPr/>
-        </p:nvSpPr>
-        <p:spPr>
-          <a:xfrm>
-            <a:off x="8074152" y="3959352"/>
-            <a:ext cx="2825496" cy="1170432"/>
+            <a:endParaRPr lang="en-US" sz="1300" dirty="0"/>
+          </a:p>
+        </p:txBody>
+      </p:sp>
+      <p:sp>
+        <p:nvSpPr>
+          <p:cNvPr id="17" name="Text 15"/>
+          <p:cNvSpPr/>
+          <p:nvPr/>
+        </p:nvSpPr>
+        <p:spPr>
+          <a:xfrm>
+            <a:off x="8074152" y="4023360"/>
+            <a:ext cx="2825496" cy="1097280"/>
           </a:xfrm>
           <a:prstGeom prst="rect">
             <a:avLst/>
@@ -5264,7 +5417,7 @@
               <a:buNone/>
             </a:pPr>
             <a:r>
-              <a:rPr lang="en-US" sz="1250" dirty="0">
+              <a:rPr lang="en-US" sz="1550" dirty="0">
                 <a:solidFill>
                   <a:srgbClr val="17364A"/>
                 </a:solidFill>
@@ -5274,7 +5427,7 @@
               </a:rPr>
               <a:t>Connect the concept to public health decisions, safeguards, documentation, or implementation work.</a:t>
             </a:r>
-            <a:endParaRPr lang="en-US" sz="1250" dirty="0"/>
+            <a:endParaRPr lang="en-US" sz="1550" dirty="0"/>
           </a:p>
         </p:txBody>
       </p:sp>
@@ -5471,7 +5624,7 @@
                 <a:ea typeface="Aptos" pitchFamily="34" charset="-122"/>
                 <a:cs typeface="Aptos" pitchFamily="34" charset="-120"/>
               </a:rPr>
-              <a:t>© Paula Soper</a:t>
+              <a:t>Â© Paula Soper</a:t>
             </a:r>
             <a:endParaRPr lang="en-US" sz="800" dirty="0"/>
           </a:p>
@@ -5485,8 +5638,47 @@
         </p:nvSpPr>
         <p:spPr>
           <a:xfrm>
+            <a:off x="11137392" y="6510528"/>
+            <a:ext cx="411480" cy="201168"/>
+          </a:xfrm>
+          <a:prstGeom prst="rect">
+            <a:avLst/>
+          </a:prstGeom>
+          <a:noFill/>
+          <a:ln/>
+        </p:spPr>
+        <p:txBody>
+          <a:bodyPr wrap="square" lIns="0" tIns="0" rIns="0" bIns="0" rtlCol="0" anchor="ctr"/>
+          <a:lstStyle/>
+          <a:p>
+            <a:pPr algn="r" indent="0" marL="0">
+              <a:buNone/>
+            </a:pPr>
+            <a:r>
+              <a:rPr lang="en-US" sz="900" dirty="0">
+                <a:solidFill>
+                  <a:srgbClr val="5F7181"/>
+                </a:solidFill>
+                <a:latin typeface="Aptos" pitchFamily="34" charset="0"/>
+                <a:ea typeface="Aptos" pitchFamily="34" charset="-122"/>
+                <a:cs typeface="Aptos" pitchFamily="34" charset="-120"/>
+              </a:rPr>
+              <a:t>14</a:t>
+            </a:r>
+            <a:endParaRPr lang="en-US" sz="900" dirty="0"/>
+          </a:p>
+        </p:txBody>
+      </p:sp>
+      <p:sp>
+        <p:nvSpPr>
+          <p:cNvPr id="8" name="Text 6"/>
+          <p:cNvSpPr/>
+          <p:nvPr/>
+        </p:nvSpPr>
+        <p:spPr>
+          <a:xfrm>
             <a:off x="640080" y="658368"/>
-            <a:ext cx="10881360" cy="566928"/>
+            <a:ext cx="10881360" cy="713232"/>
           </a:xfrm>
           <a:prstGeom prst="rect">
             <a:avLst/>
@@ -5504,7 +5696,7 @@
               <a:buNone/>
             </a:pPr>
             <a:r>
-              <a:rPr lang="en-US" sz="2700" b="1" dirty="0">
+              <a:rPr lang="en-US" sz="3400" b="1" dirty="0">
                 <a:solidFill>
                   <a:srgbClr val="003A63"/>
                 </a:solidFill>
@@ -5514,20 +5706,20 @@
               </a:rPr>
               <a:t>Reflection Questions Continued</a:t>
             </a:r>
-            <a:endParaRPr lang="en-US" sz="2700" dirty="0"/>
-          </a:p>
-        </p:txBody>
-      </p:sp>
-      <p:sp>
-        <p:nvSpPr>
-          <p:cNvPr id="8" name="Text 6"/>
-          <p:cNvSpPr/>
-          <p:nvPr/>
-        </p:nvSpPr>
-        <p:spPr>
-          <a:xfrm>
-            <a:off x="868680" y="1417320"/>
-            <a:ext cx="6675120" cy="4434840"/>
+            <a:endParaRPr lang="en-US" sz="3400" dirty="0"/>
+          </a:p>
+        </p:txBody>
+      </p:sp>
+      <p:sp>
+        <p:nvSpPr>
+          <p:cNvPr id="9" name="Text 7"/>
+          <p:cNvSpPr/>
+          <p:nvPr/>
+        </p:nvSpPr>
+        <p:spPr>
+          <a:xfrm>
+            <a:off x="868680" y="1508760"/>
+            <a:ext cx="6537960" cy="4160520"/>
           </a:xfrm>
           <a:prstGeom prst="rect">
             <a:avLst/>
@@ -5542,7 +5734,7 @@
           <a:lstStyle/>
           <a:p>
             <a:r>
-              <a:rPr lang="en-US" sz="1700" dirty="0">
+              <a:rPr lang="en-US" sz="2100" dirty="0">
                 <a:solidFill>
                   <a:srgbClr val="17364A"/>
                 </a:solidFill>
@@ -5552,11 +5744,11 @@
               </a:rPr>
               <a:t>Which staff, partners, or communities would be affected if this issue were handled poorly?</a:t>
             </a:r>
-            <a:endParaRPr lang="en-US" sz="1700" dirty="0"/>
-          </a:p>
-          <a:p>
-            <a:r>
-              <a:rPr lang="en-US" sz="1700" dirty="0">
+            <a:endParaRPr lang="en-US" sz="2100" dirty="0"/>
+          </a:p>
+          <a:p>
+            <a:r>
+              <a:rPr lang="en-US" sz="2100" dirty="0">
                 <a:solidFill>
                   <a:srgbClr val="17364A"/>
                 </a:solidFill>
@@ -5566,13 +5758,13 @@
               </a:rPr>
               <a:t>What policy, process, or artifact should be created or updated after this module?</a:t>
             </a:r>
-            <a:endParaRPr lang="en-US" sz="1700" dirty="0"/>
-          </a:p>
-        </p:txBody>
-      </p:sp>
-      <p:sp>
-        <p:nvSpPr>
-          <p:cNvPr id="9" name="Shape 7"/>
+            <a:endParaRPr lang="en-US" sz="2100" dirty="0"/>
+          </a:p>
+        </p:txBody>
+      </p:sp>
+      <p:sp>
+        <p:nvSpPr>
+          <p:cNvPr id="10" name="Shape 8"/>
           <p:cNvSpPr/>
           <p:nvPr/>
         </p:nvSpPr>
@@ -5599,14 +5791,14 @@
       </p:sp>
       <p:sp>
         <p:nvSpPr>
-          <p:cNvPr id="10" name="Text 8"/>
+          <p:cNvPr id="11" name="Text 9"/>
           <p:cNvSpPr/>
           <p:nvPr/>
         </p:nvSpPr>
         <p:spPr>
           <a:xfrm>
             <a:off x="8074152" y="1563624"/>
-            <a:ext cx="2825496" cy="201168"/>
+            <a:ext cx="2825496" cy="256032"/>
           </a:xfrm>
           <a:prstGeom prst="rect">
             <a:avLst/>
@@ -5622,7 +5814,7 @@
               <a:buNone/>
             </a:pPr>
             <a:r>
-              <a:rPr lang="en-US" sz="950" b="1" dirty="0">
+              <a:rPr lang="en-US" sz="1300" b="1" dirty="0">
                 <a:solidFill>
                   <a:srgbClr val="0068B7"/>
                 </a:solidFill>
@@ -5632,20 +5824,20 @@
               </a:rPr>
               <a:t>Key idea</a:t>
             </a:r>
-            <a:endParaRPr lang="en-US" sz="950" dirty="0"/>
-          </a:p>
-        </p:txBody>
-      </p:sp>
-      <p:sp>
-        <p:nvSpPr>
-          <p:cNvPr id="11" name="Text 9"/>
-          <p:cNvSpPr/>
-          <p:nvPr/>
-        </p:nvSpPr>
-        <p:spPr>
-          <a:xfrm>
-            <a:off x="8074152" y="1856232"/>
-            <a:ext cx="2825496" cy="1261872"/>
+            <a:endParaRPr lang="en-US" sz="1300" dirty="0"/>
+          </a:p>
+        </p:txBody>
+      </p:sp>
+      <p:sp>
+        <p:nvSpPr>
+          <p:cNvPr id="12" name="Text 10"/>
+          <p:cNvSpPr/>
+          <p:nvPr/>
+        </p:nvSpPr>
+        <p:spPr>
+          <a:xfrm>
+            <a:off x="8074152" y="1920240"/>
+            <a:ext cx="2825496" cy="1188720"/>
           </a:xfrm>
           <a:prstGeom prst="rect">
             <a:avLst/>
@@ -5663,7 +5855,7 @@
               <a:buNone/>
             </a:pPr>
             <a:r>
-              <a:rPr lang="en-US" sz="1250" dirty="0">
+              <a:rPr lang="en-US" sz="1550" dirty="0">
                 <a:solidFill>
                   <a:srgbClr val="17364A"/>
                 </a:solidFill>
@@ -5673,13 +5865,13 @@
               </a:rPr>
               <a:t>Which staff, partners, or communities would be affected if this issue were handled poorly?</a:t>
             </a:r>
-            <a:endParaRPr lang="en-US" sz="1250" dirty="0"/>
-          </a:p>
-        </p:txBody>
-      </p:sp>
-      <p:sp>
-        <p:nvSpPr>
-          <p:cNvPr id="12" name="Shape 10"/>
+            <a:endParaRPr lang="en-US" sz="1550" dirty="0"/>
+          </a:p>
+        </p:txBody>
+      </p:sp>
+      <p:sp>
+        <p:nvSpPr>
+          <p:cNvPr id="13" name="Shape 11"/>
           <p:cNvSpPr/>
           <p:nvPr/>
         </p:nvSpPr>
@@ -5706,14 +5898,14 @@
       </p:sp>
       <p:sp>
         <p:nvSpPr>
-          <p:cNvPr id="13" name="Text 11"/>
+          <p:cNvPr id="14" name="Text 12"/>
           <p:cNvSpPr/>
           <p:nvPr/>
         </p:nvSpPr>
         <p:spPr>
           <a:xfrm>
             <a:off x="8074152" y="3666744"/>
-            <a:ext cx="2825496" cy="201168"/>
+            <a:ext cx="2825496" cy="256032"/>
           </a:xfrm>
           <a:prstGeom prst="rect">
             <a:avLst/>
@@ -5729,7 +5921,7 @@
               <a:buNone/>
             </a:pPr>
             <a:r>
-              <a:rPr lang="en-US" sz="950" b="1" dirty="0">
+              <a:rPr lang="en-US" sz="1300" b="1" dirty="0">
                 <a:solidFill>
                   <a:srgbClr val="0068B7"/>
                 </a:solidFill>
@@ -5739,20 +5931,20 @@
               </a:rPr>
               <a:t>Use this for</a:t>
             </a:r>
-            <a:endParaRPr lang="en-US" sz="950" dirty="0"/>
-          </a:p>
-        </p:txBody>
-      </p:sp>
-      <p:sp>
-        <p:nvSpPr>
-          <p:cNvPr id="14" name="Text 12"/>
-          <p:cNvSpPr/>
-          <p:nvPr/>
-        </p:nvSpPr>
-        <p:spPr>
-          <a:xfrm>
-            <a:off x="8074152" y="3959352"/>
-            <a:ext cx="2825496" cy="1170432"/>
+            <a:endParaRPr lang="en-US" sz="1300" dirty="0"/>
+          </a:p>
+        </p:txBody>
+      </p:sp>
+      <p:sp>
+        <p:nvSpPr>
+          <p:cNvPr id="15" name="Text 13"/>
+          <p:cNvSpPr/>
+          <p:nvPr/>
+        </p:nvSpPr>
+        <p:spPr>
+          <a:xfrm>
+            <a:off x="8074152" y="4023360"/>
+            <a:ext cx="2825496" cy="1097280"/>
           </a:xfrm>
           <a:prstGeom prst="rect">
             <a:avLst/>
@@ -5770,7 +5962,7 @@
               <a:buNone/>
             </a:pPr>
             <a:r>
-              <a:rPr lang="en-US" sz="1250" dirty="0">
+              <a:rPr lang="en-US" sz="1550" dirty="0">
                 <a:solidFill>
                   <a:srgbClr val="17364A"/>
                 </a:solidFill>
@@ -5780,7 +5972,7 @@
               </a:rPr>
               <a:t>Connect the concept to public health decisions, safeguards, documentation, or implementation work.</a:t>
             </a:r>
-            <a:endParaRPr lang="en-US" sz="1250" dirty="0"/>
+            <a:endParaRPr lang="en-US" sz="1550" dirty="0"/>
           </a:p>
         </p:txBody>
       </p:sp>
@@ -5977,7 +6169,7 @@
                 <a:ea typeface="Aptos" pitchFamily="34" charset="-122"/>
                 <a:cs typeface="Aptos" pitchFamily="34" charset="-120"/>
               </a:rPr>
-              <a:t>© Paula Soper</a:t>
+              <a:t>Â© Paula Soper</a:t>
             </a:r>
             <a:endParaRPr lang="en-US" sz="800" dirty="0"/>
           </a:p>
@@ -5985,7 +6177,46 @@
       </p:sp>
       <p:sp>
         <p:nvSpPr>
-          <p:cNvPr id="7" name="Shape 5"/>
+          <p:cNvPr id="7" name="Text 5"/>
+          <p:cNvSpPr/>
+          <p:nvPr/>
+        </p:nvSpPr>
+        <p:spPr>
+          <a:xfrm>
+            <a:off x="11137392" y="6510528"/>
+            <a:ext cx="411480" cy="201168"/>
+          </a:xfrm>
+          <a:prstGeom prst="rect">
+            <a:avLst/>
+          </a:prstGeom>
+          <a:noFill/>
+          <a:ln/>
+        </p:spPr>
+        <p:txBody>
+          <a:bodyPr wrap="square" lIns="0" tIns="0" rIns="0" bIns="0" rtlCol="0" anchor="ctr"/>
+          <a:lstStyle/>
+          <a:p>
+            <a:pPr algn="r" indent="0" marL="0">
+              <a:buNone/>
+            </a:pPr>
+            <a:r>
+              <a:rPr lang="en-US" sz="900" dirty="0">
+                <a:solidFill>
+                  <a:srgbClr val="5F7181"/>
+                </a:solidFill>
+                <a:latin typeface="Aptos" pitchFamily="34" charset="0"/>
+                <a:ea typeface="Aptos" pitchFamily="34" charset="-122"/>
+                <a:cs typeface="Aptos" pitchFamily="34" charset="-120"/>
+              </a:rPr>
+              <a:t>15</a:t>
+            </a:r>
+            <a:endParaRPr lang="en-US" sz="900" dirty="0"/>
+          </a:p>
+        </p:txBody>
+      </p:sp>
+      <p:sp>
+        <p:nvSpPr>
+          <p:cNvPr id="8" name="Shape 6"/>
           <p:cNvSpPr/>
           <p:nvPr/>
         </p:nvSpPr>
@@ -6010,7 +6241,7 @@
       </p:sp>
       <p:sp>
         <p:nvSpPr>
-          <p:cNvPr id="8" name="Text 6"/>
+          <p:cNvPr id="9" name="Text 7"/>
           <p:cNvSpPr/>
           <p:nvPr/>
         </p:nvSpPr>
@@ -6049,14 +6280,14 @@
       </p:sp>
       <p:sp>
         <p:nvSpPr>
-          <p:cNvPr id="9" name="Text 7"/>
+          <p:cNvPr id="10" name="Text 8"/>
           <p:cNvSpPr/>
           <p:nvPr/>
         </p:nvSpPr>
         <p:spPr>
           <a:xfrm>
             <a:off x="640080" y="621792"/>
-            <a:ext cx="10881360" cy="566928"/>
+            <a:ext cx="10881360" cy="713232"/>
           </a:xfrm>
           <a:prstGeom prst="rect">
             <a:avLst/>
@@ -6074,7 +6305,7 @@
               <a:buNone/>
             </a:pPr>
             <a:r>
-              <a:rPr lang="en-US" sz="2700" b="1" dirty="0">
+              <a:rPr lang="en-US" sz="3400" b="1" dirty="0">
                 <a:solidFill>
                   <a:srgbClr val="003A63"/>
                 </a:solidFill>
@@ -6084,20 +6315,20 @@
               </a:rPr>
               <a:t>Practical Exercise</a:t>
             </a:r>
-            <a:endParaRPr lang="en-US" sz="2700" dirty="0"/>
-          </a:p>
-        </p:txBody>
-      </p:sp>
-      <p:sp>
-        <p:nvSpPr>
-          <p:cNvPr id="10" name="Text 8"/>
-          <p:cNvSpPr/>
-          <p:nvPr/>
-        </p:nvSpPr>
-        <p:spPr>
-          <a:xfrm>
-            <a:off x="868680" y="1417320"/>
-            <a:ext cx="6675120" cy="4434840"/>
+            <a:endParaRPr lang="en-US" sz="3400" dirty="0"/>
+          </a:p>
+        </p:txBody>
+      </p:sp>
+      <p:sp>
+        <p:nvSpPr>
+          <p:cNvPr id="11" name="Text 9"/>
+          <p:cNvSpPr/>
+          <p:nvPr/>
+        </p:nvSpPr>
+        <p:spPr>
+          <a:xfrm>
+            <a:off x="868680" y="1508760"/>
+            <a:ext cx="6537960" cy="4160520"/>
           </a:xfrm>
           <a:prstGeom prst="rect">
             <a:avLst/>
@@ -6112,7 +6343,7 @@
           <a:lstStyle/>
           <a:p>
             <a:r>
-              <a:rPr lang="en-US" sz="1700" dirty="0">
+              <a:rPr lang="en-US" sz="2100" dirty="0">
                 <a:solidFill>
                   <a:srgbClr val="17364A"/>
                 </a:solidFill>
@@ -6122,11 +6353,11 @@
               </a:rPr>
               <a:t>Create a lifecycle funding and sustainability plan for one AI use case.</a:t>
             </a:r>
-            <a:endParaRPr lang="en-US" sz="1700" dirty="0"/>
-          </a:p>
-          <a:p>
-            <a:r>
-              <a:rPr lang="en-US" sz="1700" dirty="0">
+            <a:endParaRPr lang="en-US" sz="2100" dirty="0"/>
+          </a:p>
+          <a:p>
+            <a:r>
+              <a:rPr lang="en-US" sz="2100" dirty="0">
                 <a:solidFill>
                   <a:srgbClr val="17364A"/>
                 </a:solidFill>
@@ -6134,15 +6365,15 @@
                 <a:ea typeface="Aptos" pitchFamily="34" charset="-122"/>
                 <a:cs typeface="Aptos" pitchFamily="34" charset="-120"/>
               </a:rPr>
-              <a:t>Include costs, owners, funding sources, monitoring, update cadence, vendor management, training, fallback process, and.</a:t>
-            </a:r>
-            <a:endParaRPr lang="en-US" sz="1700" dirty="0"/>
-          </a:p>
-        </p:txBody>
-      </p:sp>
-      <p:sp>
-        <p:nvSpPr>
-          <p:cNvPr id="11" name="Shape 9"/>
+              <a:t>Include costs, owners, funding sources, monitoring, update cadence, vendor management, training,.</a:t>
+            </a:r>
+            <a:endParaRPr lang="en-US" sz="2100" dirty="0"/>
+          </a:p>
+        </p:txBody>
+      </p:sp>
+      <p:sp>
+        <p:nvSpPr>
+          <p:cNvPr id="12" name="Shape 10"/>
           <p:cNvSpPr/>
           <p:nvPr/>
         </p:nvSpPr>
@@ -6169,14 +6400,14 @@
       </p:sp>
       <p:sp>
         <p:nvSpPr>
-          <p:cNvPr id="12" name="Text 10"/>
+          <p:cNvPr id="13" name="Text 11"/>
           <p:cNvSpPr/>
           <p:nvPr/>
         </p:nvSpPr>
         <p:spPr>
           <a:xfrm>
             <a:off x="8074152" y="1563624"/>
-            <a:ext cx="2825496" cy="201168"/>
+            <a:ext cx="2825496" cy="256032"/>
           </a:xfrm>
           <a:prstGeom prst="rect">
             <a:avLst/>
@@ -6192,7 +6423,7 @@
               <a:buNone/>
             </a:pPr>
             <a:r>
-              <a:rPr lang="en-US" sz="950" b="1" dirty="0">
+              <a:rPr lang="en-US" sz="1300" b="1" dirty="0">
                 <a:solidFill>
                   <a:srgbClr val="0068B7"/>
                 </a:solidFill>
@@ -6202,20 +6433,20 @@
               </a:rPr>
               <a:t>Key idea</a:t>
             </a:r>
-            <a:endParaRPr lang="en-US" sz="950" dirty="0"/>
-          </a:p>
-        </p:txBody>
-      </p:sp>
-      <p:sp>
-        <p:nvSpPr>
-          <p:cNvPr id="13" name="Text 11"/>
-          <p:cNvSpPr/>
-          <p:nvPr/>
-        </p:nvSpPr>
-        <p:spPr>
-          <a:xfrm>
-            <a:off x="8074152" y="1856232"/>
-            <a:ext cx="2825496" cy="1261872"/>
+            <a:endParaRPr lang="en-US" sz="1300" dirty="0"/>
+          </a:p>
+        </p:txBody>
+      </p:sp>
+      <p:sp>
+        <p:nvSpPr>
+          <p:cNvPr id="14" name="Text 12"/>
+          <p:cNvSpPr/>
+          <p:nvPr/>
+        </p:nvSpPr>
+        <p:spPr>
+          <a:xfrm>
+            <a:off x="8074152" y="1920240"/>
+            <a:ext cx="2825496" cy="1188720"/>
           </a:xfrm>
           <a:prstGeom prst="rect">
             <a:avLst/>
@@ -6233,7 +6464,7 @@
               <a:buNone/>
             </a:pPr>
             <a:r>
-              <a:rPr lang="en-US" sz="1250" dirty="0">
+              <a:rPr lang="en-US" sz="1550" dirty="0">
                 <a:solidFill>
                   <a:srgbClr val="17364A"/>
                 </a:solidFill>
@@ -6243,13 +6474,13 @@
               </a:rPr>
               <a:t>Create a lifecycle funding and sustainability plan for one AI use case.</a:t>
             </a:r>
-            <a:endParaRPr lang="en-US" sz="1250" dirty="0"/>
-          </a:p>
-        </p:txBody>
-      </p:sp>
-      <p:sp>
-        <p:nvSpPr>
-          <p:cNvPr id="14" name="Shape 12"/>
+            <a:endParaRPr lang="en-US" sz="1550" dirty="0"/>
+          </a:p>
+        </p:txBody>
+      </p:sp>
+      <p:sp>
+        <p:nvSpPr>
+          <p:cNvPr id="15" name="Shape 13"/>
           <p:cNvSpPr/>
           <p:nvPr/>
         </p:nvSpPr>
@@ -6276,14 +6507,14 @@
       </p:sp>
       <p:sp>
         <p:nvSpPr>
-          <p:cNvPr id="15" name="Text 13"/>
+          <p:cNvPr id="16" name="Text 14"/>
           <p:cNvSpPr/>
           <p:nvPr/>
         </p:nvSpPr>
         <p:spPr>
           <a:xfrm>
             <a:off x="8074152" y="3666744"/>
-            <a:ext cx="2825496" cy="201168"/>
+            <a:ext cx="2825496" cy="256032"/>
           </a:xfrm>
           <a:prstGeom prst="rect">
             <a:avLst/>
@@ -6299,7 +6530,7 @@
               <a:buNone/>
             </a:pPr>
             <a:r>
-              <a:rPr lang="en-US" sz="950" b="1" dirty="0">
+              <a:rPr lang="en-US" sz="1300" b="1" dirty="0">
                 <a:solidFill>
                   <a:srgbClr val="0068B7"/>
                 </a:solidFill>
@@ -6309,20 +6540,20 @@
               </a:rPr>
               <a:t>Use this for</a:t>
             </a:r>
-            <a:endParaRPr lang="en-US" sz="950" dirty="0"/>
-          </a:p>
-        </p:txBody>
-      </p:sp>
-      <p:sp>
-        <p:nvSpPr>
-          <p:cNvPr id="16" name="Text 14"/>
-          <p:cNvSpPr/>
-          <p:nvPr/>
-        </p:nvSpPr>
-        <p:spPr>
-          <a:xfrm>
-            <a:off x="8074152" y="3959352"/>
-            <a:ext cx="2825496" cy="1170432"/>
+            <a:endParaRPr lang="en-US" sz="1300" dirty="0"/>
+          </a:p>
+        </p:txBody>
+      </p:sp>
+      <p:sp>
+        <p:nvSpPr>
+          <p:cNvPr id="17" name="Text 15"/>
+          <p:cNvSpPr/>
+          <p:nvPr/>
+        </p:nvSpPr>
+        <p:spPr>
+          <a:xfrm>
+            <a:off x="8074152" y="4023360"/>
+            <a:ext cx="2825496" cy="1097280"/>
           </a:xfrm>
           <a:prstGeom prst="rect">
             <a:avLst/>
@@ -6340,7 +6571,7 @@
               <a:buNone/>
             </a:pPr>
             <a:r>
-              <a:rPr lang="en-US" sz="1250" dirty="0">
+              <a:rPr lang="en-US" sz="1550" dirty="0">
                 <a:solidFill>
                   <a:srgbClr val="17364A"/>
                 </a:solidFill>
@@ -6350,7 +6581,7 @@
               </a:rPr>
               <a:t>Connect the concept to public health decisions, safeguards, documentation, or implementation work.</a:t>
             </a:r>
-            <a:endParaRPr lang="en-US" sz="1250" dirty="0"/>
+            <a:endParaRPr lang="en-US" sz="1550" dirty="0"/>
           </a:p>
         </p:txBody>
       </p:sp>
@@ -6547,7 +6778,7 @@
                 <a:ea typeface="Aptos" pitchFamily="34" charset="-122"/>
                 <a:cs typeface="Aptos" pitchFamily="34" charset="-120"/>
               </a:rPr>
-              <a:t>© Paula Soper</a:t>
+              <a:t>Â© Paula Soper</a:t>
             </a:r>
             <a:endParaRPr lang="en-US" sz="800" dirty="0"/>
           </a:p>
@@ -6555,7 +6786,46 @@
       </p:sp>
       <p:sp>
         <p:nvSpPr>
-          <p:cNvPr id="7" name="Shape 5"/>
+          <p:cNvPr id="7" name="Text 5"/>
+          <p:cNvSpPr/>
+          <p:nvPr/>
+        </p:nvSpPr>
+        <p:spPr>
+          <a:xfrm>
+            <a:off x="11137392" y="6510528"/>
+            <a:ext cx="411480" cy="201168"/>
+          </a:xfrm>
+          <a:prstGeom prst="rect">
+            <a:avLst/>
+          </a:prstGeom>
+          <a:noFill/>
+          <a:ln/>
+        </p:spPr>
+        <p:txBody>
+          <a:bodyPr wrap="square" lIns="0" tIns="0" rIns="0" bIns="0" rtlCol="0" anchor="ctr"/>
+          <a:lstStyle/>
+          <a:p>
+            <a:pPr algn="r" indent="0" marL="0">
+              <a:buNone/>
+            </a:pPr>
+            <a:r>
+              <a:rPr lang="en-US" sz="900" dirty="0">
+                <a:solidFill>
+                  <a:srgbClr val="5F7181"/>
+                </a:solidFill>
+                <a:latin typeface="Aptos" pitchFamily="34" charset="0"/>
+                <a:ea typeface="Aptos" pitchFamily="34" charset="-122"/>
+                <a:cs typeface="Aptos" pitchFamily="34" charset="-120"/>
+              </a:rPr>
+              <a:t>16</a:t>
+            </a:r>
+            <a:endParaRPr lang="en-US" sz="900" dirty="0"/>
+          </a:p>
+        </p:txBody>
+      </p:sp>
+      <p:sp>
+        <p:nvSpPr>
+          <p:cNvPr id="8" name="Shape 6"/>
           <p:cNvSpPr/>
           <p:nvPr/>
         </p:nvSpPr>
@@ -6580,7 +6850,7 @@
       </p:sp>
       <p:sp>
         <p:nvSpPr>
-          <p:cNvPr id="8" name="Text 6"/>
+          <p:cNvPr id="9" name="Text 7"/>
           <p:cNvSpPr/>
           <p:nvPr/>
         </p:nvSpPr>
@@ -6619,14 +6889,14 @@
       </p:sp>
       <p:sp>
         <p:nvSpPr>
-          <p:cNvPr id="9" name="Text 7"/>
+          <p:cNvPr id="10" name="Text 8"/>
           <p:cNvSpPr/>
           <p:nvPr/>
         </p:nvSpPr>
         <p:spPr>
           <a:xfrm>
             <a:off x="640080" y="621792"/>
-            <a:ext cx="10881360" cy="566928"/>
+            <a:ext cx="10881360" cy="713232"/>
           </a:xfrm>
           <a:prstGeom prst="rect">
             <a:avLst/>
@@ -6644,7 +6914,7 @@
               <a:buNone/>
             </a:pPr>
             <a:r>
-              <a:rPr lang="en-US" sz="2700" b="1" dirty="0">
+              <a:rPr lang="en-US" sz="3400" b="1" dirty="0">
                 <a:solidFill>
                   <a:srgbClr val="003A63"/>
                 </a:solidFill>
@@ -6654,20 +6924,20 @@
               </a:rPr>
               <a:t>Before You Begin</a:t>
             </a:r>
-            <a:endParaRPr lang="en-US" sz="2700" dirty="0"/>
-          </a:p>
-        </p:txBody>
-      </p:sp>
-      <p:sp>
-        <p:nvSpPr>
-          <p:cNvPr id="10" name="Text 8"/>
-          <p:cNvSpPr/>
-          <p:nvPr/>
-        </p:nvSpPr>
-        <p:spPr>
-          <a:xfrm>
-            <a:off x="868680" y="1417320"/>
-            <a:ext cx="6675120" cy="4434840"/>
+            <a:endParaRPr lang="en-US" sz="3400" dirty="0"/>
+          </a:p>
+        </p:txBody>
+      </p:sp>
+      <p:sp>
+        <p:nvSpPr>
+          <p:cNvPr id="11" name="Text 9"/>
+          <p:cNvSpPr/>
+          <p:nvPr/>
+        </p:nvSpPr>
+        <p:spPr>
+          <a:xfrm>
+            <a:off x="868680" y="1508760"/>
+            <a:ext cx="6537960" cy="4160520"/>
           </a:xfrm>
           <a:prstGeom prst="rect">
             <a:avLst/>
@@ -6682,7 +6952,7 @@
           <a:lstStyle/>
           <a:p>
             <a:r>
-              <a:rPr lang="en-US" sz="1700" dirty="0">
+              <a:rPr lang="en-US" sz="2100" dirty="0">
                 <a:solidFill>
                   <a:srgbClr val="17364A"/>
                 </a:solidFill>
@@ -6692,11 +6962,11 @@
               </a:rPr>
               <a:t>Choose a real or realistic public health AI use case.</a:t>
             </a:r>
-            <a:endParaRPr lang="en-US" sz="1700" dirty="0"/>
-          </a:p>
-          <a:p>
-            <a:r>
-              <a:rPr lang="en-US" sz="1700" dirty="0">
+            <a:endParaRPr lang="en-US" sz="2100" dirty="0"/>
+          </a:p>
+          <a:p>
+            <a:r>
+              <a:rPr lang="en-US" sz="2100" dirty="0">
                 <a:solidFill>
                   <a:srgbClr val="17364A"/>
                 </a:solidFill>
@@ -6704,13 +6974,13 @@
                 <a:ea typeface="Aptos" pitchFamily="34" charset="-122"/>
                 <a:cs typeface="Aptos" pitchFamily="34" charset="-120"/>
               </a:rPr>
-              <a:t>Document assumptions, unresolved questions, and which agency roles would need to review the artifact before it is adopted.</a:t>
-            </a:r>
-            <a:endParaRPr lang="en-US" sz="1700" dirty="0"/>
-          </a:p>
-          <a:p>
-            <a:r>
-              <a:rPr lang="en-US" sz="1700" dirty="0">
+              <a:t>Document assumptions, unresolved questions, and which agency roles would need to review the artifact.</a:t>
+            </a:r>
+            <a:endParaRPr lang="en-US" sz="2100" dirty="0"/>
+          </a:p>
+          <a:p>
+            <a:r>
+              <a:rPr lang="en-US" sz="2100" dirty="0">
                 <a:solidFill>
                   <a:srgbClr val="17364A"/>
                 </a:solidFill>
@@ -6718,15 +6988,15 @@
                 <a:ea typeface="Aptos" pitchFamily="34" charset="-122"/>
                 <a:cs typeface="Aptos" pitchFamily="34" charset="-120"/>
               </a:rPr>
-              <a:t>The exercise should produce a work product that could support governance review, leadership discussion, implementation.</a:t>
-            </a:r>
-            <a:endParaRPr lang="en-US" sz="1700" dirty="0"/>
-          </a:p>
-        </p:txBody>
-      </p:sp>
-      <p:sp>
-        <p:nvSpPr>
-          <p:cNvPr id="11" name="Shape 9"/>
+              <a:t>The exercise should produce a work product that could support governance review, leadership discussion,.</a:t>
+            </a:r>
+            <a:endParaRPr lang="en-US" sz="2100" dirty="0"/>
+          </a:p>
+        </p:txBody>
+      </p:sp>
+      <p:sp>
+        <p:nvSpPr>
+          <p:cNvPr id="12" name="Shape 10"/>
           <p:cNvSpPr/>
           <p:nvPr/>
         </p:nvSpPr>
@@ -6753,14 +7023,14 @@
       </p:sp>
       <p:sp>
         <p:nvSpPr>
-          <p:cNvPr id="12" name="Text 10"/>
+          <p:cNvPr id="13" name="Text 11"/>
           <p:cNvSpPr/>
           <p:nvPr/>
         </p:nvSpPr>
         <p:spPr>
           <a:xfrm>
             <a:off x="8074152" y="1563624"/>
-            <a:ext cx="2825496" cy="201168"/>
+            <a:ext cx="2825496" cy="256032"/>
           </a:xfrm>
           <a:prstGeom prst="rect">
             <a:avLst/>
@@ -6776,7 +7046,7 @@
               <a:buNone/>
             </a:pPr>
             <a:r>
-              <a:rPr lang="en-US" sz="950" b="1" dirty="0">
+              <a:rPr lang="en-US" sz="1300" b="1" dirty="0">
                 <a:solidFill>
                   <a:srgbClr val="0068B7"/>
                 </a:solidFill>
@@ -6786,20 +7056,20 @@
               </a:rPr>
               <a:t>Key idea</a:t>
             </a:r>
-            <a:endParaRPr lang="en-US" sz="950" dirty="0"/>
-          </a:p>
-        </p:txBody>
-      </p:sp>
-      <p:sp>
-        <p:nvSpPr>
-          <p:cNvPr id="13" name="Text 11"/>
-          <p:cNvSpPr/>
-          <p:nvPr/>
-        </p:nvSpPr>
-        <p:spPr>
-          <a:xfrm>
-            <a:off x="8074152" y="1856232"/>
-            <a:ext cx="2825496" cy="1261872"/>
+            <a:endParaRPr lang="en-US" sz="1300" dirty="0"/>
+          </a:p>
+        </p:txBody>
+      </p:sp>
+      <p:sp>
+        <p:nvSpPr>
+          <p:cNvPr id="14" name="Text 12"/>
+          <p:cNvSpPr/>
+          <p:nvPr/>
+        </p:nvSpPr>
+        <p:spPr>
+          <a:xfrm>
+            <a:off x="8074152" y="1920240"/>
+            <a:ext cx="2825496" cy="1188720"/>
           </a:xfrm>
           <a:prstGeom prst="rect">
             <a:avLst/>
@@ -6817,7 +7087,7 @@
               <a:buNone/>
             </a:pPr>
             <a:r>
-              <a:rPr lang="en-US" sz="1250" dirty="0">
+              <a:rPr lang="en-US" sz="1550" dirty="0">
                 <a:solidFill>
                   <a:srgbClr val="17364A"/>
                 </a:solidFill>
@@ -6827,13 +7097,13 @@
               </a:rPr>
               <a:t>Choose a real or realistic public health AI use case.</a:t>
             </a:r>
-            <a:endParaRPr lang="en-US" sz="1250" dirty="0"/>
-          </a:p>
-        </p:txBody>
-      </p:sp>
-      <p:sp>
-        <p:nvSpPr>
-          <p:cNvPr id="14" name="Shape 12"/>
+            <a:endParaRPr lang="en-US" sz="1550" dirty="0"/>
+          </a:p>
+        </p:txBody>
+      </p:sp>
+      <p:sp>
+        <p:nvSpPr>
+          <p:cNvPr id="15" name="Shape 13"/>
           <p:cNvSpPr/>
           <p:nvPr/>
         </p:nvSpPr>
@@ -6860,14 +7130,14 @@
       </p:sp>
       <p:sp>
         <p:nvSpPr>
-          <p:cNvPr id="15" name="Text 13"/>
+          <p:cNvPr id="16" name="Text 14"/>
           <p:cNvSpPr/>
           <p:nvPr/>
         </p:nvSpPr>
         <p:spPr>
           <a:xfrm>
             <a:off x="8074152" y="3666744"/>
-            <a:ext cx="2825496" cy="201168"/>
+            <a:ext cx="2825496" cy="256032"/>
           </a:xfrm>
           <a:prstGeom prst="rect">
             <a:avLst/>
@@ -6883,7 +7153,7 @@
               <a:buNone/>
             </a:pPr>
             <a:r>
-              <a:rPr lang="en-US" sz="950" b="1" dirty="0">
+              <a:rPr lang="en-US" sz="1300" b="1" dirty="0">
                 <a:solidFill>
                   <a:srgbClr val="0068B7"/>
                 </a:solidFill>
@@ -6893,20 +7163,20 @@
               </a:rPr>
               <a:t>Use this for</a:t>
             </a:r>
-            <a:endParaRPr lang="en-US" sz="950" dirty="0"/>
-          </a:p>
-        </p:txBody>
-      </p:sp>
-      <p:sp>
-        <p:nvSpPr>
-          <p:cNvPr id="16" name="Text 14"/>
-          <p:cNvSpPr/>
-          <p:nvPr/>
-        </p:nvSpPr>
-        <p:spPr>
-          <a:xfrm>
-            <a:off x="8074152" y="3959352"/>
-            <a:ext cx="2825496" cy="1170432"/>
+            <a:endParaRPr lang="en-US" sz="1300" dirty="0"/>
+          </a:p>
+        </p:txBody>
+      </p:sp>
+      <p:sp>
+        <p:nvSpPr>
+          <p:cNvPr id="17" name="Text 15"/>
+          <p:cNvSpPr/>
+          <p:nvPr/>
+        </p:nvSpPr>
+        <p:spPr>
+          <a:xfrm>
+            <a:off x="8074152" y="4023360"/>
+            <a:ext cx="2825496" cy="1097280"/>
           </a:xfrm>
           <a:prstGeom prst="rect">
             <a:avLst/>
@@ -6924,7 +7194,7 @@
               <a:buNone/>
             </a:pPr>
             <a:r>
-              <a:rPr lang="en-US" sz="1250" dirty="0">
+              <a:rPr lang="en-US" sz="1550" dirty="0">
                 <a:solidFill>
                   <a:srgbClr val="17364A"/>
                 </a:solidFill>
@@ -6934,7 +7204,7 @@
               </a:rPr>
               <a:t>Connect the concept to public health decisions, safeguards, documentation, or implementation work.</a:t>
             </a:r>
-            <a:endParaRPr lang="en-US" sz="1250" dirty="0"/>
+            <a:endParaRPr lang="en-US" sz="1550" dirty="0"/>
           </a:p>
         </p:txBody>
       </p:sp>
@@ -7131,7 +7401,7 @@
                 <a:ea typeface="Aptos" pitchFamily="34" charset="-122"/>
                 <a:cs typeface="Aptos" pitchFamily="34" charset="-120"/>
               </a:rPr>
-              <a:t>© Paula Soper</a:t>
+              <a:t>Â© Paula Soper</a:t>
             </a:r>
             <a:endParaRPr lang="en-US" sz="800" dirty="0"/>
           </a:p>
@@ -7139,7 +7409,46 @@
       </p:sp>
       <p:sp>
         <p:nvSpPr>
-          <p:cNvPr id="7" name="Shape 5"/>
+          <p:cNvPr id="7" name="Text 5"/>
+          <p:cNvSpPr/>
+          <p:nvPr/>
+        </p:nvSpPr>
+        <p:spPr>
+          <a:xfrm>
+            <a:off x="11137392" y="6510528"/>
+            <a:ext cx="411480" cy="201168"/>
+          </a:xfrm>
+          <a:prstGeom prst="rect">
+            <a:avLst/>
+          </a:prstGeom>
+          <a:noFill/>
+          <a:ln/>
+        </p:spPr>
+        <p:txBody>
+          <a:bodyPr wrap="square" lIns="0" tIns="0" rIns="0" bIns="0" rtlCol="0" anchor="ctr"/>
+          <a:lstStyle/>
+          <a:p>
+            <a:pPr algn="r" indent="0" marL="0">
+              <a:buNone/>
+            </a:pPr>
+            <a:r>
+              <a:rPr lang="en-US" sz="900" dirty="0">
+                <a:solidFill>
+                  <a:srgbClr val="5F7181"/>
+                </a:solidFill>
+                <a:latin typeface="Aptos" pitchFamily="34" charset="0"/>
+                <a:ea typeface="Aptos" pitchFamily="34" charset="-122"/>
+                <a:cs typeface="Aptos" pitchFamily="34" charset="-120"/>
+              </a:rPr>
+              <a:t>17</a:t>
+            </a:r>
+            <a:endParaRPr lang="en-US" sz="900" dirty="0"/>
+          </a:p>
+        </p:txBody>
+      </p:sp>
+      <p:sp>
+        <p:nvSpPr>
+          <p:cNvPr id="8" name="Shape 6"/>
           <p:cNvSpPr/>
           <p:nvPr/>
         </p:nvSpPr>
@@ -7164,7 +7473,7 @@
       </p:sp>
       <p:sp>
         <p:nvSpPr>
-          <p:cNvPr id="8" name="Text 6"/>
+          <p:cNvPr id="9" name="Text 7"/>
           <p:cNvSpPr/>
           <p:nvPr/>
         </p:nvSpPr>
@@ -7203,14 +7512,14 @@
       </p:sp>
       <p:sp>
         <p:nvSpPr>
-          <p:cNvPr id="9" name="Text 7"/>
+          <p:cNvPr id="10" name="Text 8"/>
           <p:cNvSpPr/>
           <p:nvPr/>
         </p:nvSpPr>
         <p:spPr>
           <a:xfrm>
             <a:off x="640080" y="621792"/>
-            <a:ext cx="10881360" cy="566928"/>
+            <a:ext cx="10881360" cy="713232"/>
           </a:xfrm>
           <a:prstGeom prst="rect">
             <a:avLst/>
@@ -7228,7 +7537,7 @@
               <a:buNone/>
             </a:pPr>
             <a:r>
-              <a:rPr lang="en-US" sz="2700" b="1" dirty="0">
+              <a:rPr lang="en-US" sz="3400" b="1" dirty="0">
                 <a:solidFill>
                   <a:srgbClr val="003A63"/>
                 </a:solidFill>
@@ -7238,20 +7547,20 @@
               </a:rPr>
               <a:t>Expected Artifact or Evidence</a:t>
             </a:r>
-            <a:endParaRPr lang="en-US" sz="2700" dirty="0"/>
-          </a:p>
-        </p:txBody>
-      </p:sp>
-      <p:sp>
-        <p:nvSpPr>
-          <p:cNvPr id="10" name="Text 8"/>
-          <p:cNvSpPr/>
-          <p:nvPr/>
-        </p:nvSpPr>
-        <p:spPr>
-          <a:xfrm>
-            <a:off x="868680" y="1417320"/>
-            <a:ext cx="6675120" cy="4434840"/>
+            <a:endParaRPr lang="en-US" sz="3400" dirty="0"/>
+          </a:p>
+        </p:txBody>
+      </p:sp>
+      <p:sp>
+        <p:nvSpPr>
+          <p:cNvPr id="11" name="Text 9"/>
+          <p:cNvSpPr/>
+          <p:nvPr/>
+        </p:nvSpPr>
+        <p:spPr>
+          <a:xfrm>
+            <a:off x="868680" y="1508760"/>
+            <a:ext cx="6537960" cy="4160520"/>
           </a:xfrm>
           <a:prstGeom prst="rect">
             <a:avLst/>
@@ -7266,7 +7575,7 @@
           <a:lstStyle/>
           <a:p>
             <a:r>
-              <a:rPr lang="en-US" sz="1700" dirty="0">
+              <a:rPr lang="en-US" sz="2100" dirty="0">
                 <a:solidFill>
                   <a:srgbClr val="17364A"/>
                 </a:solidFill>
@@ -7274,15 +7583,15 @@
                 <a:ea typeface="Aptos" pitchFamily="34" charset="-122"/>
                 <a:cs typeface="Aptos" pitchFamily="34" charset="-120"/>
               </a:rPr>
-              <a:t>Sustainability plan; lifecycle cost list; ownership map; continuation and sunset criteria; rollback or fallback plan.</a:t>
-            </a:r>
-            <a:endParaRPr lang="en-US" sz="1700" dirty="0"/>
-          </a:p>
-        </p:txBody>
-      </p:sp>
-      <p:sp>
-        <p:nvSpPr>
-          <p:cNvPr id="11" name="Shape 9"/>
+              <a:t>Sustainability plan; lifecycle cost list; ownership map; continuation and sunset criteria; rollback or.</a:t>
+            </a:r>
+            <a:endParaRPr lang="en-US" sz="2100" dirty="0"/>
+          </a:p>
+        </p:txBody>
+      </p:sp>
+      <p:sp>
+        <p:nvSpPr>
+          <p:cNvPr id="12" name="Shape 10"/>
           <p:cNvSpPr/>
           <p:nvPr/>
         </p:nvSpPr>
@@ -7309,14 +7618,14 @@
       </p:sp>
       <p:sp>
         <p:nvSpPr>
-          <p:cNvPr id="12" name="Text 10"/>
+          <p:cNvPr id="13" name="Text 11"/>
           <p:cNvSpPr/>
           <p:nvPr/>
         </p:nvSpPr>
         <p:spPr>
           <a:xfrm>
             <a:off x="8074152" y="1563624"/>
-            <a:ext cx="2825496" cy="201168"/>
+            <a:ext cx="2825496" cy="256032"/>
           </a:xfrm>
           <a:prstGeom prst="rect">
             <a:avLst/>
@@ -7332,7 +7641,7 @@
               <a:buNone/>
             </a:pPr>
             <a:r>
-              <a:rPr lang="en-US" sz="950" b="1" dirty="0">
+              <a:rPr lang="en-US" sz="1300" b="1" dirty="0">
                 <a:solidFill>
                   <a:srgbClr val="0068B7"/>
                 </a:solidFill>
@@ -7342,20 +7651,20 @@
               </a:rPr>
               <a:t>Key idea</a:t>
             </a:r>
-            <a:endParaRPr lang="en-US" sz="950" dirty="0"/>
-          </a:p>
-        </p:txBody>
-      </p:sp>
-      <p:sp>
-        <p:nvSpPr>
-          <p:cNvPr id="13" name="Text 11"/>
-          <p:cNvSpPr/>
-          <p:nvPr/>
-        </p:nvSpPr>
-        <p:spPr>
-          <a:xfrm>
-            <a:off x="8074152" y="1856232"/>
-            <a:ext cx="2825496" cy="1261872"/>
+            <a:endParaRPr lang="en-US" sz="1300" dirty="0"/>
+          </a:p>
+        </p:txBody>
+      </p:sp>
+      <p:sp>
+        <p:nvSpPr>
+          <p:cNvPr id="14" name="Text 12"/>
+          <p:cNvSpPr/>
+          <p:nvPr/>
+        </p:nvSpPr>
+        <p:spPr>
+          <a:xfrm>
+            <a:off x="8074152" y="1920240"/>
+            <a:ext cx="2825496" cy="1188720"/>
           </a:xfrm>
           <a:prstGeom prst="rect">
             <a:avLst/>
@@ -7373,7 +7682,7 @@
               <a:buNone/>
             </a:pPr>
             <a:r>
-              <a:rPr lang="en-US" sz="1250" dirty="0">
+              <a:rPr lang="en-US" sz="1550" dirty="0">
                 <a:solidFill>
                   <a:srgbClr val="17364A"/>
                 </a:solidFill>
@@ -7381,15 +7690,15 @@
                 <a:ea typeface="Aptos" pitchFamily="34" charset="-122"/>
                 <a:cs typeface="Aptos" pitchFamily="34" charset="-120"/>
               </a:rPr>
-              <a:t>Sustainability plan; lifecycle cost list; ownership map; continuation and sunset criteria; rollback or fallback plan.</a:t>
-            </a:r>
-            <a:endParaRPr lang="en-US" sz="1250" dirty="0"/>
-          </a:p>
-        </p:txBody>
-      </p:sp>
-      <p:sp>
-        <p:nvSpPr>
-          <p:cNvPr id="14" name="Shape 12"/>
+              <a:t>Sustainability plan; lifecycle cost list; ownership map; continuation and sunset criteria; rollback or.</a:t>
+            </a:r>
+            <a:endParaRPr lang="en-US" sz="1550" dirty="0"/>
+          </a:p>
+        </p:txBody>
+      </p:sp>
+      <p:sp>
+        <p:nvSpPr>
+          <p:cNvPr id="15" name="Shape 13"/>
           <p:cNvSpPr/>
           <p:nvPr/>
         </p:nvSpPr>
@@ -7416,14 +7725,14 @@
       </p:sp>
       <p:sp>
         <p:nvSpPr>
-          <p:cNvPr id="15" name="Text 13"/>
+          <p:cNvPr id="16" name="Text 14"/>
           <p:cNvSpPr/>
           <p:nvPr/>
         </p:nvSpPr>
         <p:spPr>
           <a:xfrm>
             <a:off x="8074152" y="3666744"/>
-            <a:ext cx="2825496" cy="201168"/>
+            <a:ext cx="2825496" cy="256032"/>
           </a:xfrm>
           <a:prstGeom prst="rect">
             <a:avLst/>
@@ -7439,7 +7748,7 @@
               <a:buNone/>
             </a:pPr>
             <a:r>
-              <a:rPr lang="en-US" sz="950" b="1" dirty="0">
+              <a:rPr lang="en-US" sz="1300" b="1" dirty="0">
                 <a:solidFill>
                   <a:srgbClr val="0068B7"/>
                 </a:solidFill>
@@ -7449,20 +7758,20 @@
               </a:rPr>
               <a:t>Use this for</a:t>
             </a:r>
-            <a:endParaRPr lang="en-US" sz="950" dirty="0"/>
-          </a:p>
-        </p:txBody>
-      </p:sp>
-      <p:sp>
-        <p:nvSpPr>
-          <p:cNvPr id="16" name="Text 14"/>
-          <p:cNvSpPr/>
-          <p:nvPr/>
-        </p:nvSpPr>
-        <p:spPr>
-          <a:xfrm>
-            <a:off x="8074152" y="3959352"/>
-            <a:ext cx="2825496" cy="1170432"/>
+            <a:endParaRPr lang="en-US" sz="1300" dirty="0"/>
+          </a:p>
+        </p:txBody>
+      </p:sp>
+      <p:sp>
+        <p:nvSpPr>
+          <p:cNvPr id="17" name="Text 15"/>
+          <p:cNvSpPr/>
+          <p:nvPr/>
+        </p:nvSpPr>
+        <p:spPr>
+          <a:xfrm>
+            <a:off x="8074152" y="4023360"/>
+            <a:ext cx="2825496" cy="1097280"/>
           </a:xfrm>
           <a:prstGeom prst="rect">
             <a:avLst/>
@@ -7480,7 +7789,7 @@
               <a:buNone/>
             </a:pPr>
             <a:r>
-              <a:rPr lang="en-US" sz="1250" dirty="0">
+              <a:rPr lang="en-US" sz="1550" dirty="0">
                 <a:solidFill>
                   <a:srgbClr val="17364A"/>
                 </a:solidFill>
@@ -7490,7 +7799,7 @@
               </a:rPr>
               <a:t>Connect the concept to public health decisions, safeguards, documentation, or implementation work.</a:t>
             </a:r>
-            <a:endParaRPr lang="en-US" sz="1250" dirty="0"/>
+            <a:endParaRPr lang="en-US" sz="1550" dirty="0"/>
           </a:p>
         </p:txBody>
       </p:sp>
@@ -7687,7 +7996,7 @@
                 <a:ea typeface="Aptos" pitchFamily="34" charset="-122"/>
                 <a:cs typeface="Aptos" pitchFamily="34" charset="-120"/>
               </a:rPr>
-              <a:t>© Paula Soper</a:t>
+              <a:t>Â© Paula Soper</a:t>
             </a:r>
             <a:endParaRPr lang="en-US" sz="800" dirty="0"/>
           </a:p>
@@ -7695,7 +8004,46 @@
       </p:sp>
       <p:sp>
         <p:nvSpPr>
-          <p:cNvPr id="7" name="Shape 5"/>
+          <p:cNvPr id="7" name="Text 5"/>
+          <p:cNvSpPr/>
+          <p:nvPr/>
+        </p:nvSpPr>
+        <p:spPr>
+          <a:xfrm>
+            <a:off x="11137392" y="6510528"/>
+            <a:ext cx="411480" cy="201168"/>
+          </a:xfrm>
+          <a:prstGeom prst="rect">
+            <a:avLst/>
+          </a:prstGeom>
+          <a:noFill/>
+          <a:ln/>
+        </p:spPr>
+        <p:txBody>
+          <a:bodyPr wrap="square" lIns="0" tIns="0" rIns="0" bIns="0" rtlCol="0" anchor="ctr"/>
+          <a:lstStyle/>
+          <a:p>
+            <a:pPr algn="r" indent="0" marL="0">
+              <a:buNone/>
+            </a:pPr>
+            <a:r>
+              <a:rPr lang="en-US" sz="900" dirty="0">
+                <a:solidFill>
+                  <a:srgbClr val="5F7181"/>
+                </a:solidFill>
+                <a:latin typeface="Aptos" pitchFamily="34" charset="0"/>
+                <a:ea typeface="Aptos" pitchFamily="34" charset="-122"/>
+                <a:cs typeface="Aptos" pitchFamily="34" charset="-120"/>
+              </a:rPr>
+              <a:t>18</a:t>
+            </a:r>
+            <a:endParaRPr lang="en-US" sz="900" dirty="0"/>
+          </a:p>
+        </p:txBody>
+      </p:sp>
+      <p:sp>
+        <p:nvSpPr>
+          <p:cNvPr id="8" name="Shape 6"/>
           <p:cNvSpPr/>
           <p:nvPr/>
         </p:nvSpPr>
@@ -7720,7 +8068,7 @@
       </p:sp>
       <p:sp>
         <p:nvSpPr>
-          <p:cNvPr id="8" name="Text 6"/>
+          <p:cNvPr id="9" name="Text 7"/>
           <p:cNvSpPr/>
           <p:nvPr/>
         </p:nvSpPr>
@@ -7759,14 +8107,14 @@
       </p:sp>
       <p:sp>
         <p:nvSpPr>
-          <p:cNvPr id="9" name="Text 7"/>
+          <p:cNvPr id="10" name="Text 8"/>
           <p:cNvSpPr/>
           <p:nvPr/>
         </p:nvSpPr>
         <p:spPr>
           <a:xfrm>
             <a:off x="640080" y="621792"/>
-            <a:ext cx="10881360" cy="566928"/>
+            <a:ext cx="10881360" cy="713232"/>
           </a:xfrm>
           <a:prstGeom prst="rect">
             <a:avLst/>
@@ -7784,7 +8132,7 @@
               <a:buNone/>
             </a:pPr>
             <a:r>
-              <a:rPr lang="en-US" sz="2700" b="1" dirty="0">
+              <a:rPr lang="en-US" sz="3400" b="1" dirty="0">
                 <a:solidFill>
                   <a:srgbClr val="003A63"/>
                 </a:solidFill>
@@ -7794,20 +8142,20 @@
               </a:rPr>
               <a:t>Expected Assignment</a:t>
             </a:r>
-            <a:endParaRPr lang="en-US" sz="2700" dirty="0"/>
-          </a:p>
-        </p:txBody>
-      </p:sp>
-      <p:sp>
-        <p:nvSpPr>
-          <p:cNvPr id="10" name="Text 8"/>
-          <p:cNvSpPr/>
-          <p:nvPr/>
-        </p:nvSpPr>
-        <p:spPr>
-          <a:xfrm>
-            <a:off x="868680" y="1417320"/>
-            <a:ext cx="6675120" cy="4434840"/>
+            <a:endParaRPr lang="en-US" sz="3400" dirty="0"/>
+          </a:p>
+        </p:txBody>
+      </p:sp>
+      <p:sp>
+        <p:nvSpPr>
+          <p:cNvPr id="11" name="Text 9"/>
+          <p:cNvSpPr/>
+          <p:nvPr/>
+        </p:nvSpPr>
+        <p:spPr>
+          <a:xfrm>
+            <a:off x="868680" y="1508760"/>
+            <a:ext cx="6537960" cy="4160520"/>
           </a:xfrm>
           <a:prstGeom prst="rect">
             <a:avLst/>
@@ -7822,7 +8170,7 @@
           <a:lstStyle/>
           <a:p>
             <a:r>
-              <a:rPr lang="en-US" sz="1700" dirty="0">
+              <a:rPr lang="en-US" sz="2100" dirty="0">
                 <a:solidFill>
                   <a:srgbClr val="17364A"/>
                 </a:solidFill>
@@ -7830,15 +8178,15 @@
                 <a:ea typeface="Aptos" pitchFamily="34" charset="-122"/>
                 <a:cs typeface="Aptos" pitchFamily="34" charset="-120"/>
               </a:rPr>
-              <a:t>Sustainability plan; lifecycle cost list; ownership map; continuation and sunset criteria; rollback or fallback plan.</a:t>
-            </a:r>
-            <a:endParaRPr lang="en-US" sz="1700" dirty="0"/>
-          </a:p>
-        </p:txBody>
-      </p:sp>
-      <p:sp>
-        <p:nvSpPr>
-          <p:cNvPr id="11" name="Shape 9"/>
+              <a:t>Sustainability plan; lifecycle cost list; ownership map; continuation and sunset criteria; rollback or.</a:t>
+            </a:r>
+            <a:endParaRPr lang="en-US" sz="2100" dirty="0"/>
+          </a:p>
+        </p:txBody>
+      </p:sp>
+      <p:sp>
+        <p:nvSpPr>
+          <p:cNvPr id="12" name="Shape 10"/>
           <p:cNvSpPr/>
           <p:nvPr/>
         </p:nvSpPr>
@@ -7865,14 +8213,14 @@
       </p:sp>
       <p:sp>
         <p:nvSpPr>
-          <p:cNvPr id="12" name="Text 10"/>
+          <p:cNvPr id="13" name="Text 11"/>
           <p:cNvSpPr/>
           <p:nvPr/>
         </p:nvSpPr>
         <p:spPr>
           <a:xfrm>
             <a:off x="8074152" y="1563624"/>
-            <a:ext cx="2825496" cy="201168"/>
+            <a:ext cx="2825496" cy="256032"/>
           </a:xfrm>
           <a:prstGeom prst="rect">
             <a:avLst/>
@@ -7888,7 +8236,7 @@
               <a:buNone/>
             </a:pPr>
             <a:r>
-              <a:rPr lang="en-US" sz="950" b="1" dirty="0">
+              <a:rPr lang="en-US" sz="1300" b="1" dirty="0">
                 <a:solidFill>
                   <a:srgbClr val="0068B7"/>
                 </a:solidFill>
@@ -7898,20 +8246,20 @@
               </a:rPr>
               <a:t>Key idea</a:t>
             </a:r>
-            <a:endParaRPr lang="en-US" sz="950" dirty="0"/>
-          </a:p>
-        </p:txBody>
-      </p:sp>
-      <p:sp>
-        <p:nvSpPr>
-          <p:cNvPr id="13" name="Text 11"/>
-          <p:cNvSpPr/>
-          <p:nvPr/>
-        </p:nvSpPr>
-        <p:spPr>
-          <a:xfrm>
-            <a:off x="8074152" y="1856232"/>
-            <a:ext cx="2825496" cy="1261872"/>
+            <a:endParaRPr lang="en-US" sz="1300" dirty="0"/>
+          </a:p>
+        </p:txBody>
+      </p:sp>
+      <p:sp>
+        <p:nvSpPr>
+          <p:cNvPr id="14" name="Text 12"/>
+          <p:cNvSpPr/>
+          <p:nvPr/>
+        </p:nvSpPr>
+        <p:spPr>
+          <a:xfrm>
+            <a:off x="8074152" y="1920240"/>
+            <a:ext cx="2825496" cy="1188720"/>
           </a:xfrm>
           <a:prstGeom prst="rect">
             <a:avLst/>
@@ -7929,7 +8277,7 @@
               <a:buNone/>
             </a:pPr>
             <a:r>
-              <a:rPr lang="en-US" sz="1250" dirty="0">
+              <a:rPr lang="en-US" sz="1550" dirty="0">
                 <a:solidFill>
                   <a:srgbClr val="17364A"/>
                 </a:solidFill>
@@ -7937,15 +8285,15 @@
                 <a:ea typeface="Aptos" pitchFamily="34" charset="-122"/>
                 <a:cs typeface="Aptos" pitchFamily="34" charset="-120"/>
               </a:rPr>
-              <a:t>Sustainability plan; lifecycle cost list; ownership map; continuation and sunset criteria; rollback or fallback plan.</a:t>
-            </a:r>
-            <a:endParaRPr lang="en-US" sz="1250" dirty="0"/>
-          </a:p>
-        </p:txBody>
-      </p:sp>
-      <p:sp>
-        <p:nvSpPr>
-          <p:cNvPr id="14" name="Shape 12"/>
+              <a:t>Sustainability plan; lifecycle cost list; ownership map; continuation and sunset criteria; rollback or.</a:t>
+            </a:r>
+            <a:endParaRPr lang="en-US" sz="1550" dirty="0"/>
+          </a:p>
+        </p:txBody>
+      </p:sp>
+      <p:sp>
+        <p:nvSpPr>
+          <p:cNvPr id="15" name="Shape 13"/>
           <p:cNvSpPr/>
           <p:nvPr/>
         </p:nvSpPr>
@@ -7972,14 +8320,14 @@
       </p:sp>
       <p:sp>
         <p:nvSpPr>
-          <p:cNvPr id="15" name="Text 13"/>
+          <p:cNvPr id="16" name="Text 14"/>
           <p:cNvSpPr/>
           <p:nvPr/>
         </p:nvSpPr>
         <p:spPr>
           <a:xfrm>
             <a:off x="8074152" y="3666744"/>
-            <a:ext cx="2825496" cy="201168"/>
+            <a:ext cx="2825496" cy="256032"/>
           </a:xfrm>
           <a:prstGeom prst="rect">
             <a:avLst/>
@@ -7995,7 +8343,7 @@
               <a:buNone/>
             </a:pPr>
             <a:r>
-              <a:rPr lang="en-US" sz="950" b="1" dirty="0">
+              <a:rPr lang="en-US" sz="1300" b="1" dirty="0">
                 <a:solidFill>
                   <a:srgbClr val="0068B7"/>
                 </a:solidFill>
@@ -8005,20 +8353,20 @@
               </a:rPr>
               <a:t>Use this for</a:t>
             </a:r>
-            <a:endParaRPr lang="en-US" sz="950" dirty="0"/>
-          </a:p>
-        </p:txBody>
-      </p:sp>
-      <p:sp>
-        <p:nvSpPr>
-          <p:cNvPr id="16" name="Text 14"/>
-          <p:cNvSpPr/>
-          <p:nvPr/>
-        </p:nvSpPr>
-        <p:spPr>
-          <a:xfrm>
-            <a:off x="8074152" y="3959352"/>
-            <a:ext cx="2825496" cy="1170432"/>
+            <a:endParaRPr lang="en-US" sz="1300" dirty="0"/>
+          </a:p>
+        </p:txBody>
+      </p:sp>
+      <p:sp>
+        <p:nvSpPr>
+          <p:cNvPr id="17" name="Text 15"/>
+          <p:cNvSpPr/>
+          <p:nvPr/>
+        </p:nvSpPr>
+        <p:spPr>
+          <a:xfrm>
+            <a:off x="8074152" y="4023360"/>
+            <a:ext cx="2825496" cy="1097280"/>
           </a:xfrm>
           <a:prstGeom prst="rect">
             <a:avLst/>
@@ -8036,7 +8384,7 @@
               <a:buNone/>
             </a:pPr>
             <a:r>
-              <a:rPr lang="en-US" sz="1250" dirty="0">
+              <a:rPr lang="en-US" sz="1550" dirty="0">
                 <a:solidFill>
                   <a:srgbClr val="17364A"/>
                 </a:solidFill>
@@ -8046,7 +8394,7 @@
               </a:rPr>
               <a:t>Connect the concept to public health decisions, safeguards, documentation, or implementation work.</a:t>
             </a:r>
-            <a:endParaRPr lang="en-US" sz="1250" dirty="0"/>
+            <a:endParaRPr lang="en-US" sz="1550" dirty="0"/>
           </a:p>
         </p:txBody>
       </p:sp>
@@ -8243,7 +8591,7 @@
                 <a:ea typeface="Aptos" pitchFamily="34" charset="-122"/>
                 <a:cs typeface="Aptos" pitchFamily="34" charset="-120"/>
               </a:rPr>
-              <a:t>© Paula Soper</a:t>
+              <a:t>Â© Paula Soper</a:t>
             </a:r>
             <a:endParaRPr lang="en-US" sz="800" dirty="0"/>
           </a:p>
@@ -8251,7 +8599,46 @@
       </p:sp>
       <p:sp>
         <p:nvSpPr>
-          <p:cNvPr id="7" name="Shape 5"/>
+          <p:cNvPr id="7" name="Text 5"/>
+          <p:cNvSpPr/>
+          <p:nvPr/>
+        </p:nvSpPr>
+        <p:spPr>
+          <a:xfrm>
+            <a:off x="11137392" y="6510528"/>
+            <a:ext cx="411480" cy="201168"/>
+          </a:xfrm>
+          <a:prstGeom prst="rect">
+            <a:avLst/>
+          </a:prstGeom>
+          <a:noFill/>
+          <a:ln/>
+        </p:spPr>
+        <p:txBody>
+          <a:bodyPr wrap="square" lIns="0" tIns="0" rIns="0" bIns="0" rtlCol="0" anchor="ctr"/>
+          <a:lstStyle/>
+          <a:p>
+            <a:pPr algn="r" indent="0" marL="0">
+              <a:buNone/>
+            </a:pPr>
+            <a:r>
+              <a:rPr lang="en-US" sz="900" dirty="0">
+                <a:solidFill>
+                  <a:srgbClr val="5F7181"/>
+                </a:solidFill>
+                <a:latin typeface="Aptos" pitchFamily="34" charset="0"/>
+                <a:ea typeface="Aptos" pitchFamily="34" charset="-122"/>
+                <a:cs typeface="Aptos" pitchFamily="34" charset="-120"/>
+              </a:rPr>
+              <a:t>19</a:t>
+            </a:r>
+            <a:endParaRPr lang="en-US" sz="900" dirty="0"/>
+          </a:p>
+        </p:txBody>
+      </p:sp>
+      <p:sp>
+        <p:nvSpPr>
+          <p:cNvPr id="8" name="Shape 6"/>
           <p:cNvSpPr/>
           <p:nvPr/>
         </p:nvSpPr>
@@ -8276,7 +8663,7 @@
       </p:sp>
       <p:sp>
         <p:nvSpPr>
-          <p:cNvPr id="8" name="Text 6"/>
+          <p:cNvPr id="9" name="Text 7"/>
           <p:cNvSpPr/>
           <p:nvPr/>
         </p:nvSpPr>
@@ -8315,14 +8702,14 @@
       </p:sp>
       <p:sp>
         <p:nvSpPr>
-          <p:cNvPr id="9" name="Text 7"/>
+          <p:cNvPr id="10" name="Text 8"/>
           <p:cNvSpPr/>
           <p:nvPr/>
         </p:nvSpPr>
         <p:spPr>
           <a:xfrm>
             <a:off x="640080" y="621792"/>
-            <a:ext cx="10881360" cy="566928"/>
+            <a:ext cx="10881360" cy="713232"/>
           </a:xfrm>
           <a:prstGeom prst="rect">
             <a:avLst/>
@@ -8340,7 +8727,7 @@
               <a:buNone/>
             </a:pPr>
             <a:r>
-              <a:rPr lang="en-US" sz="2700" b="1" dirty="0">
+              <a:rPr lang="en-US" sz="3400" b="1" dirty="0">
                 <a:solidFill>
                   <a:srgbClr val="003A63"/>
                 </a:solidFill>
@@ -8350,20 +8737,20 @@
               </a:rPr>
               <a:t>Knowledge Check</a:t>
             </a:r>
-            <a:endParaRPr lang="en-US" sz="2700" dirty="0"/>
-          </a:p>
-        </p:txBody>
-      </p:sp>
-      <p:sp>
-        <p:nvSpPr>
-          <p:cNvPr id="10" name="Text 8"/>
-          <p:cNvSpPr/>
-          <p:nvPr/>
-        </p:nvSpPr>
-        <p:spPr>
-          <a:xfrm>
-            <a:off x="868680" y="1417320"/>
-            <a:ext cx="6675120" cy="4434840"/>
+            <a:endParaRPr lang="en-US" sz="3400" dirty="0"/>
+          </a:p>
+        </p:txBody>
+      </p:sp>
+      <p:sp>
+        <p:nvSpPr>
+          <p:cNvPr id="11" name="Text 9"/>
+          <p:cNvSpPr/>
+          <p:nvPr/>
+        </p:nvSpPr>
+        <p:spPr>
+          <a:xfrm>
+            <a:off x="868680" y="1508760"/>
+            <a:ext cx="6537960" cy="4160520"/>
           </a:xfrm>
           <a:prstGeom prst="rect">
             <a:avLst/>
@@ -8378,7 +8765,7 @@
           <a:lstStyle/>
           <a:p>
             <a:r>
-              <a:rPr lang="en-US" sz="1700" dirty="0">
+              <a:rPr lang="en-US" sz="2100" dirty="0">
                 <a:solidFill>
                   <a:srgbClr val="17364A"/>
                 </a:solidFill>
@@ -8388,11 +8775,11 @@
               </a:rPr>
               <a:t>1. What is the strongest reason this module topic belongs in AI leadership and governance training?</a:t>
             </a:r>
-            <a:endParaRPr lang="en-US" sz="1700" dirty="0"/>
-          </a:p>
-          <a:p>
-            <a:r>
-              <a:rPr lang="en-US" sz="1700" dirty="0">
+            <a:endParaRPr lang="en-US" sz="2100" dirty="0"/>
+          </a:p>
+          <a:p>
+            <a:r>
+              <a:rPr lang="en-US" sz="2100" dirty="0">
                 <a:solidFill>
                   <a:srgbClr val="17364A"/>
                 </a:solidFill>
@@ -8402,11 +8789,11 @@
               </a:rPr>
               <a:t>2. Which practice best supports accountable public health AI governance?</a:t>
             </a:r>
-            <a:endParaRPr lang="en-US" sz="1700" dirty="0"/>
-          </a:p>
-          <a:p>
-            <a:r>
-              <a:rPr lang="en-US" sz="1700" dirty="0">
+            <a:endParaRPr lang="en-US" sz="2100" dirty="0"/>
+          </a:p>
+          <a:p>
+            <a:r>
+              <a:rPr lang="en-US" sz="2100" dirty="0">
                 <a:solidFill>
                   <a:srgbClr val="17364A"/>
                 </a:solidFill>
@@ -8416,27 +8803,13 @@
               </a:rPr>
               <a:t>3. When should an AI use case be escalated for leadership or governance review?</a:t>
             </a:r>
-            <a:endParaRPr lang="en-US" sz="1700" dirty="0"/>
-          </a:p>
-          <a:p>
-            <a:r>
-              <a:rPr lang="en-US" sz="1700" dirty="0">
-                <a:solidFill>
-                  <a:srgbClr val="17364A"/>
-                </a:solidFill>
-                <a:latin typeface="Aptos" pitchFamily="34" charset="0"/>
-                <a:ea typeface="Aptos" pitchFamily="34" charset="-122"/>
-                <a:cs typeface="Aptos" pitchFamily="34" charset="-120"/>
-              </a:rPr>
-              <a:t>4. What is weak evidence of completion for a leadership and governance module?</a:t>
-            </a:r>
-            <a:endParaRPr lang="en-US" sz="1700" dirty="0"/>
-          </a:p>
-        </p:txBody>
-      </p:sp>
-      <p:sp>
-        <p:nvSpPr>
-          <p:cNvPr id="11" name="Shape 9"/>
+            <a:endParaRPr lang="en-US" sz="2100" dirty="0"/>
+          </a:p>
+        </p:txBody>
+      </p:sp>
+      <p:sp>
+        <p:nvSpPr>
+          <p:cNvPr id="12" name="Shape 10"/>
           <p:cNvSpPr/>
           <p:nvPr/>
         </p:nvSpPr>
@@ -8463,14 +8836,14 @@
       </p:sp>
       <p:sp>
         <p:nvSpPr>
-          <p:cNvPr id="12" name="Text 10"/>
+          <p:cNvPr id="13" name="Text 11"/>
           <p:cNvSpPr/>
           <p:nvPr/>
         </p:nvSpPr>
         <p:spPr>
           <a:xfrm>
             <a:off x="8074152" y="1563624"/>
-            <a:ext cx="2825496" cy="201168"/>
+            <a:ext cx="2825496" cy="256032"/>
           </a:xfrm>
           <a:prstGeom prst="rect">
             <a:avLst/>
@@ -8486,7 +8859,7 @@
               <a:buNone/>
             </a:pPr>
             <a:r>
-              <a:rPr lang="en-US" sz="950" b="1" dirty="0">
+              <a:rPr lang="en-US" sz="1300" b="1" dirty="0">
                 <a:solidFill>
                   <a:srgbClr val="0068B7"/>
                 </a:solidFill>
@@ -8496,20 +8869,20 @@
               </a:rPr>
               <a:t>Key idea</a:t>
             </a:r>
-            <a:endParaRPr lang="en-US" sz="950" dirty="0"/>
-          </a:p>
-        </p:txBody>
-      </p:sp>
-      <p:sp>
-        <p:nvSpPr>
-          <p:cNvPr id="13" name="Text 11"/>
-          <p:cNvSpPr/>
-          <p:nvPr/>
-        </p:nvSpPr>
-        <p:spPr>
-          <a:xfrm>
-            <a:off x="8074152" y="1856232"/>
-            <a:ext cx="2825496" cy="1261872"/>
+            <a:endParaRPr lang="en-US" sz="1300" dirty="0"/>
+          </a:p>
+        </p:txBody>
+      </p:sp>
+      <p:sp>
+        <p:nvSpPr>
+          <p:cNvPr id="14" name="Text 12"/>
+          <p:cNvSpPr/>
+          <p:nvPr/>
+        </p:nvSpPr>
+        <p:spPr>
+          <a:xfrm>
+            <a:off x="8074152" y="1920240"/>
+            <a:ext cx="2825496" cy="1188720"/>
           </a:xfrm>
           <a:prstGeom prst="rect">
             <a:avLst/>
@@ -8527,7 +8900,7 @@
               <a:buNone/>
             </a:pPr>
             <a:r>
-              <a:rPr lang="en-US" sz="1250" dirty="0">
+              <a:rPr lang="en-US" sz="1550" dirty="0">
                 <a:solidFill>
                   <a:srgbClr val="17364A"/>
                 </a:solidFill>
@@ -8537,13 +8910,13 @@
               </a:rPr>
               <a:t>1. What is the strongest reason this module topic belongs in AI leadership and governance training?</a:t>
             </a:r>
-            <a:endParaRPr lang="en-US" sz="1250" dirty="0"/>
-          </a:p>
-        </p:txBody>
-      </p:sp>
-      <p:sp>
-        <p:nvSpPr>
-          <p:cNvPr id="14" name="Shape 12"/>
+            <a:endParaRPr lang="en-US" sz="1550" dirty="0"/>
+          </a:p>
+        </p:txBody>
+      </p:sp>
+      <p:sp>
+        <p:nvSpPr>
+          <p:cNvPr id="15" name="Shape 13"/>
           <p:cNvSpPr/>
           <p:nvPr/>
         </p:nvSpPr>
@@ -8570,14 +8943,14 @@
       </p:sp>
       <p:sp>
         <p:nvSpPr>
-          <p:cNvPr id="15" name="Text 13"/>
+          <p:cNvPr id="16" name="Text 14"/>
           <p:cNvSpPr/>
           <p:nvPr/>
         </p:nvSpPr>
         <p:spPr>
           <a:xfrm>
             <a:off x="8074152" y="3666744"/>
-            <a:ext cx="2825496" cy="201168"/>
+            <a:ext cx="2825496" cy="256032"/>
           </a:xfrm>
           <a:prstGeom prst="rect">
             <a:avLst/>
@@ -8593,7 +8966,7 @@
               <a:buNone/>
             </a:pPr>
             <a:r>
-              <a:rPr lang="en-US" sz="950" b="1" dirty="0">
+              <a:rPr lang="en-US" sz="1300" b="1" dirty="0">
                 <a:solidFill>
                   <a:srgbClr val="0068B7"/>
                 </a:solidFill>
@@ -8603,20 +8976,20 @@
               </a:rPr>
               <a:t>Use this for</a:t>
             </a:r>
-            <a:endParaRPr lang="en-US" sz="950" dirty="0"/>
-          </a:p>
-        </p:txBody>
-      </p:sp>
-      <p:sp>
-        <p:nvSpPr>
-          <p:cNvPr id="16" name="Text 14"/>
-          <p:cNvSpPr/>
-          <p:nvPr/>
-        </p:nvSpPr>
-        <p:spPr>
-          <a:xfrm>
-            <a:off x="8074152" y="3959352"/>
-            <a:ext cx="2825496" cy="1170432"/>
+            <a:endParaRPr lang="en-US" sz="1300" dirty="0"/>
+          </a:p>
+        </p:txBody>
+      </p:sp>
+      <p:sp>
+        <p:nvSpPr>
+          <p:cNvPr id="17" name="Text 15"/>
+          <p:cNvSpPr/>
+          <p:nvPr/>
+        </p:nvSpPr>
+        <p:spPr>
+          <a:xfrm>
+            <a:off x="8074152" y="4023360"/>
+            <a:ext cx="2825496" cy="1097280"/>
           </a:xfrm>
           <a:prstGeom prst="rect">
             <a:avLst/>
@@ -8634,7 +9007,7 @@
               <a:buNone/>
             </a:pPr>
             <a:r>
-              <a:rPr lang="en-US" sz="1250" dirty="0">
+              <a:rPr lang="en-US" sz="1550" dirty="0">
                 <a:solidFill>
                   <a:srgbClr val="17364A"/>
                 </a:solidFill>
@@ -8644,7 +9017,7 @@
               </a:rPr>
               <a:t>Connect the concept to public health decisions, safeguards, documentation, or implementation work.</a:t>
             </a:r>
-            <a:endParaRPr lang="en-US" sz="1250" dirty="0"/>
+            <a:endParaRPr lang="en-US" sz="1550" dirty="0"/>
           </a:p>
         </p:txBody>
       </p:sp>
@@ -8841,7 +9214,7 @@
                 <a:ea typeface="Aptos" pitchFamily="34" charset="-122"/>
                 <a:cs typeface="Aptos" pitchFamily="34" charset="-120"/>
               </a:rPr>
-              <a:t>© Paula Soper</a:t>
+              <a:t>Â© Paula Soper</a:t>
             </a:r>
             <a:endParaRPr lang="en-US" sz="800" dirty="0"/>
           </a:p>
@@ -8855,8 +9228,47 @@
         </p:nvSpPr>
         <p:spPr>
           <a:xfrm>
+            <a:off x="11137392" y="6510528"/>
+            <a:ext cx="411480" cy="201168"/>
+          </a:xfrm>
+          <a:prstGeom prst="rect">
+            <a:avLst/>
+          </a:prstGeom>
+          <a:noFill/>
+          <a:ln/>
+        </p:spPr>
+        <p:txBody>
+          <a:bodyPr wrap="square" lIns="0" tIns="0" rIns="0" bIns="0" rtlCol="0" anchor="ctr"/>
+          <a:lstStyle/>
+          <a:p>
+            <a:pPr algn="r" indent="0" marL="0">
+              <a:buNone/>
+            </a:pPr>
+            <a:r>
+              <a:rPr lang="en-US" sz="900" dirty="0">
+                <a:solidFill>
+                  <a:srgbClr val="5F7181"/>
+                </a:solidFill>
+                <a:latin typeface="Aptos" pitchFamily="34" charset="0"/>
+                <a:ea typeface="Aptos" pitchFamily="34" charset="-122"/>
+                <a:cs typeface="Aptos" pitchFamily="34" charset="-120"/>
+              </a:rPr>
+              <a:t>2</a:t>
+            </a:r>
+            <a:endParaRPr lang="en-US" sz="900" dirty="0"/>
+          </a:p>
+        </p:txBody>
+      </p:sp>
+      <p:sp>
+        <p:nvSpPr>
+          <p:cNvPr id="8" name="Text 6"/>
+          <p:cNvSpPr/>
+          <p:nvPr/>
+        </p:nvSpPr>
+        <p:spPr>
+          <a:xfrm>
             <a:off x="640080" y="658368"/>
-            <a:ext cx="10881360" cy="566928"/>
+            <a:ext cx="10881360" cy="713232"/>
           </a:xfrm>
           <a:prstGeom prst="rect">
             <a:avLst/>
@@ -8874,7 +9286,7 @@
               <a:buNone/>
             </a:pPr>
             <a:r>
-              <a:rPr lang="en-US" sz="2700" b="1" dirty="0">
+              <a:rPr lang="en-US" sz="3400" b="1" dirty="0">
                 <a:solidFill>
                   <a:srgbClr val="003A63"/>
                 </a:solidFill>
@@ -8884,20 +9296,20 @@
               </a:rPr>
               <a:t>What this module helps you do</a:t>
             </a:r>
-            <a:endParaRPr lang="en-US" sz="2700" dirty="0"/>
-          </a:p>
-        </p:txBody>
-      </p:sp>
-      <p:sp>
-        <p:nvSpPr>
-          <p:cNvPr id="8" name="Text 6"/>
-          <p:cNvSpPr/>
-          <p:nvPr/>
-        </p:nvSpPr>
-        <p:spPr>
-          <a:xfrm>
-            <a:off x="868680" y="1417320"/>
-            <a:ext cx="6675120" cy="3291840"/>
+            <a:endParaRPr lang="en-US" sz="3400" dirty="0"/>
+          </a:p>
+        </p:txBody>
+      </p:sp>
+      <p:sp>
+        <p:nvSpPr>
+          <p:cNvPr id="9" name="Text 7"/>
+          <p:cNvSpPr/>
+          <p:nvPr/>
+        </p:nvSpPr>
+        <p:spPr>
+          <a:xfrm>
+            <a:off x="868680" y="1508760"/>
+            <a:ext cx="6446520" cy="2926080"/>
           </a:xfrm>
           <a:prstGeom prst="rect">
             <a:avLst/>
@@ -8912,7 +9324,7 @@
           <a:lstStyle/>
           <a:p>
             <a:r>
-              <a:rPr lang="en-US" sz="1700" dirty="0">
+              <a:rPr lang="en-US" sz="2100" dirty="0">
                 <a:solidFill>
                   <a:srgbClr val="17364A"/>
                 </a:solidFill>
@@ -8922,11 +9334,11 @@
               </a:rPr>
               <a:t>Responsible AI does not end at launch.</a:t>
             </a:r>
-            <a:endParaRPr lang="en-US" sz="1700" dirty="0"/>
-          </a:p>
-          <a:p>
-            <a:r>
-              <a:rPr lang="en-US" sz="1700" dirty="0">
+            <a:endParaRPr lang="en-US" sz="2100" dirty="0"/>
+          </a:p>
+          <a:p>
+            <a:r>
+              <a:rPr lang="en-US" sz="2100" dirty="0">
                 <a:solidFill>
                   <a:srgbClr val="17364A"/>
                 </a:solidFill>
@@ -8934,13 +9346,13 @@
                 <a:ea typeface="Aptos" pitchFamily="34" charset="-122"/>
                 <a:cs typeface="Aptos" pitchFamily="34" charset="-120"/>
               </a:rPr>
-              <a:t>AI tools require ongoing funding, staff time, monitoring, updates, vendor management, training, incident response, documentation, and eventual.</a:t>
-            </a:r>
-            <a:endParaRPr lang="en-US" sz="1700" dirty="0"/>
-          </a:p>
-          <a:p>
-            <a:r>
-              <a:rPr lang="en-US" sz="1700" dirty="0">
+              <a:t>AI tools require ongoing funding, staff time, monitoring, updates, vendor management, training, incident.</a:t>
+            </a:r>
+            <a:endParaRPr lang="en-US" sz="2100" dirty="0"/>
+          </a:p>
+          <a:p>
+            <a:r>
+              <a:rPr lang="en-US" sz="2100" dirty="0">
                 <a:solidFill>
                   <a:srgbClr val="17364A"/>
                 </a:solidFill>
@@ -8948,29 +9360,15 @@
                 <a:ea typeface="Aptos" pitchFamily="34" charset="-122"/>
                 <a:cs typeface="Aptos" pitchFamily="34" charset="-120"/>
               </a:rPr>
-              <a:t>Sustainability planning ensures that AI-supported workflows do not become unfunded, unmonitored, or outdated after the initial pilot or grant period.</a:t>
-            </a:r>
-            <a:endParaRPr lang="en-US" sz="1700" dirty="0"/>
-          </a:p>
-          <a:p>
-            <a:r>
-              <a:rPr lang="en-US" sz="1700" dirty="0">
-                <a:solidFill>
-                  <a:srgbClr val="17364A"/>
-                </a:solidFill>
-                <a:latin typeface="Aptos" pitchFamily="34" charset="0"/>
-                <a:ea typeface="Aptos" pitchFamily="34" charset="-122"/>
-                <a:cs typeface="Aptos" pitchFamily="34" charset="-120"/>
-              </a:rPr>
-              <a:t>This module helps leaders plan for the full AI lifecycle.</a:t>
-            </a:r>
-            <a:endParaRPr lang="en-US" sz="1700" dirty="0"/>
-          </a:p>
-        </p:txBody>
-      </p:sp>
-      <p:sp>
-        <p:nvSpPr>
-          <p:cNvPr id="9" name="Shape 7"/>
+              <a:t>Sustainability planning ensures that AI-supported workflows do not become unfunded, unmonitored, or outdated.</a:t>
+            </a:r>
+            <a:endParaRPr lang="en-US" sz="2100" dirty="0"/>
+          </a:p>
+        </p:txBody>
+      </p:sp>
+      <p:sp>
+        <p:nvSpPr>
+          <p:cNvPr id="10" name="Shape 8"/>
           <p:cNvSpPr/>
           <p:nvPr/>
         </p:nvSpPr>
@@ -8997,14 +9395,14 @@
       </p:sp>
       <p:sp>
         <p:nvSpPr>
-          <p:cNvPr id="10" name="Text 8"/>
+          <p:cNvPr id="11" name="Text 9"/>
           <p:cNvSpPr/>
           <p:nvPr/>
         </p:nvSpPr>
         <p:spPr>
           <a:xfrm>
             <a:off x="8074152" y="1563624"/>
-            <a:ext cx="2825496" cy="201168"/>
+            <a:ext cx="2825496" cy="256032"/>
           </a:xfrm>
           <a:prstGeom prst="rect">
             <a:avLst/>
@@ -9020,7 +9418,7 @@
               <a:buNone/>
             </a:pPr>
             <a:r>
-              <a:rPr lang="en-US" sz="950" b="1" dirty="0">
+              <a:rPr lang="en-US" sz="1300" b="1" dirty="0">
                 <a:solidFill>
                   <a:srgbClr val="0068B7"/>
                 </a:solidFill>
@@ -9030,20 +9428,20 @@
               </a:rPr>
               <a:t>Module details</a:t>
             </a:r>
-            <a:endParaRPr lang="en-US" sz="950" dirty="0"/>
-          </a:p>
-        </p:txBody>
-      </p:sp>
-      <p:sp>
-        <p:nvSpPr>
-          <p:cNvPr id="11" name="Text 9"/>
-          <p:cNvSpPr/>
-          <p:nvPr/>
-        </p:nvSpPr>
-        <p:spPr>
-          <a:xfrm>
-            <a:off x="8074152" y="1856232"/>
-            <a:ext cx="2825496" cy="1353312"/>
+            <a:endParaRPr lang="en-US" sz="1300" dirty="0"/>
+          </a:p>
+        </p:txBody>
+      </p:sp>
+      <p:sp>
+        <p:nvSpPr>
+          <p:cNvPr id="12" name="Text 10"/>
+          <p:cNvSpPr/>
+          <p:nvPr/>
+        </p:nvSpPr>
+        <p:spPr>
+          <a:xfrm>
+            <a:off x="8074152" y="1920240"/>
+            <a:ext cx="2825496" cy="1280160"/>
           </a:xfrm>
           <a:prstGeom prst="rect">
             <a:avLst/>
@@ -9061,7 +9459,7 @@
               <a:buNone/>
             </a:pPr>
             <a:r>
-              <a:rPr lang="en-US" sz="1250" dirty="0">
+              <a:rPr lang="en-US" sz="1550" dirty="0">
                 <a:solidFill>
                   <a:srgbClr val="17364A"/>
                 </a:solidFill>
@@ -9071,14 +9469,14 @@
               </a:rPr>
               <a:t>Level: advanced/leadership</a:t>
             </a:r>
-            <a:endParaRPr lang="en-US" sz="1250" dirty="0"/>
+            <a:endParaRPr lang="en-US" sz="1550" dirty="0"/>
           </a:p>
           <a:p>
             <a:pPr indent="0" marL="0">
               <a:buNone/>
             </a:pPr>
             <a:r>
-              <a:rPr lang="en-US" sz="1250" dirty="0">
+              <a:rPr lang="en-US" sz="1550" dirty="0">
                 <a:solidFill>
                   <a:srgbClr val="17364A"/>
                 </a:solidFill>
@@ -9088,14 +9486,14 @@
               </a:rPr>
               <a:t>Primary track: Public Health Executive Leadership Track</a:t>
             </a:r>
-            <a:endParaRPr lang="en-US" sz="1250" dirty="0"/>
+            <a:endParaRPr lang="en-US" sz="1550" dirty="0"/>
           </a:p>
           <a:p>
             <a:pPr indent="0" marL="0">
               <a:buNone/>
             </a:pPr>
             <a:r>
-              <a:rPr lang="en-US" sz="1250" dirty="0">
+              <a:rPr lang="en-US" sz="1550" dirty="0">
                 <a:solidFill>
                   <a:srgbClr val="17364A"/>
                 </a:solidFill>
@@ -9105,32 +9503,32 @@
               </a:rPr>
               <a:t>Appears in tracks: governance-security</a:t>
             </a:r>
-            <a:endParaRPr lang="en-US" sz="1250" dirty="0"/>
-          </a:p>
-        </p:txBody>
-      </p:sp>
-      <p:sp>
-        <p:nvSpPr>
-          <p:cNvPr id="12" name="Shape 10"/>
-          <p:cNvSpPr/>
-          <p:nvPr/>
-        </p:nvSpPr>
-        <p:spPr>
-          <a:xfrm>
-            <a:off x="7909560" y="3611880"/>
-            <a:ext cx="3154680" cy="1783080"/>
+            <a:endParaRPr lang="en-US" sz="1550" dirty="0"/>
+          </a:p>
+        </p:txBody>
+      </p:sp>
+      <p:sp>
+        <p:nvSpPr>
+          <p:cNvPr id="13" name="Shape 11"/>
+          <p:cNvSpPr/>
+          <p:nvPr/>
+        </p:nvSpPr>
+        <p:spPr>
+          <a:xfrm>
+            <a:off x="7635240" y="3730752"/>
+            <a:ext cx="1033272" cy="749808"/>
           </a:xfrm>
           <a:prstGeom prst="roundRect">
             <a:avLst>
-              <a:gd name="adj" fmla="val 6154"/>
+              <a:gd name="adj" fmla="val 14634"/>
             </a:avLst>
           </a:prstGeom>
           <a:solidFill>
-            <a:srgbClr val="EEF8ED"/>
+            <a:srgbClr val="0068B7"/>
           </a:solidFill>
           <a:ln w="12700">
             <a:solidFill>
-              <a:srgbClr val="B9D7E6"/>
+              <a:srgbClr val="0068B7"/>
             </a:solidFill>
             <a:prstDash val="solid"/>
           </a:ln>
@@ -9138,81 +9536,256 @@
       </p:sp>
       <p:sp>
         <p:nvSpPr>
-          <p:cNvPr id="13" name="Text 11"/>
-          <p:cNvSpPr/>
-          <p:nvPr/>
-        </p:nvSpPr>
-        <p:spPr>
-          <a:xfrm>
-            <a:off x="8074152" y="3758184"/>
-            <a:ext cx="2825496" cy="201168"/>
-          </a:xfrm>
-          <a:prstGeom prst="rect">
-            <a:avLst/>
-          </a:prstGeom>
-          <a:noFill/>
-          <a:ln/>
-        </p:spPr>
-        <p:txBody>
-          <a:bodyPr wrap="square" lIns="0" tIns="0" rIns="0" bIns="0" rtlCol="0" anchor="ctr"/>
-          <a:lstStyle/>
-          <a:p>
-            <a:pPr indent="0" marL="0">
-              <a:buNone/>
-            </a:pPr>
-            <a:r>
-              <a:rPr lang="en-US" sz="950" b="1" dirty="0">
-                <a:solidFill>
-                  <a:srgbClr val="0068B7"/>
-                </a:solidFill>
-                <a:latin typeface="Aptos" pitchFamily="34" charset="0"/>
-                <a:ea typeface="Aptos" pitchFamily="34" charset="-122"/>
-                <a:cs typeface="Aptos" pitchFamily="34" charset="-120"/>
-              </a:rPr>
-              <a:t>Learning approach</a:t>
-            </a:r>
-            <a:endParaRPr lang="en-US" sz="950" dirty="0"/>
-          </a:p>
-        </p:txBody>
-      </p:sp>
-      <p:sp>
-        <p:nvSpPr>
           <p:cNvPr id="14" name="Text 12"/>
           <p:cNvSpPr/>
           <p:nvPr/>
         </p:nvSpPr>
         <p:spPr>
           <a:xfrm>
-            <a:off x="8074152" y="4050792"/>
-            <a:ext cx="2825496" cy="1216152"/>
-          </a:xfrm>
-          <a:prstGeom prst="rect">
-            <a:avLst/>
-          </a:prstGeom>
-          <a:noFill/>
-          <a:ln/>
-        </p:spPr>
-        <p:txBody>
-          <a:bodyPr wrap="square" lIns="0" tIns="0" rIns="0" bIns="0" rtlCol="0" anchor="t">
+            <a:off x="7708392" y="3922776"/>
+            <a:ext cx="886968" cy="310896"/>
+          </a:xfrm>
+          <a:prstGeom prst="rect">
+            <a:avLst/>
+          </a:prstGeom>
+          <a:noFill/>
+          <a:ln/>
+        </p:spPr>
+        <p:txBody>
+          <a:bodyPr wrap="square" lIns="0" tIns="0" rIns="0" bIns="0" rtlCol="0" anchor="ctr">
             <a:normAutofit/>
           </a:bodyPr>
           <a:lstStyle/>
           <a:p>
-            <a:pPr indent="0" marL="0">
-              <a:buNone/>
-            </a:pPr>
-            <a:r>
-              <a:rPr lang="en-US" sz="1250" dirty="0">
-                <a:solidFill>
-                  <a:srgbClr val="17364A"/>
-                </a:solidFill>
-                <a:latin typeface="Aptos" pitchFamily="34" charset="0"/>
-                <a:ea typeface="Aptos" pitchFamily="34" charset="-122"/>
-                <a:cs typeface="Aptos" pitchFamily="34" charset="-120"/>
-              </a:rPr>
-              <a:t>Review the core ideas, complete the practical exercise, check your understanding, and use the related plays and tools to apply the lesson.</a:t>
-            </a:r>
-            <a:endParaRPr lang="en-US" sz="1250" dirty="0"/>
+            <a:pPr algn="ctr" indent="0" marL="0">
+              <a:buNone/>
+            </a:pPr>
+            <a:r>
+              <a:rPr lang="en-US" sz="1500" b="1" dirty="0">
+                <a:solidFill>
+                  <a:srgbClr val="FFFFFF"/>
+                </a:solidFill>
+                <a:latin typeface="Aptos" pitchFamily="34" charset="0"/>
+                <a:ea typeface="Aptos" pitchFamily="34" charset="-122"/>
+                <a:cs typeface="Aptos" pitchFamily="34" charset="-120"/>
+              </a:rPr>
+              <a:t>Learn</a:t>
+            </a:r>
+            <a:endParaRPr lang="en-US" sz="1500" dirty="0"/>
+          </a:p>
+        </p:txBody>
+      </p:sp>
+      <p:sp>
+        <p:nvSpPr>
+          <p:cNvPr id="15" name="Text 13"/>
+          <p:cNvSpPr/>
+          <p:nvPr/>
+        </p:nvSpPr>
+        <p:spPr>
+          <a:xfrm>
+            <a:off x="8695944" y="3941064"/>
+            <a:ext cx="201168" cy="256032"/>
+          </a:xfrm>
+          <a:prstGeom prst="rect">
+            <a:avLst/>
+          </a:prstGeom>
+          <a:noFill/>
+          <a:ln/>
+        </p:spPr>
+        <p:txBody>
+          <a:bodyPr wrap="square" lIns="0" tIns="0" rIns="0" bIns="0" rtlCol="0" anchor="ctr"/>
+          <a:lstStyle/>
+          <a:p>
+            <a:pPr algn="ctr" indent="0" marL="0">
+              <a:buNone/>
+            </a:pPr>
+            <a:r>
+              <a:rPr lang="en-US" sz="1800" b="1" dirty="0">
+                <a:solidFill>
+                  <a:srgbClr val="0068B7"/>
+                </a:solidFill>
+                <a:latin typeface="Aptos" pitchFamily="34" charset="0"/>
+                <a:ea typeface="Aptos" pitchFamily="34" charset="-122"/>
+                <a:cs typeface="Aptos" pitchFamily="34" charset="-120"/>
+              </a:rPr>
+              <a:t>â†’</a:t>
+            </a:r>
+            <a:endParaRPr lang="en-US" sz="1800" dirty="0"/>
+          </a:p>
+        </p:txBody>
+      </p:sp>
+      <p:sp>
+        <p:nvSpPr>
+          <p:cNvPr id="16" name="Shape 14"/>
+          <p:cNvSpPr/>
+          <p:nvPr/>
+        </p:nvSpPr>
+        <p:spPr>
+          <a:xfrm>
+            <a:off x="8924544" y="3730752"/>
+            <a:ext cx="1033272" cy="749808"/>
+          </a:xfrm>
+          <a:prstGeom prst="roundRect">
+            <a:avLst>
+              <a:gd name="adj" fmla="val 14634"/>
+            </a:avLst>
+          </a:prstGeom>
+          <a:solidFill>
+            <a:srgbClr val="2F8A28"/>
+          </a:solidFill>
+          <a:ln w="12700">
+            <a:solidFill>
+              <a:srgbClr val="2F8A28"/>
+            </a:solidFill>
+            <a:prstDash val="solid"/>
+          </a:ln>
+        </p:spPr>
+      </p:sp>
+      <p:sp>
+        <p:nvSpPr>
+          <p:cNvPr id="17" name="Text 15"/>
+          <p:cNvSpPr/>
+          <p:nvPr/>
+        </p:nvSpPr>
+        <p:spPr>
+          <a:xfrm>
+            <a:off x="8997696" y="3922776"/>
+            <a:ext cx="886968" cy="310896"/>
+          </a:xfrm>
+          <a:prstGeom prst="rect">
+            <a:avLst/>
+          </a:prstGeom>
+          <a:noFill/>
+          <a:ln/>
+        </p:spPr>
+        <p:txBody>
+          <a:bodyPr wrap="square" lIns="0" tIns="0" rIns="0" bIns="0" rtlCol="0" anchor="ctr">
+            <a:normAutofit/>
+          </a:bodyPr>
+          <a:lstStyle/>
+          <a:p>
+            <a:pPr algn="ctr" indent="0" marL="0">
+              <a:buNone/>
+            </a:pPr>
+            <a:r>
+              <a:rPr lang="en-US" sz="1500" b="1" dirty="0">
+                <a:solidFill>
+                  <a:srgbClr val="FFFFFF"/>
+                </a:solidFill>
+                <a:latin typeface="Aptos" pitchFamily="34" charset="0"/>
+                <a:ea typeface="Aptos" pitchFamily="34" charset="-122"/>
+                <a:cs typeface="Aptos" pitchFamily="34" charset="-120"/>
+              </a:rPr>
+              <a:t>Apply</a:t>
+            </a:r>
+            <a:endParaRPr lang="en-US" sz="1500" dirty="0"/>
+          </a:p>
+        </p:txBody>
+      </p:sp>
+      <p:sp>
+        <p:nvSpPr>
+          <p:cNvPr id="18" name="Text 16"/>
+          <p:cNvSpPr/>
+          <p:nvPr/>
+        </p:nvSpPr>
+        <p:spPr>
+          <a:xfrm>
+            <a:off x="9985248" y="3941064"/>
+            <a:ext cx="201168" cy="256032"/>
+          </a:xfrm>
+          <a:prstGeom prst="rect">
+            <a:avLst/>
+          </a:prstGeom>
+          <a:noFill/>
+          <a:ln/>
+        </p:spPr>
+        <p:txBody>
+          <a:bodyPr wrap="square" lIns="0" tIns="0" rIns="0" bIns="0" rtlCol="0" anchor="ctr"/>
+          <a:lstStyle/>
+          <a:p>
+            <a:pPr algn="ctr" indent="0" marL="0">
+              <a:buNone/>
+            </a:pPr>
+            <a:r>
+              <a:rPr lang="en-US" sz="1800" b="1" dirty="0">
+                <a:solidFill>
+                  <a:srgbClr val="0068B7"/>
+                </a:solidFill>
+                <a:latin typeface="Aptos" pitchFamily="34" charset="0"/>
+                <a:ea typeface="Aptos" pitchFamily="34" charset="-122"/>
+                <a:cs typeface="Aptos" pitchFamily="34" charset="-120"/>
+              </a:rPr>
+              <a:t>â†’</a:t>
+            </a:r>
+            <a:endParaRPr lang="en-US" sz="1800" dirty="0"/>
+          </a:p>
+        </p:txBody>
+      </p:sp>
+      <p:sp>
+        <p:nvSpPr>
+          <p:cNvPr id="19" name="Shape 17"/>
+          <p:cNvSpPr/>
+          <p:nvPr/>
+        </p:nvSpPr>
+        <p:spPr>
+          <a:xfrm>
+            <a:off x="10213848" y="3730752"/>
+            <a:ext cx="1033272" cy="749808"/>
+          </a:xfrm>
+          <a:prstGeom prst="roundRect">
+            <a:avLst>
+              <a:gd name="adj" fmla="val 14634"/>
+            </a:avLst>
+          </a:prstGeom>
+          <a:solidFill>
+            <a:srgbClr val="6A4CA3"/>
+          </a:solidFill>
+          <a:ln w="12700">
+            <a:solidFill>
+              <a:srgbClr val="6A4CA3"/>
+            </a:solidFill>
+            <a:prstDash val="solid"/>
+          </a:ln>
+        </p:spPr>
+      </p:sp>
+      <p:sp>
+        <p:nvSpPr>
+          <p:cNvPr id="20" name="Text 18"/>
+          <p:cNvSpPr/>
+          <p:nvPr/>
+        </p:nvSpPr>
+        <p:spPr>
+          <a:xfrm>
+            <a:off x="10287000" y="3922776"/>
+            <a:ext cx="886968" cy="310896"/>
+          </a:xfrm>
+          <a:prstGeom prst="rect">
+            <a:avLst/>
+          </a:prstGeom>
+          <a:noFill/>
+          <a:ln/>
+        </p:spPr>
+        <p:txBody>
+          <a:bodyPr wrap="square" lIns="0" tIns="0" rIns="0" bIns="0" rtlCol="0" anchor="ctr">
+            <a:normAutofit/>
+          </a:bodyPr>
+          <a:lstStyle/>
+          <a:p>
+            <a:pPr algn="ctr" indent="0" marL="0">
+              <a:buNone/>
+            </a:pPr>
+            <a:r>
+              <a:rPr lang="en-US" sz="1500" b="1" dirty="0">
+                <a:solidFill>
+                  <a:srgbClr val="FFFFFF"/>
+                </a:solidFill>
+                <a:latin typeface="Aptos" pitchFamily="34" charset="0"/>
+                <a:ea typeface="Aptos" pitchFamily="34" charset="-122"/>
+                <a:cs typeface="Aptos" pitchFamily="34" charset="-120"/>
+              </a:rPr>
+              <a:t>Document</a:t>
+            </a:r>
+            <a:endParaRPr lang="en-US" sz="1500" dirty="0"/>
           </a:p>
         </p:txBody>
       </p:sp>
@@ -9409,7 +9982,7 @@
                 <a:ea typeface="Aptos" pitchFamily="34" charset="-122"/>
                 <a:cs typeface="Aptos" pitchFamily="34" charset="-120"/>
               </a:rPr>
-              <a:t>© Paula Soper</a:t>
+              <a:t>Â© Paula Soper</a:t>
             </a:r>
             <a:endParaRPr lang="en-US" sz="800" dirty="0"/>
           </a:p>
@@ -9417,7 +9990,46 @@
       </p:sp>
       <p:sp>
         <p:nvSpPr>
-          <p:cNvPr id="7" name="Shape 5"/>
+          <p:cNvPr id="7" name="Text 5"/>
+          <p:cNvSpPr/>
+          <p:nvPr/>
+        </p:nvSpPr>
+        <p:spPr>
+          <a:xfrm>
+            <a:off x="11137392" y="6510528"/>
+            <a:ext cx="411480" cy="201168"/>
+          </a:xfrm>
+          <a:prstGeom prst="rect">
+            <a:avLst/>
+          </a:prstGeom>
+          <a:noFill/>
+          <a:ln/>
+        </p:spPr>
+        <p:txBody>
+          <a:bodyPr wrap="square" lIns="0" tIns="0" rIns="0" bIns="0" rtlCol="0" anchor="ctr"/>
+          <a:lstStyle/>
+          <a:p>
+            <a:pPr algn="r" indent="0" marL="0">
+              <a:buNone/>
+            </a:pPr>
+            <a:r>
+              <a:rPr lang="en-US" sz="900" dirty="0">
+                <a:solidFill>
+                  <a:srgbClr val="5F7181"/>
+                </a:solidFill>
+                <a:latin typeface="Aptos" pitchFamily="34" charset="0"/>
+                <a:ea typeface="Aptos" pitchFamily="34" charset="-122"/>
+                <a:cs typeface="Aptos" pitchFamily="34" charset="-120"/>
+              </a:rPr>
+              <a:t>20</a:t>
+            </a:r>
+            <a:endParaRPr lang="en-US" sz="900" dirty="0"/>
+          </a:p>
+        </p:txBody>
+      </p:sp>
+      <p:sp>
+        <p:nvSpPr>
+          <p:cNvPr id="8" name="Shape 6"/>
           <p:cNvSpPr/>
           <p:nvPr/>
         </p:nvSpPr>
@@ -9442,7 +10054,7 @@
       </p:sp>
       <p:sp>
         <p:nvSpPr>
-          <p:cNvPr id="8" name="Text 6"/>
+          <p:cNvPr id="9" name="Text 7"/>
           <p:cNvSpPr/>
           <p:nvPr/>
         </p:nvSpPr>
@@ -9481,14 +10093,14 @@
       </p:sp>
       <p:sp>
         <p:nvSpPr>
-          <p:cNvPr id="9" name="Text 7"/>
+          <p:cNvPr id="10" name="Text 8"/>
           <p:cNvSpPr/>
           <p:nvPr/>
         </p:nvSpPr>
         <p:spPr>
           <a:xfrm>
             <a:off x="640080" y="621792"/>
-            <a:ext cx="10881360" cy="566928"/>
+            <a:ext cx="10881360" cy="713232"/>
           </a:xfrm>
           <a:prstGeom prst="rect">
             <a:avLst/>
@@ -9506,7 +10118,7 @@
               <a:buNone/>
             </a:pPr>
             <a:r>
-              <a:rPr lang="en-US" sz="2700" b="1" dirty="0">
+              <a:rPr lang="en-US" sz="3400" b="1" dirty="0">
                 <a:solidFill>
                   <a:srgbClr val="003A63"/>
                 </a:solidFill>
@@ -9516,20 +10128,20 @@
               </a:rPr>
               <a:t>References and Resources</a:t>
             </a:r>
-            <a:endParaRPr lang="en-US" sz="2700" dirty="0"/>
-          </a:p>
-        </p:txBody>
-      </p:sp>
-      <p:sp>
-        <p:nvSpPr>
-          <p:cNvPr id="10" name="Text 8"/>
-          <p:cNvSpPr/>
-          <p:nvPr/>
-        </p:nvSpPr>
-        <p:spPr>
-          <a:xfrm>
-            <a:off x="868680" y="1417320"/>
-            <a:ext cx="6675120" cy="4434840"/>
+            <a:endParaRPr lang="en-US" sz="3400" dirty="0"/>
+          </a:p>
+        </p:txBody>
+      </p:sp>
+      <p:sp>
+        <p:nvSpPr>
+          <p:cNvPr id="11" name="Text 9"/>
+          <p:cNvSpPr/>
+          <p:nvPr/>
+        </p:nvSpPr>
+        <p:spPr>
+          <a:xfrm>
+            <a:off x="868680" y="1508760"/>
+            <a:ext cx="6537960" cy="4160520"/>
           </a:xfrm>
           <a:prstGeom prst="rect">
             <a:avLst/>
@@ -9544,7 +10156,7 @@
           <a:lstStyle/>
           <a:p>
             <a:r>
-              <a:rPr lang="en-US" sz="1700" dirty="0">
+              <a:rPr lang="en-US" sz="2100" dirty="0">
                 <a:solidFill>
                   <a:srgbClr val="17364A"/>
                 </a:solidFill>
@@ -9552,13 +10164,13 @@
                 <a:ea typeface="Aptos" pitchFamily="34" charset="-122"/>
                 <a:cs typeface="Aptos" pitchFamily="34" charset="-120"/>
               </a:rPr>
-              <a:t>NIST Artificial Intelligence Risk Management Framework (AI RMF 1.0): https://www.nist.gov/itl/ai-risk-management-framework</a:t>
-            </a:r>
-            <a:endParaRPr lang="en-US" sz="1700" dirty="0"/>
-          </a:p>
-          <a:p>
-            <a:r>
-              <a:rPr lang="en-US" sz="1700" dirty="0">
+              <a:t>NIST Artificial Intelligence Risk Management Framework (AI RMF 1.0):.</a:t>
+            </a:r>
+            <a:endParaRPr lang="en-US" sz="2100" dirty="0"/>
+          </a:p>
+          <a:p>
+            <a:r>
+              <a:rPr lang="en-US" sz="2100" dirty="0">
                 <a:solidFill>
                   <a:srgbClr val="17364A"/>
                 </a:solidFill>
@@ -9568,11 +10180,11 @@
               </a:rPr>
               <a:t>NIST Generative AI Profile:.</a:t>
             </a:r>
-            <a:endParaRPr lang="en-US" sz="1700" dirty="0"/>
-          </a:p>
-          <a:p>
-            <a:r>
-              <a:rPr lang="en-US" sz="1700" dirty="0">
+            <a:endParaRPr lang="en-US" sz="2100" dirty="0"/>
+          </a:p>
+          <a:p>
+            <a:r>
+              <a:rPr lang="en-US" sz="2100" dirty="0">
                 <a:solidFill>
                   <a:srgbClr val="17364A"/>
                 </a:solidFill>
@@ -9582,27 +10194,13 @@
               </a:rPr>
               <a:t>NIST Privacy Framework</a:t>
             </a:r>
-            <a:endParaRPr lang="en-US" sz="1700" dirty="0"/>
-          </a:p>
-          <a:p>
-            <a:r>
-              <a:rPr lang="en-US" sz="1700" dirty="0">
-                <a:solidFill>
-                  <a:srgbClr val="17364A"/>
-                </a:solidFill>
-                <a:latin typeface="Aptos" pitchFamily="34" charset="0"/>
-                <a:ea typeface="Aptos" pitchFamily="34" charset="-122"/>
-                <a:cs typeface="Aptos" pitchFamily="34" charset="-120"/>
-              </a:rPr>
-              <a:t>CDC Public Health Data Strategy and Data Modernization resources:.</a:t>
-            </a:r>
-            <a:endParaRPr lang="en-US" sz="1700" dirty="0"/>
-          </a:p>
-        </p:txBody>
-      </p:sp>
-      <p:sp>
-        <p:nvSpPr>
-          <p:cNvPr id="11" name="Shape 9"/>
+            <a:endParaRPr lang="en-US" sz="2100" dirty="0"/>
+          </a:p>
+        </p:txBody>
+      </p:sp>
+      <p:sp>
+        <p:nvSpPr>
+          <p:cNvPr id="12" name="Shape 10"/>
           <p:cNvSpPr/>
           <p:nvPr/>
         </p:nvSpPr>
@@ -9629,14 +10227,14 @@
       </p:sp>
       <p:sp>
         <p:nvSpPr>
-          <p:cNvPr id="12" name="Text 10"/>
+          <p:cNvPr id="13" name="Text 11"/>
           <p:cNvSpPr/>
           <p:nvPr/>
         </p:nvSpPr>
         <p:spPr>
           <a:xfrm>
             <a:off x="8074152" y="1563624"/>
-            <a:ext cx="2825496" cy="201168"/>
+            <a:ext cx="2825496" cy="256032"/>
           </a:xfrm>
           <a:prstGeom prst="rect">
             <a:avLst/>
@@ -9652,7 +10250,7 @@
               <a:buNone/>
             </a:pPr>
             <a:r>
-              <a:rPr lang="en-US" sz="950" b="1" dirty="0">
+              <a:rPr lang="en-US" sz="1300" b="1" dirty="0">
                 <a:solidFill>
                   <a:srgbClr val="0068B7"/>
                 </a:solidFill>
@@ -9662,20 +10260,20 @@
               </a:rPr>
               <a:t>Key idea</a:t>
             </a:r>
-            <a:endParaRPr lang="en-US" sz="950" dirty="0"/>
-          </a:p>
-        </p:txBody>
-      </p:sp>
-      <p:sp>
-        <p:nvSpPr>
-          <p:cNvPr id="13" name="Text 11"/>
-          <p:cNvSpPr/>
-          <p:nvPr/>
-        </p:nvSpPr>
-        <p:spPr>
-          <a:xfrm>
-            <a:off x="8074152" y="1856232"/>
-            <a:ext cx="2825496" cy="1261872"/>
+            <a:endParaRPr lang="en-US" sz="1300" dirty="0"/>
+          </a:p>
+        </p:txBody>
+      </p:sp>
+      <p:sp>
+        <p:nvSpPr>
+          <p:cNvPr id="14" name="Text 12"/>
+          <p:cNvSpPr/>
+          <p:nvPr/>
+        </p:nvSpPr>
+        <p:spPr>
+          <a:xfrm>
+            <a:off x="8074152" y="1920240"/>
+            <a:ext cx="2825496" cy="1188720"/>
           </a:xfrm>
           <a:prstGeom prst="rect">
             <a:avLst/>
@@ -9693,7 +10291,7 @@
               <a:buNone/>
             </a:pPr>
             <a:r>
-              <a:rPr lang="en-US" sz="1250" dirty="0">
+              <a:rPr lang="en-US" sz="1550" dirty="0">
                 <a:solidFill>
                   <a:srgbClr val="17364A"/>
                 </a:solidFill>
@@ -9701,15 +10299,15 @@
                 <a:ea typeface="Aptos" pitchFamily="34" charset="-122"/>
                 <a:cs typeface="Aptos" pitchFamily="34" charset="-120"/>
               </a:rPr>
-              <a:t>NIST Artificial Intelligence Risk Management Framework (AI RMF 1.0): https://www.nist.gov/itl/ai-risk-management-framework</a:t>
-            </a:r>
-            <a:endParaRPr lang="en-US" sz="1250" dirty="0"/>
-          </a:p>
-        </p:txBody>
-      </p:sp>
-      <p:sp>
-        <p:nvSpPr>
-          <p:cNvPr id="14" name="Shape 12"/>
+              <a:t>NIST Artificial Intelligence Risk Management Framework (AI RMF 1.0):.</a:t>
+            </a:r>
+            <a:endParaRPr lang="en-US" sz="1550" dirty="0"/>
+          </a:p>
+        </p:txBody>
+      </p:sp>
+      <p:sp>
+        <p:nvSpPr>
+          <p:cNvPr id="15" name="Shape 13"/>
           <p:cNvSpPr/>
           <p:nvPr/>
         </p:nvSpPr>
@@ -9736,14 +10334,14 @@
       </p:sp>
       <p:sp>
         <p:nvSpPr>
-          <p:cNvPr id="15" name="Text 13"/>
+          <p:cNvPr id="16" name="Text 14"/>
           <p:cNvSpPr/>
           <p:nvPr/>
         </p:nvSpPr>
         <p:spPr>
           <a:xfrm>
             <a:off x="8074152" y="3666744"/>
-            <a:ext cx="2825496" cy="201168"/>
+            <a:ext cx="2825496" cy="256032"/>
           </a:xfrm>
           <a:prstGeom prst="rect">
             <a:avLst/>
@@ -9759,7 +10357,7 @@
               <a:buNone/>
             </a:pPr>
             <a:r>
-              <a:rPr lang="en-US" sz="950" b="1" dirty="0">
+              <a:rPr lang="en-US" sz="1300" b="1" dirty="0">
                 <a:solidFill>
                   <a:srgbClr val="0068B7"/>
                 </a:solidFill>
@@ -9769,20 +10367,20 @@
               </a:rPr>
               <a:t>Use this for</a:t>
             </a:r>
-            <a:endParaRPr lang="en-US" sz="950" dirty="0"/>
-          </a:p>
-        </p:txBody>
-      </p:sp>
-      <p:sp>
-        <p:nvSpPr>
-          <p:cNvPr id="16" name="Text 14"/>
-          <p:cNvSpPr/>
-          <p:nvPr/>
-        </p:nvSpPr>
-        <p:spPr>
-          <a:xfrm>
-            <a:off x="8074152" y="3959352"/>
-            <a:ext cx="2825496" cy="1170432"/>
+            <a:endParaRPr lang="en-US" sz="1300" dirty="0"/>
+          </a:p>
+        </p:txBody>
+      </p:sp>
+      <p:sp>
+        <p:nvSpPr>
+          <p:cNvPr id="17" name="Text 15"/>
+          <p:cNvSpPr/>
+          <p:nvPr/>
+        </p:nvSpPr>
+        <p:spPr>
+          <a:xfrm>
+            <a:off x="8074152" y="4023360"/>
+            <a:ext cx="2825496" cy="1097280"/>
           </a:xfrm>
           <a:prstGeom prst="rect">
             <a:avLst/>
@@ -9800,7 +10398,7 @@
               <a:buNone/>
             </a:pPr>
             <a:r>
-              <a:rPr lang="en-US" sz="1250" dirty="0">
+              <a:rPr lang="en-US" sz="1550" dirty="0">
                 <a:solidFill>
                   <a:srgbClr val="17364A"/>
                 </a:solidFill>
@@ -9810,7 +10408,7 @@
               </a:rPr>
               <a:t>Connect the concept to public health decisions, safeguards, documentation, or implementation work.</a:t>
             </a:r>
-            <a:endParaRPr lang="en-US" sz="1250" dirty="0"/>
+            <a:endParaRPr lang="en-US" sz="1550" dirty="0"/>
           </a:p>
         </p:txBody>
       </p:sp>
@@ -10007,7 +10605,7 @@
                 <a:ea typeface="Aptos" pitchFamily="34" charset="-122"/>
                 <a:cs typeface="Aptos" pitchFamily="34" charset="-120"/>
               </a:rPr>
-              <a:t>© Paula Soper</a:t>
+              <a:t>Â© Paula Soper</a:t>
             </a:r>
             <a:endParaRPr lang="en-US" sz="800" dirty="0"/>
           </a:p>
@@ -10021,8 +10619,47 @@
         </p:nvSpPr>
         <p:spPr>
           <a:xfrm>
+            <a:off x="11137392" y="6510528"/>
+            <a:ext cx="411480" cy="201168"/>
+          </a:xfrm>
+          <a:prstGeom prst="rect">
+            <a:avLst/>
+          </a:prstGeom>
+          <a:noFill/>
+          <a:ln/>
+        </p:spPr>
+        <p:txBody>
+          <a:bodyPr wrap="square" lIns="0" tIns="0" rIns="0" bIns="0" rtlCol="0" anchor="ctr"/>
+          <a:lstStyle/>
+          <a:p>
+            <a:pPr algn="r" indent="0" marL="0">
+              <a:buNone/>
+            </a:pPr>
+            <a:r>
+              <a:rPr lang="en-US" sz="900" dirty="0">
+                <a:solidFill>
+                  <a:srgbClr val="5F7181"/>
+                </a:solidFill>
+                <a:latin typeface="Aptos" pitchFamily="34" charset="0"/>
+                <a:ea typeface="Aptos" pitchFamily="34" charset="-122"/>
+                <a:cs typeface="Aptos" pitchFamily="34" charset="-120"/>
+              </a:rPr>
+              <a:t>21</a:t>
+            </a:r>
+            <a:endParaRPr lang="en-US" sz="900" dirty="0"/>
+          </a:p>
+        </p:txBody>
+      </p:sp>
+      <p:sp>
+        <p:nvSpPr>
+          <p:cNvPr id="8" name="Text 6"/>
+          <p:cNvSpPr/>
+          <p:nvPr/>
+        </p:nvSpPr>
+        <p:spPr>
+          <a:xfrm>
             <a:off x="640080" y="658368"/>
-            <a:ext cx="10881360" cy="566928"/>
+            <a:ext cx="10881360" cy="713232"/>
           </a:xfrm>
           <a:prstGeom prst="rect">
             <a:avLst/>
@@ -10040,7 +10677,7 @@
               <a:buNone/>
             </a:pPr>
             <a:r>
-              <a:rPr lang="en-US" sz="2700" b="1" dirty="0">
+              <a:rPr lang="en-US" sz="3400" b="1" dirty="0">
                 <a:solidFill>
                   <a:srgbClr val="003A63"/>
                 </a:solidFill>
@@ -10050,20 +10687,20 @@
               </a:rPr>
               <a:t>References and Resources Continued</a:t>
             </a:r>
-            <a:endParaRPr lang="en-US" sz="2700" dirty="0"/>
-          </a:p>
-        </p:txBody>
-      </p:sp>
-      <p:sp>
-        <p:nvSpPr>
-          <p:cNvPr id="8" name="Text 6"/>
-          <p:cNvSpPr/>
-          <p:nvPr/>
-        </p:nvSpPr>
-        <p:spPr>
-          <a:xfrm>
-            <a:off x="868680" y="1417320"/>
-            <a:ext cx="6675120" cy="4434840"/>
+            <a:endParaRPr lang="en-US" sz="3400" dirty="0"/>
+          </a:p>
+        </p:txBody>
+      </p:sp>
+      <p:sp>
+        <p:nvSpPr>
+          <p:cNvPr id="9" name="Text 7"/>
+          <p:cNvSpPr/>
+          <p:nvPr/>
+        </p:nvSpPr>
+        <p:spPr>
+          <a:xfrm>
+            <a:off x="868680" y="1508760"/>
+            <a:ext cx="6537960" cy="4160520"/>
           </a:xfrm>
           <a:prstGeom prst="rect">
             <a:avLst/>
@@ -10078,7 +10715,7 @@
           <a:lstStyle/>
           <a:p>
             <a:r>
-              <a:rPr lang="en-US" sz="1700" dirty="0">
+              <a:rPr lang="en-US" sz="2100" dirty="0">
                 <a:solidFill>
                   <a:srgbClr val="17364A"/>
                 </a:solidFill>
@@ -10086,13 +10723,13 @@
                 <a:ea typeface="Aptos" pitchFamily="34" charset="-122"/>
                 <a:cs typeface="Aptos" pitchFamily="34" charset="-120"/>
               </a:rPr>
-              <a:t>OMB Memorandum M-24-10 on federal AI governance, risk management, and innovation, where relevant to public-sector governance.</a:t>
-            </a:r>
-            <a:endParaRPr lang="en-US" sz="1700" dirty="0"/>
-          </a:p>
-          <a:p>
-            <a:r>
-              <a:rPr lang="en-US" sz="1700" dirty="0">
+              <a:t>OMB Memorandum M-24-10 on federal AI governance, risk management, and innovation, where relevant to.</a:t>
+            </a:r>
+            <a:endParaRPr lang="en-US" sz="2100" dirty="0"/>
+          </a:p>
+          <a:p>
+            <a:r>
+              <a:rPr lang="en-US" sz="2100" dirty="0">
                 <a:solidFill>
                   <a:srgbClr val="17364A"/>
                 </a:solidFill>
@@ -10100,15 +10737,15 @@
                 <a:ea typeface="Aptos" pitchFamily="34" charset="-122"/>
                 <a:cs typeface="Aptos" pitchFamily="34" charset="-120"/>
               </a:rPr>
-              <a:t>Agency strategic plans, procurement policies, privacy policies, cybersecurity policies, records policies, and equity plans</a:t>
-            </a:r>
-            <a:endParaRPr lang="en-US" sz="1700" dirty="0"/>
-          </a:p>
-        </p:txBody>
-      </p:sp>
-      <p:sp>
-        <p:nvSpPr>
-          <p:cNvPr id="9" name="Shape 7"/>
+              <a:t>Agency strategic plans, procurement policies, privacy policies, cybersecurity policies, records.</a:t>
+            </a:r>
+            <a:endParaRPr lang="en-US" sz="2100" dirty="0"/>
+          </a:p>
+        </p:txBody>
+      </p:sp>
+      <p:sp>
+        <p:nvSpPr>
+          <p:cNvPr id="10" name="Shape 8"/>
           <p:cNvSpPr/>
           <p:nvPr/>
         </p:nvSpPr>
@@ -10135,14 +10772,14 @@
       </p:sp>
       <p:sp>
         <p:nvSpPr>
-          <p:cNvPr id="10" name="Text 8"/>
+          <p:cNvPr id="11" name="Text 9"/>
           <p:cNvSpPr/>
           <p:nvPr/>
         </p:nvSpPr>
         <p:spPr>
           <a:xfrm>
             <a:off x="8074152" y="1563624"/>
-            <a:ext cx="2825496" cy="201168"/>
+            <a:ext cx="2825496" cy="256032"/>
           </a:xfrm>
           <a:prstGeom prst="rect">
             <a:avLst/>
@@ -10158,7 +10795,7 @@
               <a:buNone/>
             </a:pPr>
             <a:r>
-              <a:rPr lang="en-US" sz="950" b="1" dirty="0">
+              <a:rPr lang="en-US" sz="1300" b="1" dirty="0">
                 <a:solidFill>
                   <a:srgbClr val="0068B7"/>
                 </a:solidFill>
@@ -10168,20 +10805,20 @@
               </a:rPr>
               <a:t>Key idea</a:t>
             </a:r>
-            <a:endParaRPr lang="en-US" sz="950" dirty="0"/>
-          </a:p>
-        </p:txBody>
-      </p:sp>
-      <p:sp>
-        <p:nvSpPr>
-          <p:cNvPr id="11" name="Text 9"/>
-          <p:cNvSpPr/>
-          <p:nvPr/>
-        </p:nvSpPr>
-        <p:spPr>
-          <a:xfrm>
-            <a:off x="8074152" y="1856232"/>
-            <a:ext cx="2825496" cy="1261872"/>
+            <a:endParaRPr lang="en-US" sz="1300" dirty="0"/>
+          </a:p>
+        </p:txBody>
+      </p:sp>
+      <p:sp>
+        <p:nvSpPr>
+          <p:cNvPr id="12" name="Text 10"/>
+          <p:cNvSpPr/>
+          <p:nvPr/>
+        </p:nvSpPr>
+        <p:spPr>
+          <a:xfrm>
+            <a:off x="8074152" y="1920240"/>
+            <a:ext cx="2825496" cy="1188720"/>
           </a:xfrm>
           <a:prstGeom prst="rect">
             <a:avLst/>
@@ -10199,7 +10836,7 @@
               <a:buNone/>
             </a:pPr>
             <a:r>
-              <a:rPr lang="en-US" sz="1250" dirty="0">
+              <a:rPr lang="en-US" sz="1550" dirty="0">
                 <a:solidFill>
                   <a:srgbClr val="17364A"/>
                 </a:solidFill>
@@ -10207,15 +10844,15 @@
                 <a:ea typeface="Aptos" pitchFamily="34" charset="-122"/>
                 <a:cs typeface="Aptos" pitchFamily="34" charset="-120"/>
               </a:rPr>
-              <a:t>OMB Memorandum M-24-10 on federal AI governance, risk management, and innovation, where relevant to public-sector governance.</a:t>
-            </a:r>
-            <a:endParaRPr lang="en-US" sz="1250" dirty="0"/>
-          </a:p>
-        </p:txBody>
-      </p:sp>
-      <p:sp>
-        <p:nvSpPr>
-          <p:cNvPr id="12" name="Shape 10"/>
+              <a:t>OMB Memorandum M-24-10 on federal AI governance, risk management, and innovation, where relevant to.</a:t>
+            </a:r>
+            <a:endParaRPr lang="en-US" sz="1550" dirty="0"/>
+          </a:p>
+        </p:txBody>
+      </p:sp>
+      <p:sp>
+        <p:nvSpPr>
+          <p:cNvPr id="13" name="Shape 11"/>
           <p:cNvSpPr/>
           <p:nvPr/>
         </p:nvSpPr>
@@ -10242,14 +10879,14 @@
       </p:sp>
       <p:sp>
         <p:nvSpPr>
-          <p:cNvPr id="13" name="Text 11"/>
+          <p:cNvPr id="14" name="Text 12"/>
           <p:cNvSpPr/>
           <p:nvPr/>
         </p:nvSpPr>
         <p:spPr>
           <a:xfrm>
             <a:off x="8074152" y="3666744"/>
-            <a:ext cx="2825496" cy="201168"/>
+            <a:ext cx="2825496" cy="256032"/>
           </a:xfrm>
           <a:prstGeom prst="rect">
             <a:avLst/>
@@ -10265,7 +10902,7 @@
               <a:buNone/>
             </a:pPr>
             <a:r>
-              <a:rPr lang="en-US" sz="950" b="1" dirty="0">
+              <a:rPr lang="en-US" sz="1300" b="1" dirty="0">
                 <a:solidFill>
                   <a:srgbClr val="0068B7"/>
                 </a:solidFill>
@@ -10275,20 +10912,20 @@
               </a:rPr>
               <a:t>Use this for</a:t>
             </a:r>
-            <a:endParaRPr lang="en-US" sz="950" dirty="0"/>
-          </a:p>
-        </p:txBody>
-      </p:sp>
-      <p:sp>
-        <p:nvSpPr>
-          <p:cNvPr id="14" name="Text 12"/>
-          <p:cNvSpPr/>
-          <p:nvPr/>
-        </p:nvSpPr>
-        <p:spPr>
-          <a:xfrm>
-            <a:off x="8074152" y="3959352"/>
-            <a:ext cx="2825496" cy="1170432"/>
+            <a:endParaRPr lang="en-US" sz="1300" dirty="0"/>
+          </a:p>
+        </p:txBody>
+      </p:sp>
+      <p:sp>
+        <p:nvSpPr>
+          <p:cNvPr id="15" name="Text 13"/>
+          <p:cNvSpPr/>
+          <p:nvPr/>
+        </p:nvSpPr>
+        <p:spPr>
+          <a:xfrm>
+            <a:off x="8074152" y="4023360"/>
+            <a:ext cx="2825496" cy="1097280"/>
           </a:xfrm>
           <a:prstGeom prst="rect">
             <a:avLst/>
@@ -10306,7 +10943,7 @@
               <a:buNone/>
             </a:pPr>
             <a:r>
-              <a:rPr lang="en-US" sz="1250" dirty="0">
+              <a:rPr lang="en-US" sz="1550" dirty="0">
                 <a:solidFill>
                   <a:srgbClr val="17364A"/>
                 </a:solidFill>
@@ -10316,7 +10953,7 @@
               </a:rPr>
               <a:t>Connect the concept to public health decisions, safeguards, documentation, or implementation work.</a:t>
             </a:r>
-            <a:endParaRPr lang="en-US" sz="1250" dirty="0"/>
+            <a:endParaRPr lang="en-US" sz="1550" dirty="0"/>
           </a:p>
         </p:txBody>
       </p:sp>
@@ -10513,7 +11150,7 @@
                 <a:ea typeface="Aptos" pitchFamily="34" charset="-122"/>
                 <a:cs typeface="Aptos" pitchFamily="34" charset="-120"/>
               </a:rPr>
-              <a:t>© Paula Soper</a:t>
+              <a:t>Â© Paula Soper</a:t>
             </a:r>
             <a:endParaRPr lang="en-US" sz="800" dirty="0"/>
           </a:p>
@@ -10527,8 +11164,47 @@
         </p:nvSpPr>
         <p:spPr>
           <a:xfrm>
+            <a:off x="11137392" y="6510528"/>
+            <a:ext cx="411480" cy="201168"/>
+          </a:xfrm>
+          <a:prstGeom prst="rect">
+            <a:avLst/>
+          </a:prstGeom>
+          <a:noFill/>
+          <a:ln/>
+        </p:spPr>
+        <p:txBody>
+          <a:bodyPr wrap="square" lIns="0" tIns="0" rIns="0" bIns="0" rtlCol="0" anchor="ctr"/>
+          <a:lstStyle/>
+          <a:p>
+            <a:pPr algn="r" indent="0" marL="0">
+              <a:buNone/>
+            </a:pPr>
+            <a:r>
+              <a:rPr lang="en-US" sz="900" dirty="0">
+                <a:solidFill>
+                  <a:srgbClr val="5F7181"/>
+                </a:solidFill>
+                <a:latin typeface="Aptos" pitchFamily="34" charset="0"/>
+                <a:ea typeface="Aptos" pitchFamily="34" charset="-122"/>
+                <a:cs typeface="Aptos" pitchFamily="34" charset="-120"/>
+              </a:rPr>
+              <a:t>3</a:t>
+            </a:r>
+            <a:endParaRPr lang="en-US" sz="900" dirty="0"/>
+          </a:p>
+        </p:txBody>
+      </p:sp>
+      <p:sp>
+        <p:nvSpPr>
+          <p:cNvPr id="8" name="Text 6"/>
+          <p:cNvSpPr/>
+          <p:nvPr/>
+        </p:nvSpPr>
+        <p:spPr>
+          <a:xfrm>
             <a:off x="640080" y="658368"/>
-            <a:ext cx="10881360" cy="566928"/>
+            <a:ext cx="10881360" cy="713232"/>
           </a:xfrm>
           <a:prstGeom prst="rect">
             <a:avLst/>
@@ -10546,7 +11222,7 @@
               <a:buNone/>
             </a:pPr>
             <a:r>
-              <a:rPr lang="en-US" sz="2700" b="1" dirty="0">
+              <a:rPr lang="en-US" sz="3400" b="1" dirty="0">
                 <a:solidFill>
                   <a:srgbClr val="003A63"/>
                 </a:solidFill>
@@ -10556,20 +11232,20 @@
               </a:rPr>
               <a:t>How this module connects to the playbook</a:t>
             </a:r>
-            <a:endParaRPr lang="en-US" sz="2700" dirty="0"/>
-          </a:p>
-        </p:txBody>
-      </p:sp>
-      <p:sp>
-        <p:nvSpPr>
-          <p:cNvPr id="8" name="Text 6"/>
-          <p:cNvSpPr/>
-          <p:nvPr/>
-        </p:nvSpPr>
-        <p:spPr>
-          <a:xfrm>
-            <a:off x="868680" y="1417320"/>
-            <a:ext cx="6903720" cy="4480560"/>
+            <a:endParaRPr lang="en-US" sz="3400" dirty="0"/>
+          </a:p>
+        </p:txBody>
+      </p:sp>
+      <p:sp>
+        <p:nvSpPr>
+          <p:cNvPr id="9" name="Text 7"/>
+          <p:cNvSpPr/>
+          <p:nvPr/>
+        </p:nvSpPr>
+        <p:spPr>
+          <a:xfrm>
+            <a:off x="868680" y="1508760"/>
+            <a:ext cx="6812280" cy="3977640"/>
           </a:xfrm>
           <a:prstGeom prst="rect">
             <a:avLst/>
@@ -10584,7 +11260,7 @@
           <a:lstStyle/>
           <a:p>
             <a:r>
-              <a:rPr lang="en-US" sz="1540" dirty="0">
+              <a:rPr lang="en-US" sz="1900" dirty="0">
                 <a:solidFill>
                   <a:srgbClr val="17364A"/>
                 </a:solidFill>
@@ -10592,13 +11268,13 @@
                 <a:ea typeface="Aptos" pitchFamily="34" charset="-122"/>
                 <a:cs typeface="Aptos" pitchFamily="34" charset="-120"/>
               </a:rPr>
-              <a:t>Play 11: Build and Deploy AI Solutions - This lesson informs Play 11 by helping learners connect the lesson topic to build and deploy.</a:t>
-            </a:r>
-            <a:endParaRPr lang="en-US" sz="1540" dirty="0"/>
-          </a:p>
-          <a:p>
-            <a:r>
-              <a:rPr lang="en-US" sz="1540" dirty="0">
+              <a:t>Play 11: Build and Deploy AI Solutions - This lesson informs Play 11 by helping learners connect the lesson.</a:t>
+            </a:r>
+            <a:endParaRPr lang="en-US" sz="1900" dirty="0"/>
+          </a:p>
+          <a:p>
+            <a:r>
+              <a:rPr lang="en-US" sz="1900" dirty="0">
                 <a:solidFill>
                   <a:srgbClr val="17364A"/>
                 </a:solidFill>
@@ -10606,13 +11282,13 @@
                 <a:ea typeface="Aptos" pitchFamily="34" charset="-122"/>
                 <a:cs typeface="Aptos" pitchFamily="34" charset="-120"/>
               </a:rPr>
-              <a:t>Play 8: Develop a Funding Strategy - This lesson informs Play 8 by helping learners connect the lesson topic to develop a funding.</a:t>
-            </a:r>
-            <a:endParaRPr lang="en-US" sz="1540" dirty="0"/>
-          </a:p>
-          <a:p>
-            <a:r>
-              <a:rPr lang="en-US" sz="1540" dirty="0">
+              <a:t>Play 8: Develop a Funding Strategy - This lesson informs Play 8 by helping learners connect the lesson topic.</a:t>
+            </a:r>
+            <a:endParaRPr lang="en-US" sz="1900" dirty="0"/>
+          </a:p>
+          <a:p>
+            <a:r>
+              <a:rPr lang="en-US" sz="1900" dirty="0">
                 <a:solidFill>
                   <a:srgbClr val="17364A"/>
                 </a:solidFill>
@@ -10620,13 +11296,13 @@
                 <a:ea typeface="Aptos" pitchFamily="34" charset="-122"/>
                 <a:cs typeface="Aptos" pitchFamily="34" charset="-120"/>
               </a:rPr>
-              <a:t>Play 3: Establish AI Governance - This lesson informs Play 3 by helping learners connect the lesson topic to establish ai governance.</a:t>
-            </a:r>
-            <a:endParaRPr lang="en-US" sz="1540" dirty="0"/>
-          </a:p>
-          <a:p>
-            <a:r>
-              <a:rPr lang="en-US" sz="1540" dirty="0">
+              <a:t>Play 3: Establish AI Governance - This lesson informs Play 3 by helping learners connect the lesson topic to.</a:t>
+            </a:r>
+            <a:endParaRPr lang="en-US" sz="1900" dirty="0"/>
+          </a:p>
+          <a:p>
+            <a:r>
+              <a:rPr lang="en-US" sz="1900" dirty="0">
                 <a:solidFill>
                   <a:srgbClr val="17364A"/>
                 </a:solidFill>
@@ -10634,15 +11310,15 @@
                 <a:ea typeface="Aptos" pitchFamily="34" charset="-122"/>
                 <a:cs typeface="Aptos" pitchFamily="34" charset="-120"/>
               </a:rPr>
-              <a:t>Play 1: Vision &amp; Guardrails - This lesson informs Play 1 by helping learners connect the lesson topic to vision &amp; guardrails work in.</a:t>
-            </a:r>
-            <a:endParaRPr lang="en-US" sz="1540" dirty="0"/>
-          </a:p>
-        </p:txBody>
-      </p:sp>
-      <p:sp>
-        <p:nvSpPr>
-          <p:cNvPr id="9" name="Shape 7"/>
+              <a:t>Play 1: Vision &amp; Guardrails - This lesson informs Play 1 by helping learners connect the lesson topic to.</a:t>
+            </a:r>
+            <a:endParaRPr lang="en-US" sz="1900" dirty="0"/>
+          </a:p>
+        </p:txBody>
+      </p:sp>
+      <p:sp>
+        <p:nvSpPr>
+          <p:cNvPr id="10" name="Shape 8"/>
           <p:cNvSpPr/>
           <p:nvPr/>
         </p:nvSpPr>
@@ -10669,14 +11345,14 @@
       </p:sp>
       <p:sp>
         <p:nvSpPr>
-          <p:cNvPr id="10" name="Text 8"/>
+          <p:cNvPr id="11" name="Text 9"/>
           <p:cNvSpPr/>
           <p:nvPr/>
         </p:nvSpPr>
         <p:spPr>
           <a:xfrm>
             <a:off x="8211312" y="1563624"/>
-            <a:ext cx="2734056" cy="201168"/>
+            <a:ext cx="2734056" cy="256032"/>
           </a:xfrm>
           <a:prstGeom prst="rect">
             <a:avLst/>
@@ -10692,7 +11368,7 @@
               <a:buNone/>
             </a:pPr>
             <a:r>
-              <a:rPr lang="en-US" sz="950" b="1" dirty="0">
+              <a:rPr lang="en-US" sz="1300" b="1" dirty="0">
                 <a:solidFill>
                   <a:srgbClr val="0068B7"/>
                 </a:solidFill>
@@ -10702,20 +11378,20 @@
               </a:rPr>
               <a:t>Apply the lesson</a:t>
             </a:r>
-            <a:endParaRPr lang="en-US" sz="950" dirty="0"/>
-          </a:p>
-        </p:txBody>
-      </p:sp>
-      <p:sp>
-        <p:nvSpPr>
-          <p:cNvPr id="11" name="Text 9"/>
-          <p:cNvSpPr/>
-          <p:nvPr/>
-        </p:nvSpPr>
-        <p:spPr>
-          <a:xfrm>
-            <a:off x="8211312" y="1856232"/>
-            <a:ext cx="2734056" cy="1536192"/>
+            <a:endParaRPr lang="en-US" sz="1300" dirty="0"/>
+          </a:p>
+        </p:txBody>
+      </p:sp>
+      <p:sp>
+        <p:nvSpPr>
+          <p:cNvPr id="12" name="Text 10"/>
+          <p:cNvSpPr/>
+          <p:nvPr/>
+        </p:nvSpPr>
+        <p:spPr>
+          <a:xfrm>
+            <a:off x="8211312" y="1920240"/>
+            <a:ext cx="2734056" cy="1463040"/>
           </a:xfrm>
           <a:prstGeom prst="rect">
             <a:avLst/>
@@ -10733,7 +11409,7 @@
               <a:buNone/>
             </a:pPr>
             <a:r>
-              <a:rPr lang="en-US" sz="1250" dirty="0">
+              <a:rPr lang="en-US" sz="1550" dirty="0">
                 <a:solidFill>
                   <a:srgbClr val="17364A"/>
                 </a:solidFill>
@@ -10743,32 +11419,32 @@
               </a:rPr>
               <a:t>Use the related plays to identify decisions, participants, timing, approvals, and documentation needed for responsible implementation.</a:t>
             </a:r>
-            <a:endParaRPr lang="en-US" sz="1250" dirty="0"/>
-          </a:p>
-        </p:txBody>
-      </p:sp>
-      <p:sp>
-        <p:nvSpPr>
-          <p:cNvPr id="12" name="Shape 10"/>
-          <p:cNvSpPr/>
-          <p:nvPr/>
-        </p:nvSpPr>
-        <p:spPr>
-          <a:xfrm>
-            <a:off x="8046720" y="3794760"/>
-            <a:ext cx="3063240" cy="1508760"/>
+            <a:endParaRPr lang="en-US" sz="1550" dirty="0"/>
+          </a:p>
+        </p:txBody>
+      </p:sp>
+      <p:sp>
+        <p:nvSpPr>
+          <p:cNvPr id="13" name="Shape 11"/>
+          <p:cNvSpPr/>
+          <p:nvPr/>
+        </p:nvSpPr>
+        <p:spPr>
+          <a:xfrm>
+            <a:off x="7818120" y="3977640"/>
+            <a:ext cx="972312" cy="749808"/>
           </a:xfrm>
           <a:prstGeom prst="roundRect">
             <a:avLst>
-              <a:gd name="adj" fmla="val 7273"/>
+              <a:gd name="adj" fmla="val 14634"/>
             </a:avLst>
           </a:prstGeom>
           <a:solidFill>
-            <a:srgbClr val="FFF4D9"/>
+            <a:srgbClr val="0068B7"/>
           </a:solidFill>
           <a:ln w="12700">
             <a:solidFill>
-              <a:srgbClr val="B9D7E6"/>
+              <a:srgbClr val="0068B7"/>
             </a:solidFill>
             <a:prstDash val="solid"/>
           </a:ln>
@@ -10776,81 +11452,256 @@
       </p:sp>
       <p:sp>
         <p:nvSpPr>
-          <p:cNvPr id="13" name="Text 11"/>
-          <p:cNvSpPr/>
-          <p:nvPr/>
-        </p:nvSpPr>
-        <p:spPr>
-          <a:xfrm>
-            <a:off x="8211312" y="3941064"/>
-            <a:ext cx="2734056" cy="201168"/>
-          </a:xfrm>
-          <a:prstGeom prst="rect">
-            <a:avLst/>
-          </a:prstGeom>
-          <a:noFill/>
-          <a:ln/>
-        </p:spPr>
-        <p:txBody>
-          <a:bodyPr wrap="square" lIns="0" tIns="0" rIns="0" bIns="0" rtlCol="0" anchor="ctr"/>
-          <a:lstStyle/>
-          <a:p>
-            <a:pPr indent="0" marL="0">
-              <a:buNone/>
-            </a:pPr>
-            <a:r>
-              <a:rPr lang="en-US" sz="950" b="1" dirty="0">
-                <a:solidFill>
-                  <a:srgbClr val="0068B7"/>
-                </a:solidFill>
-                <a:latin typeface="Aptos" pitchFamily="34" charset="0"/>
-                <a:ea typeface="Aptos" pitchFamily="34" charset="-122"/>
-                <a:cs typeface="Aptos" pitchFamily="34" charset="-120"/>
-              </a:rPr>
-              <a:t>Keep in mind</a:t>
-            </a:r>
-            <a:endParaRPr lang="en-US" sz="950" dirty="0"/>
-          </a:p>
-        </p:txBody>
-      </p:sp>
-      <p:sp>
-        <p:nvSpPr>
           <p:cNvPr id="14" name="Text 12"/>
           <p:cNvSpPr/>
           <p:nvPr/>
         </p:nvSpPr>
         <p:spPr>
           <a:xfrm>
-            <a:off x="8211312" y="4233672"/>
-            <a:ext cx="2734056" cy="941832"/>
-          </a:xfrm>
-          <a:prstGeom prst="rect">
-            <a:avLst/>
-          </a:prstGeom>
-          <a:noFill/>
-          <a:ln/>
-        </p:spPr>
-        <p:txBody>
-          <a:bodyPr wrap="square" lIns="0" tIns="0" rIns="0" bIns="0" rtlCol="0" anchor="t">
+            <a:off x="7891272" y="4169664"/>
+            <a:ext cx="826008" cy="310896"/>
+          </a:xfrm>
+          <a:prstGeom prst="rect">
+            <a:avLst/>
+          </a:prstGeom>
+          <a:noFill/>
+          <a:ln/>
+        </p:spPr>
+        <p:txBody>
+          <a:bodyPr wrap="square" lIns="0" tIns="0" rIns="0" bIns="0" rtlCol="0" anchor="ctr">
             <a:normAutofit/>
           </a:bodyPr>
           <a:lstStyle/>
           <a:p>
-            <a:pPr indent="0" marL="0">
-              <a:buNone/>
-            </a:pPr>
-            <a:r>
-              <a:rPr lang="en-US" sz="1250" dirty="0">
-                <a:solidFill>
-                  <a:srgbClr val="17364A"/>
-                </a:solidFill>
-                <a:latin typeface="Aptos" pitchFamily="34" charset="0"/>
-                <a:ea typeface="Aptos" pitchFamily="34" charset="-122"/>
-                <a:cs typeface="Aptos" pitchFamily="34" charset="-120"/>
-              </a:rPr>
-              <a:t>The playbook connection helps turn training into agency work, not just individual knowledge.</a:t>
-            </a:r>
-            <a:endParaRPr lang="en-US" sz="1250" dirty="0"/>
+            <a:pPr algn="ctr" indent="0" marL="0">
+              <a:buNone/>
+            </a:pPr>
+            <a:r>
+              <a:rPr lang="en-US" sz="1500" b="1" dirty="0">
+                <a:solidFill>
+                  <a:srgbClr val="FFFFFF"/>
+                </a:solidFill>
+                <a:latin typeface="Aptos" pitchFamily="34" charset="0"/>
+                <a:ea typeface="Aptos" pitchFamily="34" charset="-122"/>
+                <a:cs typeface="Aptos" pitchFamily="34" charset="-120"/>
+              </a:rPr>
+              <a:t>Lesson</a:t>
+            </a:r>
+            <a:endParaRPr lang="en-US" sz="1500" dirty="0"/>
+          </a:p>
+        </p:txBody>
+      </p:sp>
+      <p:sp>
+        <p:nvSpPr>
+          <p:cNvPr id="15" name="Text 13"/>
+          <p:cNvSpPr/>
+          <p:nvPr/>
+        </p:nvSpPr>
+        <p:spPr>
+          <a:xfrm>
+            <a:off x="8817864" y="4187952"/>
+            <a:ext cx="201168" cy="256032"/>
+          </a:xfrm>
+          <a:prstGeom prst="rect">
+            <a:avLst/>
+          </a:prstGeom>
+          <a:noFill/>
+          <a:ln/>
+        </p:spPr>
+        <p:txBody>
+          <a:bodyPr wrap="square" lIns="0" tIns="0" rIns="0" bIns="0" rtlCol="0" anchor="ctr"/>
+          <a:lstStyle/>
+          <a:p>
+            <a:pPr algn="ctr" indent="0" marL="0">
+              <a:buNone/>
+            </a:pPr>
+            <a:r>
+              <a:rPr lang="en-US" sz="1800" b="1" dirty="0">
+                <a:solidFill>
+                  <a:srgbClr val="0068B7"/>
+                </a:solidFill>
+                <a:latin typeface="Aptos" pitchFamily="34" charset="0"/>
+                <a:ea typeface="Aptos" pitchFamily="34" charset="-122"/>
+                <a:cs typeface="Aptos" pitchFamily="34" charset="-120"/>
+              </a:rPr>
+              <a:t>â†’</a:t>
+            </a:r>
+            <a:endParaRPr lang="en-US" sz="1800" dirty="0"/>
+          </a:p>
+        </p:txBody>
+      </p:sp>
+      <p:sp>
+        <p:nvSpPr>
+          <p:cNvPr id="16" name="Shape 14"/>
+          <p:cNvSpPr/>
+          <p:nvPr/>
+        </p:nvSpPr>
+        <p:spPr>
+          <a:xfrm>
+            <a:off x="9046464" y="3977640"/>
+            <a:ext cx="972312" cy="749808"/>
+          </a:xfrm>
+          <a:prstGeom prst="roundRect">
+            <a:avLst>
+              <a:gd name="adj" fmla="val 14634"/>
+            </a:avLst>
+          </a:prstGeom>
+          <a:solidFill>
+            <a:srgbClr val="2F8A28"/>
+          </a:solidFill>
+          <a:ln w="12700">
+            <a:solidFill>
+              <a:srgbClr val="2F8A28"/>
+            </a:solidFill>
+            <a:prstDash val="solid"/>
+          </a:ln>
+        </p:spPr>
+      </p:sp>
+      <p:sp>
+        <p:nvSpPr>
+          <p:cNvPr id="17" name="Text 15"/>
+          <p:cNvSpPr/>
+          <p:nvPr/>
+        </p:nvSpPr>
+        <p:spPr>
+          <a:xfrm>
+            <a:off x="9119616" y="4169664"/>
+            <a:ext cx="826008" cy="310896"/>
+          </a:xfrm>
+          <a:prstGeom prst="rect">
+            <a:avLst/>
+          </a:prstGeom>
+          <a:noFill/>
+          <a:ln/>
+        </p:spPr>
+        <p:txBody>
+          <a:bodyPr wrap="square" lIns="0" tIns="0" rIns="0" bIns="0" rtlCol="0" anchor="ctr">
+            <a:normAutofit/>
+          </a:bodyPr>
+          <a:lstStyle/>
+          <a:p>
+            <a:pPr algn="ctr" indent="0" marL="0">
+              <a:buNone/>
+            </a:pPr>
+            <a:r>
+              <a:rPr lang="en-US" sz="1500" b="1" dirty="0">
+                <a:solidFill>
+                  <a:srgbClr val="FFFFFF"/>
+                </a:solidFill>
+                <a:latin typeface="Aptos" pitchFamily="34" charset="0"/>
+                <a:ea typeface="Aptos" pitchFamily="34" charset="-122"/>
+                <a:cs typeface="Aptos" pitchFamily="34" charset="-120"/>
+              </a:rPr>
+              <a:t>Plays</a:t>
+            </a:r>
+            <a:endParaRPr lang="en-US" sz="1500" dirty="0"/>
+          </a:p>
+        </p:txBody>
+      </p:sp>
+      <p:sp>
+        <p:nvSpPr>
+          <p:cNvPr id="18" name="Text 16"/>
+          <p:cNvSpPr/>
+          <p:nvPr/>
+        </p:nvSpPr>
+        <p:spPr>
+          <a:xfrm>
+            <a:off x="10046208" y="4187952"/>
+            <a:ext cx="201168" cy="256032"/>
+          </a:xfrm>
+          <a:prstGeom prst="rect">
+            <a:avLst/>
+          </a:prstGeom>
+          <a:noFill/>
+          <a:ln/>
+        </p:spPr>
+        <p:txBody>
+          <a:bodyPr wrap="square" lIns="0" tIns="0" rIns="0" bIns="0" rtlCol="0" anchor="ctr"/>
+          <a:lstStyle/>
+          <a:p>
+            <a:pPr algn="ctr" indent="0" marL="0">
+              <a:buNone/>
+            </a:pPr>
+            <a:r>
+              <a:rPr lang="en-US" sz="1800" b="1" dirty="0">
+                <a:solidFill>
+                  <a:srgbClr val="0068B7"/>
+                </a:solidFill>
+                <a:latin typeface="Aptos" pitchFamily="34" charset="0"/>
+                <a:ea typeface="Aptos" pitchFamily="34" charset="-122"/>
+                <a:cs typeface="Aptos" pitchFamily="34" charset="-120"/>
+              </a:rPr>
+              <a:t>â†’</a:t>
+            </a:r>
+            <a:endParaRPr lang="en-US" sz="1800" dirty="0"/>
+          </a:p>
+        </p:txBody>
+      </p:sp>
+      <p:sp>
+        <p:nvSpPr>
+          <p:cNvPr id="19" name="Shape 17"/>
+          <p:cNvSpPr/>
+          <p:nvPr/>
+        </p:nvSpPr>
+        <p:spPr>
+          <a:xfrm>
+            <a:off x="10274808" y="3977640"/>
+            <a:ext cx="972312" cy="749808"/>
+          </a:xfrm>
+          <a:prstGeom prst="roundRect">
+            <a:avLst>
+              <a:gd name="adj" fmla="val 14634"/>
+            </a:avLst>
+          </a:prstGeom>
+          <a:solidFill>
+            <a:srgbClr val="6A4CA3"/>
+          </a:solidFill>
+          <a:ln w="12700">
+            <a:solidFill>
+              <a:srgbClr val="6A4CA3"/>
+            </a:solidFill>
+            <a:prstDash val="solid"/>
+          </a:ln>
+        </p:spPr>
+      </p:sp>
+      <p:sp>
+        <p:nvSpPr>
+          <p:cNvPr id="20" name="Text 18"/>
+          <p:cNvSpPr/>
+          <p:nvPr/>
+        </p:nvSpPr>
+        <p:spPr>
+          <a:xfrm>
+            <a:off x="10347960" y="4169664"/>
+            <a:ext cx="826008" cy="310896"/>
+          </a:xfrm>
+          <a:prstGeom prst="rect">
+            <a:avLst/>
+          </a:prstGeom>
+          <a:noFill/>
+          <a:ln/>
+        </p:spPr>
+        <p:txBody>
+          <a:bodyPr wrap="square" lIns="0" tIns="0" rIns="0" bIns="0" rtlCol="0" anchor="ctr">
+            <a:normAutofit/>
+          </a:bodyPr>
+          <a:lstStyle/>
+          <a:p>
+            <a:pPr algn="ctr" indent="0" marL="0">
+              <a:buNone/>
+            </a:pPr>
+            <a:r>
+              <a:rPr lang="en-US" sz="1500" b="1" dirty="0">
+                <a:solidFill>
+                  <a:srgbClr val="FFFFFF"/>
+                </a:solidFill>
+                <a:latin typeface="Aptos" pitchFamily="34" charset="0"/>
+                <a:ea typeface="Aptos" pitchFamily="34" charset="-122"/>
+                <a:cs typeface="Aptos" pitchFamily="34" charset="-120"/>
+              </a:rPr>
+              <a:t>Action</a:t>
+            </a:r>
+            <a:endParaRPr lang="en-US" sz="1500" dirty="0"/>
           </a:p>
         </p:txBody>
       </p:sp>
@@ -11047,7 +11898,7 @@
                 <a:ea typeface="Aptos" pitchFamily="34" charset="-122"/>
                 <a:cs typeface="Aptos" pitchFamily="34" charset="-120"/>
               </a:rPr>
-              <a:t>© Paula Soper</a:t>
+              <a:t>Â© Paula Soper</a:t>
             </a:r>
             <a:endParaRPr lang="en-US" sz="800" dirty="0"/>
           </a:p>
@@ -11061,8 +11912,47 @@
         </p:nvSpPr>
         <p:spPr>
           <a:xfrm>
+            <a:off x="11137392" y="6510528"/>
+            <a:ext cx="411480" cy="201168"/>
+          </a:xfrm>
+          <a:prstGeom prst="rect">
+            <a:avLst/>
+          </a:prstGeom>
+          <a:noFill/>
+          <a:ln/>
+        </p:spPr>
+        <p:txBody>
+          <a:bodyPr wrap="square" lIns="0" tIns="0" rIns="0" bIns="0" rtlCol="0" anchor="ctr"/>
+          <a:lstStyle/>
+          <a:p>
+            <a:pPr algn="r" indent="0" marL="0">
+              <a:buNone/>
+            </a:pPr>
+            <a:r>
+              <a:rPr lang="en-US" sz="900" dirty="0">
+                <a:solidFill>
+                  <a:srgbClr val="5F7181"/>
+                </a:solidFill>
+                <a:latin typeface="Aptos" pitchFamily="34" charset="0"/>
+                <a:ea typeface="Aptos" pitchFamily="34" charset="-122"/>
+                <a:cs typeface="Aptos" pitchFamily="34" charset="-120"/>
+              </a:rPr>
+              <a:t>4</a:t>
+            </a:r>
+            <a:endParaRPr lang="en-US" sz="900" dirty="0"/>
+          </a:p>
+        </p:txBody>
+      </p:sp>
+      <p:sp>
+        <p:nvSpPr>
+          <p:cNvPr id="8" name="Text 6"/>
+          <p:cNvSpPr/>
+          <p:nvPr/>
+        </p:nvSpPr>
+        <p:spPr>
+          <a:xfrm>
             <a:off x="640080" y="658368"/>
-            <a:ext cx="10881360" cy="566928"/>
+            <a:ext cx="10881360" cy="713232"/>
           </a:xfrm>
           <a:prstGeom prst="rect">
             <a:avLst/>
@@ -11080,7 +11970,7 @@
               <a:buNone/>
             </a:pPr>
             <a:r>
-              <a:rPr lang="en-US" sz="2700" b="1" dirty="0">
+              <a:rPr lang="en-US" sz="3400" b="1" dirty="0">
                 <a:solidFill>
                   <a:srgbClr val="003A63"/>
                 </a:solidFill>
@@ -11090,20 +11980,20 @@
               </a:rPr>
               <a:t>Related toolkit resources</a:t>
             </a:r>
-            <a:endParaRPr lang="en-US" sz="2700" dirty="0"/>
-          </a:p>
-        </p:txBody>
-      </p:sp>
-      <p:sp>
-        <p:nvSpPr>
-          <p:cNvPr id="8" name="Text 6"/>
-          <p:cNvSpPr/>
-          <p:nvPr/>
-        </p:nvSpPr>
-        <p:spPr>
-          <a:xfrm>
-            <a:off x="868680" y="1417320"/>
-            <a:ext cx="6903720" cy="4480560"/>
+            <a:endParaRPr lang="en-US" sz="3400" dirty="0"/>
+          </a:p>
+        </p:txBody>
+      </p:sp>
+      <p:sp>
+        <p:nvSpPr>
+          <p:cNvPr id="9" name="Text 7"/>
+          <p:cNvSpPr/>
+          <p:nvPr/>
+        </p:nvSpPr>
+        <p:spPr>
+          <a:xfrm>
+            <a:off x="868680" y="1508760"/>
+            <a:ext cx="6812280" cy="3977640"/>
           </a:xfrm>
           <a:prstGeom prst="rect">
             <a:avLst/>
@@ -11118,7 +12008,7 @@
           <a:lstStyle/>
           <a:p>
             <a:r>
-              <a:rPr lang="en-US" sz="1460" dirty="0">
+              <a:rPr lang="en-US" sz="1850" dirty="0">
                 <a:solidFill>
                   <a:srgbClr val="17364A"/>
                 </a:solidFill>
@@ -11126,13 +12016,13 @@
                 <a:ea typeface="Aptos" pitchFamily="34" charset="-122"/>
                 <a:cs typeface="Aptos" pitchFamily="34" charset="-120"/>
               </a:rPr>
-              <a:t>Tool 33: Funding Strategy Checklists (Checklist) - Use this tool to complete or strengthen the practical exercise for the module.</a:t>
-            </a:r>
-            <a:endParaRPr lang="en-US" sz="1460" dirty="0"/>
-          </a:p>
-          <a:p>
-            <a:r>
-              <a:rPr lang="en-US" sz="1460" dirty="0">
+              <a:t>Tool 33: Funding Strategy Checklists (Checklist) - Use this tool to complete or strengthen the practical.</a:t>
+            </a:r>
+            <a:endParaRPr lang="en-US" sz="1850" dirty="0"/>
+          </a:p>
+          <a:p>
+            <a:r>
+              <a:rPr lang="en-US" sz="1850" dirty="0">
                 <a:solidFill>
                   <a:srgbClr val="17364A"/>
                 </a:solidFill>
@@ -11140,13 +12030,13 @@
                 <a:ea typeface="Aptos" pitchFamily="34" charset="-122"/>
                 <a:cs typeface="Aptos" pitchFamily="34" charset="-120"/>
               </a:rPr>
-              <a:t>Tool 35: AI Total Cost of Ownership and Sustainability Worksheet (Worksheet) - Use this tool to complete or strengthen the practical.</a:t>
-            </a:r>
-            <a:endParaRPr lang="en-US" sz="1460" dirty="0"/>
-          </a:p>
-          <a:p>
-            <a:r>
-              <a:rPr lang="en-US" sz="1460" dirty="0">
+              <a:t>Tool 35: AI Total Cost of Ownership and Sustainability Worksheet (Worksheet) - Use this tool to complete or.</a:t>
+            </a:r>
+            <a:endParaRPr lang="en-US" sz="1850" dirty="0"/>
+          </a:p>
+          <a:p>
+            <a:r>
+              <a:rPr lang="en-US" sz="1850" dirty="0">
                 <a:solidFill>
                   <a:srgbClr val="17364A"/>
                 </a:solidFill>
@@ -11154,13 +12044,13 @@
                 <a:ea typeface="Aptos" pitchFamily="34" charset="-122"/>
                 <a:cs typeface="Aptos" pitchFamily="34" charset="-120"/>
               </a:rPr>
-              <a:t>Tool 32: Vendor Evaluation Checklist (Checklist) - Use this tool to complete or strengthen the practical exercise for the module.</a:t>
-            </a:r>
-            <a:endParaRPr lang="en-US" sz="1460" dirty="0"/>
-          </a:p>
-          <a:p>
-            <a:r>
-              <a:rPr lang="en-US" sz="1460" dirty="0">
+              <a:t>Tool 32: Vendor Evaluation Checklist (Checklist) - Use this tool to complete or strengthen the practical.</a:t>
+            </a:r>
+            <a:endParaRPr lang="en-US" sz="1850" dirty="0"/>
+          </a:p>
+          <a:p>
+            <a:r>
+              <a:rPr lang="en-US" sz="1850" dirty="0">
                 <a:solidFill>
                   <a:srgbClr val="17364A"/>
                 </a:solidFill>
@@ -11168,29 +12058,15 @@
                 <a:ea typeface="Aptos" pitchFamily="34" charset="-122"/>
                 <a:cs typeface="Aptos" pitchFamily="34" charset="-120"/>
               </a:rPr>
-              <a:t>Tool 34: STLT AI Procurement and Vendor Addendum (Checklist) - Use this tool to complete or strengthen the practical exercise for the.</a:t>
-            </a:r>
-            <a:endParaRPr lang="en-US" sz="1460" dirty="0"/>
-          </a:p>
-          <a:p>
-            <a:r>
-              <a:rPr lang="en-US" sz="1460" dirty="0">
-                <a:solidFill>
-                  <a:srgbClr val="17364A"/>
-                </a:solidFill>
-                <a:latin typeface="Aptos" pitchFamily="34" charset="0"/>
-                <a:ea typeface="Aptos" pitchFamily="34" charset="-122"/>
-                <a:cs typeface="Aptos" pitchFamily="34" charset="-120"/>
-              </a:rPr>
-              <a:t>Tool 3: Equity Impact Assessment Checklist (Checklist) - Use this tool to complete or strengthen the practical exercise for the.</a:t>
-            </a:r>
-            <a:endParaRPr lang="en-US" sz="1460" dirty="0"/>
-          </a:p>
-        </p:txBody>
-      </p:sp>
-      <p:sp>
-        <p:nvSpPr>
-          <p:cNvPr id="9" name="Shape 7"/>
+              <a:t>Tool 34: STLT AI Procurement and Vendor Addendum (Checklist) - Use this tool to complete or strengthen the.</a:t>
+            </a:r>
+            <a:endParaRPr lang="en-US" sz="1850" dirty="0"/>
+          </a:p>
+        </p:txBody>
+      </p:sp>
+      <p:sp>
+        <p:nvSpPr>
+          <p:cNvPr id="10" name="Shape 8"/>
           <p:cNvSpPr/>
           <p:nvPr/>
         </p:nvSpPr>
@@ -11217,14 +12093,14 @@
       </p:sp>
       <p:sp>
         <p:nvSpPr>
-          <p:cNvPr id="10" name="Text 8"/>
+          <p:cNvPr id="11" name="Text 9"/>
           <p:cNvSpPr/>
           <p:nvPr/>
         </p:nvSpPr>
         <p:spPr>
           <a:xfrm>
             <a:off x="8211312" y="1563624"/>
-            <a:ext cx="2734056" cy="201168"/>
+            <a:ext cx="2734056" cy="256032"/>
           </a:xfrm>
           <a:prstGeom prst="rect">
             <a:avLst/>
@@ -11240,7 +12116,7 @@
               <a:buNone/>
             </a:pPr>
             <a:r>
-              <a:rPr lang="en-US" sz="950" b="1" dirty="0">
+              <a:rPr lang="en-US" sz="1300" b="1" dirty="0">
                 <a:solidFill>
                   <a:srgbClr val="0068B7"/>
                 </a:solidFill>
@@ -11250,20 +12126,20 @@
               </a:rPr>
               <a:t>Use the tools</a:t>
             </a:r>
-            <a:endParaRPr lang="en-US" sz="950" dirty="0"/>
-          </a:p>
-        </p:txBody>
-      </p:sp>
-      <p:sp>
-        <p:nvSpPr>
-          <p:cNvPr id="11" name="Text 9"/>
-          <p:cNvSpPr/>
-          <p:nvPr/>
-        </p:nvSpPr>
-        <p:spPr>
-          <a:xfrm>
-            <a:off x="8211312" y="1856232"/>
-            <a:ext cx="2734056" cy="1536192"/>
+            <a:endParaRPr lang="en-US" sz="1300" dirty="0"/>
+          </a:p>
+        </p:txBody>
+      </p:sp>
+      <p:sp>
+        <p:nvSpPr>
+          <p:cNvPr id="12" name="Text 10"/>
+          <p:cNvSpPr/>
+          <p:nvPr/>
+        </p:nvSpPr>
+        <p:spPr>
+          <a:xfrm>
+            <a:off x="8211312" y="1920240"/>
+            <a:ext cx="2734056" cy="1463040"/>
           </a:xfrm>
           <a:prstGeom prst="rect">
             <a:avLst/>
@@ -11281,7 +12157,7 @@
               <a:buNone/>
             </a:pPr>
             <a:r>
-              <a:rPr lang="en-US" sz="1250" dirty="0">
+              <a:rPr lang="en-US" sz="1550" dirty="0">
                 <a:solidFill>
                   <a:srgbClr val="17364A"/>
                 </a:solidFill>
@@ -11291,32 +12167,32 @@
               </a:rPr>
               <a:t>Use linked tools when your department needs a structured worksheet, template, checklist, review process, or documentation artifact.</a:t>
             </a:r>
-            <a:endParaRPr lang="en-US" sz="1250" dirty="0"/>
-          </a:p>
-        </p:txBody>
-      </p:sp>
-      <p:sp>
-        <p:nvSpPr>
-          <p:cNvPr id="12" name="Shape 10"/>
-          <p:cNvSpPr/>
-          <p:nvPr/>
-        </p:nvSpPr>
-        <p:spPr>
-          <a:xfrm>
-            <a:off x="8046720" y="3794760"/>
-            <a:ext cx="3063240" cy="1508760"/>
+            <a:endParaRPr lang="en-US" sz="1550" dirty="0"/>
+          </a:p>
+        </p:txBody>
+      </p:sp>
+      <p:sp>
+        <p:nvSpPr>
+          <p:cNvPr id="13" name="Shape 11"/>
+          <p:cNvSpPr/>
+          <p:nvPr/>
+        </p:nvSpPr>
+        <p:spPr>
+          <a:xfrm>
+            <a:off x="7818120" y="3977640"/>
+            <a:ext cx="972312" cy="749808"/>
           </a:xfrm>
           <a:prstGeom prst="roundRect">
             <a:avLst>
-              <a:gd name="adj" fmla="val 7273"/>
+              <a:gd name="adj" fmla="val 14634"/>
             </a:avLst>
           </a:prstGeom>
           <a:solidFill>
-            <a:srgbClr val="EEF8ED"/>
+            <a:srgbClr val="0068B7"/>
           </a:solidFill>
           <a:ln w="12700">
             <a:solidFill>
-              <a:srgbClr val="B9D7E6"/>
+              <a:srgbClr val="0068B7"/>
             </a:solidFill>
             <a:prstDash val="solid"/>
           </a:ln>
@@ -11324,81 +12200,256 @@
       </p:sp>
       <p:sp>
         <p:nvSpPr>
-          <p:cNvPr id="13" name="Text 11"/>
-          <p:cNvSpPr/>
-          <p:nvPr/>
-        </p:nvSpPr>
-        <p:spPr>
-          <a:xfrm>
-            <a:off x="8211312" y="3941064"/>
-            <a:ext cx="2734056" cy="201168"/>
-          </a:xfrm>
-          <a:prstGeom prst="rect">
-            <a:avLst/>
-          </a:prstGeom>
-          <a:noFill/>
-          <a:ln/>
-        </p:spPr>
-        <p:txBody>
-          <a:bodyPr wrap="square" lIns="0" tIns="0" rIns="0" bIns="0" rtlCol="0" anchor="ctr"/>
-          <a:lstStyle/>
-          <a:p>
-            <a:pPr indent="0" marL="0">
-              <a:buNone/>
-            </a:pPr>
-            <a:r>
-              <a:rPr lang="en-US" sz="950" b="1" dirty="0">
-                <a:solidFill>
-                  <a:srgbClr val="0068B7"/>
-                </a:solidFill>
-                <a:latin typeface="Aptos" pitchFamily="34" charset="0"/>
-                <a:ea typeface="Aptos" pitchFamily="34" charset="-122"/>
-                <a:cs typeface="Aptos" pitchFamily="34" charset="-120"/>
-              </a:rPr>
-              <a:t>Avoid duplication</a:t>
-            </a:r>
-            <a:endParaRPr lang="en-US" sz="950" dirty="0"/>
-          </a:p>
-        </p:txBody>
-      </p:sp>
-      <p:sp>
-        <p:nvSpPr>
           <p:cNvPr id="14" name="Text 12"/>
           <p:cNvSpPr/>
           <p:nvPr/>
         </p:nvSpPr>
         <p:spPr>
           <a:xfrm>
-            <a:off x="8211312" y="4233672"/>
-            <a:ext cx="2734056" cy="941832"/>
-          </a:xfrm>
-          <a:prstGeom prst="rect">
-            <a:avLst/>
-          </a:prstGeom>
-          <a:noFill/>
-          <a:ln/>
-        </p:spPr>
-        <p:txBody>
-          <a:bodyPr wrap="square" lIns="0" tIns="0" rIns="0" bIns="0" rtlCol="0" anchor="t">
+            <a:off x="7891272" y="4169664"/>
+            <a:ext cx="826008" cy="310896"/>
+          </a:xfrm>
+          <a:prstGeom prst="rect">
+            <a:avLst/>
+          </a:prstGeom>
+          <a:noFill/>
+          <a:ln/>
+        </p:spPr>
+        <p:txBody>
+          <a:bodyPr wrap="square" lIns="0" tIns="0" rIns="0" bIns="0" rtlCol="0" anchor="ctr">
             <a:normAutofit/>
           </a:bodyPr>
           <a:lstStyle/>
           <a:p>
-            <a:pPr indent="0" marL="0">
-              <a:buNone/>
-            </a:pPr>
-            <a:r>
-              <a:rPr lang="en-US" sz="1250" dirty="0">
-                <a:solidFill>
-                  <a:srgbClr val="17364A"/>
-                </a:solidFill>
-                <a:latin typeface="Aptos" pitchFamily="34" charset="0"/>
-                <a:ea typeface="Aptos" pitchFamily="34" charset="-122"/>
-                <a:cs typeface="Aptos" pitchFamily="34" charset="-120"/>
-              </a:rPr>
-              <a:t>If your department already has a strong equivalent tool, adapt or use the existing process instead of recreating it.</a:t>
-            </a:r>
-            <a:endParaRPr lang="en-US" sz="1250" dirty="0"/>
+            <a:pPr algn="ctr" indent="0" marL="0">
+              <a:buNone/>
+            </a:pPr>
+            <a:r>
+              <a:rPr lang="en-US" sz="1500" b="1" dirty="0">
+                <a:solidFill>
+                  <a:srgbClr val="FFFFFF"/>
+                </a:solidFill>
+                <a:latin typeface="Aptos" pitchFamily="34" charset="0"/>
+                <a:ea typeface="Aptos" pitchFamily="34" charset="-122"/>
+                <a:cs typeface="Aptos" pitchFamily="34" charset="-120"/>
+              </a:rPr>
+              <a:t>Concept</a:t>
+            </a:r>
+            <a:endParaRPr lang="en-US" sz="1500" dirty="0"/>
+          </a:p>
+        </p:txBody>
+      </p:sp>
+      <p:sp>
+        <p:nvSpPr>
+          <p:cNvPr id="15" name="Text 13"/>
+          <p:cNvSpPr/>
+          <p:nvPr/>
+        </p:nvSpPr>
+        <p:spPr>
+          <a:xfrm>
+            <a:off x="8817864" y="4187952"/>
+            <a:ext cx="201168" cy="256032"/>
+          </a:xfrm>
+          <a:prstGeom prst="rect">
+            <a:avLst/>
+          </a:prstGeom>
+          <a:noFill/>
+          <a:ln/>
+        </p:spPr>
+        <p:txBody>
+          <a:bodyPr wrap="square" lIns="0" tIns="0" rIns="0" bIns="0" rtlCol="0" anchor="ctr"/>
+          <a:lstStyle/>
+          <a:p>
+            <a:pPr algn="ctr" indent="0" marL="0">
+              <a:buNone/>
+            </a:pPr>
+            <a:r>
+              <a:rPr lang="en-US" sz="1800" b="1" dirty="0">
+                <a:solidFill>
+                  <a:srgbClr val="0068B7"/>
+                </a:solidFill>
+                <a:latin typeface="Aptos" pitchFamily="34" charset="0"/>
+                <a:ea typeface="Aptos" pitchFamily="34" charset="-122"/>
+                <a:cs typeface="Aptos" pitchFamily="34" charset="-120"/>
+              </a:rPr>
+              <a:t>â†’</a:t>
+            </a:r>
+            <a:endParaRPr lang="en-US" sz="1800" dirty="0"/>
+          </a:p>
+        </p:txBody>
+      </p:sp>
+      <p:sp>
+        <p:nvSpPr>
+          <p:cNvPr id="16" name="Shape 14"/>
+          <p:cNvSpPr/>
+          <p:nvPr/>
+        </p:nvSpPr>
+        <p:spPr>
+          <a:xfrm>
+            <a:off x="9046464" y="3977640"/>
+            <a:ext cx="972312" cy="749808"/>
+          </a:xfrm>
+          <a:prstGeom prst="roundRect">
+            <a:avLst>
+              <a:gd name="adj" fmla="val 14634"/>
+            </a:avLst>
+          </a:prstGeom>
+          <a:solidFill>
+            <a:srgbClr val="2F8A28"/>
+          </a:solidFill>
+          <a:ln w="12700">
+            <a:solidFill>
+              <a:srgbClr val="2F8A28"/>
+            </a:solidFill>
+            <a:prstDash val="solid"/>
+          </a:ln>
+        </p:spPr>
+      </p:sp>
+      <p:sp>
+        <p:nvSpPr>
+          <p:cNvPr id="17" name="Text 15"/>
+          <p:cNvSpPr/>
+          <p:nvPr/>
+        </p:nvSpPr>
+        <p:spPr>
+          <a:xfrm>
+            <a:off x="9119616" y="4169664"/>
+            <a:ext cx="826008" cy="310896"/>
+          </a:xfrm>
+          <a:prstGeom prst="rect">
+            <a:avLst/>
+          </a:prstGeom>
+          <a:noFill/>
+          <a:ln/>
+        </p:spPr>
+        <p:txBody>
+          <a:bodyPr wrap="square" lIns="0" tIns="0" rIns="0" bIns="0" rtlCol="0" anchor="ctr">
+            <a:normAutofit/>
+          </a:bodyPr>
+          <a:lstStyle/>
+          <a:p>
+            <a:pPr algn="ctr" indent="0" marL="0">
+              <a:buNone/>
+            </a:pPr>
+            <a:r>
+              <a:rPr lang="en-US" sz="1500" b="1" dirty="0">
+                <a:solidFill>
+                  <a:srgbClr val="FFFFFF"/>
+                </a:solidFill>
+                <a:latin typeface="Aptos" pitchFamily="34" charset="0"/>
+                <a:ea typeface="Aptos" pitchFamily="34" charset="-122"/>
+                <a:cs typeface="Aptos" pitchFamily="34" charset="-120"/>
+              </a:rPr>
+              <a:t>Tool</a:t>
+            </a:r>
+            <a:endParaRPr lang="en-US" sz="1500" dirty="0"/>
+          </a:p>
+        </p:txBody>
+      </p:sp>
+      <p:sp>
+        <p:nvSpPr>
+          <p:cNvPr id="18" name="Text 16"/>
+          <p:cNvSpPr/>
+          <p:nvPr/>
+        </p:nvSpPr>
+        <p:spPr>
+          <a:xfrm>
+            <a:off x="10046208" y="4187952"/>
+            <a:ext cx="201168" cy="256032"/>
+          </a:xfrm>
+          <a:prstGeom prst="rect">
+            <a:avLst/>
+          </a:prstGeom>
+          <a:noFill/>
+          <a:ln/>
+        </p:spPr>
+        <p:txBody>
+          <a:bodyPr wrap="square" lIns="0" tIns="0" rIns="0" bIns="0" rtlCol="0" anchor="ctr"/>
+          <a:lstStyle/>
+          <a:p>
+            <a:pPr algn="ctr" indent="0" marL="0">
+              <a:buNone/>
+            </a:pPr>
+            <a:r>
+              <a:rPr lang="en-US" sz="1800" b="1" dirty="0">
+                <a:solidFill>
+                  <a:srgbClr val="0068B7"/>
+                </a:solidFill>
+                <a:latin typeface="Aptos" pitchFamily="34" charset="0"/>
+                <a:ea typeface="Aptos" pitchFamily="34" charset="-122"/>
+                <a:cs typeface="Aptos" pitchFamily="34" charset="-120"/>
+              </a:rPr>
+              <a:t>â†’</a:t>
+            </a:r>
+            <a:endParaRPr lang="en-US" sz="1800" dirty="0"/>
+          </a:p>
+        </p:txBody>
+      </p:sp>
+      <p:sp>
+        <p:nvSpPr>
+          <p:cNvPr id="19" name="Shape 17"/>
+          <p:cNvSpPr/>
+          <p:nvPr/>
+        </p:nvSpPr>
+        <p:spPr>
+          <a:xfrm>
+            <a:off x="10274808" y="3977640"/>
+            <a:ext cx="972312" cy="749808"/>
+          </a:xfrm>
+          <a:prstGeom prst="roundRect">
+            <a:avLst>
+              <a:gd name="adj" fmla="val 14634"/>
+            </a:avLst>
+          </a:prstGeom>
+          <a:solidFill>
+            <a:srgbClr val="D69A2D"/>
+          </a:solidFill>
+          <a:ln w="12700">
+            <a:solidFill>
+              <a:srgbClr val="D69A2D"/>
+            </a:solidFill>
+            <a:prstDash val="solid"/>
+          </a:ln>
+        </p:spPr>
+      </p:sp>
+      <p:sp>
+        <p:nvSpPr>
+          <p:cNvPr id="20" name="Text 18"/>
+          <p:cNvSpPr/>
+          <p:nvPr/>
+        </p:nvSpPr>
+        <p:spPr>
+          <a:xfrm>
+            <a:off x="10347960" y="4169664"/>
+            <a:ext cx="826008" cy="310896"/>
+          </a:xfrm>
+          <a:prstGeom prst="rect">
+            <a:avLst/>
+          </a:prstGeom>
+          <a:noFill/>
+          <a:ln/>
+        </p:spPr>
+        <p:txBody>
+          <a:bodyPr wrap="square" lIns="0" tIns="0" rIns="0" bIns="0" rtlCol="0" anchor="ctr">
+            <a:normAutofit/>
+          </a:bodyPr>
+          <a:lstStyle/>
+          <a:p>
+            <a:pPr algn="ctr" indent="0" marL="0">
+              <a:buNone/>
+            </a:pPr>
+            <a:r>
+              <a:rPr lang="en-US" sz="1500" b="1" dirty="0">
+                <a:solidFill>
+                  <a:srgbClr val="FFFFFF"/>
+                </a:solidFill>
+                <a:latin typeface="Aptos" pitchFamily="34" charset="0"/>
+                <a:ea typeface="Aptos" pitchFamily="34" charset="-122"/>
+                <a:cs typeface="Aptos" pitchFamily="34" charset="-120"/>
+              </a:rPr>
+              <a:t>Artifact</a:t>
+            </a:r>
+            <a:endParaRPr lang="en-US" sz="1500" dirty="0"/>
           </a:p>
         </p:txBody>
       </p:sp>
@@ -11595,7 +12646,7 @@
                 <a:ea typeface="Aptos" pitchFamily="34" charset="-122"/>
                 <a:cs typeface="Aptos" pitchFamily="34" charset="-120"/>
               </a:rPr>
-              <a:t>© Paula Soper</a:t>
+              <a:t>Â© Paula Soper</a:t>
             </a:r>
             <a:endParaRPr lang="en-US" sz="800" dirty="0"/>
           </a:p>
@@ -11603,7 +12654,46 @@
       </p:sp>
       <p:sp>
         <p:nvSpPr>
-          <p:cNvPr id="7" name="Shape 5"/>
+          <p:cNvPr id="7" name="Text 5"/>
+          <p:cNvSpPr/>
+          <p:nvPr/>
+        </p:nvSpPr>
+        <p:spPr>
+          <a:xfrm>
+            <a:off x="11137392" y="6510528"/>
+            <a:ext cx="411480" cy="201168"/>
+          </a:xfrm>
+          <a:prstGeom prst="rect">
+            <a:avLst/>
+          </a:prstGeom>
+          <a:noFill/>
+          <a:ln/>
+        </p:spPr>
+        <p:txBody>
+          <a:bodyPr wrap="square" lIns="0" tIns="0" rIns="0" bIns="0" rtlCol="0" anchor="ctr"/>
+          <a:lstStyle/>
+          <a:p>
+            <a:pPr algn="r" indent="0" marL="0">
+              <a:buNone/>
+            </a:pPr>
+            <a:r>
+              <a:rPr lang="en-US" sz="900" dirty="0">
+                <a:solidFill>
+                  <a:srgbClr val="5F7181"/>
+                </a:solidFill>
+                <a:latin typeface="Aptos" pitchFamily="34" charset="0"/>
+                <a:ea typeface="Aptos" pitchFamily="34" charset="-122"/>
+                <a:cs typeface="Aptos" pitchFamily="34" charset="-120"/>
+              </a:rPr>
+              <a:t>5</a:t>
+            </a:r>
+            <a:endParaRPr lang="en-US" sz="900" dirty="0"/>
+          </a:p>
+        </p:txBody>
+      </p:sp>
+      <p:sp>
+        <p:nvSpPr>
+          <p:cNvPr id="8" name="Shape 6"/>
           <p:cNvSpPr/>
           <p:nvPr/>
         </p:nvSpPr>
@@ -11628,7 +12718,7 @@
       </p:sp>
       <p:sp>
         <p:nvSpPr>
-          <p:cNvPr id="8" name="Text 6"/>
+          <p:cNvPr id="9" name="Text 7"/>
           <p:cNvSpPr/>
           <p:nvPr/>
         </p:nvSpPr>
@@ -11667,14 +12757,14 @@
       </p:sp>
       <p:sp>
         <p:nvSpPr>
-          <p:cNvPr id="9" name="Text 7"/>
+          <p:cNvPr id="10" name="Text 8"/>
           <p:cNvSpPr/>
           <p:nvPr/>
         </p:nvSpPr>
         <p:spPr>
           <a:xfrm>
             <a:off x="640080" y="621792"/>
-            <a:ext cx="10881360" cy="566928"/>
+            <a:ext cx="10881360" cy="713232"/>
           </a:xfrm>
           <a:prstGeom prst="rect">
             <a:avLst/>
@@ -11692,7 +12782,7 @@
               <a:buNone/>
             </a:pPr>
             <a:r>
-              <a:rPr lang="en-US" sz="2700" b="1" dirty="0">
+              <a:rPr lang="en-US" sz="3400" b="1" dirty="0">
                 <a:solidFill>
                   <a:srgbClr val="003A63"/>
                 </a:solidFill>
@@ -11702,20 +12792,20 @@
               </a:rPr>
               <a:t>Learning Objectives</a:t>
             </a:r>
-            <a:endParaRPr lang="en-US" sz="2700" dirty="0"/>
-          </a:p>
-        </p:txBody>
-      </p:sp>
-      <p:sp>
-        <p:nvSpPr>
-          <p:cNvPr id="10" name="Text 8"/>
-          <p:cNvSpPr/>
-          <p:nvPr/>
-        </p:nvSpPr>
-        <p:spPr>
-          <a:xfrm>
-            <a:off x="868680" y="1417320"/>
-            <a:ext cx="6675120" cy="4434840"/>
+            <a:endParaRPr lang="en-US" sz="3400" dirty="0"/>
+          </a:p>
+        </p:txBody>
+      </p:sp>
+      <p:sp>
+        <p:nvSpPr>
+          <p:cNvPr id="11" name="Text 9"/>
+          <p:cNvSpPr/>
+          <p:nvPr/>
+        </p:nvSpPr>
+        <p:spPr>
+          <a:xfrm>
+            <a:off x="868680" y="1508760"/>
+            <a:ext cx="6537960" cy="4160520"/>
           </a:xfrm>
           <a:prstGeom prst="rect">
             <a:avLst/>
@@ -11730,7 +12820,7 @@
           <a:lstStyle/>
           <a:p>
             <a:r>
-              <a:rPr lang="en-US" sz="1700" dirty="0">
+              <a:rPr lang="en-US" sz="2100" dirty="0">
                 <a:solidFill>
                   <a:srgbClr val="17364A"/>
                 </a:solidFill>
@@ -11740,11 +12830,11 @@
               </a:rPr>
               <a:t>Explain why AI sustainability must be planned before launch.</a:t>
             </a:r>
-            <a:endParaRPr lang="en-US" sz="1700" dirty="0"/>
-          </a:p>
-          <a:p>
-            <a:r>
-              <a:rPr lang="en-US" sz="1700" dirty="0">
+            <a:endParaRPr lang="en-US" sz="2100" dirty="0"/>
+          </a:p>
+          <a:p>
+            <a:r>
+              <a:rPr lang="en-US" sz="2100" dirty="0">
                 <a:solidFill>
                   <a:srgbClr val="17364A"/>
                 </a:solidFill>
@@ -11754,11 +12844,11 @@
               </a:rPr>
               <a:t>Identify lifecycle costs and responsibilities for AI tools and workflows.</a:t>
             </a:r>
-            <a:endParaRPr lang="en-US" sz="1700" dirty="0"/>
-          </a:p>
-          <a:p>
-            <a:r>
-              <a:rPr lang="en-US" sz="1700" dirty="0">
+            <a:endParaRPr lang="en-US" sz="2100" dirty="0"/>
+          </a:p>
+          <a:p>
+            <a:r>
+              <a:rPr lang="en-US" sz="2100" dirty="0">
                 <a:solidFill>
                   <a:srgbClr val="17364A"/>
                 </a:solidFill>
@@ -11768,27 +12858,13 @@
               </a:rPr>
               <a:t>Develop sustainability criteria for moving from pilot to operational use.</a:t>
             </a:r>
-            <a:endParaRPr lang="en-US" sz="1700" dirty="0"/>
-          </a:p>
-          <a:p>
-            <a:r>
-              <a:rPr lang="en-US" sz="1700" dirty="0">
-                <a:solidFill>
-                  <a:srgbClr val="17364A"/>
-                </a:solidFill>
-                <a:latin typeface="Aptos" pitchFamily="34" charset="0"/>
-                <a:ea typeface="Aptos" pitchFamily="34" charset="-122"/>
-                <a:cs typeface="Aptos" pitchFamily="34" charset="-120"/>
-              </a:rPr>
-              <a:t>Define sunset, pause, and retirement criteria for AI use cases.</a:t>
-            </a:r>
-            <a:endParaRPr lang="en-US" sz="1700" dirty="0"/>
-          </a:p>
-        </p:txBody>
-      </p:sp>
-      <p:sp>
-        <p:nvSpPr>
-          <p:cNvPr id="11" name="Shape 9"/>
+            <a:endParaRPr lang="en-US" sz="2100" dirty="0"/>
+          </a:p>
+        </p:txBody>
+      </p:sp>
+      <p:sp>
+        <p:nvSpPr>
+          <p:cNvPr id="12" name="Shape 10"/>
           <p:cNvSpPr/>
           <p:nvPr/>
         </p:nvSpPr>
@@ -11815,14 +12891,14 @@
       </p:sp>
       <p:sp>
         <p:nvSpPr>
-          <p:cNvPr id="12" name="Text 10"/>
+          <p:cNvPr id="13" name="Text 11"/>
           <p:cNvSpPr/>
           <p:nvPr/>
         </p:nvSpPr>
         <p:spPr>
           <a:xfrm>
             <a:off x="8074152" y="1563624"/>
-            <a:ext cx="2825496" cy="201168"/>
+            <a:ext cx="2825496" cy="256032"/>
           </a:xfrm>
           <a:prstGeom prst="rect">
             <a:avLst/>
@@ -11838,7 +12914,7 @@
               <a:buNone/>
             </a:pPr>
             <a:r>
-              <a:rPr lang="en-US" sz="950" b="1" dirty="0">
+              <a:rPr lang="en-US" sz="1300" b="1" dirty="0">
                 <a:solidFill>
                   <a:srgbClr val="0068B7"/>
                 </a:solidFill>
@@ -11848,20 +12924,20 @@
               </a:rPr>
               <a:t>Key idea</a:t>
             </a:r>
-            <a:endParaRPr lang="en-US" sz="950" dirty="0"/>
-          </a:p>
-        </p:txBody>
-      </p:sp>
-      <p:sp>
-        <p:nvSpPr>
-          <p:cNvPr id="13" name="Text 11"/>
-          <p:cNvSpPr/>
-          <p:nvPr/>
-        </p:nvSpPr>
-        <p:spPr>
-          <a:xfrm>
-            <a:off x="8074152" y="1856232"/>
-            <a:ext cx="2825496" cy="1261872"/>
+            <a:endParaRPr lang="en-US" sz="1300" dirty="0"/>
+          </a:p>
+        </p:txBody>
+      </p:sp>
+      <p:sp>
+        <p:nvSpPr>
+          <p:cNvPr id="14" name="Text 12"/>
+          <p:cNvSpPr/>
+          <p:nvPr/>
+        </p:nvSpPr>
+        <p:spPr>
+          <a:xfrm>
+            <a:off x="8074152" y="1920240"/>
+            <a:ext cx="2825496" cy="1188720"/>
           </a:xfrm>
           <a:prstGeom prst="rect">
             <a:avLst/>
@@ -11879,7 +12955,7 @@
               <a:buNone/>
             </a:pPr>
             <a:r>
-              <a:rPr lang="en-US" sz="1250" dirty="0">
+              <a:rPr lang="en-US" sz="1550" dirty="0">
                 <a:solidFill>
                   <a:srgbClr val="17364A"/>
                 </a:solidFill>
@@ -11889,13 +12965,13 @@
               </a:rPr>
               <a:t>Explain why AI sustainability must be planned before launch.</a:t>
             </a:r>
-            <a:endParaRPr lang="en-US" sz="1250" dirty="0"/>
-          </a:p>
-        </p:txBody>
-      </p:sp>
-      <p:sp>
-        <p:nvSpPr>
-          <p:cNvPr id="14" name="Shape 12"/>
+            <a:endParaRPr lang="en-US" sz="1550" dirty="0"/>
+          </a:p>
+        </p:txBody>
+      </p:sp>
+      <p:sp>
+        <p:nvSpPr>
+          <p:cNvPr id="15" name="Shape 13"/>
           <p:cNvSpPr/>
           <p:nvPr/>
         </p:nvSpPr>
@@ -11922,14 +12998,14 @@
       </p:sp>
       <p:sp>
         <p:nvSpPr>
-          <p:cNvPr id="15" name="Text 13"/>
+          <p:cNvPr id="16" name="Text 14"/>
           <p:cNvSpPr/>
           <p:nvPr/>
         </p:nvSpPr>
         <p:spPr>
           <a:xfrm>
             <a:off x="8074152" y="3666744"/>
-            <a:ext cx="2825496" cy="201168"/>
+            <a:ext cx="2825496" cy="256032"/>
           </a:xfrm>
           <a:prstGeom prst="rect">
             <a:avLst/>
@@ -11945,7 +13021,7 @@
               <a:buNone/>
             </a:pPr>
             <a:r>
-              <a:rPr lang="en-US" sz="950" b="1" dirty="0">
+              <a:rPr lang="en-US" sz="1300" b="1" dirty="0">
                 <a:solidFill>
                   <a:srgbClr val="0068B7"/>
                 </a:solidFill>
@@ -11955,20 +13031,20 @@
               </a:rPr>
               <a:t>Use this for</a:t>
             </a:r>
-            <a:endParaRPr lang="en-US" sz="950" dirty="0"/>
-          </a:p>
-        </p:txBody>
-      </p:sp>
-      <p:sp>
-        <p:nvSpPr>
-          <p:cNvPr id="16" name="Text 14"/>
-          <p:cNvSpPr/>
-          <p:nvPr/>
-        </p:nvSpPr>
-        <p:spPr>
-          <a:xfrm>
-            <a:off x="8074152" y="3959352"/>
-            <a:ext cx="2825496" cy="1170432"/>
+            <a:endParaRPr lang="en-US" sz="1300" dirty="0"/>
+          </a:p>
+        </p:txBody>
+      </p:sp>
+      <p:sp>
+        <p:nvSpPr>
+          <p:cNvPr id="17" name="Text 15"/>
+          <p:cNvSpPr/>
+          <p:nvPr/>
+        </p:nvSpPr>
+        <p:spPr>
+          <a:xfrm>
+            <a:off x="8074152" y="4023360"/>
+            <a:ext cx="2825496" cy="1097280"/>
           </a:xfrm>
           <a:prstGeom prst="rect">
             <a:avLst/>
@@ -11986,7 +13062,7 @@
               <a:buNone/>
             </a:pPr>
             <a:r>
-              <a:rPr lang="en-US" sz="1250" dirty="0">
+              <a:rPr lang="en-US" sz="1550" dirty="0">
                 <a:solidFill>
                   <a:srgbClr val="17364A"/>
                 </a:solidFill>
@@ -11996,7 +13072,7 @@
               </a:rPr>
               <a:t>Connect the concept to public health decisions, safeguards, documentation, or implementation work.</a:t>
             </a:r>
-            <a:endParaRPr lang="en-US" sz="1250" dirty="0"/>
+            <a:endParaRPr lang="en-US" sz="1550" dirty="0"/>
           </a:p>
         </p:txBody>
       </p:sp>
@@ -12193,7 +13269,7 @@
                 <a:ea typeface="Aptos" pitchFamily="34" charset="-122"/>
                 <a:cs typeface="Aptos" pitchFamily="34" charset="-120"/>
               </a:rPr>
-              <a:t>© Paula Soper</a:t>
+              <a:t>Â© Paula Soper</a:t>
             </a:r>
             <a:endParaRPr lang="en-US" sz="800" dirty="0"/>
           </a:p>
@@ -12201,7 +13277,46 @@
       </p:sp>
       <p:sp>
         <p:nvSpPr>
-          <p:cNvPr id="7" name="Shape 5"/>
+          <p:cNvPr id="7" name="Text 5"/>
+          <p:cNvSpPr/>
+          <p:nvPr/>
+        </p:nvSpPr>
+        <p:spPr>
+          <a:xfrm>
+            <a:off x="11137392" y="6510528"/>
+            <a:ext cx="411480" cy="201168"/>
+          </a:xfrm>
+          <a:prstGeom prst="rect">
+            <a:avLst/>
+          </a:prstGeom>
+          <a:noFill/>
+          <a:ln/>
+        </p:spPr>
+        <p:txBody>
+          <a:bodyPr wrap="square" lIns="0" tIns="0" rIns="0" bIns="0" rtlCol="0" anchor="ctr"/>
+          <a:lstStyle/>
+          <a:p>
+            <a:pPr algn="r" indent="0" marL="0">
+              <a:buNone/>
+            </a:pPr>
+            <a:r>
+              <a:rPr lang="en-US" sz="900" dirty="0">
+                <a:solidFill>
+                  <a:srgbClr val="5F7181"/>
+                </a:solidFill>
+                <a:latin typeface="Aptos" pitchFamily="34" charset="0"/>
+                <a:ea typeface="Aptos" pitchFamily="34" charset="-122"/>
+                <a:cs typeface="Aptos" pitchFamily="34" charset="-120"/>
+              </a:rPr>
+              <a:t>6</a:t>
+            </a:r>
+            <a:endParaRPr lang="en-US" sz="900" dirty="0"/>
+          </a:p>
+        </p:txBody>
+      </p:sp>
+      <p:sp>
+        <p:nvSpPr>
+          <p:cNvPr id="8" name="Shape 6"/>
           <p:cNvSpPr/>
           <p:nvPr/>
         </p:nvSpPr>
@@ -12226,7 +13341,7 @@
       </p:sp>
       <p:sp>
         <p:nvSpPr>
-          <p:cNvPr id="8" name="Text 6"/>
+          <p:cNvPr id="9" name="Text 7"/>
           <p:cNvSpPr/>
           <p:nvPr/>
         </p:nvSpPr>
@@ -12265,14 +13380,14 @@
       </p:sp>
       <p:sp>
         <p:nvSpPr>
-          <p:cNvPr id="9" name="Text 7"/>
+          <p:cNvPr id="10" name="Text 8"/>
           <p:cNvSpPr/>
           <p:nvPr/>
         </p:nvSpPr>
         <p:spPr>
           <a:xfrm>
             <a:off x="640080" y="621792"/>
-            <a:ext cx="10881360" cy="566928"/>
+            <a:ext cx="10881360" cy="713232"/>
           </a:xfrm>
           <a:prstGeom prst="rect">
             <a:avLst/>
@@ -12290,7 +13405,7 @@
               <a:buNone/>
             </a:pPr>
             <a:r>
-              <a:rPr lang="en-US" sz="2700" b="1" dirty="0">
+              <a:rPr lang="en-US" sz="3400" b="1" dirty="0">
                 <a:solidFill>
                   <a:srgbClr val="003A63"/>
                 </a:solidFill>
@@ -12300,20 +13415,20 @@
               </a:rPr>
               <a:t>Module Overview</a:t>
             </a:r>
-            <a:endParaRPr lang="en-US" sz="2700" dirty="0"/>
-          </a:p>
-        </p:txBody>
-      </p:sp>
-      <p:sp>
-        <p:nvSpPr>
-          <p:cNvPr id="10" name="Text 8"/>
-          <p:cNvSpPr/>
-          <p:nvPr/>
-        </p:nvSpPr>
-        <p:spPr>
-          <a:xfrm>
-            <a:off x="868680" y="1417320"/>
-            <a:ext cx="6675120" cy="4434840"/>
+            <a:endParaRPr lang="en-US" sz="3400" dirty="0"/>
+          </a:p>
+        </p:txBody>
+      </p:sp>
+      <p:sp>
+        <p:nvSpPr>
+          <p:cNvPr id="11" name="Text 9"/>
+          <p:cNvSpPr/>
+          <p:nvPr/>
+        </p:nvSpPr>
+        <p:spPr>
+          <a:xfrm>
+            <a:off x="868680" y="1508760"/>
+            <a:ext cx="6537960" cy="4160520"/>
           </a:xfrm>
           <a:prstGeom prst="rect">
             <a:avLst/>
@@ -12328,7 +13443,7 @@
           <a:lstStyle/>
           <a:p>
             <a:r>
-              <a:rPr lang="en-US" sz="1700" dirty="0">
+              <a:rPr lang="en-US" sz="2100" dirty="0">
                 <a:solidFill>
                   <a:srgbClr val="17364A"/>
                 </a:solidFill>
@@ -12338,11 +13453,11 @@
               </a:rPr>
               <a:t>Responsible AI does not end at launch.</a:t>
             </a:r>
-            <a:endParaRPr lang="en-US" sz="1700" dirty="0"/>
-          </a:p>
-          <a:p>
-            <a:r>
-              <a:rPr lang="en-US" sz="1700" dirty="0">
+            <a:endParaRPr lang="en-US" sz="2100" dirty="0"/>
+          </a:p>
+          <a:p>
+            <a:r>
+              <a:rPr lang="en-US" sz="2100" dirty="0">
                 <a:solidFill>
                   <a:srgbClr val="17364A"/>
                 </a:solidFill>
@@ -12350,13 +13465,13 @@
                 <a:ea typeface="Aptos" pitchFamily="34" charset="-122"/>
                 <a:cs typeface="Aptos" pitchFamily="34" charset="-120"/>
               </a:rPr>
-              <a:t>AI tools require ongoing funding, staff time, monitoring, updates, vendor management, training, incident response,.</a:t>
-            </a:r>
-            <a:endParaRPr lang="en-US" sz="1700" dirty="0"/>
-          </a:p>
-          <a:p>
-            <a:r>
-              <a:rPr lang="en-US" sz="1700" dirty="0">
+              <a:t>AI tools require ongoing funding, staff time, monitoring, updates, vendor management, training,.</a:t>
+            </a:r>
+            <a:endParaRPr lang="en-US" sz="2100" dirty="0"/>
+          </a:p>
+          <a:p>
+            <a:r>
+              <a:rPr lang="en-US" sz="2100" dirty="0">
                 <a:solidFill>
                   <a:srgbClr val="17364A"/>
                 </a:solidFill>
@@ -12364,29 +13479,15 @@
                 <a:ea typeface="Aptos" pitchFamily="34" charset="-122"/>
                 <a:cs typeface="Aptos" pitchFamily="34" charset="-120"/>
               </a:rPr>
-              <a:t>Sustainability planning ensures that AI-supported workflows do not become unfunded, unmonitored, or outdated after the.</a:t>
-            </a:r>
-            <a:endParaRPr lang="en-US" sz="1700" dirty="0"/>
-          </a:p>
-          <a:p>
-            <a:r>
-              <a:rPr lang="en-US" sz="1700" dirty="0">
-                <a:solidFill>
-                  <a:srgbClr val="17364A"/>
-                </a:solidFill>
-                <a:latin typeface="Aptos" pitchFamily="34" charset="0"/>
-                <a:ea typeface="Aptos" pitchFamily="34" charset="-122"/>
-                <a:cs typeface="Aptos" pitchFamily="34" charset="-120"/>
-              </a:rPr>
-              <a:t>This module helps leaders plan for the full AI lifecycle.</a:t>
-            </a:r>
-            <a:endParaRPr lang="en-US" sz="1700" dirty="0"/>
-          </a:p>
-        </p:txBody>
-      </p:sp>
-      <p:sp>
-        <p:nvSpPr>
-          <p:cNvPr id="11" name="Shape 9"/>
+              <a:t>Sustainability planning ensures that AI-supported workflows do not become unfunded, unmonitored, or.</a:t>
+            </a:r>
+            <a:endParaRPr lang="en-US" sz="2100" dirty="0"/>
+          </a:p>
+        </p:txBody>
+      </p:sp>
+      <p:sp>
+        <p:nvSpPr>
+          <p:cNvPr id="12" name="Shape 10"/>
           <p:cNvSpPr/>
           <p:nvPr/>
         </p:nvSpPr>
@@ -12413,14 +13514,14 @@
       </p:sp>
       <p:sp>
         <p:nvSpPr>
-          <p:cNvPr id="12" name="Text 10"/>
+          <p:cNvPr id="13" name="Text 11"/>
           <p:cNvSpPr/>
           <p:nvPr/>
         </p:nvSpPr>
         <p:spPr>
           <a:xfrm>
             <a:off x="8074152" y="1563624"/>
-            <a:ext cx="2825496" cy="201168"/>
+            <a:ext cx="2825496" cy="256032"/>
           </a:xfrm>
           <a:prstGeom prst="rect">
             <a:avLst/>
@@ -12436,7 +13537,7 @@
               <a:buNone/>
             </a:pPr>
             <a:r>
-              <a:rPr lang="en-US" sz="950" b="1" dirty="0">
+              <a:rPr lang="en-US" sz="1300" b="1" dirty="0">
                 <a:solidFill>
                   <a:srgbClr val="0068B7"/>
                 </a:solidFill>
@@ -12446,20 +13547,20 @@
               </a:rPr>
               <a:t>Key idea</a:t>
             </a:r>
-            <a:endParaRPr lang="en-US" sz="950" dirty="0"/>
-          </a:p>
-        </p:txBody>
-      </p:sp>
-      <p:sp>
-        <p:nvSpPr>
-          <p:cNvPr id="13" name="Text 11"/>
-          <p:cNvSpPr/>
-          <p:nvPr/>
-        </p:nvSpPr>
-        <p:spPr>
-          <a:xfrm>
-            <a:off x="8074152" y="1856232"/>
-            <a:ext cx="2825496" cy="1261872"/>
+            <a:endParaRPr lang="en-US" sz="1300" dirty="0"/>
+          </a:p>
+        </p:txBody>
+      </p:sp>
+      <p:sp>
+        <p:nvSpPr>
+          <p:cNvPr id="14" name="Text 12"/>
+          <p:cNvSpPr/>
+          <p:nvPr/>
+        </p:nvSpPr>
+        <p:spPr>
+          <a:xfrm>
+            <a:off x="8074152" y="1920240"/>
+            <a:ext cx="2825496" cy="1188720"/>
           </a:xfrm>
           <a:prstGeom prst="rect">
             <a:avLst/>
@@ -12477,7 +13578,7 @@
               <a:buNone/>
             </a:pPr>
             <a:r>
-              <a:rPr lang="en-US" sz="1250" dirty="0">
+              <a:rPr lang="en-US" sz="1550" dirty="0">
                 <a:solidFill>
                   <a:srgbClr val="17364A"/>
                 </a:solidFill>
@@ -12487,13 +13588,13 @@
               </a:rPr>
               <a:t>Responsible AI does not end at launch.</a:t>
             </a:r>
-            <a:endParaRPr lang="en-US" sz="1250" dirty="0"/>
-          </a:p>
-        </p:txBody>
-      </p:sp>
-      <p:sp>
-        <p:nvSpPr>
-          <p:cNvPr id="14" name="Shape 12"/>
+            <a:endParaRPr lang="en-US" sz="1550" dirty="0"/>
+          </a:p>
+        </p:txBody>
+      </p:sp>
+      <p:sp>
+        <p:nvSpPr>
+          <p:cNvPr id="15" name="Shape 13"/>
           <p:cNvSpPr/>
           <p:nvPr/>
         </p:nvSpPr>
@@ -12520,14 +13621,14 @@
       </p:sp>
       <p:sp>
         <p:nvSpPr>
-          <p:cNvPr id="15" name="Text 13"/>
+          <p:cNvPr id="16" name="Text 14"/>
           <p:cNvSpPr/>
           <p:nvPr/>
         </p:nvSpPr>
         <p:spPr>
           <a:xfrm>
             <a:off x="8074152" y="3666744"/>
-            <a:ext cx="2825496" cy="201168"/>
+            <a:ext cx="2825496" cy="256032"/>
           </a:xfrm>
           <a:prstGeom prst="rect">
             <a:avLst/>
@@ -12543,7 +13644,7 @@
               <a:buNone/>
             </a:pPr>
             <a:r>
-              <a:rPr lang="en-US" sz="950" b="1" dirty="0">
+              <a:rPr lang="en-US" sz="1300" b="1" dirty="0">
                 <a:solidFill>
                   <a:srgbClr val="0068B7"/>
                 </a:solidFill>
@@ -12553,20 +13654,20 @@
               </a:rPr>
               <a:t>Use this for</a:t>
             </a:r>
-            <a:endParaRPr lang="en-US" sz="950" dirty="0"/>
-          </a:p>
-        </p:txBody>
-      </p:sp>
-      <p:sp>
-        <p:nvSpPr>
-          <p:cNvPr id="16" name="Text 14"/>
-          <p:cNvSpPr/>
-          <p:nvPr/>
-        </p:nvSpPr>
-        <p:spPr>
-          <a:xfrm>
-            <a:off x="8074152" y="3959352"/>
-            <a:ext cx="2825496" cy="1170432"/>
+            <a:endParaRPr lang="en-US" sz="1300" dirty="0"/>
+          </a:p>
+        </p:txBody>
+      </p:sp>
+      <p:sp>
+        <p:nvSpPr>
+          <p:cNvPr id="17" name="Text 15"/>
+          <p:cNvSpPr/>
+          <p:nvPr/>
+        </p:nvSpPr>
+        <p:spPr>
+          <a:xfrm>
+            <a:off x="8074152" y="4023360"/>
+            <a:ext cx="2825496" cy="1097280"/>
           </a:xfrm>
           <a:prstGeom prst="rect">
             <a:avLst/>
@@ -12584,7 +13685,7 @@
               <a:buNone/>
             </a:pPr>
             <a:r>
-              <a:rPr lang="en-US" sz="1250" dirty="0">
+              <a:rPr lang="en-US" sz="1550" dirty="0">
                 <a:solidFill>
                   <a:srgbClr val="17364A"/>
                 </a:solidFill>
@@ -12594,7 +13695,7 @@
               </a:rPr>
               <a:t>Connect the concept to public health decisions, safeguards, documentation, or implementation work.</a:t>
             </a:r>
-            <a:endParaRPr lang="en-US" sz="1250" dirty="0"/>
+            <a:endParaRPr lang="en-US" sz="1550" dirty="0"/>
           </a:p>
         </p:txBody>
       </p:sp>
@@ -12791,7 +13892,7 @@
                 <a:ea typeface="Aptos" pitchFamily="34" charset="-122"/>
                 <a:cs typeface="Aptos" pitchFamily="34" charset="-120"/>
               </a:rPr>
-              <a:t>© Paula Soper</a:t>
+              <a:t>Â© Paula Soper</a:t>
             </a:r>
             <a:endParaRPr lang="en-US" sz="800" dirty="0"/>
           </a:p>
@@ -12799,7 +13900,46 @@
       </p:sp>
       <p:sp>
         <p:nvSpPr>
-          <p:cNvPr id="7" name="Shape 5"/>
+          <p:cNvPr id="7" name="Text 5"/>
+          <p:cNvSpPr/>
+          <p:nvPr/>
+        </p:nvSpPr>
+        <p:spPr>
+          <a:xfrm>
+            <a:off x="11137392" y="6510528"/>
+            <a:ext cx="411480" cy="201168"/>
+          </a:xfrm>
+          <a:prstGeom prst="rect">
+            <a:avLst/>
+          </a:prstGeom>
+          <a:noFill/>
+          <a:ln/>
+        </p:spPr>
+        <p:txBody>
+          <a:bodyPr wrap="square" lIns="0" tIns="0" rIns="0" bIns="0" rtlCol="0" anchor="ctr"/>
+          <a:lstStyle/>
+          <a:p>
+            <a:pPr algn="r" indent="0" marL="0">
+              <a:buNone/>
+            </a:pPr>
+            <a:r>
+              <a:rPr lang="en-US" sz="900" dirty="0">
+                <a:solidFill>
+                  <a:srgbClr val="5F7181"/>
+                </a:solidFill>
+                <a:latin typeface="Aptos" pitchFamily="34" charset="0"/>
+                <a:ea typeface="Aptos" pitchFamily="34" charset="-122"/>
+                <a:cs typeface="Aptos" pitchFamily="34" charset="-120"/>
+              </a:rPr>
+              <a:t>7</a:t>
+            </a:r>
+            <a:endParaRPr lang="en-US" sz="900" dirty="0"/>
+          </a:p>
+        </p:txBody>
+      </p:sp>
+      <p:sp>
+        <p:nvSpPr>
+          <p:cNvPr id="8" name="Shape 6"/>
           <p:cNvSpPr/>
           <p:nvPr/>
         </p:nvSpPr>
@@ -12824,7 +13964,7 @@
       </p:sp>
       <p:sp>
         <p:nvSpPr>
-          <p:cNvPr id="8" name="Text 6"/>
+          <p:cNvPr id="9" name="Text 7"/>
           <p:cNvSpPr/>
           <p:nvPr/>
         </p:nvSpPr>
@@ -12863,14 +14003,14 @@
       </p:sp>
       <p:sp>
         <p:nvSpPr>
-          <p:cNvPr id="9" name="Text 7"/>
+          <p:cNvPr id="10" name="Text 8"/>
           <p:cNvSpPr/>
           <p:nvPr/>
         </p:nvSpPr>
         <p:spPr>
           <a:xfrm>
             <a:off x="640080" y="621792"/>
-            <a:ext cx="10881360" cy="566928"/>
+            <a:ext cx="10881360" cy="713232"/>
           </a:xfrm>
           <a:prstGeom prst="rect">
             <a:avLst/>
@@ -12888,7 +14028,7 @@
               <a:buNone/>
             </a:pPr>
             <a:r>
-              <a:rPr lang="en-US" sz="2700" b="1" dirty="0">
+              <a:rPr lang="en-US" sz="3400" b="1" dirty="0">
                 <a:solidFill>
                   <a:srgbClr val="003A63"/>
                 </a:solidFill>
@@ -12898,20 +14038,20 @@
               </a:rPr>
               <a:t>Jurisdiction and Agency Policy Note</a:t>
             </a:r>
-            <a:endParaRPr lang="en-US" sz="2700" dirty="0"/>
-          </a:p>
-        </p:txBody>
-      </p:sp>
-      <p:sp>
-        <p:nvSpPr>
-          <p:cNvPr id="10" name="Text 8"/>
-          <p:cNvSpPr/>
-          <p:nvPr/>
-        </p:nvSpPr>
-        <p:spPr>
-          <a:xfrm>
-            <a:off x="868680" y="1417320"/>
-            <a:ext cx="6675120" cy="4434840"/>
+            <a:endParaRPr lang="en-US" sz="3400" dirty="0"/>
+          </a:p>
+        </p:txBody>
+      </p:sp>
+      <p:sp>
+        <p:nvSpPr>
+          <p:cNvPr id="11" name="Text 9"/>
+          <p:cNvSpPr/>
+          <p:nvPr/>
+        </p:nvSpPr>
+        <p:spPr>
+          <a:xfrm>
+            <a:off x="868680" y="1508760"/>
+            <a:ext cx="6537960" cy="4160520"/>
           </a:xfrm>
           <a:prstGeom prst="rect">
             <a:avLst/>
@@ -12926,7 +14066,7 @@
           <a:lstStyle/>
           <a:p>
             <a:r>
-              <a:rPr lang="en-US" sz="1700" dirty="0">
+              <a:rPr lang="en-US" sz="2100" dirty="0">
                 <a:solidFill>
                   <a:srgbClr val="17364A"/>
                 </a:solidFill>
@@ -12936,11 +14076,11 @@
               </a:rPr>
               <a:t>This national-level module is intended for training and planning purposes.</a:t>
             </a:r>
-            <a:endParaRPr lang="en-US" sz="1700" dirty="0"/>
-          </a:p>
-          <a:p>
-            <a:r>
-              <a:rPr lang="en-US" sz="1700" dirty="0">
+            <a:endParaRPr lang="en-US" sz="2100" dirty="0"/>
+          </a:p>
+          <a:p>
+            <a:r>
+              <a:rPr lang="en-US" sz="2100" dirty="0">
                 <a:solidFill>
                   <a:srgbClr val="17364A"/>
                 </a:solidFill>
@@ -12950,11 +14090,11 @@
               </a:rPr>
               <a:t>It does not replace legal, privacy, procurement, civil rights, records, or agency policy review.</a:t>
             </a:r>
-            <a:endParaRPr lang="en-US" sz="1700" dirty="0"/>
-          </a:p>
-          <a:p>
-            <a:r>
-              <a:rPr lang="en-US" sz="1700" dirty="0">
+            <a:endParaRPr lang="en-US" sz="2100" dirty="0"/>
+          </a:p>
+          <a:p>
+            <a:r>
+              <a:rPr lang="en-US" sz="2100" dirty="0">
                 <a:solidFill>
                   <a:srgbClr val="17364A"/>
                 </a:solidFill>
@@ -12962,15 +14102,15 @@
                 <a:ea typeface="Aptos" pitchFamily="34" charset="-122"/>
                 <a:cs typeface="Aptos" pitchFamily="34" charset="-120"/>
               </a:rPr>
-              <a:t>Learners should confirm applicable requirements in their own jurisdiction and organization before implementing AI-supported.</a:t>
-            </a:r>
-            <a:endParaRPr lang="en-US" sz="1700" dirty="0"/>
-          </a:p>
-        </p:txBody>
-      </p:sp>
-      <p:sp>
-        <p:nvSpPr>
-          <p:cNvPr id="11" name="Shape 9"/>
+              <a:t>Learners should confirm applicable requirements in their own jurisdiction and organization before.</a:t>
+            </a:r>
+            <a:endParaRPr lang="en-US" sz="2100" dirty="0"/>
+          </a:p>
+        </p:txBody>
+      </p:sp>
+      <p:sp>
+        <p:nvSpPr>
+          <p:cNvPr id="12" name="Shape 10"/>
           <p:cNvSpPr/>
           <p:nvPr/>
         </p:nvSpPr>
@@ -12997,14 +14137,14 @@
       </p:sp>
       <p:sp>
         <p:nvSpPr>
-          <p:cNvPr id="12" name="Text 10"/>
+          <p:cNvPr id="13" name="Text 11"/>
           <p:cNvSpPr/>
           <p:nvPr/>
         </p:nvSpPr>
         <p:spPr>
           <a:xfrm>
             <a:off x="8074152" y="1563624"/>
-            <a:ext cx="2825496" cy="201168"/>
+            <a:ext cx="2825496" cy="256032"/>
           </a:xfrm>
           <a:prstGeom prst="rect">
             <a:avLst/>
@@ -13020,7 +14160,7 @@
               <a:buNone/>
             </a:pPr>
             <a:r>
-              <a:rPr lang="en-US" sz="950" b="1" dirty="0">
+              <a:rPr lang="en-US" sz="1300" b="1" dirty="0">
                 <a:solidFill>
                   <a:srgbClr val="0068B7"/>
                 </a:solidFill>
@@ -13030,20 +14170,20 @@
               </a:rPr>
               <a:t>Key idea</a:t>
             </a:r>
-            <a:endParaRPr lang="en-US" sz="950" dirty="0"/>
-          </a:p>
-        </p:txBody>
-      </p:sp>
-      <p:sp>
-        <p:nvSpPr>
-          <p:cNvPr id="13" name="Text 11"/>
-          <p:cNvSpPr/>
-          <p:nvPr/>
-        </p:nvSpPr>
-        <p:spPr>
-          <a:xfrm>
-            <a:off x="8074152" y="1856232"/>
-            <a:ext cx="2825496" cy="1261872"/>
+            <a:endParaRPr lang="en-US" sz="1300" dirty="0"/>
+          </a:p>
+        </p:txBody>
+      </p:sp>
+      <p:sp>
+        <p:nvSpPr>
+          <p:cNvPr id="14" name="Text 12"/>
+          <p:cNvSpPr/>
+          <p:nvPr/>
+        </p:nvSpPr>
+        <p:spPr>
+          <a:xfrm>
+            <a:off x="8074152" y="1920240"/>
+            <a:ext cx="2825496" cy="1188720"/>
           </a:xfrm>
           <a:prstGeom prst="rect">
             <a:avLst/>
@@ -13061,7 +14201,7 @@
               <a:buNone/>
             </a:pPr>
             <a:r>
-              <a:rPr lang="en-US" sz="1250" dirty="0">
+              <a:rPr lang="en-US" sz="1550" dirty="0">
                 <a:solidFill>
                   <a:srgbClr val="17364A"/>
                 </a:solidFill>
@@ -13071,13 +14211,13 @@
               </a:rPr>
               <a:t>This national-level module is intended for training and planning purposes.</a:t>
             </a:r>
-            <a:endParaRPr lang="en-US" sz="1250" dirty="0"/>
-          </a:p>
-        </p:txBody>
-      </p:sp>
-      <p:sp>
-        <p:nvSpPr>
-          <p:cNvPr id="14" name="Shape 12"/>
+            <a:endParaRPr lang="en-US" sz="1550" dirty="0"/>
+          </a:p>
+        </p:txBody>
+      </p:sp>
+      <p:sp>
+        <p:nvSpPr>
+          <p:cNvPr id="15" name="Shape 13"/>
           <p:cNvSpPr/>
           <p:nvPr/>
         </p:nvSpPr>
@@ -13104,14 +14244,14 @@
       </p:sp>
       <p:sp>
         <p:nvSpPr>
-          <p:cNvPr id="15" name="Text 13"/>
+          <p:cNvPr id="16" name="Text 14"/>
           <p:cNvSpPr/>
           <p:nvPr/>
         </p:nvSpPr>
         <p:spPr>
           <a:xfrm>
             <a:off x="8074152" y="3666744"/>
-            <a:ext cx="2825496" cy="201168"/>
+            <a:ext cx="2825496" cy="256032"/>
           </a:xfrm>
           <a:prstGeom prst="rect">
             <a:avLst/>
@@ -13127,7 +14267,7 @@
               <a:buNone/>
             </a:pPr>
             <a:r>
-              <a:rPr lang="en-US" sz="950" b="1" dirty="0">
+              <a:rPr lang="en-US" sz="1300" b="1" dirty="0">
                 <a:solidFill>
                   <a:srgbClr val="0068B7"/>
                 </a:solidFill>
@@ -13137,20 +14277,20 @@
               </a:rPr>
               <a:t>Use this for</a:t>
             </a:r>
-            <a:endParaRPr lang="en-US" sz="950" dirty="0"/>
-          </a:p>
-        </p:txBody>
-      </p:sp>
-      <p:sp>
-        <p:nvSpPr>
-          <p:cNvPr id="16" name="Text 14"/>
-          <p:cNvSpPr/>
-          <p:nvPr/>
-        </p:nvSpPr>
-        <p:spPr>
-          <a:xfrm>
-            <a:off x="8074152" y="3959352"/>
-            <a:ext cx="2825496" cy="1170432"/>
+            <a:endParaRPr lang="en-US" sz="1300" dirty="0"/>
+          </a:p>
+        </p:txBody>
+      </p:sp>
+      <p:sp>
+        <p:nvSpPr>
+          <p:cNvPr id="17" name="Text 15"/>
+          <p:cNvSpPr/>
+          <p:nvPr/>
+        </p:nvSpPr>
+        <p:spPr>
+          <a:xfrm>
+            <a:off x="8074152" y="4023360"/>
+            <a:ext cx="2825496" cy="1097280"/>
           </a:xfrm>
           <a:prstGeom prst="rect">
             <a:avLst/>
@@ -13168,7 +14308,7 @@
               <a:buNone/>
             </a:pPr>
             <a:r>
-              <a:rPr lang="en-US" sz="1250" dirty="0">
+              <a:rPr lang="en-US" sz="1550" dirty="0">
                 <a:solidFill>
                   <a:srgbClr val="17364A"/>
                 </a:solidFill>
@@ -13178,7 +14318,7 @@
               </a:rPr>
               <a:t>Connect the concept to public health decisions, safeguards, documentation, or implementation work.</a:t>
             </a:r>
-            <a:endParaRPr lang="en-US" sz="1250" dirty="0"/>
+            <a:endParaRPr lang="en-US" sz="1550" dirty="0"/>
           </a:p>
         </p:txBody>
       </p:sp>
@@ -13375,7 +14515,7 @@
                 <a:ea typeface="Aptos" pitchFamily="34" charset="-122"/>
                 <a:cs typeface="Aptos" pitchFamily="34" charset="-120"/>
               </a:rPr>
-              <a:t>© Paula Soper</a:t>
+              <a:t>Â© Paula Soper</a:t>
             </a:r>
             <a:endParaRPr lang="en-US" sz="800" dirty="0"/>
           </a:p>
@@ -13383,7 +14523,46 @@
       </p:sp>
       <p:sp>
         <p:nvSpPr>
-          <p:cNvPr id="7" name="Shape 5"/>
+          <p:cNvPr id="7" name="Text 5"/>
+          <p:cNvSpPr/>
+          <p:nvPr/>
+        </p:nvSpPr>
+        <p:spPr>
+          <a:xfrm>
+            <a:off x="11137392" y="6510528"/>
+            <a:ext cx="411480" cy="201168"/>
+          </a:xfrm>
+          <a:prstGeom prst="rect">
+            <a:avLst/>
+          </a:prstGeom>
+          <a:noFill/>
+          <a:ln/>
+        </p:spPr>
+        <p:txBody>
+          <a:bodyPr wrap="square" lIns="0" tIns="0" rIns="0" bIns="0" rtlCol="0" anchor="ctr"/>
+          <a:lstStyle/>
+          <a:p>
+            <a:pPr algn="r" indent="0" marL="0">
+              <a:buNone/>
+            </a:pPr>
+            <a:r>
+              <a:rPr lang="en-US" sz="900" dirty="0">
+                <a:solidFill>
+                  <a:srgbClr val="5F7181"/>
+                </a:solidFill>
+                <a:latin typeface="Aptos" pitchFamily="34" charset="0"/>
+                <a:ea typeface="Aptos" pitchFamily="34" charset="-122"/>
+                <a:cs typeface="Aptos" pitchFamily="34" charset="-120"/>
+              </a:rPr>
+              <a:t>8</a:t>
+            </a:r>
+            <a:endParaRPr lang="en-US" sz="900" dirty="0"/>
+          </a:p>
+        </p:txBody>
+      </p:sp>
+      <p:sp>
+        <p:nvSpPr>
+          <p:cNvPr id="8" name="Shape 6"/>
           <p:cNvSpPr/>
           <p:nvPr/>
         </p:nvSpPr>
@@ -13408,7 +14587,7 @@
       </p:sp>
       <p:sp>
         <p:nvSpPr>
-          <p:cNvPr id="8" name="Text 6"/>
+          <p:cNvPr id="9" name="Text 7"/>
           <p:cNvSpPr/>
           <p:nvPr/>
         </p:nvSpPr>
@@ -13447,14 +14626,14 @@
       </p:sp>
       <p:sp>
         <p:nvSpPr>
-          <p:cNvPr id="9" name="Text 7"/>
+          <p:cNvPr id="10" name="Text 8"/>
           <p:cNvSpPr/>
           <p:nvPr/>
         </p:nvSpPr>
         <p:spPr>
           <a:xfrm>
             <a:off x="640080" y="621792"/>
-            <a:ext cx="10881360" cy="566928"/>
+            <a:ext cx="10881360" cy="713232"/>
           </a:xfrm>
           <a:prstGeom prst="rect">
             <a:avLst/>
@@ -13472,7 +14651,7 @@
               <a:buNone/>
             </a:pPr>
             <a:r>
-              <a:rPr lang="en-US" sz="2700" b="1" dirty="0">
+              <a:rPr lang="en-US" sz="3400" b="1" dirty="0">
                 <a:solidFill>
                   <a:srgbClr val="003A63"/>
                 </a:solidFill>
@@ -13482,20 +14661,20 @@
               </a:rPr>
               <a:t>Why This Topic Matters for Public Health AI</a:t>
             </a:r>
-            <a:endParaRPr lang="en-US" sz="2700" dirty="0"/>
-          </a:p>
-        </p:txBody>
-      </p:sp>
-      <p:sp>
-        <p:nvSpPr>
-          <p:cNvPr id="10" name="Text 8"/>
-          <p:cNvSpPr/>
-          <p:nvPr/>
-        </p:nvSpPr>
-        <p:spPr>
-          <a:xfrm>
-            <a:off x="868680" y="1417320"/>
-            <a:ext cx="6675120" cy="4434840"/>
+            <a:endParaRPr lang="en-US" sz="3400" dirty="0"/>
+          </a:p>
+        </p:txBody>
+      </p:sp>
+      <p:sp>
+        <p:nvSpPr>
+          <p:cNvPr id="11" name="Text 9"/>
+          <p:cNvSpPr/>
+          <p:nvPr/>
+        </p:nvSpPr>
+        <p:spPr>
+          <a:xfrm>
+            <a:off x="868680" y="1508760"/>
+            <a:ext cx="6537960" cy="4160520"/>
           </a:xfrm>
           <a:prstGeom prst="rect">
             <a:avLst/>
@@ -13510,7 +14689,7 @@
           <a:lstStyle/>
           <a:p>
             <a:r>
-              <a:rPr lang="en-US" sz="1700" dirty="0">
+              <a:rPr lang="en-US" sz="2100" dirty="0">
                 <a:solidFill>
                   <a:srgbClr val="17364A"/>
                 </a:solidFill>
@@ -13520,11 +14699,11 @@
               </a:rPr>
               <a:t>Many AI efforts begin as pilots, innovation projects, or grant-funded experiments.</a:t>
             </a:r>
-            <a:endParaRPr lang="en-US" sz="1700" dirty="0"/>
-          </a:p>
-          <a:p>
-            <a:r>
-              <a:rPr lang="en-US" sz="1700" dirty="0">
+            <a:endParaRPr lang="en-US" sz="2100" dirty="0"/>
+          </a:p>
+          <a:p>
+            <a:r>
+              <a:rPr lang="en-US" sz="2100" dirty="0">
                 <a:solidFill>
                   <a:srgbClr val="17364A"/>
                 </a:solidFill>
@@ -13534,11 +14713,11 @@
               </a:rPr>
               <a:t>These projects may succeed technically but fail operationally if there is no plan for ongoing support.</a:t>
             </a:r>
-            <a:endParaRPr lang="en-US" sz="1700" dirty="0"/>
-          </a:p>
-          <a:p>
-            <a:r>
-              <a:rPr lang="en-US" sz="1700" dirty="0">
+            <a:endParaRPr lang="en-US" sz="2100" dirty="0"/>
+          </a:p>
+          <a:p>
+            <a:r>
+              <a:rPr lang="en-US" sz="2100" dirty="0">
                 <a:solidFill>
                   <a:srgbClr val="17364A"/>
                 </a:solidFill>
@@ -13546,29 +14725,15 @@
                 <a:ea typeface="Aptos" pitchFamily="34" charset="-122"/>
                 <a:cs typeface="Aptos" pitchFamily="34" charset="-120"/>
               </a:rPr>
-              <a:t>Public health agencies may be left with a tool that staff rely on but no budget for validation updates, vendor support,.</a:t>
-            </a:r>
-            <a:endParaRPr lang="en-US" sz="1700" dirty="0"/>
-          </a:p>
-          <a:p>
-            <a:r>
-              <a:rPr lang="en-US" sz="1700" dirty="0">
-                <a:solidFill>
-                  <a:srgbClr val="17364A"/>
-                </a:solidFill>
-                <a:latin typeface="Aptos" pitchFamily="34" charset="0"/>
-                <a:ea typeface="Aptos" pitchFamily="34" charset="-122"/>
-                <a:cs typeface="Aptos" pitchFamily="34" charset="-120"/>
-              </a:rPr>
-              <a:t>Sustainability is also a risk-control issue.</a:t>
-            </a:r>
-            <a:endParaRPr lang="en-US" sz="1700" dirty="0"/>
-          </a:p>
-        </p:txBody>
-      </p:sp>
-      <p:sp>
-        <p:nvSpPr>
-          <p:cNvPr id="11" name="Shape 9"/>
+              <a:t>Public health agencies may be left with a tool that staff rely on but no budget for validation updates,.</a:t>
+            </a:r>
+            <a:endParaRPr lang="en-US" sz="2100" dirty="0"/>
+          </a:p>
+        </p:txBody>
+      </p:sp>
+      <p:sp>
+        <p:nvSpPr>
+          <p:cNvPr id="12" name="Shape 10"/>
           <p:cNvSpPr/>
           <p:nvPr/>
         </p:nvSpPr>
@@ -13595,14 +14760,14 @@
       </p:sp>
       <p:sp>
         <p:nvSpPr>
-          <p:cNvPr id="12" name="Text 10"/>
+          <p:cNvPr id="13" name="Text 11"/>
           <p:cNvSpPr/>
           <p:nvPr/>
         </p:nvSpPr>
         <p:spPr>
           <a:xfrm>
             <a:off x="8074152" y="1563624"/>
-            <a:ext cx="2825496" cy="201168"/>
+            <a:ext cx="2825496" cy="256032"/>
           </a:xfrm>
           <a:prstGeom prst="rect">
             <a:avLst/>
@@ -13618,7 +14783,7 @@
               <a:buNone/>
             </a:pPr>
             <a:r>
-              <a:rPr lang="en-US" sz="950" b="1" dirty="0">
+              <a:rPr lang="en-US" sz="1300" b="1" dirty="0">
                 <a:solidFill>
                   <a:srgbClr val="0068B7"/>
                 </a:solidFill>
@@ -13628,20 +14793,20 @@
               </a:rPr>
               <a:t>Key idea</a:t>
             </a:r>
-            <a:endParaRPr lang="en-US" sz="950" dirty="0"/>
-          </a:p>
-        </p:txBody>
-      </p:sp>
-      <p:sp>
-        <p:nvSpPr>
-          <p:cNvPr id="13" name="Text 11"/>
-          <p:cNvSpPr/>
-          <p:nvPr/>
-        </p:nvSpPr>
-        <p:spPr>
-          <a:xfrm>
-            <a:off x="8074152" y="1856232"/>
-            <a:ext cx="2825496" cy="1261872"/>
+            <a:endParaRPr lang="en-US" sz="1300" dirty="0"/>
+          </a:p>
+        </p:txBody>
+      </p:sp>
+      <p:sp>
+        <p:nvSpPr>
+          <p:cNvPr id="14" name="Text 12"/>
+          <p:cNvSpPr/>
+          <p:nvPr/>
+        </p:nvSpPr>
+        <p:spPr>
+          <a:xfrm>
+            <a:off x="8074152" y="1920240"/>
+            <a:ext cx="2825496" cy="1188720"/>
           </a:xfrm>
           <a:prstGeom prst="rect">
             <a:avLst/>
@@ -13659,7 +14824,7 @@
               <a:buNone/>
             </a:pPr>
             <a:r>
-              <a:rPr lang="en-US" sz="1250" dirty="0">
+              <a:rPr lang="en-US" sz="1550" dirty="0">
                 <a:solidFill>
                   <a:srgbClr val="17364A"/>
                 </a:solidFill>
@@ -13669,13 +14834,13 @@
               </a:rPr>
               <a:t>Many AI efforts begin as pilots, innovation projects, or grant-funded experiments.</a:t>
             </a:r>
-            <a:endParaRPr lang="en-US" sz="1250" dirty="0"/>
-          </a:p>
-        </p:txBody>
-      </p:sp>
-      <p:sp>
-        <p:nvSpPr>
-          <p:cNvPr id="14" name="Shape 12"/>
+            <a:endParaRPr lang="en-US" sz="1550" dirty="0"/>
+          </a:p>
+        </p:txBody>
+      </p:sp>
+      <p:sp>
+        <p:nvSpPr>
+          <p:cNvPr id="15" name="Shape 13"/>
           <p:cNvSpPr/>
           <p:nvPr/>
         </p:nvSpPr>
@@ -13702,14 +14867,14 @@
       </p:sp>
       <p:sp>
         <p:nvSpPr>
-          <p:cNvPr id="15" name="Text 13"/>
+          <p:cNvPr id="16" name="Text 14"/>
           <p:cNvSpPr/>
           <p:nvPr/>
         </p:nvSpPr>
         <p:spPr>
           <a:xfrm>
             <a:off x="8074152" y="3666744"/>
-            <a:ext cx="2825496" cy="201168"/>
+            <a:ext cx="2825496" cy="256032"/>
           </a:xfrm>
           <a:prstGeom prst="rect">
             <a:avLst/>
@@ -13725,7 +14890,7 @@
               <a:buNone/>
             </a:pPr>
             <a:r>
-              <a:rPr lang="en-US" sz="950" b="1" dirty="0">
+              <a:rPr lang="en-US" sz="1300" b="1" dirty="0">
                 <a:solidFill>
                   <a:srgbClr val="0068B7"/>
                 </a:solidFill>
@@ -13735,20 +14900,20 @@
               </a:rPr>
               <a:t>Use this for</a:t>
             </a:r>
-            <a:endParaRPr lang="en-US" sz="950" dirty="0"/>
-          </a:p>
-        </p:txBody>
-      </p:sp>
-      <p:sp>
-        <p:nvSpPr>
-          <p:cNvPr id="16" name="Text 14"/>
-          <p:cNvSpPr/>
-          <p:nvPr/>
-        </p:nvSpPr>
-        <p:spPr>
-          <a:xfrm>
-            <a:off x="8074152" y="3959352"/>
-            <a:ext cx="2825496" cy="1170432"/>
+            <a:endParaRPr lang="en-US" sz="1300" dirty="0"/>
+          </a:p>
+        </p:txBody>
+      </p:sp>
+      <p:sp>
+        <p:nvSpPr>
+          <p:cNvPr id="17" name="Text 15"/>
+          <p:cNvSpPr/>
+          <p:nvPr/>
+        </p:nvSpPr>
+        <p:spPr>
+          <a:xfrm>
+            <a:off x="8074152" y="4023360"/>
+            <a:ext cx="2825496" cy="1097280"/>
           </a:xfrm>
           <a:prstGeom prst="rect">
             <a:avLst/>
@@ -13766,7 +14931,7 @@
               <a:buNone/>
             </a:pPr>
             <a:r>
-              <a:rPr lang="en-US" sz="1250" dirty="0">
+              <a:rPr lang="en-US" sz="1550" dirty="0">
                 <a:solidFill>
                   <a:srgbClr val="17364A"/>
                 </a:solidFill>
@@ -13776,7 +14941,7 @@
               </a:rPr>
               <a:t>Connect the concept to public health decisions, safeguards, documentation, or implementation work.</a:t>
             </a:r>
-            <a:endParaRPr lang="en-US" sz="1250" dirty="0"/>
+            <a:endParaRPr lang="en-US" sz="1550" dirty="0"/>
           </a:p>
         </p:txBody>
       </p:sp>
@@ -13973,7 +15138,7 @@
                 <a:ea typeface="Aptos" pitchFamily="34" charset="-122"/>
                 <a:cs typeface="Aptos" pitchFamily="34" charset="-120"/>
               </a:rPr>
-              <a:t>© Paula Soper</a:t>
+              <a:t>Â© Paula Soper</a:t>
             </a:r>
             <a:endParaRPr lang="en-US" sz="800" dirty="0"/>
           </a:p>
@@ -13981,7 +15146,46 @@
       </p:sp>
       <p:sp>
         <p:nvSpPr>
-          <p:cNvPr id="7" name="Shape 5"/>
+          <p:cNvPr id="7" name="Text 5"/>
+          <p:cNvSpPr/>
+          <p:nvPr/>
+        </p:nvSpPr>
+        <p:spPr>
+          <a:xfrm>
+            <a:off x="11137392" y="6510528"/>
+            <a:ext cx="411480" cy="201168"/>
+          </a:xfrm>
+          <a:prstGeom prst="rect">
+            <a:avLst/>
+          </a:prstGeom>
+          <a:noFill/>
+          <a:ln/>
+        </p:spPr>
+        <p:txBody>
+          <a:bodyPr wrap="square" lIns="0" tIns="0" rIns="0" bIns="0" rtlCol="0" anchor="ctr"/>
+          <a:lstStyle/>
+          <a:p>
+            <a:pPr algn="r" indent="0" marL="0">
+              <a:buNone/>
+            </a:pPr>
+            <a:r>
+              <a:rPr lang="en-US" sz="900" dirty="0">
+                <a:solidFill>
+                  <a:srgbClr val="5F7181"/>
+                </a:solidFill>
+                <a:latin typeface="Aptos" pitchFamily="34" charset="0"/>
+                <a:ea typeface="Aptos" pitchFamily="34" charset="-122"/>
+                <a:cs typeface="Aptos" pitchFamily="34" charset="-120"/>
+              </a:rPr>
+              <a:t>9</a:t>
+            </a:r>
+            <a:endParaRPr lang="en-US" sz="900" dirty="0"/>
+          </a:p>
+        </p:txBody>
+      </p:sp>
+      <p:sp>
+        <p:nvSpPr>
+          <p:cNvPr id="8" name="Shape 6"/>
           <p:cNvSpPr/>
           <p:nvPr/>
         </p:nvSpPr>
@@ -14006,7 +15210,7 @@
       </p:sp>
       <p:sp>
         <p:nvSpPr>
-          <p:cNvPr id="8" name="Text 6"/>
+          <p:cNvPr id="9" name="Text 7"/>
           <p:cNvSpPr/>
           <p:nvPr/>
         </p:nvSpPr>
@@ -14045,14 +15249,14 @@
       </p:sp>
       <p:sp>
         <p:nvSpPr>
-          <p:cNvPr id="9" name="Text 7"/>
+          <p:cNvPr id="10" name="Text 8"/>
           <p:cNvSpPr/>
           <p:nvPr/>
         </p:nvSpPr>
         <p:spPr>
           <a:xfrm>
             <a:off x="640080" y="621792"/>
-            <a:ext cx="10881360" cy="566928"/>
+            <a:ext cx="10881360" cy="713232"/>
           </a:xfrm>
           <a:prstGeom prst="rect">
             <a:avLst/>
@@ -14070,7 +15274,7 @@
               <a:buNone/>
             </a:pPr>
             <a:r>
-              <a:rPr lang="en-US" sz="2700" b="1" dirty="0">
+              <a:rPr lang="en-US" sz="3400" b="1" dirty="0">
                 <a:solidFill>
                   <a:srgbClr val="003A63"/>
                 </a:solidFill>
@@ -14080,20 +15284,20 @@
               </a:rPr>
               <a:t>Public Health Example</a:t>
             </a:r>
-            <a:endParaRPr lang="en-US" sz="2700" dirty="0"/>
-          </a:p>
-        </p:txBody>
-      </p:sp>
-      <p:sp>
-        <p:nvSpPr>
-          <p:cNvPr id="10" name="Text 8"/>
-          <p:cNvSpPr/>
-          <p:nvPr/>
-        </p:nvSpPr>
-        <p:spPr>
-          <a:xfrm>
-            <a:off x="868680" y="1417320"/>
-            <a:ext cx="6675120" cy="4434840"/>
+            <a:endParaRPr lang="en-US" sz="3400" dirty="0"/>
+          </a:p>
+        </p:txBody>
+      </p:sp>
+      <p:sp>
+        <p:nvSpPr>
+          <p:cNvPr id="11" name="Text 9"/>
+          <p:cNvSpPr/>
+          <p:nvPr/>
+        </p:nvSpPr>
+        <p:spPr>
+          <a:xfrm>
+            <a:off x="868680" y="1508760"/>
+            <a:ext cx="6537960" cy="4160520"/>
           </a:xfrm>
           <a:prstGeom prst="rect">
             <a:avLst/>
@@ -14108,7 +15312,7 @@
           <a:lstStyle/>
           <a:p>
             <a:r>
-              <a:rPr lang="en-US" sz="1700" dirty="0">
+              <a:rPr lang="en-US" sz="2100" dirty="0">
                 <a:solidFill>
                   <a:srgbClr val="17364A"/>
                 </a:solidFill>
@@ -14118,11 +15322,11 @@
               </a:rPr>
               <a:t>A grant funds a two-year AI pilot to help identify likely duplicate records in a public health system.</a:t>
             </a:r>
-            <a:endParaRPr lang="en-US" sz="1700" dirty="0"/>
-          </a:p>
-          <a:p>
-            <a:r>
-              <a:rPr lang="en-US" sz="1700" dirty="0">
+            <a:endParaRPr lang="en-US" sz="2100" dirty="0"/>
+          </a:p>
+          <a:p>
+            <a:r>
+              <a:rPr lang="en-US" sz="2100" dirty="0">
                 <a:solidFill>
                   <a:srgbClr val="17364A"/>
                 </a:solidFill>
@@ -14130,13 +15334,13 @@
                 <a:ea typeface="Aptos" pitchFamily="34" charset="-122"/>
                 <a:cs typeface="Aptos" pitchFamily="34" charset="-120"/>
               </a:rPr>
-              <a:t>The pilot improves efficiency, but the grant does not cover long-term hosting, monitoring, system upgrades, training, or.</a:t>
-            </a:r>
-            <a:endParaRPr lang="en-US" sz="1700" dirty="0"/>
-          </a:p>
-          <a:p>
-            <a:r>
-              <a:rPr lang="en-US" sz="1700" dirty="0">
+              <a:t>The pilot improves efficiency, but the grant does not cover long-term hosting, monitoring, system.</a:t>
+            </a:r>
+            <a:endParaRPr lang="en-US" sz="2100" dirty="0"/>
+          </a:p>
+          <a:p>
+            <a:r>
+              <a:rPr lang="en-US" sz="2100" dirty="0">
                 <a:solidFill>
                   <a:srgbClr val="17364A"/>
                 </a:solidFill>
@@ -14144,29 +15348,15 @@
                 <a:ea typeface="Aptos" pitchFamily="34" charset="-122"/>
                 <a:cs typeface="Aptos" pitchFamily="34" charset="-120"/>
               </a:rPr>
-              <a:t>When funding ends, staff continue relying on the tool even though no one is assigned to review performance.</a:t>
-            </a:r>
-            <a:endParaRPr lang="en-US" sz="1700" dirty="0"/>
-          </a:p>
-          <a:p>
-            <a:r>
-              <a:rPr lang="en-US" sz="1700" dirty="0">
-                <a:solidFill>
-                  <a:srgbClr val="17364A"/>
-                </a:solidFill>
-                <a:latin typeface="Aptos" pitchFamily="34" charset="0"/>
-                <a:ea typeface="Aptos" pitchFamily="34" charset="-122"/>
-                <a:cs typeface="Aptos" pitchFamily="34" charset="-120"/>
-              </a:rPr>
-              <a:t>A sustainability plan would have addressed this before launch.</a:t>
-            </a:r>
-            <a:endParaRPr lang="en-US" sz="1700" dirty="0"/>
-          </a:p>
-        </p:txBody>
-      </p:sp>
-      <p:sp>
-        <p:nvSpPr>
-          <p:cNvPr id="11" name="Shape 9"/>
+              <a:t>When funding ends, staff continue relying on the tool even though no one is assigned to review.</a:t>
+            </a:r>
+            <a:endParaRPr lang="en-US" sz="2100" dirty="0"/>
+          </a:p>
+        </p:txBody>
+      </p:sp>
+      <p:sp>
+        <p:nvSpPr>
+          <p:cNvPr id="12" name="Shape 10"/>
           <p:cNvSpPr/>
           <p:nvPr/>
         </p:nvSpPr>
@@ -14193,14 +15383,14 @@
       </p:sp>
       <p:sp>
         <p:nvSpPr>
-          <p:cNvPr id="12" name="Text 10"/>
+          <p:cNvPr id="13" name="Text 11"/>
           <p:cNvSpPr/>
           <p:nvPr/>
         </p:nvSpPr>
         <p:spPr>
           <a:xfrm>
             <a:off x="8074152" y="1563624"/>
-            <a:ext cx="2825496" cy="201168"/>
+            <a:ext cx="2825496" cy="256032"/>
           </a:xfrm>
           <a:prstGeom prst="rect">
             <a:avLst/>
@@ -14216,7 +15406,7 @@
               <a:buNone/>
             </a:pPr>
             <a:r>
-              <a:rPr lang="en-US" sz="950" b="1" dirty="0">
+              <a:rPr lang="en-US" sz="1300" b="1" dirty="0">
                 <a:solidFill>
                   <a:srgbClr val="0068B7"/>
                 </a:solidFill>
@@ -14226,20 +15416,20 @@
               </a:rPr>
               <a:t>Key idea</a:t>
             </a:r>
-            <a:endParaRPr lang="en-US" sz="950" dirty="0"/>
-          </a:p>
-        </p:txBody>
-      </p:sp>
-      <p:sp>
-        <p:nvSpPr>
-          <p:cNvPr id="13" name="Text 11"/>
-          <p:cNvSpPr/>
-          <p:nvPr/>
-        </p:nvSpPr>
-        <p:spPr>
-          <a:xfrm>
-            <a:off x="8074152" y="1856232"/>
-            <a:ext cx="2825496" cy="1261872"/>
+            <a:endParaRPr lang="en-US" sz="1300" dirty="0"/>
+          </a:p>
+        </p:txBody>
+      </p:sp>
+      <p:sp>
+        <p:nvSpPr>
+          <p:cNvPr id="14" name="Text 12"/>
+          <p:cNvSpPr/>
+          <p:nvPr/>
+        </p:nvSpPr>
+        <p:spPr>
+          <a:xfrm>
+            <a:off x="8074152" y="1920240"/>
+            <a:ext cx="2825496" cy="1188720"/>
           </a:xfrm>
           <a:prstGeom prst="rect">
             <a:avLst/>
@@ -14257,7 +15447,7 @@
               <a:buNone/>
             </a:pPr>
             <a:r>
-              <a:rPr lang="en-US" sz="1250" dirty="0">
+              <a:rPr lang="en-US" sz="1550" dirty="0">
                 <a:solidFill>
                   <a:srgbClr val="17364A"/>
                 </a:solidFill>
@@ -14267,13 +15457,13 @@
               </a:rPr>
               <a:t>A grant funds a two-year AI pilot to help identify likely duplicate records in a public health system.</a:t>
             </a:r>
-            <a:endParaRPr lang="en-US" sz="1250" dirty="0"/>
-          </a:p>
-        </p:txBody>
-      </p:sp>
-      <p:sp>
-        <p:nvSpPr>
-          <p:cNvPr id="14" name="Shape 12"/>
+            <a:endParaRPr lang="en-US" sz="1550" dirty="0"/>
+          </a:p>
+        </p:txBody>
+      </p:sp>
+      <p:sp>
+        <p:nvSpPr>
+          <p:cNvPr id="15" name="Shape 13"/>
           <p:cNvSpPr/>
           <p:nvPr/>
         </p:nvSpPr>
@@ -14300,14 +15490,14 @@
       </p:sp>
       <p:sp>
         <p:nvSpPr>
-          <p:cNvPr id="15" name="Text 13"/>
+          <p:cNvPr id="16" name="Text 14"/>
           <p:cNvSpPr/>
           <p:nvPr/>
         </p:nvSpPr>
         <p:spPr>
           <a:xfrm>
             <a:off x="8074152" y="3666744"/>
-            <a:ext cx="2825496" cy="201168"/>
+            <a:ext cx="2825496" cy="256032"/>
           </a:xfrm>
           <a:prstGeom prst="rect">
             <a:avLst/>
@@ -14323,7 +15513,7 @@
               <a:buNone/>
             </a:pPr>
             <a:r>
-              <a:rPr lang="en-US" sz="950" b="1" dirty="0">
+              <a:rPr lang="en-US" sz="1300" b="1" dirty="0">
                 <a:solidFill>
                   <a:srgbClr val="0068B7"/>
                 </a:solidFill>
@@ -14333,20 +15523,20 @@
               </a:rPr>
               <a:t>Use this for</a:t>
             </a:r>
-            <a:endParaRPr lang="en-US" sz="950" dirty="0"/>
-          </a:p>
-        </p:txBody>
-      </p:sp>
-      <p:sp>
-        <p:nvSpPr>
-          <p:cNvPr id="16" name="Text 14"/>
-          <p:cNvSpPr/>
-          <p:nvPr/>
-        </p:nvSpPr>
-        <p:spPr>
-          <a:xfrm>
-            <a:off x="8074152" y="3959352"/>
-            <a:ext cx="2825496" cy="1170432"/>
+            <a:endParaRPr lang="en-US" sz="1300" dirty="0"/>
+          </a:p>
+        </p:txBody>
+      </p:sp>
+      <p:sp>
+        <p:nvSpPr>
+          <p:cNvPr id="17" name="Text 15"/>
+          <p:cNvSpPr/>
+          <p:nvPr/>
+        </p:nvSpPr>
+        <p:spPr>
+          <a:xfrm>
+            <a:off x="8074152" y="4023360"/>
+            <a:ext cx="2825496" cy="1097280"/>
           </a:xfrm>
           <a:prstGeom prst="rect">
             <a:avLst/>
@@ -14364,7 +15554,7 @@
               <a:buNone/>
             </a:pPr>
             <a:r>
-              <a:rPr lang="en-US" sz="1250" dirty="0">
+              <a:rPr lang="en-US" sz="1550" dirty="0">
                 <a:solidFill>
                   <a:srgbClr val="17364A"/>
                 </a:solidFill>
@@ -14374,7 +15564,7 @@
               </a:rPr>
               <a:t>Connect the concept to public health decisions, safeguards, documentation, or implementation work.</a:t>
             </a:r>
-            <a:endParaRPr lang="en-US" sz="1250" dirty="0"/>
+            <a:endParaRPr lang="en-US" sz="1550" dirty="0"/>
           </a:p>
         </p:txBody>
       </p:sp>
